--- a/Curso Gas B/02 - ITC-ICG 02-03-04 - Almacenamiento GLP y plantas GNL/02 - ITC-ICG 02-03-04 - Almacenamiento GLP y plantas GNL - Vídeo 2.pptx
+++ b/Curso Gas B/02 - ITC-ICG 02-03-04 - Almacenamiento GLP y plantas GNL/02 - ITC-ICG 02-03-04 - Almacenamiento GLP y plantas GNL - Vídeo 2.pptx
@@ -20,6 +20,8 @@
     <p:sldId id="268" r:id="rId20"/>
     <p:sldId id="269" r:id="rId21"/>
     <p:sldId id="270" r:id="rId22"/>
+    <p:sldId id="271" r:id="rId23"/>
+    <p:sldId id="272" r:id="rId24"/>
   </p:sldIdLst>
   <p:sldSz cx="12191695" cy="6858000" type="screen4x3"/>
   <p:notesSz cx="6858000" cy="9144000"/>
@@ -516,12 +518,12 @@
           <a:lstStyle/>
           <a:p>
             <a:r>
-              <a:t>N1: ¿Dónde ves bombonas casi a diario sin darte cuenta?</a:t>
-            </a:r>
-          </a:p>
-          <a:p>
-            <a:r>
-              <a:t>N2: En la jaula de la gasolinera y en el rincón de la ferretería. Terminamos la ITC-ICG cero dos con los centros más habituales: la cuarta categoría, pequeños almacenes y anexos a gasolineras, y la quinta, la gasolinera y la tienda de barrio que venden bombonas. Después vienen los papeles, la puesta en servicio, el mantenimiento periódico y las reglas de transporte de envases, incluidas las del camión de reparto y las de tu propio coche. Son las normas que más vas a ver en la calle: atento a las cifras y a los carteles.</a:t>
+              <a:t>N1: ¿Y las bombonas de la gasolinera y de la ferretería del barrio? Esas también tendrán sus reglas.</a:t>
+            </a:r>
+          </a:p>
+          <a:p>
+            <a:r>
+              <a:t>N2: Claro, y son justo las que más vas a ver en la calle. En este segundo vídeo terminamos la ITC-ICG cero dos bajando a lo pequeño y a lo cotidiano. Vemos la cuarta categoría, esos pequeños almacenes anexos a gasolineras, y la quinta, que es la propia gasolinera y la tienda que vende bombonas. Después vienen los papeles, la documentación y la puesta en servicio, el mantenimiento periódico, y las reglas de transporte de envases, incluido lo que puedes llevar en tu propio coche. Presta atención a las cifras y a los carteles, porque son pregunta fácil si te suenan las frases exactas.</a:t>
             </a:r>
           </a:p>
         </p:txBody>
@@ -591,12 +593,12 @@
           <a:lstStyle/>
           <a:p>
             <a:r>
-              <a:t>N1: ¿Hace falta permiso antes de construir un centro de envases?</a:t>
-            </a:r>
-          </a:p>
-          <a:p>
-            <a:r>
-              <a:t>N2: No. La construcción de un centro de envases de GLP no precisa autorización administrativa previa. En Gas B lo normal es hacer y comunicar, no pedir permiso antes. Sobre el papeleo, regla clara: los centros grandes, primera, segunda y tercera, necesitan proyecto redactado por técnico facultativo competente; las pequeñas, cuarta y quinta, se libran del proyecto. Pero cuidado, la inspección por un organismo de control es para todo centro, grande o pequeño, una vez terminada la construcción.</a:t>
+              <a:t>N1: ¿Y la tienda pequeña, hasta 150 kilos?</a:t>
+            </a:r>
+          </a:p>
+          <a:p>
+            <a:r>
+              <a:t>N2: Aquí baja la exigencia porque baja el gas. Basta con dos extintores de trece a, cincuenta y cinco b en lugar accesible, separación de llamas y fuentes de calor, y la ventilación necesaria. Y hay una prohibición que cae fijo: nunca en sótano ni en semisótano. ¿Por qué? Por lo de siempre, el GLP pesa más que el aire y en un sótano se acumularía abajo sin poder ventilar. Los envases van ordenados o en jaulas, incluso en muebles expositores que cumplan las condiciones de ventilación. Y otra vez la frase de oro: en el escaparate, solo recipientes vacíos. Fíjate en el detalle que cruza el examen: la tienda pequeña lleva extintores trece a, cincuenta y cinco b, distintos de los veintiuno a, ciento trece b de la grande.</a:t>
             </a:r>
           </a:p>
         </p:txBody>
@@ -666,12 +668,12 @@
           <a:lstStyle/>
           <a:p>
             <a:r>
-              <a:t>N1: ¿Cómo se pone en marcha un centro tras la inspección?</a:t>
-            </a:r>
-          </a:p>
-          <a:p>
-            <a:r>
-              <a:t>N2: Superada la inspección favorable, el titular presenta ante el órgano competente de la Comunidad Autónoma los datos del titular y la ubicación, con un plano descriptivo de detalle, el proyecto y el certificado de dirección de obra si los hubo, y el certificado de inspección del organismo de control. Con esa documentación presentada, los centros de segunda a quinta pueden ponerse en servicio. Y ojo al matiz que cae en el examen: presentar la documentación faculta para arrancar, pero no significa que la Administración dé su conformidad técnica. Tú comunicas y te haces responsable.</a:t>
+              <a:t>N1: Has dicho que los carteles caen en examen, ¿cuáles son exactamente?</a:t>
+            </a:r>
+          </a:p>
+          <a:p>
+            <a:r>
+              <a:t>N2: En la tienda grande hay dos carteles diferentes, y conviene no confundirlos. En la entrada del establecimiento va uno genérico: prohibido fumar en las zonas señalizadas. Y junto a la zona de los envases va otro más concreto: prohibido fumar a menos de cinco metros de esta zona. El número que tienes que retener es ese cinco, asociado al cartel que está pegado a las bombonas. Son pregunta fácil si te suenan las frases tal cual. Y súmale que el establecimiento va separado de otros locales ajenos por muros sin huecos, para que un problema no se propague de un negocio a otro.</a:t>
             </a:r>
           </a:p>
         </p:txBody>
@@ -741,12 +743,12 @@
           <a:lstStyle/>
           <a:p>
             <a:r>
-              <a:t>N1: ¿Cada cuánto se revisa el centro y qué pasa si no lo haces?</a:t>
-            </a:r>
-          </a:p>
-          <a:p>
-            <a:r>
-              <a:t>N2: Dos ideas que caen juntas. El titular es responsable del buen uso y de que el centro sea inspeccionado cada dos años por un organismo de control, que comprueba que no se sobrepasa la capacidad comunicada y que siguen cumpliéndose las medidas de seguridad. El organismo emite el certificado de inspección y manda copia a la Comunidad Autónoma. Y aquí está la llave: no se suministra GLP a ningún centro si el titular no acredita, con copia del certificado favorable, que la inspección se ha hecho en plazo. Sin ese papel, el operador no te llena las bombonas. Así se autovigila el sistema.</a:t>
+              <a:t>N1: ¿Qué papeles hacen falta para poner en marcha un centro de envases?</a:t>
+            </a:r>
+          </a:p>
+          <a:p>
+            <a:r>
+              <a:t>N2: Vamos por orden, porque aquí hay tres ideas que se cruzan. Primera: un centro de envases no necesita autorización administrativa previa; no pides permiso antes de construir. Segunda: hace falta proyecto de técnico facultativo competente solo en los centros grandes, primera, segunda y tercera; la cuarta y la quinta se libran del proyecto. Y tercera, la que más se olvida: la inspección por un organismo de control es para todo centro, grande o pequeño. Resume así la filosofía de Gas B: no se pide permiso, se hace, se inspecciona y se comunica después. Hacer y comunicar, no pedir permiso.</a:t>
             </a:r>
           </a:p>
         </p:txBody>
@@ -816,12 +818,12 @@
           <a:lstStyle/>
           <a:p>
             <a:r>
-              <a:t>N1: ¿Cómo se transportan las bombonas y qué puedes llevar en tu coche?</a:t>
-            </a:r>
-          </a:p>
-          <a:p>
-            <a:r>
-              <a:t>N2: Los envases con válvula, llenos o vacíos, se transportan siempre en posición vertical, de pie, en sus jaulas o bien estibados, y siempre sujetos para que no vuelquen. La única excepción del de pie son los envases nuevos o reparados y sin gas, de fábrica o taller a la planta, que sí pueden ir tumbados. Prohibido aparcar un vehículo con envases en un estacionamiento subterráneo, otra vez la lógica del gas pesado que se acumula abajo. Y el dato preguntadísimo: en tu coche particular solo puedes llevar dos envases móviles de hasta quince kilos. Ni uno más.</a:t>
+              <a:t>N1: Si no pido permiso antes, ¿cuándo aviso a la Administración?</a:t>
+            </a:r>
+          </a:p>
+          <a:p>
+            <a:r>
+              <a:t>N2: Después de la inspección favorable. El titular presenta ante el órgano competente de la Comunidad Autónoma tres cosas: sus datos y la ubicación con un plano descriptivo de detalle, el proyecto y certificado de dirección de obra si los hubo, y el certificado de inspección del organismo de control. Con esa documentación presentada, los centros de segunda, tercera, cuarta y quinta ya pueden ponerse en servicio. Ojo al matiz que cae: esa presentación te faculta para arrancar, pero no significa que la Administración dé su conformidad técnica. Tú respondes de que está bien hecho; el papel solo deja constancia.</a:t>
             </a:r>
           </a:p>
         </p:txBody>
@@ -891,12 +893,12 @@
           <a:lstStyle/>
           <a:p>
             <a:r>
-              <a:t>N1: ¿Qué tiene de especial el camión de reparto a domicilio?</a:t>
-            </a:r>
-          </a:p>
-          <a:p>
-            <a:r>
-              <a:t>N2: Tres cosas. Su caja lleva aberturas laterales y en la parte trasera, a ras del piso, para que si una botella fuga, el gas salga fácil y no se acumule dentro. Cuando entra a descargar en un sitio con más de quinientos kilos de GLP, monta el aparato cortafuegos en el tubo de escape; recuerda ese umbral, quinientos kilos. No puede llevar personas ajenas al servicio y trata los envases con cuidado para evitar choques. Y la dotación de extintores depende del tamaño: la frontera es el peso máximo autorizado de tres mil quinientos kilos. Por debajo, dos extintores de ocho a, treinta y cuatro b; por encima, el de la carga sube a trece a, cincuenta y cinco b.</a:t>
+              <a:t>N1: Una vez en marcha, ¿cómo se vigila el centro?</a:t>
+            </a:r>
+          </a:p>
+          <a:p>
+            <a:r>
+              <a:t>N2: Con una inspección periódica cada dos años, hecha por un organismo de control. En esa visita comprueban dos cosas: que no se ha superado la capacidad total de almacenamiento que comunicaste, y que se siguen cumpliendo todas las medidas de seguridad. El organismo emite un certificado de inspección, entrega copia al titular y manda otra a la Comunidad Autónoma. Y aquí está el mecanismo genial con el que el sistema se autovigila: no se suministra GLP a ningún centro si el titular no acredita, con copia de ese certificado favorable, que la inspección se ha hecho en plazo. Sin papel, no hay gas. Ese certificado es, literalmente, la llave del suministro, y el titular es quien debe tenerlo al día.</a:t>
             </a:r>
           </a:p>
         </p:txBody>
@@ -966,12 +968,172 @@
           <a:lstStyle/>
           <a:p>
             <a:r>
-              <a:t>N1: Tres ideas para cerrar la ITC-ICG cero dos.</a:t>
-            </a:r>
-          </a:p>
-          <a:p>
-            <a:r>
-              <a:t>N2: Primera: las categorías pequeñas son las que pisas en la calle; la quinta nunca pasa de quinientos kilos, y la tienda se parte en ciento cincuenta, con más extintores y más exigencias por encima. Segunda, el papeleo sin líos: un centro de envases no necesita autorización previa, proyecto solo para las tres grandes, pero la inspección por organismo de control es para todos, y con su certificado favorable el titular comunica la puesta en servicio a la Comunidad Autónoma. Y tercera, la avería que evitas: el gas pesado se embolsa abajo, por eso las jaulas ventilan arriba y abajo, nunca guardas bombonas en sótano y jamás aparcas con ellas en un garaje subterráneo. En tu coche, dos y de pie.</a:t>
+              <a:t>N1: ¿Qué puedo llevar y cómo en mi propio coche?</a:t>
+            </a:r>
+          </a:p>
+          <a:p>
+            <a:r>
+              <a:t>N2: Dato preguntadísimo: en un vehículo particular solo puedes llevar dos envases de hasta quince kilos, ni uno más. Y siempre de pie y bien sujetos, con lo necesario para que no vuelquen durante el trayecto, porque un envase que cae puede golpear la válvula y fugar. Hay una prohibición que no falla: jamás aparques un vehículo con bombonas en un garaje subterráneo, otra vez por la lógica del gas pesado que se acumula abajo sin ventilar. La única excepción a lo de ir de pie son los envases nuevos o reparados y sin gas, cuando van de la fábrica a la planta: esos, al estar vacíos de verdad, pueden ir tumbados.</a:t>
+            </a:r>
+          </a:p>
+        </p:txBody>
+      </p:sp>
+      <p:sp>
+        <p:nvSpPr>
+          <p:cNvPr id="4" name="Slide Number Placeholder 3"/>
+          <p:cNvSpPr>
+            <a:spLocks noGrp="1"/>
+          </p:cNvSpPr>
+          <p:nvPr>
+            <p:ph type="sldNum" idx="5" sz="quarter"/>
+          </p:nvPr>
+        </p:nvSpPr>
+        <p:spPr/>
+      </p:sp>
+    </p:spTree>
+  </p:cSld>
+  <p:clrMapOvr>
+    <a:masterClrMapping/>
+  </p:clrMapOvr>
+</p:notes>
+</file>
+
+<file path=ppt/notesSlides/notesSlide16.xml><?xml version="1.0" encoding="utf-8"?>
+<p:notes xmlns:a="http://schemas.openxmlformats.org/drawingml/2006/main" xmlns:p="http://schemas.openxmlformats.org/presentationml/2006/main" xmlns:r="http://schemas.openxmlformats.org/officeDocument/2006/relationships">
+  <p:cSld>
+    <p:spTree>
+      <p:nvGrpSpPr>
+        <p:cNvPr id="1" name=""/>
+        <p:cNvGrpSpPr/>
+        <p:nvPr/>
+      </p:nvGrpSpPr>
+      <p:grpSpPr>
+        <a:xfrm>
+          <a:off x="0" y="0"/>
+          <a:ext cx="0" cy="0"/>
+          <a:chOff x="0" y="0"/>
+          <a:chExt cx="0" cy="0"/>
+        </a:xfrm>
+      </p:grpSpPr>
+      <p:sp>
+        <p:nvSpPr>
+          <p:cNvPr id="2" name="Slide Image Placeholder 1"/>
+          <p:cNvSpPr>
+            <a:spLocks noGrp="1"/>
+          </p:cNvSpPr>
+          <p:nvPr>
+            <p:ph type="sldImg" idx="2"/>
+          </p:nvPr>
+        </p:nvSpPr>
+        <p:spPr/>
+      </p:sp>
+      <p:sp>
+        <p:nvSpPr>
+          <p:cNvPr id="3" name="Notes Placeholder 2"/>
+          <p:cNvSpPr>
+            <a:spLocks noGrp="1"/>
+          </p:cNvSpPr>
+          <p:nvPr>
+            <p:ph type="body" idx="3" sz="quarter"/>
+          </p:nvPr>
+        </p:nvSpPr>
+        <p:spPr/>
+        <p:txBody>
+          <a:bodyPr/>
+          <a:lstStyle/>
+          <a:p>
+            <a:r>
+              <a:t>N1: ¿Y el camión que reparte las bombonas, qué reglas lleva?</a:t>
+            </a:r>
+          </a:p>
+          <a:p>
+            <a:r>
+              <a:t>N2: Tres detalles y una tabla. Primero, la caja del furgón tiene aberturas laterales y en la parte trasera, a ras del piso, para que si una botella fuga, el gas salga por abajo en vez de acumularse dentro. Segundo, cuando el camión entra a descargar en un sitio con más de quinientos kilos de GLP, un centro o una nave, monta el cortafuegos en el tubo de escape para que la chispa del motor no prenda la atmósfera; ese umbral de quinientos kilos va asociado al cortafuegos. Y tercero, los extintores dependen del tamaño del camión, con la frontera en tres mil quinientos kilos de peso máximo: por debajo, dos extintores de ocho a, treinta y cuatro b, uno en cabina y otro en la carga; por encima, el de la carga sube a trece a, cincuenta y cinco b. Ah, y prohibido llevar personas ajenas al servicio.</a:t>
+            </a:r>
+          </a:p>
+        </p:txBody>
+      </p:sp>
+      <p:sp>
+        <p:nvSpPr>
+          <p:cNvPr id="4" name="Slide Number Placeholder 3"/>
+          <p:cNvSpPr>
+            <a:spLocks noGrp="1"/>
+          </p:cNvSpPr>
+          <p:nvPr>
+            <p:ph type="sldNum" idx="5" sz="quarter"/>
+          </p:nvPr>
+        </p:nvSpPr>
+        <p:spPr/>
+      </p:sp>
+    </p:spTree>
+  </p:cSld>
+  <p:clrMapOvr>
+    <a:masterClrMapping/>
+  </p:clrMapOvr>
+</p:notes>
+</file>
+
+<file path=ppt/notesSlides/notesSlide17.xml><?xml version="1.0" encoding="utf-8"?>
+<p:notes xmlns:a="http://schemas.openxmlformats.org/drawingml/2006/main" xmlns:p="http://schemas.openxmlformats.org/presentationml/2006/main" xmlns:r="http://schemas.openxmlformats.org/officeDocument/2006/relationships">
+  <p:cSld>
+    <p:spTree>
+      <p:nvGrpSpPr>
+        <p:cNvPr id="1" name=""/>
+        <p:cNvGrpSpPr/>
+        <p:nvPr/>
+      </p:nvGrpSpPr>
+      <p:grpSpPr>
+        <a:xfrm>
+          <a:off x="0" y="0"/>
+          <a:ext cx="0" cy="0"/>
+          <a:chOff x="0" y="0"/>
+          <a:chExt cx="0" cy="0"/>
+        </a:xfrm>
+      </p:grpSpPr>
+      <p:sp>
+        <p:nvSpPr>
+          <p:cNvPr id="2" name="Slide Image Placeholder 1"/>
+          <p:cNvSpPr>
+            <a:spLocks noGrp="1"/>
+          </p:cNvSpPr>
+          <p:nvPr>
+            <p:ph type="sldImg" idx="2"/>
+          </p:nvPr>
+        </p:nvSpPr>
+        <p:spPr/>
+      </p:sp>
+      <p:sp>
+        <p:nvSpPr>
+          <p:cNvPr id="3" name="Notes Placeholder 2"/>
+          <p:cNvSpPr>
+            <a:spLocks noGrp="1"/>
+          </p:cNvSpPr>
+          <p:nvPr>
+            <p:ph type="body" idx="3" sz="quarter"/>
+          </p:nvPr>
+        </p:nvSpPr>
+        <p:spPr/>
+        <p:txBody>
+          <a:bodyPr/>
+          <a:lstStyle/>
+          <a:p>
+            <a:r>
+              <a:t>N1: Cerramos la ITC cero dos. ¿Qué me llevo de todo esto?</a:t>
+            </a:r>
+          </a:p>
+          <a:p>
+            <a:r>
+              <a:t>N2: Te llevas el terreno que más vas a pisar en la calle, y todo cuelga de la misma lógica de siempre: el gas pesa más que el aire. Por eso las jaulas ventilan arriba y abajo, por eso nunca hay bombonas en sótano ni coches con gas en garajes subterráneos, y por eso el camión lleva la caja con rejillas a ras de suelo. Encima de esa idea has colocado las cifras: quinientos kilos de tope en quinta, la tienda partida en ciento cincuenta, extintores veintiuno a ciento trece b en la grande y trece a cincuenta y cinco b en la pequeña, y en tu coche solo dos envases de hasta quince kilos.</a:t>
+            </a:r>
+          </a:p>
+          <a:p>
+            <a:r>
+              <a:t>N1: ¿Y cómo se pregunta esto, y qué papeles me quedan claros?</a:t>
+            </a:r>
+          </a:p>
+          <a:p>
+            <a:r>
+              <a:t>N2: En el examen te cruzan las cifras y los carteles: te dan unos kilos de tienda y esperan el extintor correcto, o te piden la frase exacta del cartel de los cinco metros. Y de papeleo te queda una regla limpia: proyecto solo en los centros grandes, inspección para todos, y puesta en servicio que se comunica a la Comunidad Autónoma, más la inspección cada dos años que es la llave del suministro. Con esto cierras la ITC cero dos entera. En el siguiente vídeo cambiamos de escenario y saltamos al depósito fijo de GLP, el del chalé y la urbanización sin gas natural. Nos vemos allí.</a:t>
             </a:r>
           </a:p>
         </p:txBody>
@@ -1041,12 +1203,12 @@
           <a:lstStyle/>
           <a:p>
             <a:r>
-              <a:t>N1: Tres cifras que resumen el vídeo.</a:t>
-            </a:r>
-          </a:p>
-          <a:p>
-            <a:r>
-              <a:t>N2: La primera: la quinta categoría, la gasolinera y la tienda, nunca pasa de quinientos kilos de GLP en total. La segunda: el comercio se parte en ciento cincuenta kilos, y según estés por encima o por debajo cambian los extintores y las exigencias. Y la tercera, la más preguntada de todas: en tu coche particular solo puedes llevar dos bombonas de hasta quince kilos, ni una más. Con estas tres ya tienes el esqueleto del vídeo.</a:t>
+              <a:t>N1: Dame tres cifras para arrancar.</a:t>
+            </a:r>
+          </a:p>
+          <a:p>
+            <a:r>
+              <a:t>N2: Tres números que hoy caen seguro. El primero: quinientos kilos es el tope de la quinta categoría, la gasolinera y la tienda; por encima de ahí ya juegas en otra liga. El segundo: la inspección periódica del centro por un organismo de control es cada dos años, y sin ese papel no te llenan las bombonas. Y el tercero, muy preguntado: en tu coche particular solo puedes llevar dos envases de hasta quince kilos, ni uno más. Con estas tres ya tienes el mapa del vídeo.</a:t>
             </a:r>
           </a:p>
         </p:txBody>
@@ -1116,12 +1278,12 @@
           <a:lstStyle/>
           <a:p>
             <a:r>
-              <a:t>N1: ¿Qué se pide a un centro de cuarta, mucho más pequeño?</a:t>
-            </a:r>
-          </a:p>
-          <a:p>
-            <a:r>
-              <a:t>N2: Muy poco comparado con las categorías grandes del vídeo uno. Un vallado de dos metros en todo el perímetro, fijado al suelo y hecho de forma que impida manipular las botellas desde fuera; nada de muro resistente al fuego. Distancia mínima a locales habitados de tres metros, o de seis si el centro está en un patio cerrado por los cuatro lados. Y dos extintores de eficacia veintiuno a, ciento trece b, cada uno en sitio accesible. Ni bocas de incendio ni alarma permanente. Regla mental: poca cantidad de gas, protección proporcional.</a:t>
+              <a:t>N1: ¿Qué se le pide a un centro de cuarta categoría?</a:t>
+            </a:r>
+          </a:p>
+          <a:p>
+            <a:r>
+              <a:t>N2: Muy poco comparado con las categorías grandes del vídeo anterior, y eso es lo que tienes que notar. Aquí basta con un vallado de dos metros en todo el perímetro, fijado al suelo y hecho de forma que nadie pueda manipular las bombonas desde fuera; no hace falta el muro serio resistente al fuego. Las distancias también son cortas: tres metros a locales habitados, o seis metros si el almacenamiento está en un patio cerrado por los cuatro lados. Y de incendios, dos extintores de veintiuno a, ciento trece b. Nada de bocas de agua ni alarma permanente. La regla de fondo es proporcional: poca cantidad de gas, protección proporcional.</a:t>
             </a:r>
           </a:p>
         </p:txBody>
@@ -1196,7 +1358,7 @@
           </a:p>
           <a:p>
             <a:r>
-              <a:t>N2: Entonces el almacenamiento de cuarta debe ubicarse fuera de la propia estación de servicio y a una distancia mínima de diez metros respecto al área de la instalación para el suministro de vehículos, la de los surtidores. La estación de servicio es todo ese espacio delimitado: el pavimento, la zona de descarga del camión cisterna, los surtidores, los monolitos, las instalaciones de agua y contra incendios. La cifra que retienes es sencilla: diez metros separan las bombonas de la zona donde se reposta.</a:t>
+              <a:t>N2: Entonces se le añade una condición clave. El almacenamiento de cuarta categoría anexo a una estación de servicio tiene que ubicarse fuera de la propia estación, y a una distancia mínima de diez metros respecto al área donde se suministra a los vehículos, la zona de los surtidores. Piensa en el porqué: los surtidores son una fuente constante de posibles chispas y vapores de gasolina, así que las bombonas se apartan diez metros de ahí. Esos diez metros son la distancia que separa el gas envasado del repostaje. La estación de servicio, por cierto, es todo ese recinto delimitado: pavimento, isla, zona de descarga, surtidores, monolitos y demás instalaciones.</a:t>
             </a:r>
           </a:p>
         </p:txBody>
@@ -1266,12 +1428,12 @@
           <a:lstStyle/>
           <a:p>
             <a:r>
-              <a:t>N1: ¿Cómo es la quinta categoría de una gasolinera?</a:t>
-            </a:r>
-          </a:p>
-          <a:p>
-            <a:r>
-              <a:t>N2: Aquí ya no hay naves, sino la jaula de bombonas junto a los surtidores. En una misma estación pueden convivir tres tipos de envase: los de vehículos de gas, los cartuchos no rellenables de hasta tres kilos y las bombonas de hasta quince. Pero la capacidad total nunca pasa de quinientos kilos. Si hay varios tipos juntos, cada almacenamiento es independiente y se separan cinco metros entre sí. Y las alturas de apilado por tipo: dos alturas para las de coche y las de hasta quince kilos, y cuatro alturas para los cartuchos pequeños, con cuarenta centímetros entre ellas.</a:t>
+              <a:t>N1: ¿Cómo se organizan las bombonas en la propia gasolinera?</a:t>
+            </a:r>
+          </a:p>
+          <a:p>
+            <a:r>
+              <a:t>N2: Aquí ya no hablamos de naves, sino de la jaula de bombonas de la estación de servicio. En una misma estación pueden convivir tres cosas: envases de GLP para coches con motor, cartuchos no rellenables o envases de hasta tres kilos, y bombonas de hasta quince kilos. Pero pase lo que pase, la capacidad total máxima es de quinientos kilos. Si hay varios tipos juntos, cada uno va en su almacenamiento independiente y separados cinco metros entre sí. Y fíjate en las alturas de apilado, que cambian por tipo: los envases de coche y los de hasta quince kilos, dos alturas; los cartuchos pequeños de hasta tres kilos, hasta cuatro alturas, con cuarenta centímetros entre ellas.</a:t>
             </a:r>
           </a:p>
         </p:txBody>
@@ -1341,12 +1503,12 @@
           <a:lstStyle/>
           <a:p>
             <a:r>
-              <a:t>N1: ¿Qué distancias y protección comparten estos almacenamientos?</a:t>
-            </a:r>
-          </a:p>
-          <a:p>
-            <a:r>
-              <a:t>N2: Van en espacios abiertos, pudiendo estar bajo la cubierta propia de la gasolinera, y su piso nunca por debajo del terreno. Desde el límite del almacenamiento se guardan cuatro metros a los tubos de aireación, a las bocas de carga de los tanques y a las vías públicas; y dos metros a los bordillos de andenes, a los sumideros, a los surtidores y a cualquier abertura a ras de suelo que comunique con un local inferior. ¿Por qué esos sumideros y aberturas? Porque el gas pesado se cuela por ahí hacia abajo. Y de protección, dos extintores portátiles de veintiuno a, ciento trece b, como mínimo.</a:t>
+              <a:t>N1: ¿Qué reglas comparten todos esos envases de la gasolinera?</a:t>
+            </a:r>
+          </a:p>
+          <a:p>
+            <a:r>
+              <a:t>N2: Van en espacios abiertos, pudiendo estar bajo la propia cubierta de la estación, y con el piso nunca por debajo del terreno; siempre buscando que el gas, si fuga, se ventile y no se embolse. Si hay cubierta, será de material que no arda, sobre estructura estable al fuego, y el pavimento no absorbe ni hace chispas al golpearlo. Las distancias de seguridad van en dos números fáciles de emparejar: cuatro metros a tubos de aireación, bocas de carga de los tanques y vías públicas; y dos metros a bordillos, sumideros, surtidores y aberturas a ras de suelo que comuniquen con locales de abajo. Y de incendios, dos extintores portátiles de veintiuno a, ciento trece b como mínimo.</a:t>
             </a:r>
           </a:p>
         </p:txBody>
@@ -1416,12 +1578,12 @@
           <a:lstStyle/>
           <a:p>
             <a:r>
-              <a:t>N1: ¿Por qué una jaula de bombonas lleva rejilla arriba y abajo?</a:t>
-            </a:r>
-          </a:p>
-          <a:p>
-            <a:r>
-              <a:t>N2: Es un detalle con lógica física. Si hay una fuga, el GLP, más pesado que el aire, se va al suelo y necesita salir por la rejilla de abajo; y la de arriba deja circular el aire para que no se quede embolsado. Sin ventilación en los dos extremos, el gas se acumula. Imagen: la jaula respira por arriba y por abajo. Además, las jaulas se construyen con materiales que no arden y, fuera del horario de servicio, no permiten que nadie ajeno manipule las botellas desde fuera.</a:t>
+              <a:t>N1: ¿Por qué las jaulas tienen que ventilar por arriba y por abajo, y no solo por un lado?</a:t>
+            </a:r>
+          </a:p>
+          <a:p>
+            <a:r>
+              <a:t>N2: Buena pregunta, y la respuesta es física. Si una botella fuga, el GLP pesa más que el aire y se va al suelo; la rejilla de abajo deja que ese gas pesado escape en vez de quedarse embolsado en la jaula. Y la rejilla de arriba deja circular el aire para que todo se ventile. Por eso las dos, arriba y abajo: la jaula respira por los dos extremos. Además, la jaula se hace de material que no arde y, fuera del horario de servicio, no permite que nadie de fuera manipule los envases. Imagen para recordarlo: una jaula bien hecha es como una chimenea al revés, saca el gas por abajo.</a:t>
             </a:r>
           </a:p>
         </p:txBody>
@@ -1491,12 +1653,12 @@
           <a:lstStyle/>
           <a:p>
             <a:r>
-              <a:t>N1: ¿Y la tienda que vende bastantes bombonas?</a:t>
-            </a:r>
-          </a:p>
-          <a:p>
-            <a:r>
-              <a:t>N2: La de ciento cincuenta a quinientos kilos es la más exigente del comercio. Va en planta baja, nunca por debajo del terreno, con una o más rejillas de ventilación directa a ras de suelo de al menos cuatrocientos centímetros cuadrados. Guarda cuatro metros a escaleras, sótanos u otros locales inferiores, y ocho metros a arquetas, tragaluces o bocas de alcantarilla si está en local cerrado. Lleva tres extintores de veintiuno a, ciento trece b, muros sin huecos hacia otros locales, y dos carteles distintos que veremos ahora. Y un detalle de oro: en el escaparate solo se exhiben envases vacíos.</a:t>
+              <a:t>N1: ¿Y la tienda de barrio que vende bombonas, cómo se regula?</a:t>
+            </a:r>
+          </a:p>
+          <a:p>
+            <a:r>
+              <a:t>N2: El comercio se parte en dos según los kilos que almacene, y esa frontera son los ciento cincuenta kilos. Por debajo, hasta ciento cincuenta kilos, es la tienda pequeña, con reglas más suaves. Por encima, de ciento cincuenta a quinientos kilos, es la tienda grande, más exigente. En ambos casos vendemos envases de menos de quince kilos, envases populares y cartuchos no rellenables. Y una frase de oro que cae en las dos: en el escaparate solo se exhiben envases vacíos. La que se ve desde la calle, vacía. Vamos a ver cada nivel por separado.</a:t>
             </a:r>
           </a:p>
         </p:txBody>
@@ -1566,12 +1728,12 @@
           <a:lstStyle/>
           <a:p>
             <a:r>
-              <a:t>N1: ¿Qué cambia en la tienda pequeña y cuáles son los carteles?</a:t>
-            </a:r>
-          </a:p>
-          <a:p>
-            <a:r>
-              <a:t>N2: La tienda de hasta ciento cincuenta kilos es más suave: ventilación suficiente, dos extintores de trece a, cincuenta y cinco b, y una prohibición tajante: nunca en sótano ni semisótano, porque el gas se acumula abajo. En el escaparate, otra vez, solo envases vacíos. Y presta atención a los carteles, que son pregunta fácil: en la entrada del establecimiento va uno genérico, prohibido fumar en las zonas señalizadas; y junto a los envases, otro distinto, prohibido fumar a menos de cinco metros de esta zona. Son dos carteles diferentes, no los confundas: el número cinco va con el de la zona de venta.</a:t>
+              <a:t>N1: ¿Qué se le pide a la tienda grande, la de 150 a 500 kilos?</a:t>
+            </a:r>
+          </a:p>
+          <a:p>
+            <a:r>
+              <a:t>N2: Más cosas, porque hay más gas. Tres extintores de veintiuno a, ciento trece b cerca de la zona de venta. Ventilación directa a ras de suelo mediante una o más rejillas de al menos cuatrocientos centímetros cuadrados, sin que un lado sea más del doble que el otro; esa rejilla baja es la que deja salir el gas pesado si fuga. Las zonas van en planta baja, nunca por debajo del terreno. Y dos distancias de seguridad: cuatro metros a comunicaciones con escaleras, sótanos u otros locales de nivel inferior, y ocho metros a arquetas, tragaluces o bocas de alcantarillado que comuniquen con espacios de abajo. Remátalo con muros sin huecos hacia otros locales y techo o cubierta de material que no arde.</a:t>
             </a:r>
           </a:p>
         </p:txBody>
@@ -4826,7 +4988,7 @@
                 </a:solidFill>
                 <a:latin typeface="Montserrat"/>
               </a:rPr>
-              <a:t>010 / 015</a:t>
+              <a:t>010 / 017</a:t>
             </a:r>
           </a:p>
         </p:txBody>
@@ -4894,7 +5056,7 @@
                 </a:solidFill>
                 <a:latin typeface="Montserrat"/>
               </a:rPr>
-              <a:t>APARTADO 4 · DOCUMENTACIÓN</a:t>
+              <a:t>APARTADO 3.4.2.2 · HASTA 150 KG</a:t>
             </a:r>
           </a:p>
         </p:txBody>
@@ -4928,7 +5090,7 @@
                 </a:solidFill>
                 <a:latin typeface="Montserrat"/>
               </a:rPr>
-              <a:t>Autorización y proyecto</a:t>
+              <a:t>Tienda pequeña, más suave</a:t>
             </a:r>
           </a:p>
         </p:txBody>
@@ -4976,7 +5138,7 @@
                 </a:solidFill>
                 <a:latin typeface="Montserrat"/>
               </a:rPr>
-              <a:t>Sin autorización administrativa previa</a:t>
+              <a:t>2 extintores 13A-55B</a:t>
             </a:r>
           </a:p>
           <a:p>
@@ -5001,7 +5163,7 @@
                 </a:solidFill>
                 <a:latin typeface="Montserrat"/>
               </a:rPr>
-              <a:t>Proyecto solo en 1.ª, 2.ª y 3.ª</a:t>
+              <a:t>Ventilación necesaria</a:t>
             </a:r>
           </a:p>
           <a:p>
@@ -5026,7 +5188,7 @@
                 </a:solidFill>
                 <a:latin typeface="Montserrat"/>
               </a:rPr>
-              <a:t>4.ª y 5.ª se libran del proyecto</a:t>
+              <a:t>Nunca en sótano ni semisótano</a:t>
             </a:r>
           </a:p>
           <a:p>
@@ -5051,14 +5213,14 @@
                 </a:solidFill>
                 <a:latin typeface="Montserrat"/>
               </a:rPr>
-              <a:t>Inspección: para TODO centro</a:t>
-            </a:r>
-          </a:p>
-        </p:txBody>
-      </p:sp>
-      <p:sp>
-        <p:nvSpPr>
-          <p:cNvPr id="8" name="imgph" descr="IMGQ:engineer reviewing blueprints desk"/>
+              <a:t>Escaparate: solo recipientes vacíos</a:t>
+            </a:r>
+          </a:p>
+        </p:txBody>
+      </p:sp>
+      <p:sp>
+        <p:nvSpPr>
+          <p:cNvPr id="8" name="imgph" descr="IMGQ:small shop counter gas cartridges"/>
           <p:cNvSpPr/>
           <p:nvPr/>
         </p:nvSpPr>
@@ -5144,7 +5306,7 @@
                 </a:solidFill>
                 <a:latin typeface="Montserrat"/>
               </a:rPr>
-              <a:t>engineer reviewing blueprints desk</a:t>
+              <a:t>small shop counter gas cartridges</a:t>
             </a:r>
           </a:p>
         </p:txBody>
@@ -5241,7 +5403,7 @@
                 </a:solidFill>
                 <a:latin typeface="Montserrat"/>
               </a:rPr>
-              <a:t>011 / 015</a:t>
+              <a:t>011 / 017</a:t>
             </a:r>
           </a:p>
         </p:txBody>
@@ -5309,7 +5471,7 @@
                 </a:solidFill>
                 <a:latin typeface="Montserrat"/>
               </a:rPr>
-              <a:t>APARTADO 4.4 · PUESTA EN SERVICIO</a:t>
+              <a:t>APARTADO 3.4.2 · CARTELES</a:t>
             </a:r>
           </a:p>
         </p:txBody>
@@ -5343,7 +5505,7 @@
                 </a:solidFill>
                 <a:latin typeface="Montserrat"/>
               </a:rPr>
-              <a:t>Se comunica, no se pide</a:t>
+              <a:t>Dos carteles distintos</a:t>
             </a:r>
           </a:p>
         </p:txBody>
@@ -5391,7 +5553,7 @@
                 </a:solidFill>
                 <a:latin typeface="Montserrat"/>
               </a:rPr>
-              <a:t>Tras inspección favorable</a:t>
+              <a:t>Entrada: prohibido fumar en zonas señalizadas</a:t>
             </a:r>
           </a:p>
           <a:p>
@@ -5416,7 +5578,7 @@
                 </a:solidFill>
                 <a:latin typeface="Montserrat"/>
               </a:rPr>
-              <a:t>Datos del titular y plano de detalle</a:t>
+              <a:t>Junto a envases: prohibido fumar a 5 m</a:t>
             </a:r>
           </a:p>
           <a:p>
@@ -5441,39 +5603,14 @@
                 </a:solidFill>
                 <a:latin typeface="Montserrat"/>
               </a:rPr>
-              <a:t>Proyecto y certificados</a:t>
-            </a:r>
-          </a:p>
-          <a:p>
-            <a:pPr>
-              <a:spcAft>
-                <a:spcPts val="1000"/>
-              </a:spcAft>
-            </a:pPr>
-            <a:r>
-              <a:rPr sz="1600" b="1" i="0">
-                <a:solidFill>
-                  <a:srgbClr val="2E3A80"/>
-                </a:solidFill>
-                <a:latin typeface="Montserrat"/>
-              </a:rPr>
-              <a:t>•  </a:t>
-            </a:r>
-            <a:r>
-              <a:rPr sz="1600" b="0" i="0">
-                <a:solidFill>
-                  <a:srgbClr val="1B2330"/>
-                </a:solidFill>
-                <a:latin typeface="Montserrat"/>
-              </a:rPr>
-              <a:t>Comunicar: faculta el arranque</a:t>
-            </a:r>
-          </a:p>
-        </p:txBody>
-      </p:sp>
-      <p:sp>
-        <p:nvSpPr>
-          <p:cNvPr id="8" name="imgph" descr="IMGQ:official document stamp desk"/>
+              <a:t>Muros sin huecos a otros locales</a:t>
+            </a:r>
+          </a:p>
+        </p:txBody>
+      </p:sp>
+      <p:sp>
+        <p:nvSpPr>
+          <p:cNvPr id="8" name="imgph" descr="IMGQ:no smoking warning sign shop"/>
           <p:cNvSpPr/>
           <p:nvPr/>
         </p:nvSpPr>
@@ -5559,7 +5696,7 @@
                 </a:solidFill>
                 <a:latin typeface="Montserrat"/>
               </a:rPr>
-              <a:t>official document stamp desk</a:t>
+              <a:t>no smoking warning sign shop</a:t>
             </a:r>
           </a:p>
         </p:txBody>
@@ -5656,7 +5793,7 @@
                 </a:solidFill>
                 <a:latin typeface="Montserrat"/>
               </a:rPr>
-              <a:t>012 / 015</a:t>
+              <a:t>012 / 017</a:t>
             </a:r>
           </a:p>
         </p:txBody>
@@ -5724,7 +5861,7 @@
                 </a:solidFill>
                 <a:latin typeface="Montserrat"/>
               </a:rPr>
-              <a:t>APARTADO 5 · MANTENIMIENTO</a:t>
+              <a:t>APARTADO 4 · DOCUMENTACIÓN</a:t>
             </a:r>
           </a:p>
         </p:txBody>
@@ -5758,7 +5895,7 @@
                 </a:solidFill>
                 <a:latin typeface="Montserrat"/>
               </a:rPr>
-              <a:t>Cada dos años y la llave del gas</a:t>
+              <a:t>Proyecto sí, proyecto no</a:t>
             </a:r>
           </a:p>
         </p:txBody>
@@ -5806,7 +5943,7 @@
                 </a:solidFill>
                 <a:latin typeface="Montserrat"/>
               </a:rPr>
-              <a:t>Titular responsable del buen uso</a:t>
+              <a:t>Sin autorización administrativa previa</a:t>
             </a:r>
           </a:p>
           <a:p>
@@ -5831,7 +5968,7 @@
                 </a:solidFill>
                 <a:latin typeface="Montserrat"/>
               </a:rPr>
-              <a:t>Inspección cada 2 años</a:t>
+              <a:t>Proyecto solo en 1.ª, 2.ª y 3.ª</a:t>
             </a:r>
           </a:p>
           <a:p>
@@ -5856,7 +5993,7 @@
                 </a:solidFill>
                 <a:latin typeface="Montserrat"/>
               </a:rPr>
-              <a:t>Comprueba capacidad y seguridad</a:t>
+              <a:t>4.ª y 5.ª: sin proyecto</a:t>
             </a:r>
           </a:p>
           <a:p>
@@ -5881,14 +6018,14 @@
                 </a:solidFill>
                 <a:latin typeface="Montserrat"/>
               </a:rPr>
-              <a:t>Sin certificado, no te llenan</a:t>
-            </a:r>
-          </a:p>
-        </p:txBody>
-      </p:sp>
-      <p:sp>
-        <p:nvSpPr>
-          <p:cNvPr id="8" name="imgph" descr="IMGQ:technician inspecting gas installation"/>
+              <a:t>Inspección: para TODO centro</a:t>
+            </a:r>
+          </a:p>
+        </p:txBody>
+      </p:sp>
+      <p:sp>
+        <p:nvSpPr>
+          <p:cNvPr id="8" name="imgph" descr="IMGQ:engineer reviewing technical blueprint"/>
           <p:cNvSpPr/>
           <p:nvPr/>
         </p:nvSpPr>
@@ -5974,7 +6111,7 @@
                 </a:solidFill>
                 <a:latin typeface="Montserrat"/>
               </a:rPr>
-              <a:t>technician inspecting gas installation</a:t>
+              <a:t>engineer reviewing technical blueprint</a:t>
             </a:r>
           </a:p>
         </p:txBody>
@@ -6071,7 +6208,7 @@
                 </a:solidFill>
                 <a:latin typeface="Montserrat"/>
               </a:rPr>
-              <a:t>013 / 015</a:t>
+              <a:t>013 / 017</a:t>
             </a:r>
           </a:p>
         </p:txBody>
@@ -6139,7 +6276,7 @@
                 </a:solidFill>
                 <a:latin typeface="Montserrat"/>
               </a:rPr>
-              <a:t>APARTADO 6 · TRANSPORTE</a:t>
+              <a:t>APARTADO 4 · PUESTA EN SERVICIO</a:t>
             </a:r>
           </a:p>
         </p:txBody>
@@ -6173,7 +6310,7 @@
                 </a:solidFill>
                 <a:latin typeface="Montserrat"/>
               </a:rPr>
-              <a:t>Envases en la carretera</a:t>
+              <a:t>Se comunica a la Comunidad</a:t>
             </a:r>
           </a:p>
         </p:txBody>
@@ -6221,7 +6358,7 @@
                 </a:solidFill>
                 <a:latin typeface="Montserrat"/>
               </a:rPr>
-              <a:t>Siempre verticales y sujetos</a:t>
+              <a:t>Datos del titular y plano de detalle</a:t>
             </a:r>
           </a:p>
           <a:p>
@@ -6246,7 +6383,7 @@
                 </a:solidFill>
                 <a:latin typeface="Montserrat"/>
               </a:rPr>
-              <a:t>Nuevos sin gas: pueden ir tumbados</a:t>
+              <a:t>Certificado de inspección</a:t>
             </a:r>
           </a:p>
           <a:p>
@@ -6271,7 +6408,7 @@
                 </a:solidFill>
                 <a:latin typeface="Montserrat"/>
               </a:rPr>
-              <a:t>Prohibido aparcamiento subterráneo</a:t>
+              <a:t>La comunicación faculta el servicio</a:t>
             </a:r>
           </a:p>
           <a:p>
@@ -6296,14 +6433,14 @@
                 </a:solidFill>
                 <a:latin typeface="Montserrat"/>
               </a:rPr>
-              <a:t>Tu coche: máximo 2 de hasta 15 kg</a:t>
-            </a:r>
-          </a:p>
-        </p:txBody>
-      </p:sp>
-      <p:sp>
-        <p:nvSpPr>
-          <p:cNvPr id="8" name="imgph" descr="IMGQ:gas cylinders secured truck bed"/>
+              <a:t>No es conformidad de la Administración</a:t>
+            </a:r>
+          </a:p>
+        </p:txBody>
+      </p:sp>
+      <p:sp>
+        <p:nvSpPr>
+          <p:cNvPr id="8" name="imgph" descr="IMGQ:official documents folder stamp"/>
           <p:cNvSpPr/>
           <p:nvPr/>
         </p:nvSpPr>
@@ -6389,7 +6526,7 @@
                 </a:solidFill>
                 <a:latin typeface="Montserrat"/>
               </a:rPr>
-              <a:t>gas cylinders secured truck bed</a:t>
+              <a:t>official documents folder stamp</a:t>
             </a:r>
           </a:p>
         </p:txBody>
@@ -6486,7 +6623,7 @@
                 </a:solidFill>
                 <a:latin typeface="Montserrat"/>
               </a:rPr>
-              <a:t>014 / 015</a:t>
+              <a:t>014 / 017</a:t>
             </a:r>
           </a:p>
         </p:txBody>
@@ -6554,7 +6691,7 @@
                 </a:solidFill>
                 <a:latin typeface="Montserrat"/>
               </a:rPr>
-              <a:t>APARTADO 6 · REPARTO</a:t>
+              <a:t>APARTADO 5 · MANTENIMIENTO</a:t>
             </a:r>
           </a:p>
         </p:txBody>
@@ -6588,7 +6725,7 @@
                 </a:solidFill>
                 <a:latin typeface="Montserrat"/>
               </a:rPr>
-              <a:t>El furgón del butanero</a:t>
+              <a:t>Cada 2 años y la llave del gas</a:t>
             </a:r>
           </a:p>
         </p:txBody>
@@ -6636,7 +6773,7 @@
                 </a:solidFill>
                 <a:latin typeface="Montserrat"/>
               </a:rPr>
-              <a:t>Caja con rejillas laterales y traseras</a:t>
+              <a:t>Titular responsable del mantenimiento</a:t>
             </a:r>
           </a:p>
           <a:p>
@@ -6661,7 +6798,7 @@
                 </a:solidFill>
                 <a:latin typeface="Montserrat"/>
               </a:rPr>
-              <a:t>Cortafuegos si hay &gt; 500 kg</a:t>
+              <a:t>Inspección cada 2 años</a:t>
             </a:r>
           </a:p>
           <a:p>
@@ -6686,7 +6823,7 @@
                 </a:solidFill>
                 <a:latin typeface="Montserrat"/>
               </a:rPr>
-              <a:t>Prohibido llevar personas ajenas</a:t>
+              <a:t>No supera la capacidad comunicada</a:t>
             </a:r>
           </a:p>
           <a:p>
@@ -6711,14 +6848,14 @@
                 </a:solidFill>
                 <a:latin typeface="Montserrat"/>
               </a:rPr>
-              <a:t>Extintores según PMA (3.500 kg)</a:t>
-            </a:r>
-          </a:p>
-        </p:txBody>
-      </p:sp>
-      <p:sp>
-        <p:nvSpPr>
-          <p:cNvPr id="8" name="imgph" descr="IMGQ:delivery truck gas cylinders van"/>
+              <a:t>Sin certificado favorable: no hay gas</a:t>
+            </a:r>
+          </a:p>
+        </p:txBody>
+      </p:sp>
+      <p:sp>
+        <p:nvSpPr>
+          <p:cNvPr id="8" name="imgph" descr="IMGQ:inspector checking gas installation"/>
           <p:cNvSpPr/>
           <p:nvPr/>
         </p:nvSpPr>
@@ -6804,7 +6941,7 @@
                 </a:solidFill>
                 <a:latin typeface="Montserrat"/>
               </a:rPr>
-              <a:t>delivery truck gas cylinders van</a:t>
+              <a:t>inspector checking gas installation</a:t>
             </a:r>
           </a:p>
         </p:txBody>
@@ -6901,7 +7038,7 @@
                 </a:solidFill>
                 <a:latin typeface="Montserrat"/>
               </a:rPr>
-              <a:t>015 / 015</a:t>
+              <a:t>015 / 017</a:t>
             </a:r>
           </a:p>
         </p:txBody>
@@ -6948,8 +7085,8 @@
         </p:nvSpPr>
         <p:spPr>
           <a:xfrm>
-            <a:off x="822960" y="640080"/>
-            <a:ext cx="10058400" cy="914400"/>
+            <a:off x="822960" y="457200"/>
+            <a:ext cx="8229600" cy="365760"/>
           </a:xfrm>
           <a:prstGeom prst="rect">
             <a:avLst/>
@@ -6963,13 +7100,13 @@
           <a:lstStyle/>
           <a:p>
             <a:r>
-              <a:rPr sz="3000" b="1" i="0">
-                <a:solidFill>
-                  <a:srgbClr val="1E2761"/>
-                </a:solidFill>
-                <a:latin typeface="Montserrat"/>
-              </a:rPr>
-              <a:t>Qué me llevo</a:t>
+              <a:rPr sz="1200" b="1" i="0">
+                <a:solidFill>
+                  <a:srgbClr val="64748B"/>
+                </a:solidFill>
+                <a:latin typeface="Montserrat"/>
+              </a:rPr>
+              <a:t>APARTADO 6 · TRANSPORTE</a:t>
             </a:r>
           </a:p>
         </p:txBody>
@@ -6982,8 +7119,8 @@
         </p:nvSpPr>
         <p:spPr>
           <a:xfrm>
-            <a:off x="822960" y="2011680"/>
-            <a:ext cx="10058400" cy="3657600"/>
+            <a:off x="822960" y="868680"/>
+            <a:ext cx="10515600" cy="914400"/>
           </a:xfrm>
           <a:prstGeom prst="rect">
             <a:avLst/>
@@ -6996,78 +7133,976 @@
           </a:bodyPr>
           <a:lstStyle/>
           <a:p>
+            <a:r>
+              <a:rPr sz="2700" b="1" i="0">
+                <a:solidFill>
+                  <a:srgbClr val="1E2761"/>
+                </a:solidFill>
+                <a:latin typeface="Montserrat"/>
+              </a:rPr>
+              <a:t>Tu coche y las bombonas</a:t>
+            </a:r>
+          </a:p>
+        </p:txBody>
+      </p:sp>
+      <p:sp>
+        <p:nvSpPr>
+          <p:cNvPr id="7" name="TextBox 6"/>
+          <p:cNvSpPr txBox="1"/>
+          <p:nvPr/>
+        </p:nvSpPr>
+        <p:spPr>
+          <a:xfrm>
+            <a:off x="822960" y="1920240"/>
+            <a:ext cx="4983480" cy="4206240"/>
+          </a:xfrm>
+          <a:prstGeom prst="rect">
+            <a:avLst/>
+          </a:prstGeom>
+          <a:noFill/>
+        </p:spPr>
+        <p:txBody>
+          <a:bodyPr wrap="square">
+            <a:spAutoFit/>
+          </a:bodyPr>
+          <a:lstStyle/>
+          <a:p>
             <a:pPr>
               <a:spcAft>
-                <a:spcPts val="1400"/>
+                <a:spcPts val="1000"/>
               </a:spcAft>
             </a:pPr>
             <a:r>
-              <a:rPr sz="2000" b="1" i="0">
+              <a:rPr sz="1600" b="1" i="0">
                 <a:solidFill>
                   <a:srgbClr val="2E3A80"/>
                 </a:solidFill>
                 <a:latin typeface="Montserrat"/>
               </a:rPr>
-              <a:t>✓  </a:t>
-            </a:r>
-            <a:r>
-              <a:rPr sz="2000" b="0" i="0">
+              <a:t>•  </a:t>
+            </a:r>
+            <a:r>
+              <a:rPr sz="1600" b="0" i="0">
                 <a:solidFill>
                   <a:srgbClr val="1B2330"/>
                 </a:solidFill>
                 <a:latin typeface="Montserrat"/>
               </a:rPr>
-              <a:t>5.ª ≤ 500 kg · tienda partida en 150 kg</a:t>
+              <a:t>Máximo 2 envases de hasta 15 kg</a:t>
             </a:r>
           </a:p>
           <a:p>
             <a:pPr>
               <a:spcAft>
-                <a:spcPts val="1400"/>
+                <a:spcPts val="1000"/>
               </a:spcAft>
             </a:pPr>
             <a:r>
-              <a:rPr sz="2000" b="1" i="0">
+              <a:rPr sz="1600" b="1" i="0">
                 <a:solidFill>
                   <a:srgbClr val="2E3A80"/>
                 </a:solidFill>
                 <a:latin typeface="Montserrat"/>
               </a:rPr>
-              <a:t>✓  </a:t>
-            </a:r>
-            <a:r>
-              <a:rPr sz="2000" b="0" i="0">
+              <a:t>•  </a:t>
+            </a:r>
+            <a:r>
+              <a:rPr sz="1600" b="0" i="0">
                 <a:solidFill>
                   <a:srgbClr val="1B2330"/>
                 </a:solidFill>
                 <a:latin typeface="Montserrat"/>
               </a:rPr>
-              <a:t>Se hace y se comunica, inspección para todos</a:t>
+              <a:t>Siempre de pie y sujetos</a:t>
             </a:r>
           </a:p>
           <a:p>
             <a:pPr>
               <a:spcAft>
-                <a:spcPts val="1400"/>
+                <a:spcPts val="1000"/>
               </a:spcAft>
             </a:pPr>
             <a:r>
+              <a:rPr sz="1600" b="1" i="0">
+                <a:solidFill>
+                  <a:srgbClr val="2E3A80"/>
+                </a:solidFill>
+                <a:latin typeface="Montserrat"/>
+              </a:rPr>
+              <a:t>•  </a:t>
+            </a:r>
+            <a:r>
+              <a:rPr sz="1600" b="0" i="0">
+                <a:solidFill>
+                  <a:srgbClr val="1B2330"/>
+                </a:solidFill>
+                <a:latin typeface="Montserrat"/>
+              </a:rPr>
+              <a:t>Prohibido aparcar en subterráneo</a:t>
+            </a:r>
+          </a:p>
+          <a:p>
+            <a:pPr>
+              <a:spcAft>
+                <a:spcPts val="1000"/>
+              </a:spcAft>
+            </a:pPr>
+            <a:r>
+              <a:rPr sz="1600" b="1" i="0">
+                <a:solidFill>
+                  <a:srgbClr val="2E3A80"/>
+                </a:solidFill>
+                <a:latin typeface="Montserrat"/>
+              </a:rPr>
+              <a:t>•  </a:t>
+            </a:r>
+            <a:r>
+              <a:rPr sz="1600" b="0" i="0">
+                <a:solidFill>
+                  <a:srgbClr val="1B2330"/>
+                </a:solidFill>
+                <a:latin typeface="Montserrat"/>
+              </a:rPr>
+              <a:t>Nuevos y sin gas: pueden ir tumbados</a:t>
+            </a:r>
+          </a:p>
+        </p:txBody>
+      </p:sp>
+      <p:sp>
+        <p:nvSpPr>
+          <p:cNvPr id="8" name="imgph" descr="IMGQ:gas cylinders secured in van"/>
+          <p:cNvSpPr/>
+          <p:nvPr/>
+        </p:nvSpPr>
+        <p:spPr>
+          <a:xfrm>
+            <a:off x="5806440" y="1051560"/>
+            <a:ext cx="5298947" cy="4629150"/>
+          </a:xfrm>
+          <a:prstGeom prst="roundRect">
+            <a:avLst/>
+          </a:prstGeom>
+          <a:solidFill>
+            <a:srgbClr val="F3F6FB"/>
+          </a:solidFill>
+          <a:ln w="12700">
+            <a:solidFill>
+              <a:srgbClr val="C7D2E6"/>
+            </a:solidFill>
+          </a:ln>
+          <a:effectLst/>
+        </p:spPr>
+        <p:style>
+          <a:lnRef idx="1">
+            <a:schemeClr val="accent1"/>
+          </a:lnRef>
+          <a:fillRef idx="3">
+            <a:schemeClr val="accent1"/>
+          </a:fillRef>
+          <a:effectRef idx="2">
+            <a:schemeClr val="accent1"/>
+          </a:effectRef>
+          <a:fontRef idx="minor">
+            <a:schemeClr val="lt1"/>
+          </a:fontRef>
+        </p:style>
+        <p:txBody>
+          <a:bodyPr rtlCol="0" anchor="ctr"/>
+          <a:lstStyle/>
+          <a:p>
+            <a:pPr algn="ctr"/>
+          </a:p>
+        </p:txBody>
+      </p:sp>
+      <p:sp>
+        <p:nvSpPr>
+          <p:cNvPr id="9" name="TextBox 8"/>
+          <p:cNvSpPr txBox="1"/>
+          <p:nvPr/>
+        </p:nvSpPr>
+        <p:spPr>
+          <a:xfrm>
+            <a:off x="6080760" y="2726055"/>
+            <a:ext cx="4750307" cy="1280160"/>
+          </a:xfrm>
+          <a:prstGeom prst="rect">
+            <a:avLst/>
+          </a:prstGeom>
+          <a:noFill/>
+        </p:spPr>
+        <p:txBody>
+          <a:bodyPr wrap="square">
+            <a:spAutoFit/>
+          </a:bodyPr>
+          <a:lstStyle/>
+          <a:p>
+            <a:pPr algn="ctr"/>
+            <a:r>
+              <a:rPr sz="1400" b="1" i="0">
+                <a:solidFill>
+                  <a:srgbClr val="64748B"/>
+                </a:solidFill>
+                <a:latin typeface="Montserrat"/>
+              </a:rPr>
+              <a:t>IMAGEN REALISTA</a:t>
+            </a:r>
+          </a:p>
+          <a:p>
+            <a:pPr algn="ctr"/>
+            <a:r>
+              <a:rPr sz="1100" b="0" i="1">
+                <a:solidFill>
+                  <a:srgbClr val="64748B"/>
+                </a:solidFill>
+                <a:latin typeface="Montserrat"/>
+              </a:rPr>
+              <a:t>gas cylinders secured in van</a:t>
+            </a:r>
+          </a:p>
+        </p:txBody>
+      </p:sp>
+    </p:spTree>
+  </p:cSld>
+  <p:clrMapOvr>
+    <a:masterClrMapping/>
+  </p:clrMapOvr>
+</p:sld>
+</file>
+
+<file path=ppt/slides/slide16.xml><?xml version="1.0" encoding="utf-8"?>
+<p:sld xmlns:a="http://schemas.openxmlformats.org/drawingml/2006/main" xmlns:p="http://schemas.openxmlformats.org/presentationml/2006/main" xmlns:r="http://schemas.openxmlformats.org/officeDocument/2006/relationships">
+  <p:cSld>
+    <p:spTree>
+      <p:nvGrpSpPr>
+        <p:cNvPr id="1" name=""/>
+        <p:cNvGrpSpPr/>
+        <p:nvPr/>
+      </p:nvGrpSpPr>
+      <p:grpSpPr/>
+      <p:sp>
+        <p:nvSpPr>
+          <p:cNvPr id="2" name="Rectangle 1"/>
+          <p:cNvSpPr/>
+          <p:nvPr/>
+        </p:nvSpPr>
+        <p:spPr>
+          <a:xfrm>
+            <a:off x="0" y="0"/>
+            <a:ext cx="12191695" cy="6858000"/>
+          </a:xfrm>
+          <a:prstGeom prst="rect">
+            <a:avLst/>
+          </a:prstGeom>
+          <a:solidFill>
+            <a:srgbClr val="FFFFFF"/>
+          </a:solidFill>
+          <a:ln>
+            <a:noFill/>
+          </a:ln>
+          <a:effectLst/>
+        </p:spPr>
+        <p:style>
+          <a:lnRef idx="1">
+            <a:schemeClr val="accent1"/>
+          </a:lnRef>
+          <a:fillRef idx="3">
+            <a:schemeClr val="accent1"/>
+          </a:fillRef>
+          <a:effectRef idx="2">
+            <a:schemeClr val="accent1"/>
+          </a:effectRef>
+          <a:fontRef idx="minor">
+            <a:schemeClr val="lt1"/>
+          </a:fontRef>
+        </p:style>
+        <p:txBody>
+          <a:bodyPr rtlCol="0" anchor="ctr"/>
+          <a:lstStyle/>
+          <a:p>
+            <a:pPr algn="ctr"/>
+          </a:p>
+        </p:txBody>
+      </p:sp>
+      <p:sp>
+        <p:nvSpPr>
+          <p:cNvPr id="3" name="TextBox 2"/>
+          <p:cNvSpPr txBox="1"/>
+          <p:nvPr/>
+        </p:nvSpPr>
+        <p:spPr>
+          <a:xfrm>
+            <a:off x="10607040" y="320040"/>
+            <a:ext cx="1371600" cy="365760"/>
+          </a:xfrm>
+          <a:prstGeom prst="rect">
+            <a:avLst/>
+          </a:prstGeom>
+          <a:noFill/>
+        </p:spPr>
+        <p:txBody>
+          <a:bodyPr wrap="square">
+            <a:spAutoFit/>
+          </a:bodyPr>
+          <a:lstStyle/>
+          <a:p>
+            <a:pPr algn="r"/>
+            <a:r>
+              <a:rPr sz="1000" b="1" i="0">
+                <a:solidFill>
+                  <a:srgbClr val="64748B"/>
+                </a:solidFill>
+                <a:latin typeface="Montserrat"/>
+              </a:rPr>
+              <a:t>016 / 017</a:t>
+            </a:r>
+          </a:p>
+        </p:txBody>
+      </p:sp>
+      <p:sp>
+        <p:nvSpPr>
+          <p:cNvPr id="4" name="TextBox 3"/>
+          <p:cNvSpPr txBox="1"/>
+          <p:nvPr/>
+        </p:nvSpPr>
+        <p:spPr>
+          <a:xfrm>
+            <a:off x="457200" y="6419088"/>
+            <a:ext cx="8229600" cy="365760"/>
+          </a:xfrm>
+          <a:prstGeom prst="rect">
+            <a:avLst/>
+          </a:prstGeom>
+          <a:noFill/>
+        </p:spPr>
+        <p:txBody>
+          <a:bodyPr wrap="square">
+            <a:spAutoFit/>
+          </a:bodyPr>
+          <a:lstStyle/>
+          <a:p>
+            <a:r>
+              <a:rPr sz="900" b="0" i="0">
+                <a:solidFill>
+                  <a:srgbClr val="64748B"/>
+                </a:solidFill>
+                <a:latin typeface="Montserrat"/>
+              </a:rPr>
+              <a:t>Curso Gas B · Tema 02 · Centros de envases de GLP (II)</a:t>
+            </a:r>
+          </a:p>
+        </p:txBody>
+      </p:sp>
+      <p:sp>
+        <p:nvSpPr>
+          <p:cNvPr id="5" name="TextBox 4"/>
+          <p:cNvSpPr txBox="1"/>
+          <p:nvPr/>
+        </p:nvSpPr>
+        <p:spPr>
+          <a:xfrm>
+            <a:off x="822960" y="457200"/>
+            <a:ext cx="8229600" cy="365760"/>
+          </a:xfrm>
+          <a:prstGeom prst="rect">
+            <a:avLst/>
+          </a:prstGeom>
+          <a:noFill/>
+        </p:spPr>
+        <p:txBody>
+          <a:bodyPr wrap="square">
+            <a:spAutoFit/>
+          </a:bodyPr>
+          <a:lstStyle/>
+          <a:p>
+            <a:r>
+              <a:rPr sz="1200" b="1" i="0">
+                <a:solidFill>
+                  <a:srgbClr val="64748B"/>
+                </a:solidFill>
+                <a:latin typeface="Montserrat"/>
+              </a:rPr>
+              <a:t>APARTADO 6 · REPARTO</a:t>
+            </a:r>
+          </a:p>
+        </p:txBody>
+      </p:sp>
+      <p:sp>
+        <p:nvSpPr>
+          <p:cNvPr id="6" name="TextBox 5"/>
+          <p:cNvSpPr txBox="1"/>
+          <p:nvPr/>
+        </p:nvSpPr>
+        <p:spPr>
+          <a:xfrm>
+            <a:off x="822960" y="868680"/>
+            <a:ext cx="10515600" cy="914400"/>
+          </a:xfrm>
+          <a:prstGeom prst="rect">
+            <a:avLst/>
+          </a:prstGeom>
+          <a:noFill/>
+        </p:spPr>
+        <p:txBody>
+          <a:bodyPr wrap="square">
+            <a:spAutoFit/>
+          </a:bodyPr>
+          <a:lstStyle/>
+          <a:p>
+            <a:r>
+              <a:rPr sz="2700" b="1" i="0">
+                <a:solidFill>
+                  <a:srgbClr val="1E2761"/>
+                </a:solidFill>
+                <a:latin typeface="Montserrat"/>
+              </a:rPr>
+              <a:t>El furgón del butanero</a:t>
+            </a:r>
+          </a:p>
+        </p:txBody>
+      </p:sp>
+      <p:sp>
+        <p:nvSpPr>
+          <p:cNvPr id="7" name="TextBox 6"/>
+          <p:cNvSpPr txBox="1"/>
+          <p:nvPr/>
+        </p:nvSpPr>
+        <p:spPr>
+          <a:xfrm>
+            <a:off x="822960" y="1920240"/>
+            <a:ext cx="4983480" cy="4206240"/>
+          </a:xfrm>
+          <a:prstGeom prst="rect">
+            <a:avLst/>
+          </a:prstGeom>
+          <a:noFill/>
+        </p:spPr>
+        <p:txBody>
+          <a:bodyPr wrap="square">
+            <a:spAutoFit/>
+          </a:bodyPr>
+          <a:lstStyle/>
+          <a:p>
+            <a:pPr>
+              <a:spcAft>
+                <a:spcPts val="1000"/>
+              </a:spcAft>
+            </a:pPr>
+            <a:r>
+              <a:rPr sz="1600" b="1" i="0">
+                <a:solidFill>
+                  <a:srgbClr val="2E3A80"/>
+                </a:solidFill>
+                <a:latin typeface="Montserrat"/>
+              </a:rPr>
+              <a:t>•  </a:t>
+            </a:r>
+            <a:r>
+              <a:rPr sz="1600" b="0" i="0">
+                <a:solidFill>
+                  <a:srgbClr val="1B2330"/>
+                </a:solidFill>
+                <a:latin typeface="Montserrat"/>
+              </a:rPr>
+              <a:t>Caja con rejillas laterales y traseras</a:t>
+            </a:r>
+          </a:p>
+          <a:p>
+            <a:pPr>
+              <a:spcAft>
+                <a:spcPts val="1000"/>
+              </a:spcAft>
+            </a:pPr>
+            <a:r>
+              <a:rPr sz="1600" b="1" i="0">
+                <a:solidFill>
+                  <a:srgbClr val="2E3A80"/>
+                </a:solidFill>
+                <a:latin typeface="Montserrat"/>
+              </a:rPr>
+              <a:t>•  </a:t>
+            </a:r>
+            <a:r>
+              <a:rPr sz="1600" b="0" i="0">
+                <a:solidFill>
+                  <a:srgbClr val="1B2330"/>
+                </a:solidFill>
+                <a:latin typeface="Montserrat"/>
+              </a:rPr>
+              <a:t>Cortafuegos al entrar donde hay &gt; 500 kg</a:t>
+            </a:r>
+          </a:p>
+          <a:p>
+            <a:pPr>
+              <a:spcAft>
+                <a:spcPts val="1000"/>
+              </a:spcAft>
+            </a:pPr>
+            <a:r>
+              <a:rPr sz="1600" b="1" i="0">
+                <a:solidFill>
+                  <a:srgbClr val="2E3A80"/>
+                </a:solidFill>
+                <a:latin typeface="Montserrat"/>
+              </a:rPr>
+              <a:t>•  </a:t>
+            </a:r>
+            <a:r>
+              <a:rPr sz="1600" b="0" i="0">
+                <a:solidFill>
+                  <a:srgbClr val="1B2330"/>
+                </a:solidFill>
+                <a:latin typeface="Montserrat"/>
+              </a:rPr>
+              <a:t>PMA ≤ 3.500 kg: dos 8A-34B</a:t>
+            </a:r>
+          </a:p>
+          <a:p>
+            <a:pPr>
+              <a:spcAft>
+                <a:spcPts val="1000"/>
+              </a:spcAft>
+            </a:pPr>
+            <a:r>
+              <a:rPr sz="1600" b="1" i="0">
+                <a:solidFill>
+                  <a:srgbClr val="2E3A80"/>
+                </a:solidFill>
+                <a:latin typeface="Montserrat"/>
+              </a:rPr>
+              <a:t>•  </a:t>
+            </a:r>
+            <a:r>
+              <a:rPr sz="1600" b="0" i="0">
+                <a:solidFill>
+                  <a:srgbClr val="1B2330"/>
+                </a:solidFill>
+                <a:latin typeface="Montserrat"/>
+              </a:rPr>
+              <a:t>PMA &gt; 3.500 kg: carga sube a 13A-55B</a:t>
+            </a:r>
+          </a:p>
+        </p:txBody>
+      </p:sp>
+      <p:sp>
+        <p:nvSpPr>
+          <p:cNvPr id="8" name="imgph" descr="IMGQ:delivery truck loaded gas cylinders"/>
+          <p:cNvSpPr/>
+          <p:nvPr/>
+        </p:nvSpPr>
+        <p:spPr>
+          <a:xfrm>
+            <a:off x="5806440" y="1051560"/>
+            <a:ext cx="5298947" cy="4629150"/>
+          </a:xfrm>
+          <a:prstGeom prst="roundRect">
+            <a:avLst/>
+          </a:prstGeom>
+          <a:solidFill>
+            <a:srgbClr val="F3F6FB"/>
+          </a:solidFill>
+          <a:ln w="12700">
+            <a:solidFill>
+              <a:srgbClr val="C7D2E6"/>
+            </a:solidFill>
+          </a:ln>
+          <a:effectLst/>
+        </p:spPr>
+        <p:style>
+          <a:lnRef idx="1">
+            <a:schemeClr val="accent1"/>
+          </a:lnRef>
+          <a:fillRef idx="3">
+            <a:schemeClr val="accent1"/>
+          </a:fillRef>
+          <a:effectRef idx="2">
+            <a:schemeClr val="accent1"/>
+          </a:effectRef>
+          <a:fontRef idx="minor">
+            <a:schemeClr val="lt1"/>
+          </a:fontRef>
+        </p:style>
+        <p:txBody>
+          <a:bodyPr rtlCol="0" anchor="ctr"/>
+          <a:lstStyle/>
+          <a:p>
+            <a:pPr algn="ctr"/>
+          </a:p>
+        </p:txBody>
+      </p:sp>
+      <p:sp>
+        <p:nvSpPr>
+          <p:cNvPr id="9" name="TextBox 8"/>
+          <p:cNvSpPr txBox="1"/>
+          <p:nvPr/>
+        </p:nvSpPr>
+        <p:spPr>
+          <a:xfrm>
+            <a:off x="6080760" y="2726055"/>
+            <a:ext cx="4750307" cy="1280160"/>
+          </a:xfrm>
+          <a:prstGeom prst="rect">
+            <a:avLst/>
+          </a:prstGeom>
+          <a:noFill/>
+        </p:spPr>
+        <p:txBody>
+          <a:bodyPr wrap="square">
+            <a:spAutoFit/>
+          </a:bodyPr>
+          <a:lstStyle/>
+          <a:p>
+            <a:pPr algn="ctr"/>
+            <a:r>
+              <a:rPr sz="1400" b="1" i="0">
+                <a:solidFill>
+                  <a:srgbClr val="64748B"/>
+                </a:solidFill>
+                <a:latin typeface="Montserrat"/>
+              </a:rPr>
+              <a:t>IMAGEN REALISTA</a:t>
+            </a:r>
+          </a:p>
+          <a:p>
+            <a:pPr algn="ctr"/>
+            <a:r>
+              <a:rPr sz="1100" b="0" i="1">
+                <a:solidFill>
+                  <a:srgbClr val="64748B"/>
+                </a:solidFill>
+                <a:latin typeface="Montserrat"/>
+              </a:rPr>
+              <a:t>delivery truck loaded gas cylinders</a:t>
+            </a:r>
+          </a:p>
+        </p:txBody>
+      </p:sp>
+    </p:spTree>
+  </p:cSld>
+  <p:clrMapOvr>
+    <a:masterClrMapping/>
+  </p:clrMapOvr>
+</p:sld>
+</file>
+
+<file path=ppt/slides/slide17.xml><?xml version="1.0" encoding="utf-8"?>
+<p:sld xmlns:a="http://schemas.openxmlformats.org/drawingml/2006/main" xmlns:p="http://schemas.openxmlformats.org/presentationml/2006/main" xmlns:r="http://schemas.openxmlformats.org/officeDocument/2006/relationships">
+  <p:cSld>
+    <p:spTree>
+      <p:nvGrpSpPr>
+        <p:cNvPr id="1" name=""/>
+        <p:cNvGrpSpPr/>
+        <p:nvPr/>
+      </p:nvGrpSpPr>
+      <p:grpSpPr/>
+      <p:sp>
+        <p:nvSpPr>
+          <p:cNvPr id="2" name="Rectangle 1"/>
+          <p:cNvSpPr/>
+          <p:nvPr/>
+        </p:nvSpPr>
+        <p:spPr>
+          <a:xfrm>
+            <a:off x="0" y="0"/>
+            <a:ext cx="12191695" cy="6858000"/>
+          </a:xfrm>
+          <a:prstGeom prst="rect">
+            <a:avLst/>
+          </a:prstGeom>
+          <a:solidFill>
+            <a:srgbClr val="1E2761"/>
+          </a:solidFill>
+          <a:ln>
+            <a:noFill/>
+          </a:ln>
+          <a:effectLst/>
+        </p:spPr>
+        <p:style>
+          <a:lnRef idx="1">
+            <a:schemeClr val="accent1"/>
+          </a:lnRef>
+          <a:fillRef idx="3">
+            <a:schemeClr val="accent1"/>
+          </a:fillRef>
+          <a:effectRef idx="2">
+            <a:schemeClr val="accent1"/>
+          </a:effectRef>
+          <a:fontRef idx="minor">
+            <a:schemeClr val="lt1"/>
+          </a:fontRef>
+        </p:style>
+        <p:txBody>
+          <a:bodyPr rtlCol="0" anchor="ctr"/>
+          <a:lstStyle/>
+          <a:p>
+            <a:pPr algn="ctr"/>
+          </a:p>
+        </p:txBody>
+      </p:sp>
+      <p:sp>
+        <p:nvSpPr>
+          <p:cNvPr id="3" name="TextBox 2"/>
+          <p:cNvSpPr txBox="1"/>
+          <p:nvPr/>
+        </p:nvSpPr>
+        <p:spPr>
+          <a:xfrm>
+            <a:off x="822960" y="640080"/>
+            <a:ext cx="10515600" cy="457200"/>
+          </a:xfrm>
+          <a:prstGeom prst="rect">
+            <a:avLst/>
+          </a:prstGeom>
+          <a:noFill/>
+        </p:spPr>
+        <p:txBody>
+          <a:bodyPr wrap="square">
+            <a:spAutoFit/>
+          </a:bodyPr>
+          <a:lstStyle/>
+          <a:p>
+            <a:r>
+              <a:rPr sz="1400" b="1" i="0">
+                <a:solidFill>
+                  <a:srgbClr val="CADCFC"/>
+                </a:solidFill>
+                <a:latin typeface="Montserrat"/>
+              </a:rPr>
+              <a:t>LO QUE YA DOMINAS</a:t>
+            </a:r>
+          </a:p>
+        </p:txBody>
+      </p:sp>
+      <p:sp>
+        <p:nvSpPr>
+          <p:cNvPr id="4" name="TextBox 3"/>
+          <p:cNvSpPr txBox="1"/>
+          <p:nvPr/>
+        </p:nvSpPr>
+        <p:spPr>
+          <a:xfrm>
+            <a:off x="822960" y="1143000"/>
+            <a:ext cx="10515600" cy="1097280"/>
+          </a:xfrm>
+          <a:prstGeom prst="rect">
+            <a:avLst/>
+          </a:prstGeom>
+          <a:noFill/>
+        </p:spPr>
+        <p:txBody>
+          <a:bodyPr wrap="square">
+            <a:spAutoFit/>
+          </a:bodyPr>
+          <a:lstStyle/>
+          <a:p>
+            <a:r>
+              <a:rPr sz="3400" b="1" i="0">
+                <a:solidFill>
+                  <a:srgbClr val="FFFFFF"/>
+                </a:solidFill>
+                <a:latin typeface="Montserrat"/>
+              </a:rPr>
+              <a:t>Ya controlas la gasolinera, la tienda y el reparto</a:t>
+            </a:r>
+          </a:p>
+        </p:txBody>
+      </p:sp>
+      <p:sp>
+        <p:nvSpPr>
+          <p:cNvPr id="5" name="TextBox 4"/>
+          <p:cNvSpPr txBox="1"/>
+          <p:nvPr/>
+        </p:nvSpPr>
+        <p:spPr>
+          <a:xfrm>
+            <a:off x="822960" y="2514600"/>
+            <a:ext cx="10515600" cy="2834640"/>
+          </a:xfrm>
+          <a:prstGeom prst="rect">
+            <a:avLst/>
+          </a:prstGeom>
+          <a:noFill/>
+        </p:spPr>
+        <p:txBody>
+          <a:bodyPr wrap="square">
+            <a:spAutoFit/>
+          </a:bodyPr>
+          <a:lstStyle/>
+          <a:p>
+            <a:pPr>
+              <a:spcAft>
+                <a:spcPts val="1200"/>
+              </a:spcAft>
+            </a:pPr>
+            <a:r>
               <a:rPr sz="2000" b="1" i="0">
                 <a:solidFill>
-                  <a:srgbClr val="2E3A80"/>
+                  <a:srgbClr val="CADCFC"/>
                 </a:solidFill>
                 <a:latin typeface="Montserrat"/>
               </a:rPr>
               <a:t>✓  </a:t>
             </a:r>
             <a:r>
-              <a:rPr sz="2000" b="0" i="0">
-                <a:solidFill>
-                  <a:srgbClr val="1B2330"/>
-                </a:solidFill>
-                <a:latin typeface="Montserrat"/>
-              </a:rPr>
-              <a:t>Coche: 2 bombonas · nunca en subterráneo</a:t>
+              <a:rPr sz="1900" b="0" i="0">
+                <a:solidFill>
+                  <a:srgbClr val="FFFFFF"/>
+                </a:solidFill>
+                <a:latin typeface="Montserrat"/>
+              </a:rPr>
+              <a:t>Distingues 4.ª y 5.ª: vallado, distancias y extintores</a:t>
+            </a:r>
+          </a:p>
+          <a:p>
+            <a:pPr>
+              <a:spcAft>
+                <a:spcPts val="1200"/>
+              </a:spcAft>
+            </a:pPr>
+            <a:r>
+              <a:rPr sz="2000" b="1" i="0">
+                <a:solidFill>
+                  <a:srgbClr val="CADCFC"/>
+                </a:solidFill>
+                <a:latin typeface="Montserrat"/>
+              </a:rPr>
+              <a:t>✓  </a:t>
+            </a:r>
+            <a:r>
+              <a:rPr sz="1900" b="0" i="0">
+                <a:solidFill>
+                  <a:srgbClr val="FFFFFF"/>
+                </a:solidFill>
+                <a:latin typeface="Montserrat"/>
+              </a:rPr>
+              <a:t>Partes la tienda en 150 kg y colocas cada extintor</a:t>
+            </a:r>
+          </a:p>
+          <a:p>
+            <a:pPr>
+              <a:spcAft>
+                <a:spcPts val="1200"/>
+              </a:spcAft>
+            </a:pPr>
+            <a:r>
+              <a:rPr sz="2000" b="1" i="0">
+                <a:solidFill>
+                  <a:srgbClr val="CADCFC"/>
+                </a:solidFill>
+                <a:latin typeface="Montserrat"/>
+              </a:rPr>
+              <a:t>✓  </a:t>
+            </a:r>
+            <a:r>
+              <a:rPr sz="1900" b="0" i="0">
+                <a:solidFill>
+                  <a:srgbClr val="FFFFFF"/>
+                </a:solidFill>
+                <a:latin typeface="Montserrat"/>
+              </a:rPr>
+              <a:t>Sabes que se inspecciona y se comunica, no se pide permiso</a:t>
+            </a:r>
+          </a:p>
+          <a:p>
+            <a:pPr>
+              <a:spcAft>
+                <a:spcPts val="1200"/>
+              </a:spcAft>
+            </a:pPr>
+            <a:r>
+              <a:rPr sz="2000" b="1" i="0">
+                <a:solidFill>
+                  <a:srgbClr val="CADCFC"/>
+                </a:solidFill>
+                <a:latin typeface="Montserrat"/>
+              </a:rPr>
+              <a:t>✓  </a:t>
+            </a:r>
+            <a:r>
+              <a:rPr sz="1900" b="0" i="0">
+                <a:solidFill>
+                  <a:srgbClr val="FFFFFF"/>
+                </a:solidFill>
+                <a:latin typeface="Montserrat"/>
+              </a:rPr>
+              <a:t>Transportas envases de pie, sin sótano y sin pasarte de 2</a:t>
+            </a:r>
+          </a:p>
+        </p:txBody>
+      </p:sp>
+      <p:sp>
+        <p:nvSpPr>
+          <p:cNvPr id="6" name="Rounded Rectangle 5"/>
+          <p:cNvSpPr/>
+          <p:nvPr/>
+        </p:nvSpPr>
+        <p:spPr>
+          <a:xfrm>
+            <a:off x="822960" y="5532120"/>
+            <a:ext cx="10515600" cy="777240"/>
+          </a:xfrm>
+          <a:prstGeom prst="roundRect">
+            <a:avLst/>
+          </a:prstGeom>
+          <a:solidFill>
+            <a:srgbClr val="2E3A80"/>
+          </a:solidFill>
+          <a:ln>
+            <a:noFill/>
+          </a:ln>
+          <a:effectLst/>
+        </p:spPr>
+        <p:style>
+          <a:lnRef idx="1">
+            <a:schemeClr val="accent1"/>
+          </a:lnRef>
+          <a:fillRef idx="3">
+            <a:schemeClr val="accent1"/>
+          </a:fillRef>
+          <a:effectRef idx="2">
+            <a:schemeClr val="accent1"/>
+          </a:effectRef>
+          <a:fontRef idx="minor">
+            <a:schemeClr val="lt1"/>
+          </a:fontRef>
+        </p:style>
+        <p:txBody>
+          <a:bodyPr rtlCol="0" anchor="ctr"/>
+          <a:lstStyle/>
+          <a:p>
+            <a:pPr algn="ctr"/>
+          </a:p>
+        </p:txBody>
+      </p:sp>
+      <p:sp>
+        <p:nvSpPr>
+          <p:cNvPr id="7" name="TextBox 6"/>
+          <p:cNvSpPr txBox="1"/>
+          <p:nvPr/>
+        </p:nvSpPr>
+        <p:spPr>
+          <a:xfrm>
+            <a:off x="1051560" y="5605272"/>
+            <a:ext cx="10058400" cy="640080"/>
+          </a:xfrm>
+          <a:prstGeom prst="rect">
+            <a:avLst/>
+          </a:prstGeom>
+          <a:noFill/>
+        </p:spPr>
+        <p:txBody>
+          <a:bodyPr wrap="square">
+            <a:spAutoFit/>
+          </a:bodyPr>
+          <a:lstStyle/>
+          <a:p>
+            <a:r>
+              <a:rPr sz="1500" b="1" i="1">
+                <a:solidFill>
+                  <a:srgbClr val="CADCFC"/>
+                </a:solidFill>
+                <a:latin typeface="Montserrat"/>
+              </a:rPr>
+              <a:t>Con esto cierras la ITC-02 entera. Ahora damos el salto al depósito fijo del chalé.</a:t>
             </a:r>
           </a:p>
         </p:txBody>
@@ -7164,7 +8199,7 @@
                 </a:solidFill>
                 <a:latin typeface="Montserrat"/>
               </a:rPr>
-              <a:t>002 / 015</a:t>
+              <a:t>002 / 017</a:t>
             </a:r>
           </a:p>
         </p:txBody>
@@ -7429,7 +8464,7 @@
                 </a:solidFill>
                 <a:latin typeface="Montserrat"/>
               </a:rPr>
-              <a:t>150 kg</a:t>
+              <a:t>2 años</a:t>
             </a:r>
           </a:p>
         </p:txBody>
@@ -7464,7 +8499,7 @@
                 </a:solidFill>
                 <a:latin typeface="Montserrat"/>
               </a:rPr>
-              <a:t>frontera de la tienda</a:t>
+              <a:t>inspección por organismo de control</a:t>
             </a:r>
           </a:p>
         </p:txBody>
@@ -7580,7 +8615,7 @@
                 </a:solidFill>
                 <a:latin typeface="Montserrat"/>
               </a:rPr>
-              <a:t>envases máx. en tu coche</a:t>
+              <a:t>envases máx. en coche particular</a:t>
             </a:r>
           </a:p>
         </p:txBody>
@@ -7677,7 +8712,7 @@
                 </a:solidFill>
                 <a:latin typeface="Montserrat"/>
               </a:rPr>
-              <a:t>003 / 015</a:t>
+              <a:t>003 / 017</a:t>
             </a:r>
           </a:p>
         </p:txBody>
@@ -7779,7 +8814,7 @@
                 </a:solidFill>
                 <a:latin typeface="Montserrat"/>
               </a:rPr>
-              <a:t>La versión mini</a:t>
+              <a:t>La versión mini y sencilla</a:t>
             </a:r>
           </a:p>
         </p:txBody>
@@ -7877,7 +8912,7 @@
                 </a:solidFill>
                 <a:latin typeface="Montserrat"/>
               </a:rPr>
-              <a:t>6 m si es patio cerrado</a:t>
+              <a:t>6 m si está en patio cerrado</a:t>
             </a:r>
           </a:p>
           <a:p>
@@ -7909,7 +8944,7 @@
       </p:sp>
       <p:sp>
         <p:nvSpPr>
-          <p:cNvPr id="8" name="imgph" descr="IMGQ:small propane cage fenced yard"/>
+          <p:cNvPr id="8" name="imgph" descr="IMGQ:small gas cylinder storage fenced yard"/>
           <p:cNvSpPr/>
           <p:nvPr/>
         </p:nvSpPr>
@@ -7995,7 +9030,7 @@
                 </a:solidFill>
                 <a:latin typeface="Montserrat"/>
               </a:rPr>
-              <a:t>small propane cage fenced yard</a:t>
+              <a:t>small gas cylinder storage fenced yard</a:t>
             </a:r>
           </a:p>
         </p:txBody>
@@ -8092,7 +9127,7 @@
                 </a:solidFill>
                 <a:latin typeface="Montserrat"/>
               </a:rPr>
-              <a:t>004 / 015</a:t>
+              <a:t>004 / 017</a:t>
             </a:r>
           </a:p>
         </p:txBody>
@@ -8160,7 +9195,7 @@
                 </a:solidFill>
                 <a:latin typeface="Montserrat"/>
               </a:rPr>
-              <a:t>APARTADO 3.3 · GASOLINERAS</a:t>
+              <a:t>APARTADO 3.3 · ANEXOS A EE.SS.</a:t>
             </a:r>
           </a:p>
         </p:txBody>
@@ -8194,7 +9229,7 @@
                 </a:solidFill>
                 <a:latin typeface="Montserrat"/>
               </a:rPr>
-              <a:t>Anexo a estación de servicio</a:t>
+              <a:t>4.ª junto a una gasolinera</a:t>
             </a:r>
           </a:p>
         </p:txBody>
@@ -8242,7 +9277,7 @@
                 </a:solidFill>
                 <a:latin typeface="Montserrat"/>
               </a:rPr>
-              <a:t>Fuera de la propia estación</a:t>
+              <a:t>Fuera de la propia estación de servicio</a:t>
             </a:r>
           </a:p>
           <a:p>
@@ -8267,7 +9302,7 @@
                 </a:solidFill>
                 <a:latin typeface="Montserrat"/>
               </a:rPr>
-              <a:t>10 m al área de suministro</a:t>
+              <a:t>A 10 m del área de suministro</a:t>
             </a:r>
           </a:p>
           <a:p>
@@ -8292,7 +9327,7 @@
                 </a:solidFill>
                 <a:latin typeface="Montserrat"/>
               </a:rPr>
-              <a:t>Lejos de los surtidores</a:t>
+              <a:t>Separa bombonas de los surtidores</a:t>
             </a:r>
           </a:p>
         </p:txBody>
@@ -8482,7 +9517,7 @@
                 </a:solidFill>
                 <a:latin typeface="Montserrat"/>
               </a:rPr>
-              <a:t>005 / 015</a:t>
+              <a:t>005 / 017</a:t>
             </a:r>
           </a:p>
         </p:txBody>
@@ -8550,7 +9585,7 @@
                 </a:solidFill>
                 <a:latin typeface="Montserrat"/>
               </a:rPr>
-              <a:t>APARTADO 3.4.1 · 5.ª CATEGORÍA</a:t>
+              <a:t>APARTADO 3.4.1 · 5.ª EN EE.SS.</a:t>
             </a:r>
           </a:p>
         </p:txBody>
@@ -8584,7 +9619,7 @@
                 </a:solidFill>
                 <a:latin typeface="Montserrat"/>
               </a:rPr>
-              <a:t>En la estación de servicio</a:t>
+              <a:t>La gasolinera: máximo 500 kg</a:t>
             </a:r>
           </a:p>
         </p:txBody>
@@ -8632,7 +9667,7 @@
                 </a:solidFill>
                 <a:latin typeface="Montserrat"/>
               </a:rPr>
-              <a:t>Capacidad total máxima 500 kg</a:t>
+              <a:t>Capacidad total máxima: 500 kg</a:t>
             </a:r>
           </a:p>
           <a:p>
@@ -8707,14 +9742,14 @@
                 </a:solidFill>
                 <a:latin typeface="Montserrat"/>
               </a:rPr>
-              <a:t>Cartuchos ≤ 3 kg: 4 alturas, 40 cm</a:t>
-            </a:r>
-          </a:p>
-        </p:txBody>
-      </p:sp>
-      <p:sp>
-        <p:nvSpPr>
-          <p:cNvPr id="8" name="imgph" descr="IMGQ:propane exchange cage gas station"/>
+              <a:t>Cartuchos ≤ 3 kg: 4 alturas (40 cm)</a:t>
+            </a:r>
+          </a:p>
+        </p:txBody>
+      </p:sp>
+      <p:sp>
+        <p:nvSpPr>
+          <p:cNvPr id="8" name="imgph" descr="IMGQ:gas cylinder cage at petrol station"/>
           <p:cNvSpPr/>
           <p:nvPr/>
         </p:nvSpPr>
@@ -8800,7 +9835,7 @@
                 </a:solidFill>
                 <a:latin typeface="Montserrat"/>
               </a:rPr>
-              <a:t>propane exchange cage gas station</a:t>
+              <a:t>gas cylinder cage at petrol station</a:t>
             </a:r>
           </a:p>
         </p:txBody>
@@ -8897,7 +9932,7 @@
                 </a:solidFill>
                 <a:latin typeface="Montserrat"/>
               </a:rPr>
-              <a:t>006 / 015</a:t>
+              <a:t>006 / 017</a:t>
             </a:r>
           </a:p>
         </p:txBody>
@@ -8965,7 +10000,7 @@
                 </a:solidFill>
                 <a:latin typeface="Montserrat"/>
               </a:rPr>
-              <a:t>APARTADO 3.4.1 · REGLAS COMUNES</a:t>
+              <a:t>APARTADO 3.4.1.1 · REGLAS COMUNES</a:t>
             </a:r>
           </a:p>
         </p:txBody>
@@ -8999,7 +10034,7 @@
                 </a:solidFill>
                 <a:latin typeface="Montserrat"/>
               </a:rPr>
-              <a:t>Espacio y protección</a:t>
+              <a:t>Espacios abiertos y distancias</a:t>
             </a:r>
           </a:p>
         </p:txBody>
@@ -9129,7 +10164,7 @@
       </p:sp>
       <p:sp>
         <p:nvSpPr>
-          <p:cNvPr id="8" name="imgph" descr="IMGQ:storm drain grate pavement"/>
+          <p:cNvPr id="8" name="imgph" descr="IMGQ:outdoor gas cylinder storage cage"/>
           <p:cNvSpPr/>
           <p:nvPr/>
         </p:nvSpPr>
@@ -9215,7 +10250,7 @@
                 </a:solidFill>
                 <a:latin typeface="Montserrat"/>
               </a:rPr>
-              <a:t>storm drain grate pavement</a:t>
+              <a:t>outdoor gas cylinder storage cage</a:t>
             </a:r>
           </a:p>
         </p:txBody>
@@ -9312,7 +10347,7 @@
                 </a:solidFill>
                 <a:latin typeface="Montserrat"/>
               </a:rPr>
-              <a:t>007 / 015</a:t>
+              <a:t>007 / 017</a:t>
             </a:r>
           </a:p>
         </p:txBody>
@@ -9414,7 +10449,7 @@
                 </a:solidFill>
                 <a:latin typeface="Montserrat"/>
               </a:rPr>
-              <a:t>La jaula que respira</a:t>
+              <a:t>La jaula respira arriba y abajo</a:t>
             </a:r>
           </a:p>
         </p:txBody>
@@ -9462,7 +10497,7 @@
                 </a:solidFill>
                 <a:latin typeface="Montserrat"/>
               </a:rPr>
-              <a:t>Materiales que no arden</a:t>
+              <a:t>Material que no arde (A2-s3,d0)</a:t>
             </a:r>
           </a:p>
           <a:p>
@@ -9487,7 +10522,7 @@
                 </a:solidFill>
                 <a:latin typeface="Montserrat"/>
               </a:rPr>
-              <a:t>Ventilación arriba Y abajo</a:t>
+              <a:t>Ventilación superior e inferior</a:t>
             </a:r>
           </a:p>
           <a:p>
@@ -9512,14 +10547,14 @@
                 </a:solidFill>
                 <a:latin typeface="Montserrat"/>
               </a:rPr>
-              <a:t>Cerrada al público fuera de horario</a:t>
-            </a:r>
-          </a:p>
-        </p:txBody>
-      </p:sp>
-      <p:sp>
-        <p:nvSpPr>
-          <p:cNvPr id="8" name="imgph" descr="IMGQ:ventilation grille metal cabinet"/>
+              <a:t>Cerradas al público fuera de servicio</a:t>
+            </a:r>
+          </a:p>
+        </p:txBody>
+      </p:sp>
+      <p:sp>
+        <p:nvSpPr>
+          <p:cNvPr id="8" name="imgph" descr="IMGQ:ventilated metal gas bottle cage"/>
           <p:cNvSpPr/>
           <p:nvPr/>
         </p:nvSpPr>
@@ -9605,7 +10640,7 @@
                 </a:solidFill>
                 <a:latin typeface="Montserrat"/>
               </a:rPr>
-              <a:t>ventilation grille metal cabinet</a:t>
+              <a:t>ventilated metal gas bottle cage</a:t>
             </a:r>
           </a:p>
         </p:txBody>
@@ -9702,7 +10737,7 @@
                 </a:solidFill>
                 <a:latin typeface="Montserrat"/>
               </a:rPr>
-              <a:t>008 / 015</a:t>
+              <a:t>008 / 017</a:t>
             </a:r>
           </a:p>
         </p:txBody>
@@ -9770,7 +10805,7 @@
                 </a:solidFill>
                 <a:latin typeface="Montserrat"/>
               </a:rPr>
-              <a:t>APARTADO 3.4.2.1 · TIENDA GRANDE</a:t>
+              <a:t>APARTADO 3.4.2 · COMERCIOS</a:t>
             </a:r>
           </a:p>
         </p:txBody>
@@ -9804,7 +10839,7 @@
                 </a:solidFill>
                 <a:latin typeface="Montserrat"/>
               </a:rPr>
-              <a:t>De 150 a 500 kg</a:t>
+              <a:t>La tienda se parte en 150 kg</a:t>
             </a:r>
           </a:p>
         </p:txBody>
@@ -9852,7 +10887,7 @@
                 </a:solidFill>
                 <a:latin typeface="Montserrat"/>
               </a:rPr>
-              <a:t>Máximo 500 kg, en planta baja</a:t>
+              <a:t>Envases inferiores a 15 kg y cartuchos</a:t>
             </a:r>
           </a:p>
           <a:p>
@@ -9877,7 +10912,7 @@
                 </a:solidFill>
                 <a:latin typeface="Montserrat"/>
               </a:rPr>
-              <a:t>Rejilla al suelo, mínimo 400 cm²</a:t>
+              <a:t>Hasta 150 kg: tienda pequeña</a:t>
             </a:r>
           </a:p>
           <a:p>
@@ -9902,7 +10937,7 @@
                 </a:solidFill>
                 <a:latin typeface="Montserrat"/>
               </a:rPr>
-              <a:t>4 m a escaleras · 8 m a arquetas</a:t>
+              <a:t>De 150 a 500 kg: tienda grande</a:t>
             </a:r>
           </a:p>
           <a:p>
@@ -9927,14 +10962,14 @@
                 </a:solidFill>
                 <a:latin typeface="Montserrat"/>
               </a:rPr>
-              <a:t>3 extintores 21A-113B</a:t>
-            </a:r>
-          </a:p>
-        </p:txBody>
-      </p:sp>
-      <p:sp>
-        <p:nvSpPr>
-          <p:cNvPr id="8" name="imgph" descr="IMGQ:hardware store shelves interior"/>
+              <a:t>Escaparate: solo envases vacíos</a:t>
+            </a:r>
+          </a:p>
+        </p:txBody>
+      </p:sp>
+      <p:sp>
+        <p:nvSpPr>
+          <p:cNvPr id="8" name="imgph" descr="IMGQ:hardware store gas bottles shelf"/>
           <p:cNvSpPr/>
           <p:nvPr/>
         </p:nvSpPr>
@@ -10020,7 +11055,7 @@
                 </a:solidFill>
                 <a:latin typeface="Montserrat"/>
               </a:rPr>
-              <a:t>hardware store shelves interior</a:t>
+              <a:t>hardware store gas bottles shelf</a:t>
             </a:r>
           </a:p>
         </p:txBody>
@@ -10117,7 +11152,7 @@
                 </a:solidFill>
                 <a:latin typeface="Montserrat"/>
               </a:rPr>
-              <a:t>009 / 015</a:t>
+              <a:t>009 / 017</a:t>
             </a:r>
           </a:p>
         </p:txBody>
@@ -10185,7 +11220,7 @@
                 </a:solidFill>
                 <a:latin typeface="Montserrat"/>
               </a:rPr>
-              <a:t>APARTADO 3.4.2.2 · TIENDA PEQUEÑA</a:t>
+              <a:t>APARTADO 3.4.2.1 · 150 A 500 KG</a:t>
             </a:r>
           </a:p>
         </p:txBody>
@@ -10219,7 +11254,7 @@
                 </a:solidFill>
                 <a:latin typeface="Montserrat"/>
               </a:rPr>
-              <a:t>Hasta 150 kg y carteles</a:t>
+              <a:t>Tienda grande, más exigente</a:t>
             </a:r>
           </a:p>
         </p:txBody>
@@ -10267,7 +11302,7 @@
                 </a:solidFill>
                 <a:latin typeface="Montserrat"/>
               </a:rPr>
-              <a:t>Ventilación · nunca en sótano</a:t>
+              <a:t>3 extintores 21A-113B</a:t>
             </a:r>
           </a:p>
           <a:p>
@@ -10292,7 +11327,7 @@
                 </a:solidFill>
                 <a:latin typeface="Montserrat"/>
               </a:rPr>
-              <a:t>2 extintores 13A-55B</a:t>
+              <a:t>Rejilla a ras de suelo: 400 cm²</a:t>
             </a:r>
           </a:p>
           <a:p>
@@ -10317,7 +11352,7 @@
                 </a:solidFill>
                 <a:latin typeface="Montserrat"/>
               </a:rPr>
-              <a:t>Entrada: prohibido fumar señalizado</a:t>
+              <a:t>4 m a escaleras · 8 m a arquetas</a:t>
             </a:r>
           </a:p>
           <a:p>
@@ -10342,14 +11377,14 @@
                 </a:solidFill>
                 <a:latin typeface="Montserrat"/>
               </a:rPr>
-              <a:t>Junto a envases: no fumar a 5 m</a:t>
-            </a:r>
-          </a:p>
-        </p:txBody>
-      </p:sp>
-      <p:sp>
-        <p:nvSpPr>
-          <p:cNvPr id="8" name="imgph" descr="IMGQ:no smoking wall sign shop"/>
+              <a:t>Planta baja, nunca en sótano</a:t>
+            </a:r>
+          </a:p>
+        </p:txBody>
+      </p:sp>
+      <p:sp>
+        <p:nvSpPr>
+          <p:cNvPr id="8" name="imgph" descr="IMGQ:floor ventilation grille indoor"/>
           <p:cNvSpPr/>
           <p:nvPr/>
         </p:nvSpPr>
@@ -10435,7 +11470,7 @@
                 </a:solidFill>
                 <a:latin typeface="Montserrat"/>
               </a:rPr>
-              <a:t>no smoking wall sign shop</a:t>
+              <a:t>floor ventilation grille indoor</a:t>
             </a:r>
           </a:p>
         </p:txBody>

--- a/Curso Gas B/02 - ITC-ICG 02-03-04 - Almacenamiento GLP y plantas GNL/02 - ITC-ICG 02-03-04 - Almacenamiento GLP y plantas GNL - Vídeo 2.pptx
+++ b/Curso Gas B/02 - ITC-ICG 02-03-04 - Almacenamiento GLP y plantas GNL/02 - ITC-ICG 02-03-04 - Almacenamiento GLP y plantas GNL - Vídeo 2.pptx
@@ -22,6 +22,7 @@
     <p:sldId id="270" r:id="rId22"/>
     <p:sldId id="271" r:id="rId23"/>
     <p:sldId id="272" r:id="rId24"/>
+    <p:sldId id="273" r:id="rId25"/>
   </p:sldIdLst>
   <p:sldSz cx="12191695" cy="6858000" type="screen4x3"/>
   <p:notesSz cx="6858000" cy="9144000"/>
@@ -593,12 +594,12 @@
           <a:lstStyle/>
           <a:p>
             <a:r>
-              <a:t>N1: ¿Y la tienda pequeña, hasta 150 kilos?</a:t>
-            </a:r>
-          </a:p>
-          <a:p>
-            <a:r>
-              <a:t>N2: Aquí baja la exigencia porque baja el gas. Basta con dos extintores de trece a, cincuenta y cinco b en lugar accesible, separación de llamas y fuentes de calor, y la ventilación necesaria. Y hay una prohibición que cae fijo: nunca en sótano ni en semisótano. ¿Por qué? Por lo de siempre, el GLP pesa más que el aire y en un sótano se acumularía abajo sin poder ventilar. Los envases van ordenados o en jaulas, incluso en muebles expositores que cumplan las condiciones de ventilación. Y otra vez la frase de oro: en el escaparate, solo recipientes vacíos. Fíjate en el detalle que cruza el examen: la tienda pequeña lleva extintores trece a, cincuenta y cinco b, distintos de los veintiuno a, ciento trece b de la grande.</a:t>
+              <a:t>N1: ¿Qué se le pide a la tienda grande, la de 150 a 500 kilos?</a:t>
+            </a:r>
+          </a:p>
+          <a:p>
+            <a:r>
+              <a:t>N2: Más cosas, porque hay más gas. Tres extintores de veintiuno a, ciento trece b cerca de la zona de venta. Ventilación directa a ras de suelo mediante una o más rejillas de al menos cuatrocientos centímetros cuadrados, sin que un lado sea más del doble que el otro; esa rejilla baja es la que deja salir el gas pesado si fuga. Las zonas van en planta baja, nunca por debajo del terreno. Y dos distancias de seguridad: cuatro metros a comunicaciones con escaleras, sótanos u otros locales de nivel inferior, y ocho metros a arquetas, tragaluces o bocas de alcantarillado que comuniquen con espacios de abajo. Remátalo con muros sin huecos hacia otros locales y techo o cubierta de material que no arde.</a:t>
             </a:r>
           </a:p>
         </p:txBody>
@@ -668,12 +669,12 @@
           <a:lstStyle/>
           <a:p>
             <a:r>
-              <a:t>N1: Has dicho que los carteles caen en examen, ¿cuáles son exactamente?</a:t>
-            </a:r>
-          </a:p>
-          <a:p>
-            <a:r>
-              <a:t>N2: En la tienda grande hay dos carteles diferentes, y conviene no confundirlos. En la entrada del establecimiento va uno genérico: prohibido fumar en las zonas señalizadas. Y junto a la zona de los envases va otro más concreto: prohibido fumar a menos de cinco metros de esta zona. El número que tienes que retener es ese cinco, asociado al cartel que está pegado a las bombonas. Son pregunta fácil si te suenan las frases tal cual. Y súmale que el establecimiento va separado de otros locales ajenos por muros sin huecos, para que un problema no se propague de un negocio a otro.</a:t>
+              <a:t>N1: ¿Y la tienda pequeña, hasta 150 kilos?</a:t>
+            </a:r>
+          </a:p>
+          <a:p>
+            <a:r>
+              <a:t>N2: Aquí baja la exigencia porque baja el gas. Basta con dos extintores de trece a, cincuenta y cinco b en lugar accesible, separación de llamas y fuentes de calor, y la ventilación necesaria. Y hay una prohibición que cae fijo: nunca en sótano ni en semisótano. ¿Por qué? Por lo de siempre, el GLP pesa más que el aire y en un sótano se acumularía abajo sin poder ventilar. Los envases van ordenados o en jaulas, incluso en muebles expositores que cumplan las condiciones de ventilación. Y otra vez la frase de oro: en el escaparate, solo recipientes vacíos. Fíjate en el detalle que cruza el examen: la tienda pequeña lleva extintores trece a, cincuenta y cinco b, distintos de los veintiuno a, ciento trece b de la grande.</a:t>
             </a:r>
           </a:p>
         </p:txBody>
@@ -743,12 +744,12 @@
           <a:lstStyle/>
           <a:p>
             <a:r>
-              <a:t>N1: ¿Qué papeles hacen falta para poner en marcha un centro de envases?</a:t>
-            </a:r>
-          </a:p>
-          <a:p>
-            <a:r>
-              <a:t>N2: Vamos por orden, porque aquí hay tres ideas que se cruzan. Primera: un centro de envases no necesita autorización administrativa previa; no pides permiso antes de construir. Segunda: hace falta proyecto de técnico facultativo competente solo en los centros grandes, primera, segunda y tercera; la cuarta y la quinta se libran del proyecto. Y tercera, la que más se olvida: la inspección por un organismo de control es para todo centro, grande o pequeño. Resume así la filosofía de Gas B: no se pide permiso, se hace, se inspecciona y se comunica después. Hacer y comunicar, no pedir permiso.</a:t>
+              <a:t>N1: Has dicho que los carteles caen en examen, ¿cuáles son exactamente?</a:t>
+            </a:r>
+          </a:p>
+          <a:p>
+            <a:r>
+              <a:t>N2: En la tienda grande hay dos carteles diferentes, y conviene no confundirlos. En la entrada del establecimiento va uno genérico: prohibido fumar en las zonas señalizadas. Y junto a la zona de los envases va otro más concreto: prohibido fumar a menos de cinco metros de esta zona. El número que tienes que retener es ese cinco, asociado al cartel que está pegado a las bombonas. Son pregunta fácil si te suenan las frases tal cual. Y súmale que el establecimiento va separado de otros locales ajenos por muros sin huecos, para que un problema no se propague de un negocio a otro.</a:t>
             </a:r>
           </a:p>
         </p:txBody>
@@ -818,12 +819,12 @@
           <a:lstStyle/>
           <a:p>
             <a:r>
-              <a:t>N1: Si no pido permiso antes, ¿cuándo aviso a la Administración?</a:t>
-            </a:r>
-          </a:p>
-          <a:p>
-            <a:r>
-              <a:t>N2: Después de la inspección favorable. El titular presenta ante el órgano competente de la Comunidad Autónoma tres cosas: sus datos y la ubicación con un plano descriptivo de detalle, el proyecto y certificado de dirección de obra si los hubo, y el certificado de inspección del organismo de control. Con esa documentación presentada, los centros de segunda, tercera, cuarta y quinta ya pueden ponerse en servicio. Ojo al matiz que cae: esa presentación te faculta para arrancar, pero no significa que la Administración dé su conformidad técnica. Tú respondes de que está bien hecho; el papel solo deja constancia.</a:t>
+              <a:t>N1: ¿Qué papeles hacen falta para poner en marcha un centro de envases?</a:t>
+            </a:r>
+          </a:p>
+          <a:p>
+            <a:r>
+              <a:t>N2: Vamos por orden, porque aquí hay tres ideas que se cruzan. Primera: un centro de envases no necesita autorización administrativa previa; no pides permiso antes de construir. Segunda: hace falta proyecto de técnico facultativo competente solo en los centros grandes, primera, segunda y tercera; la cuarta y la quinta se libran del proyecto. Y tercera, la que más se olvida: la inspección por un organismo de control es para todo centro, grande o pequeño. Resume así la filosofía de Gas B: no se pide permiso, se hace, se inspecciona y se comunica después. Hacer y comunicar, no pedir permiso.</a:t>
             </a:r>
           </a:p>
         </p:txBody>
@@ -893,12 +894,12 @@
           <a:lstStyle/>
           <a:p>
             <a:r>
-              <a:t>N1: Una vez en marcha, ¿cómo se vigila el centro?</a:t>
-            </a:r>
-          </a:p>
-          <a:p>
-            <a:r>
-              <a:t>N2: Con una inspección periódica cada dos años, hecha por un organismo de control. En esa visita comprueban dos cosas: que no se ha superado la capacidad total de almacenamiento que comunicaste, y que se siguen cumpliendo todas las medidas de seguridad. El organismo emite un certificado de inspección, entrega copia al titular y manda otra a la Comunidad Autónoma. Y aquí está el mecanismo genial con el que el sistema se autovigila: no se suministra GLP a ningún centro si el titular no acredita, con copia de ese certificado favorable, que la inspección se ha hecho en plazo. Sin papel, no hay gas. Ese certificado es, literalmente, la llave del suministro, y el titular es quien debe tenerlo al día.</a:t>
+              <a:t>N1: Si no pido permiso antes, ¿cuándo aviso a la Administración?</a:t>
+            </a:r>
+          </a:p>
+          <a:p>
+            <a:r>
+              <a:t>N2: Después de la inspección favorable. El titular presenta ante el órgano competente de la Comunidad Autónoma tres cosas: sus datos y la ubicación con un plano descriptivo de detalle, el proyecto y certificado de dirección de obra si los hubo, y el certificado de inspección del organismo de control. Con esa documentación presentada, los centros de segunda, tercera, cuarta y quinta ya pueden ponerse en servicio. Ojo al matiz que cae: esa presentación te faculta para arrancar, pero no significa que la Administración dé su conformidad técnica. Tú respondes de que está bien hecho; el papel solo deja constancia.</a:t>
             </a:r>
           </a:p>
         </p:txBody>
@@ -968,12 +969,12 @@
           <a:lstStyle/>
           <a:p>
             <a:r>
-              <a:t>N1: ¿Qué puedo llevar y cómo en mi propio coche?</a:t>
-            </a:r>
-          </a:p>
-          <a:p>
-            <a:r>
-              <a:t>N2: Dato preguntadísimo: en un vehículo particular solo puedes llevar dos envases de hasta quince kilos, ni uno más. Y siempre de pie y bien sujetos, con lo necesario para que no vuelquen durante el trayecto, porque un envase que cae puede golpear la válvula y fugar. Hay una prohibición que no falla: jamás aparques un vehículo con bombonas en un garaje subterráneo, otra vez por la lógica del gas pesado que se acumula abajo sin ventilar. La única excepción a lo de ir de pie son los envases nuevos o reparados y sin gas, cuando van de la fábrica a la planta: esos, al estar vacíos de verdad, pueden ir tumbados.</a:t>
+              <a:t>N1: Una vez en marcha, ¿cómo se vigila el centro?</a:t>
+            </a:r>
+          </a:p>
+          <a:p>
+            <a:r>
+              <a:t>N2: Con una inspección periódica cada dos años, hecha por un organismo de control. En esa visita comprueban dos cosas: que no se ha superado la capacidad total de almacenamiento que comunicaste, y que se siguen cumpliendo todas las medidas de seguridad. El organismo emite un certificado de inspección, entrega copia al titular y manda otra a la Comunidad Autónoma. Y aquí está el mecanismo genial con el que el sistema se autovigila: no se suministra GLP a ningún centro si el titular no acredita, con copia de ese certificado favorable, que la inspección se ha hecho en plazo. Sin papel, no hay gas. Ese certificado es, literalmente, la llave del suministro, y el titular es quien debe tenerlo al día.</a:t>
             </a:r>
           </a:p>
         </p:txBody>
@@ -1043,12 +1044,12 @@
           <a:lstStyle/>
           <a:p>
             <a:r>
-              <a:t>N1: ¿Y el camión que reparte las bombonas, qué reglas lleva?</a:t>
-            </a:r>
-          </a:p>
-          <a:p>
-            <a:r>
-              <a:t>N2: Tres detalles y una tabla. Primero, la caja del furgón tiene aberturas laterales y en la parte trasera, a ras del piso, para que si una botella fuga, el gas salga por abajo en vez de acumularse dentro. Segundo, cuando el camión entra a descargar en un sitio con más de quinientos kilos de GLP, un centro o una nave, monta el cortafuegos en el tubo de escape para que la chispa del motor no prenda la atmósfera; ese umbral de quinientos kilos va asociado al cortafuegos. Y tercero, los extintores dependen del tamaño del camión, con la frontera en tres mil quinientos kilos de peso máximo: por debajo, dos extintores de ocho a, treinta y cuatro b, uno en cabina y otro en la carga; por encima, el de la carga sube a trece a, cincuenta y cinco b. Ah, y prohibido llevar personas ajenas al servicio.</a:t>
+              <a:t>N1: ¿Qué puedo llevar y cómo en mi propio coche?</a:t>
+            </a:r>
+          </a:p>
+          <a:p>
+            <a:r>
+              <a:t>N2: Dato preguntadísimo: en un vehículo particular solo puedes llevar dos envases de hasta quince kilos, ni uno más. Y siempre de pie y bien sujetos, con lo necesario para que no vuelquen durante el trayecto, porque un envase que cae puede golpear la válvula y fugar. Hay una prohibición que no falla: jamás aparques un vehículo con bombonas en un garaje subterráneo, otra vez por la lógica del gas pesado que se acumula abajo sin ventilar. La única excepción a lo de ir de pie son los envases nuevos o reparados y sin gas, cuando van de la fábrica a la planta: esos, al estar vacíos de verdad, pueden ir tumbados.</a:t>
             </a:r>
           </a:p>
         </p:txBody>
@@ -1118,6 +1119,81 @@
           <a:lstStyle/>
           <a:p>
             <a:r>
+              <a:t>N1: ¿Y el camión que reparte las bombonas, qué reglas lleva?</a:t>
+            </a:r>
+          </a:p>
+          <a:p>
+            <a:r>
+              <a:t>N2: Tres detalles y una tabla. Primero, la caja del furgón tiene aberturas laterales y en la parte trasera, a ras del piso, para que si una botella fuga, el gas salga por abajo en vez de acumularse dentro. Segundo, cuando el camión entra a descargar en un sitio con más de quinientos kilos de GLP, un centro o una nave, monta el cortafuegos en el tubo de escape para que la chispa del motor no prenda la atmósfera; ese umbral de quinientos kilos va asociado al cortafuegos. Y tercero, los extintores dependen del tamaño del camión, con la frontera en tres mil quinientos kilos de peso máximo: por debajo, dos extintores de ocho a, treinta y cuatro b, uno en cabina y otro en la carga; por encima, el de la carga sube a trece a, cincuenta y cinco b. Ah, y prohibido llevar personas ajenas al servicio.</a:t>
+            </a:r>
+          </a:p>
+        </p:txBody>
+      </p:sp>
+      <p:sp>
+        <p:nvSpPr>
+          <p:cNvPr id="4" name="Slide Number Placeholder 3"/>
+          <p:cNvSpPr>
+            <a:spLocks noGrp="1"/>
+          </p:cNvSpPr>
+          <p:nvPr>
+            <p:ph type="sldNum" idx="5" sz="quarter"/>
+          </p:nvPr>
+        </p:nvSpPr>
+        <p:spPr/>
+      </p:sp>
+    </p:spTree>
+  </p:cSld>
+  <p:clrMapOvr>
+    <a:masterClrMapping/>
+  </p:clrMapOvr>
+</p:notes>
+</file>
+
+<file path=ppt/notesSlides/notesSlide18.xml><?xml version="1.0" encoding="utf-8"?>
+<p:notes xmlns:a="http://schemas.openxmlformats.org/drawingml/2006/main" xmlns:p="http://schemas.openxmlformats.org/presentationml/2006/main" xmlns:r="http://schemas.openxmlformats.org/officeDocument/2006/relationships">
+  <p:cSld>
+    <p:spTree>
+      <p:nvGrpSpPr>
+        <p:cNvPr id="1" name=""/>
+        <p:cNvGrpSpPr/>
+        <p:nvPr/>
+      </p:nvGrpSpPr>
+      <p:grpSpPr>
+        <a:xfrm>
+          <a:off x="0" y="0"/>
+          <a:ext cx="0" cy="0"/>
+          <a:chOff x="0" y="0"/>
+          <a:chExt cx="0" cy="0"/>
+        </a:xfrm>
+      </p:grpSpPr>
+      <p:sp>
+        <p:nvSpPr>
+          <p:cNvPr id="2" name="Slide Image Placeholder 1"/>
+          <p:cNvSpPr>
+            <a:spLocks noGrp="1"/>
+          </p:cNvSpPr>
+          <p:nvPr>
+            <p:ph type="sldImg" idx="2"/>
+          </p:nvPr>
+        </p:nvSpPr>
+        <p:spPr/>
+      </p:sp>
+      <p:sp>
+        <p:nvSpPr>
+          <p:cNvPr id="3" name="Notes Placeholder 2"/>
+          <p:cNvSpPr>
+            <a:spLocks noGrp="1"/>
+          </p:cNvSpPr>
+          <p:nvPr>
+            <p:ph type="body" idx="3" sz="quarter"/>
+          </p:nvPr>
+        </p:nvSpPr>
+        <p:spPr/>
+        <p:txBody>
+          <a:bodyPr/>
+          <a:lstStyle/>
+          <a:p>
+            <a:r>
               <a:t>N1: Cerramos la ITC cero dos. ¿Qué me llevo de todo esto?</a:t>
             </a:r>
           </a:p>
@@ -1276,16 +1352,7 @@
         <p:txBody>
           <a:bodyPr/>
           <a:lstStyle/>
-          <a:p>
-            <a:r>
-              <a:t>N1: ¿Qué se le pide a un centro de cuarta categoría?</a:t>
-            </a:r>
-          </a:p>
-          <a:p>
-            <a:r>
-              <a:t>N2: Muy poco comparado con las categorías grandes del vídeo anterior, y eso es lo que tienes que notar. Aquí basta con un vallado de dos metros en todo el perímetro, fijado al suelo y hecho de forma que nadie pueda manipular las bombonas desde fuera; no hace falta el muro serio resistente al fuego. Las distancias también son cortas: tres metros a locales habitados, o seis metros si el almacenamiento está en un patio cerrado por los cuatro lados. Y de incendios, dos extintores de veintiuno a, ciento trece b. Nada de bocas de agua ni alarma permanente. La regla de fondo es proporcional: poca cantidad de gas, protección proporcional.</a:t>
-            </a:r>
-          </a:p>
+          <a:p/>
         </p:txBody>
       </p:sp>
       <p:sp>
@@ -1353,12 +1420,12 @@
           <a:lstStyle/>
           <a:p>
             <a:r>
-              <a:t>N1: ¿Y si ese pequeño almacén está pegado a una gasolinera?</a:t>
-            </a:r>
-          </a:p>
-          <a:p>
-            <a:r>
-              <a:t>N2: Entonces se le añade una condición clave. El almacenamiento de cuarta categoría anexo a una estación de servicio tiene que ubicarse fuera de la propia estación, y a una distancia mínima de diez metros respecto al área donde se suministra a los vehículos, la zona de los surtidores. Piensa en el porqué: los surtidores son una fuente constante de posibles chispas y vapores de gasolina, así que las bombonas se apartan diez metros de ahí. Esos diez metros son la distancia que separa el gas envasado del repostaje. La estación de servicio, por cierto, es todo ese recinto delimitado: pavimento, isla, zona de descarga, surtidores, monolitos y demás instalaciones.</a:t>
+              <a:t>N1: ¿Qué se le pide a un centro de cuarta categoría?</a:t>
+            </a:r>
+          </a:p>
+          <a:p>
+            <a:r>
+              <a:t>N2: Muy poco comparado con las categorías grandes del vídeo anterior, y eso es lo que tienes que notar. Aquí basta con un vallado de dos metros en todo el perímetro, fijado al suelo y hecho de forma que nadie pueda manipular las bombonas desde fuera; no hace falta el muro serio resistente al fuego. Las distancias también son cortas: tres metros a locales habitados, o seis metros si el almacenamiento está en un patio cerrado por los cuatro lados. Y de incendios, dos extintores de veintiuno a, ciento trece b. Nada de bocas de agua ni alarma permanente. La regla de fondo es proporcional: poca cantidad de gas, protección proporcional.</a:t>
             </a:r>
           </a:p>
         </p:txBody>
@@ -1428,12 +1495,12 @@
           <a:lstStyle/>
           <a:p>
             <a:r>
-              <a:t>N1: ¿Cómo se organizan las bombonas en la propia gasolinera?</a:t>
-            </a:r>
-          </a:p>
-          <a:p>
-            <a:r>
-              <a:t>N2: Aquí ya no hablamos de naves, sino de la jaula de bombonas de la estación de servicio. En una misma estación pueden convivir tres cosas: envases de GLP para coches con motor, cartuchos no rellenables o envases de hasta tres kilos, y bombonas de hasta quince kilos. Pero pase lo que pase, la capacidad total máxima es de quinientos kilos. Si hay varios tipos juntos, cada uno va en su almacenamiento independiente y separados cinco metros entre sí. Y fíjate en las alturas de apilado, que cambian por tipo: los envases de coche y los de hasta quince kilos, dos alturas; los cartuchos pequeños de hasta tres kilos, hasta cuatro alturas, con cuarenta centímetros entre ellas.</a:t>
+              <a:t>N1: ¿Y si ese pequeño almacén está pegado a una gasolinera?</a:t>
+            </a:r>
+          </a:p>
+          <a:p>
+            <a:r>
+              <a:t>N2: Entonces se le añade una condición clave. El almacenamiento de cuarta categoría anexo a una estación de servicio tiene que ubicarse fuera de la propia estación, y a una distancia mínima de diez metros respecto al área donde se suministra a los vehículos, la zona de los surtidores. Piensa en el porqué: los surtidores son una fuente constante de posibles chispas y vapores de gasolina, así que las bombonas se apartan diez metros de ahí. Esos diez metros son la distancia que separa el gas envasado del repostaje. La estación de servicio, por cierto, es todo ese recinto delimitado: pavimento, isla, zona de descarga, surtidores, monolitos y demás instalaciones.</a:t>
             </a:r>
           </a:p>
         </p:txBody>
@@ -1503,12 +1570,12 @@
           <a:lstStyle/>
           <a:p>
             <a:r>
-              <a:t>N1: ¿Qué reglas comparten todos esos envases de la gasolinera?</a:t>
-            </a:r>
-          </a:p>
-          <a:p>
-            <a:r>
-              <a:t>N2: Van en espacios abiertos, pudiendo estar bajo la propia cubierta de la estación, y con el piso nunca por debajo del terreno; siempre buscando que el gas, si fuga, se ventile y no se embolse. Si hay cubierta, será de material que no arda, sobre estructura estable al fuego, y el pavimento no absorbe ni hace chispas al golpearlo. Las distancias de seguridad van en dos números fáciles de emparejar: cuatro metros a tubos de aireación, bocas de carga de los tanques y vías públicas; y dos metros a bordillos, sumideros, surtidores y aberturas a ras de suelo que comuniquen con locales de abajo. Y de incendios, dos extintores portátiles de veintiuno a, ciento trece b como mínimo.</a:t>
+              <a:t>N1: ¿Cómo se organizan las bombonas en la propia gasolinera?</a:t>
+            </a:r>
+          </a:p>
+          <a:p>
+            <a:r>
+              <a:t>N2: Aquí ya no hablamos de naves, sino de la jaula de bombonas de la estación de servicio. En una misma estación pueden convivir tres cosas: envases de GLP para coches con motor, cartuchos no rellenables o envases de hasta tres kilos, y bombonas de hasta quince kilos. Pero pase lo que pase, la capacidad total máxima es de quinientos kilos. Si hay varios tipos juntos, cada uno va en su almacenamiento independiente y separados cinco metros entre sí. Y fíjate en las alturas de apilado, que cambian por tipo: los envases de coche y los de hasta quince kilos, dos alturas; los cartuchos pequeños de hasta tres kilos, hasta cuatro alturas, con cuarenta centímetros entre ellas.</a:t>
             </a:r>
           </a:p>
         </p:txBody>
@@ -1578,12 +1645,12 @@
           <a:lstStyle/>
           <a:p>
             <a:r>
-              <a:t>N1: ¿Por qué las jaulas tienen que ventilar por arriba y por abajo, y no solo por un lado?</a:t>
-            </a:r>
-          </a:p>
-          <a:p>
-            <a:r>
-              <a:t>N2: Buena pregunta, y la respuesta es física. Si una botella fuga, el GLP pesa más que el aire y se va al suelo; la rejilla de abajo deja que ese gas pesado escape en vez de quedarse embolsado en la jaula. Y la rejilla de arriba deja circular el aire para que todo se ventile. Por eso las dos, arriba y abajo: la jaula respira por los dos extremos. Además, la jaula se hace de material que no arde y, fuera del horario de servicio, no permite que nadie de fuera manipule los envases. Imagen para recordarlo: una jaula bien hecha es como una chimenea al revés, saca el gas por abajo.</a:t>
+              <a:t>N1: ¿Qué reglas comparten todos esos envases de la gasolinera?</a:t>
+            </a:r>
+          </a:p>
+          <a:p>
+            <a:r>
+              <a:t>N2: Van en espacios abiertos, pudiendo estar bajo la propia cubierta de la estación, y con el piso nunca por debajo del terreno; siempre buscando que el gas, si fuga, se ventile y no se embolse. Si hay cubierta, será de material que no arda, sobre estructura estable al fuego, y el pavimento no absorbe ni hace chispas al golpearlo. Las distancias de seguridad van en dos números fáciles de emparejar: cuatro metros a tubos de aireación, bocas de carga de los tanques y vías públicas; y dos metros a bordillos, sumideros, surtidores y aberturas a ras de suelo que comuniquen con locales de abajo. Y de incendios, dos extintores portátiles de veintiuno a, ciento trece b como mínimo.</a:t>
             </a:r>
           </a:p>
         </p:txBody>
@@ -1653,12 +1720,12 @@
           <a:lstStyle/>
           <a:p>
             <a:r>
-              <a:t>N1: ¿Y la tienda de barrio que vende bombonas, cómo se regula?</a:t>
-            </a:r>
-          </a:p>
-          <a:p>
-            <a:r>
-              <a:t>N2: El comercio se parte en dos según los kilos que almacene, y esa frontera son los ciento cincuenta kilos. Por debajo, hasta ciento cincuenta kilos, es la tienda pequeña, con reglas más suaves. Por encima, de ciento cincuenta a quinientos kilos, es la tienda grande, más exigente. En ambos casos vendemos envases de menos de quince kilos, envases populares y cartuchos no rellenables. Y una frase de oro que cae en las dos: en el escaparate solo se exhiben envases vacíos. La que se ve desde la calle, vacía. Vamos a ver cada nivel por separado.</a:t>
+              <a:t>N1: ¿Por qué las jaulas tienen que ventilar por arriba y por abajo, y no solo por un lado?</a:t>
+            </a:r>
+          </a:p>
+          <a:p>
+            <a:r>
+              <a:t>N2: Buena pregunta, y la respuesta es física. Si una botella fuga, el GLP pesa más que el aire y se va al suelo; la rejilla de abajo deja que ese gas pesado escape en vez de quedarse embolsado en la jaula. Y la rejilla de arriba deja circular el aire para que todo se ventile. Por eso las dos, arriba y abajo: la jaula respira por los dos extremos. Además, la jaula se hace de material que no arde y, fuera del horario de servicio, no permite que nadie de fuera manipule los envases. Imagen para recordarlo: una jaula bien hecha es como una chimenea al revés, saca el gas por abajo.</a:t>
             </a:r>
           </a:p>
         </p:txBody>
@@ -1728,12 +1795,12 @@
           <a:lstStyle/>
           <a:p>
             <a:r>
-              <a:t>N1: ¿Qué se le pide a la tienda grande, la de 150 a 500 kilos?</a:t>
-            </a:r>
-          </a:p>
-          <a:p>
-            <a:r>
-              <a:t>N2: Más cosas, porque hay más gas. Tres extintores de veintiuno a, ciento trece b cerca de la zona de venta. Ventilación directa a ras de suelo mediante una o más rejillas de al menos cuatrocientos centímetros cuadrados, sin que un lado sea más del doble que el otro; esa rejilla baja es la que deja salir el gas pesado si fuga. Las zonas van en planta baja, nunca por debajo del terreno. Y dos distancias de seguridad: cuatro metros a comunicaciones con escaleras, sótanos u otros locales de nivel inferior, y ocho metros a arquetas, tragaluces o bocas de alcantarillado que comuniquen con espacios de abajo. Remátalo con muros sin huecos hacia otros locales y techo o cubierta de material que no arde.</a:t>
+              <a:t>N1: ¿Y la tienda de barrio que vende bombonas, cómo se regula?</a:t>
+            </a:r>
+          </a:p>
+          <a:p>
+            <a:r>
+              <a:t>N2: El comercio se parte en dos según los kilos que almacene, y esa frontera son los ciento cincuenta kilos. Por debajo, hasta ciento cincuenta kilos, es la tienda pequeña, con reglas más suaves. Por encima, de ciento cincuenta a quinientos kilos, es la tienda grande, más exigente. En ambos casos vendemos envases de menos de quince kilos, envases populares y cartuchos no rellenables. Y una frase de oro que cae en las dos: en el escaparate solo se exhiben envases vacíos. La que se ve desde la calle, vacía. Vamos a ver cada nivel por separado.</a:t>
             </a:r>
           </a:p>
         </p:txBody>
@@ -4808,7 +4875,7 @@
             <a:r>
               <a:rPr sz="1400" b="1" i="0">
                 <a:solidFill>
-                  <a:srgbClr val="CADCFC"/>
+                  <a:srgbClr val="F4A24C"/>
                 </a:solidFill>
                 <a:latin typeface="Montserrat"/>
               </a:rPr>
@@ -4819,13 +4886,57 @@
       </p:sp>
       <p:sp>
         <p:nvSpPr>
-          <p:cNvPr id="4" name="TextBox 3"/>
+          <p:cNvPr id="4" name="Rounded Rectangle 3"/>
+          <p:cNvSpPr/>
+          <p:nvPr/>
+        </p:nvSpPr>
+        <p:spPr>
+          <a:xfrm>
+            <a:off x="868680" y="2057400"/>
+            <a:ext cx="1463040" cy="82296"/>
+          </a:xfrm>
+          <a:prstGeom prst="roundRect">
+            <a:avLst/>
+          </a:prstGeom>
+          <a:solidFill>
+            <a:srgbClr val="E8801A"/>
+          </a:solidFill>
+          <a:ln>
+            <a:noFill/>
+          </a:ln>
+          <a:effectLst/>
+        </p:spPr>
+        <p:style>
+          <a:lnRef idx="1">
+            <a:schemeClr val="accent1"/>
+          </a:lnRef>
+          <a:fillRef idx="3">
+            <a:schemeClr val="accent1"/>
+          </a:fillRef>
+          <a:effectRef idx="2">
+            <a:schemeClr val="accent1"/>
+          </a:effectRef>
+          <a:fontRef idx="minor">
+            <a:schemeClr val="lt1"/>
+          </a:fontRef>
+        </p:style>
+        <p:txBody>
+          <a:bodyPr rtlCol="0" anchor="ctr"/>
+          <a:lstStyle/>
+          <a:p>
+            <a:pPr algn="ctr"/>
+          </a:p>
+        </p:txBody>
+      </p:sp>
+      <p:sp>
+        <p:nvSpPr>
+          <p:cNvPr id="5" name="TextBox 4"/>
           <p:cNvSpPr txBox="1"/>
           <p:nvPr/>
         </p:nvSpPr>
         <p:spPr>
           <a:xfrm>
-            <a:off x="822960" y="2194560"/>
+            <a:off x="822960" y="2286000"/>
             <a:ext cx="10515600" cy="2011680"/>
           </a:xfrm>
           <a:prstGeom prst="rect">
@@ -4864,7 +4975,7 @@
       </p:sp>
       <p:sp>
         <p:nvSpPr>
-          <p:cNvPr id="5" name="TextBox 4"/>
+          <p:cNvPr id="6" name="TextBox 5"/>
           <p:cNvSpPr txBox="1"/>
           <p:nvPr/>
         </p:nvSpPr>
@@ -4988,7 +5099,7 @@
                 </a:solidFill>
                 <a:latin typeface="Montserrat"/>
               </a:rPr>
-              <a:t>010 / 017</a:t>
+              <a:t>010 / 018</a:t>
             </a:r>
           </a:p>
         </p:txBody>
@@ -5036,7 +5147,7 @@
         <p:spPr>
           <a:xfrm>
             <a:off x="822960" y="457200"/>
-            <a:ext cx="8229600" cy="365760"/>
+            <a:ext cx="10058400" cy="365760"/>
           </a:xfrm>
           <a:prstGeom prst="rect">
             <a:avLst/>
@@ -5050,13 +5161,13 @@
           <a:lstStyle/>
           <a:p>
             <a:r>
-              <a:rPr sz="1200" b="1" i="0">
-                <a:solidFill>
-                  <a:srgbClr val="64748B"/>
-                </a:solidFill>
-                <a:latin typeface="Montserrat"/>
-              </a:rPr>
-              <a:t>APARTADO 3.4.2.2 · HASTA 150 KG</a:t>
+              <a:rPr sz="1300" b="1" i="0">
+                <a:solidFill>
+                  <a:srgbClr val="E8801A"/>
+                </a:solidFill>
+                <a:latin typeface="Montserrat"/>
+              </a:rPr>
+              <a:t>APARTADO 3.4.2.1 · 150 A 500 KG</a:t>
             </a:r>
           </a:p>
         </p:txBody>
@@ -5084,26 +5195,70 @@
           <a:lstStyle/>
           <a:p>
             <a:r>
-              <a:rPr sz="2700" b="1" i="0">
+              <a:rPr sz="2800" b="1" i="0">
                 <a:solidFill>
                   <a:srgbClr val="1E2761"/>
                 </a:solidFill>
                 <a:latin typeface="Montserrat"/>
               </a:rPr>
-              <a:t>Tienda pequeña, más suave</a:t>
-            </a:r>
-          </a:p>
-        </p:txBody>
-      </p:sp>
-      <p:sp>
-        <p:nvSpPr>
-          <p:cNvPr id="7" name="TextBox 6"/>
+              <a:t>Tienda grande, más exigente</a:t>
+            </a:r>
+          </a:p>
+        </p:txBody>
+      </p:sp>
+      <p:sp>
+        <p:nvSpPr>
+          <p:cNvPr id="7" name="Rounded Rectangle 6"/>
+          <p:cNvSpPr/>
+          <p:nvPr/>
+        </p:nvSpPr>
+        <p:spPr>
+          <a:xfrm>
+            <a:off x="868680" y="1627632"/>
+            <a:ext cx="2011680" cy="73152"/>
+          </a:xfrm>
+          <a:prstGeom prst="roundRect">
+            <a:avLst/>
+          </a:prstGeom>
+          <a:solidFill>
+            <a:srgbClr val="E8801A"/>
+          </a:solidFill>
+          <a:ln>
+            <a:noFill/>
+          </a:ln>
+          <a:effectLst/>
+        </p:spPr>
+        <p:style>
+          <a:lnRef idx="1">
+            <a:schemeClr val="accent1"/>
+          </a:lnRef>
+          <a:fillRef idx="3">
+            <a:schemeClr val="accent1"/>
+          </a:fillRef>
+          <a:effectRef idx="2">
+            <a:schemeClr val="accent1"/>
+          </a:effectRef>
+          <a:fontRef idx="minor">
+            <a:schemeClr val="lt1"/>
+          </a:fontRef>
+        </p:style>
+        <p:txBody>
+          <a:bodyPr rtlCol="0" anchor="ctr"/>
+          <a:lstStyle/>
+          <a:p>
+            <a:pPr algn="ctr"/>
+          </a:p>
+        </p:txBody>
+      </p:sp>
+      <p:sp>
+        <p:nvSpPr>
+          <p:cNvPr id="8" name="TextBox 7"/>
           <p:cNvSpPr txBox="1"/>
           <p:nvPr/>
         </p:nvSpPr>
         <p:spPr>
           <a:xfrm>
-            <a:off x="822960" y="1920240"/>
+            <a:off x="822960" y="1965960"/>
             <a:ext cx="4983480" cy="4206240"/>
           </a:xfrm>
           <a:prstGeom prst="rect">
@@ -5119,17 +5274,17 @@
           <a:p>
             <a:pPr>
               <a:spcAft>
-                <a:spcPts val="1000"/>
+                <a:spcPts val="1100"/>
               </a:spcAft>
             </a:pPr>
             <a:r>
               <a:rPr sz="1600" b="1" i="0">
                 <a:solidFill>
-                  <a:srgbClr val="2E3A80"/>
-                </a:solidFill>
-                <a:latin typeface="Montserrat"/>
-              </a:rPr>
-              <a:t>•  </a:t>
+                  <a:srgbClr val="E8801A"/>
+                </a:solidFill>
+                <a:latin typeface="Montserrat"/>
+              </a:rPr>
+              <a:t>▸  </a:t>
             </a:r>
             <a:r>
               <a:rPr sz="1600" b="0" i="0">
@@ -5138,23 +5293,23 @@
                 </a:solidFill>
                 <a:latin typeface="Montserrat"/>
               </a:rPr>
-              <a:t>2 extintores 13A-55B</a:t>
+              <a:t>3 extintores 21A-113B</a:t>
             </a:r>
           </a:p>
           <a:p>
             <a:pPr>
               <a:spcAft>
-                <a:spcPts val="1000"/>
+                <a:spcPts val="1100"/>
               </a:spcAft>
             </a:pPr>
             <a:r>
               <a:rPr sz="1600" b="1" i="0">
                 <a:solidFill>
-                  <a:srgbClr val="2E3A80"/>
-                </a:solidFill>
-                <a:latin typeface="Montserrat"/>
-              </a:rPr>
-              <a:t>•  </a:t>
+                  <a:srgbClr val="E8801A"/>
+                </a:solidFill>
+                <a:latin typeface="Montserrat"/>
+              </a:rPr>
+              <a:t>▸  </a:t>
             </a:r>
             <a:r>
               <a:rPr sz="1600" b="0" i="0">
@@ -5163,23 +5318,23 @@
                 </a:solidFill>
                 <a:latin typeface="Montserrat"/>
               </a:rPr>
-              <a:t>Ventilación necesaria</a:t>
+              <a:t>Rejilla a ras de suelo: 400 cm²</a:t>
             </a:r>
           </a:p>
           <a:p>
             <a:pPr>
               <a:spcAft>
-                <a:spcPts val="1000"/>
+                <a:spcPts val="1100"/>
               </a:spcAft>
             </a:pPr>
             <a:r>
               <a:rPr sz="1600" b="1" i="0">
                 <a:solidFill>
-                  <a:srgbClr val="2E3A80"/>
-                </a:solidFill>
-                <a:latin typeface="Montserrat"/>
-              </a:rPr>
-              <a:t>•  </a:t>
+                  <a:srgbClr val="E8801A"/>
+                </a:solidFill>
+                <a:latin typeface="Montserrat"/>
+              </a:rPr>
+              <a:t>▸  </a:t>
             </a:r>
             <a:r>
               <a:rPr sz="1600" b="0" i="0">
@@ -5188,23 +5343,23 @@
                 </a:solidFill>
                 <a:latin typeface="Montserrat"/>
               </a:rPr>
-              <a:t>Nunca en sótano ni semisótano</a:t>
+              <a:t>4 m a escaleras · 8 m a arquetas</a:t>
             </a:r>
           </a:p>
           <a:p>
             <a:pPr>
               <a:spcAft>
-                <a:spcPts val="1000"/>
+                <a:spcPts val="1100"/>
               </a:spcAft>
             </a:pPr>
             <a:r>
               <a:rPr sz="1600" b="1" i="0">
                 <a:solidFill>
-                  <a:srgbClr val="2E3A80"/>
-                </a:solidFill>
-                <a:latin typeface="Montserrat"/>
-              </a:rPr>
-              <a:t>•  </a:t>
+                  <a:srgbClr val="E8801A"/>
+                </a:solidFill>
+                <a:latin typeface="Montserrat"/>
+              </a:rPr>
+              <a:t>▸  </a:t>
             </a:r>
             <a:r>
               <a:rPr sz="1600" b="0" i="0">
@@ -5213,14 +5368,14 @@
                 </a:solidFill>
                 <a:latin typeface="Montserrat"/>
               </a:rPr>
-              <a:t>Escaparate: solo recipientes vacíos</a:t>
-            </a:r>
-          </a:p>
-        </p:txBody>
-      </p:sp>
-      <p:sp>
-        <p:nvSpPr>
-          <p:cNvPr id="8" name="imgph" descr="IMGQ:small shop counter gas cartridges"/>
+              <a:t>Planta baja, nunca en sótano</a:t>
+            </a:r>
+          </a:p>
+        </p:txBody>
+      </p:sp>
+      <p:sp>
+        <p:nvSpPr>
+          <p:cNvPr id="9" name="imgph" descr="IMGQ:floor ventilation grille indoor"/>
           <p:cNvSpPr/>
           <p:nvPr/>
         </p:nvSpPr>
@@ -5266,7 +5421,7 @@
       </p:sp>
       <p:sp>
         <p:nvSpPr>
-          <p:cNvPr id="9" name="TextBox 8"/>
+          <p:cNvPr id="10" name="TextBox 9"/>
           <p:cNvSpPr txBox="1"/>
           <p:nvPr/>
         </p:nvSpPr>
@@ -5306,7 +5461,7 @@
                 </a:solidFill>
                 <a:latin typeface="Montserrat"/>
               </a:rPr>
-              <a:t>small shop counter gas cartridges</a:t>
+              <a:t>floor ventilation grille indoor</a:t>
             </a:r>
           </a:p>
         </p:txBody>
@@ -5403,7 +5558,7 @@
                 </a:solidFill>
                 <a:latin typeface="Montserrat"/>
               </a:rPr>
-              <a:t>011 / 017</a:t>
+              <a:t>011 / 018</a:t>
             </a:r>
           </a:p>
         </p:txBody>
@@ -5451,7 +5606,7 @@
         <p:spPr>
           <a:xfrm>
             <a:off x="822960" y="457200"/>
-            <a:ext cx="8229600" cy="365760"/>
+            <a:ext cx="10058400" cy="365760"/>
           </a:xfrm>
           <a:prstGeom prst="rect">
             <a:avLst/>
@@ -5465,13 +5620,13 @@
           <a:lstStyle/>
           <a:p>
             <a:r>
-              <a:rPr sz="1200" b="1" i="0">
-                <a:solidFill>
-                  <a:srgbClr val="64748B"/>
-                </a:solidFill>
-                <a:latin typeface="Montserrat"/>
-              </a:rPr>
-              <a:t>APARTADO 3.4.2 · CARTELES</a:t>
+              <a:rPr sz="1300" b="1" i="0">
+                <a:solidFill>
+                  <a:srgbClr val="E8801A"/>
+                </a:solidFill>
+                <a:latin typeface="Montserrat"/>
+              </a:rPr>
+              <a:t>APARTADO 3.4.2.2 · HASTA 150 KG</a:t>
             </a:r>
           </a:p>
         </p:txBody>
@@ -5499,26 +5654,70 @@
           <a:lstStyle/>
           <a:p>
             <a:r>
-              <a:rPr sz="2700" b="1" i="0">
+              <a:rPr sz="2800" b="1" i="0">
                 <a:solidFill>
                   <a:srgbClr val="1E2761"/>
                 </a:solidFill>
                 <a:latin typeface="Montserrat"/>
               </a:rPr>
-              <a:t>Dos carteles distintos</a:t>
-            </a:r>
-          </a:p>
-        </p:txBody>
-      </p:sp>
-      <p:sp>
-        <p:nvSpPr>
-          <p:cNvPr id="7" name="TextBox 6"/>
+              <a:t>Tienda pequeña, más suave</a:t>
+            </a:r>
+          </a:p>
+        </p:txBody>
+      </p:sp>
+      <p:sp>
+        <p:nvSpPr>
+          <p:cNvPr id="7" name="Rounded Rectangle 6"/>
+          <p:cNvSpPr/>
+          <p:nvPr/>
+        </p:nvSpPr>
+        <p:spPr>
+          <a:xfrm>
+            <a:off x="868680" y="1627632"/>
+            <a:ext cx="2011680" cy="73152"/>
+          </a:xfrm>
+          <a:prstGeom prst="roundRect">
+            <a:avLst/>
+          </a:prstGeom>
+          <a:solidFill>
+            <a:srgbClr val="E8801A"/>
+          </a:solidFill>
+          <a:ln>
+            <a:noFill/>
+          </a:ln>
+          <a:effectLst/>
+        </p:spPr>
+        <p:style>
+          <a:lnRef idx="1">
+            <a:schemeClr val="accent1"/>
+          </a:lnRef>
+          <a:fillRef idx="3">
+            <a:schemeClr val="accent1"/>
+          </a:fillRef>
+          <a:effectRef idx="2">
+            <a:schemeClr val="accent1"/>
+          </a:effectRef>
+          <a:fontRef idx="minor">
+            <a:schemeClr val="lt1"/>
+          </a:fontRef>
+        </p:style>
+        <p:txBody>
+          <a:bodyPr rtlCol="0" anchor="ctr"/>
+          <a:lstStyle/>
+          <a:p>
+            <a:pPr algn="ctr"/>
+          </a:p>
+        </p:txBody>
+      </p:sp>
+      <p:sp>
+        <p:nvSpPr>
+          <p:cNvPr id="8" name="TextBox 7"/>
           <p:cNvSpPr txBox="1"/>
           <p:nvPr/>
         </p:nvSpPr>
         <p:spPr>
           <a:xfrm>
-            <a:off x="822960" y="1920240"/>
+            <a:off x="822960" y="1965960"/>
             <a:ext cx="4983480" cy="4206240"/>
           </a:xfrm>
           <a:prstGeom prst="rect">
@@ -5534,17 +5733,17 @@
           <a:p>
             <a:pPr>
               <a:spcAft>
-                <a:spcPts val="1000"/>
+                <a:spcPts val="1100"/>
               </a:spcAft>
             </a:pPr>
             <a:r>
               <a:rPr sz="1600" b="1" i="0">
                 <a:solidFill>
-                  <a:srgbClr val="2E3A80"/>
-                </a:solidFill>
-                <a:latin typeface="Montserrat"/>
-              </a:rPr>
-              <a:t>•  </a:t>
+                  <a:srgbClr val="E8801A"/>
+                </a:solidFill>
+                <a:latin typeface="Montserrat"/>
+              </a:rPr>
+              <a:t>▸  </a:t>
             </a:r>
             <a:r>
               <a:rPr sz="1600" b="0" i="0">
@@ -5553,23 +5752,23 @@
                 </a:solidFill>
                 <a:latin typeface="Montserrat"/>
               </a:rPr>
-              <a:t>Entrada: prohibido fumar en zonas señalizadas</a:t>
+              <a:t>2 extintores 13A-55B</a:t>
             </a:r>
           </a:p>
           <a:p>
             <a:pPr>
               <a:spcAft>
-                <a:spcPts val="1000"/>
+                <a:spcPts val="1100"/>
               </a:spcAft>
             </a:pPr>
             <a:r>
               <a:rPr sz="1600" b="1" i="0">
                 <a:solidFill>
-                  <a:srgbClr val="2E3A80"/>
-                </a:solidFill>
-                <a:latin typeface="Montserrat"/>
-              </a:rPr>
-              <a:t>•  </a:t>
+                  <a:srgbClr val="E8801A"/>
+                </a:solidFill>
+                <a:latin typeface="Montserrat"/>
+              </a:rPr>
+              <a:t>▸  </a:t>
             </a:r>
             <a:r>
               <a:rPr sz="1600" b="0" i="0">
@@ -5578,23 +5777,23 @@
                 </a:solidFill>
                 <a:latin typeface="Montserrat"/>
               </a:rPr>
-              <a:t>Junto a envases: prohibido fumar a 5 m</a:t>
+              <a:t>Ventilación necesaria</a:t>
             </a:r>
           </a:p>
           <a:p>
             <a:pPr>
               <a:spcAft>
-                <a:spcPts val="1000"/>
+                <a:spcPts val="1100"/>
               </a:spcAft>
             </a:pPr>
             <a:r>
               <a:rPr sz="1600" b="1" i="0">
                 <a:solidFill>
-                  <a:srgbClr val="2E3A80"/>
-                </a:solidFill>
-                <a:latin typeface="Montserrat"/>
-              </a:rPr>
-              <a:t>•  </a:t>
+                  <a:srgbClr val="E8801A"/>
+                </a:solidFill>
+                <a:latin typeface="Montserrat"/>
+              </a:rPr>
+              <a:t>▸  </a:t>
             </a:r>
             <a:r>
               <a:rPr sz="1600" b="0" i="0">
@@ -5603,14 +5802,39 @@
                 </a:solidFill>
                 <a:latin typeface="Montserrat"/>
               </a:rPr>
-              <a:t>Muros sin huecos a otros locales</a:t>
-            </a:r>
-          </a:p>
-        </p:txBody>
-      </p:sp>
-      <p:sp>
-        <p:nvSpPr>
-          <p:cNvPr id="8" name="imgph" descr="IMGQ:no smoking warning sign shop"/>
+              <a:t>Nunca en sótano ni semisótano</a:t>
+            </a:r>
+          </a:p>
+          <a:p>
+            <a:pPr>
+              <a:spcAft>
+                <a:spcPts val="1100"/>
+              </a:spcAft>
+            </a:pPr>
+            <a:r>
+              <a:rPr sz="1600" b="1" i="0">
+                <a:solidFill>
+                  <a:srgbClr val="E8801A"/>
+                </a:solidFill>
+                <a:latin typeface="Montserrat"/>
+              </a:rPr>
+              <a:t>▸  </a:t>
+            </a:r>
+            <a:r>
+              <a:rPr sz="1600" b="0" i="0">
+                <a:solidFill>
+                  <a:srgbClr val="1B2330"/>
+                </a:solidFill>
+                <a:latin typeface="Montserrat"/>
+              </a:rPr>
+              <a:t>Escaparate: solo recipientes vacíos</a:t>
+            </a:r>
+          </a:p>
+        </p:txBody>
+      </p:sp>
+      <p:sp>
+        <p:nvSpPr>
+          <p:cNvPr id="9" name="imgph" descr="IMGQ:small shop counter gas cartridges"/>
           <p:cNvSpPr/>
           <p:nvPr/>
         </p:nvSpPr>
@@ -5656,7 +5880,7 @@
       </p:sp>
       <p:sp>
         <p:nvSpPr>
-          <p:cNvPr id="9" name="TextBox 8"/>
+          <p:cNvPr id="10" name="TextBox 9"/>
           <p:cNvSpPr txBox="1"/>
           <p:nvPr/>
         </p:nvSpPr>
@@ -5696,7 +5920,7 @@
                 </a:solidFill>
                 <a:latin typeface="Montserrat"/>
               </a:rPr>
-              <a:t>no smoking warning sign shop</a:t>
+              <a:t>small shop counter gas cartridges</a:t>
             </a:r>
           </a:p>
         </p:txBody>
@@ -5793,7 +6017,7 @@
                 </a:solidFill>
                 <a:latin typeface="Montserrat"/>
               </a:rPr>
-              <a:t>012 / 017</a:t>
+              <a:t>012 / 018</a:t>
             </a:r>
           </a:p>
         </p:txBody>
@@ -5841,7 +6065,7 @@
         <p:spPr>
           <a:xfrm>
             <a:off x="822960" y="457200"/>
-            <a:ext cx="8229600" cy="365760"/>
+            <a:ext cx="10058400" cy="365760"/>
           </a:xfrm>
           <a:prstGeom prst="rect">
             <a:avLst/>
@@ -5855,13 +6079,13 @@
           <a:lstStyle/>
           <a:p>
             <a:r>
-              <a:rPr sz="1200" b="1" i="0">
-                <a:solidFill>
-                  <a:srgbClr val="64748B"/>
-                </a:solidFill>
-                <a:latin typeface="Montserrat"/>
-              </a:rPr>
-              <a:t>APARTADO 4 · DOCUMENTACIÓN</a:t>
+              <a:rPr sz="1300" b="1" i="0">
+                <a:solidFill>
+                  <a:srgbClr val="E8801A"/>
+                </a:solidFill>
+                <a:latin typeface="Montserrat"/>
+              </a:rPr>
+              <a:t>APARTADO 3.4.2 · CARTELES</a:t>
             </a:r>
           </a:p>
         </p:txBody>
@@ -5889,26 +6113,70 @@
           <a:lstStyle/>
           <a:p>
             <a:r>
-              <a:rPr sz="2700" b="1" i="0">
+              <a:rPr sz="2800" b="1" i="0">
                 <a:solidFill>
                   <a:srgbClr val="1E2761"/>
                 </a:solidFill>
                 <a:latin typeface="Montserrat"/>
               </a:rPr>
-              <a:t>Proyecto sí, proyecto no</a:t>
-            </a:r>
-          </a:p>
-        </p:txBody>
-      </p:sp>
-      <p:sp>
-        <p:nvSpPr>
-          <p:cNvPr id="7" name="TextBox 6"/>
+              <a:t>Dos carteles distintos</a:t>
+            </a:r>
+          </a:p>
+        </p:txBody>
+      </p:sp>
+      <p:sp>
+        <p:nvSpPr>
+          <p:cNvPr id="7" name="Rounded Rectangle 6"/>
+          <p:cNvSpPr/>
+          <p:nvPr/>
+        </p:nvSpPr>
+        <p:spPr>
+          <a:xfrm>
+            <a:off x="868680" y="1627632"/>
+            <a:ext cx="2011680" cy="73152"/>
+          </a:xfrm>
+          <a:prstGeom prst="roundRect">
+            <a:avLst/>
+          </a:prstGeom>
+          <a:solidFill>
+            <a:srgbClr val="E8801A"/>
+          </a:solidFill>
+          <a:ln>
+            <a:noFill/>
+          </a:ln>
+          <a:effectLst/>
+        </p:spPr>
+        <p:style>
+          <a:lnRef idx="1">
+            <a:schemeClr val="accent1"/>
+          </a:lnRef>
+          <a:fillRef idx="3">
+            <a:schemeClr val="accent1"/>
+          </a:fillRef>
+          <a:effectRef idx="2">
+            <a:schemeClr val="accent1"/>
+          </a:effectRef>
+          <a:fontRef idx="minor">
+            <a:schemeClr val="lt1"/>
+          </a:fontRef>
+        </p:style>
+        <p:txBody>
+          <a:bodyPr rtlCol="0" anchor="ctr"/>
+          <a:lstStyle/>
+          <a:p>
+            <a:pPr algn="ctr"/>
+          </a:p>
+        </p:txBody>
+      </p:sp>
+      <p:sp>
+        <p:nvSpPr>
+          <p:cNvPr id="8" name="TextBox 7"/>
           <p:cNvSpPr txBox="1"/>
           <p:nvPr/>
         </p:nvSpPr>
         <p:spPr>
           <a:xfrm>
-            <a:off x="822960" y="1920240"/>
+            <a:off x="822960" y="1965960"/>
             <a:ext cx="4983480" cy="4206240"/>
           </a:xfrm>
           <a:prstGeom prst="rect">
@@ -5924,17 +6192,17 @@
           <a:p>
             <a:pPr>
               <a:spcAft>
-                <a:spcPts val="1000"/>
+                <a:spcPts val="1100"/>
               </a:spcAft>
             </a:pPr>
             <a:r>
               <a:rPr sz="1600" b="1" i="0">
                 <a:solidFill>
-                  <a:srgbClr val="2E3A80"/>
-                </a:solidFill>
-                <a:latin typeface="Montserrat"/>
-              </a:rPr>
-              <a:t>•  </a:t>
+                  <a:srgbClr val="E8801A"/>
+                </a:solidFill>
+                <a:latin typeface="Montserrat"/>
+              </a:rPr>
+              <a:t>▸  </a:t>
             </a:r>
             <a:r>
               <a:rPr sz="1600" b="0" i="0">
@@ -5943,23 +6211,23 @@
                 </a:solidFill>
                 <a:latin typeface="Montserrat"/>
               </a:rPr>
-              <a:t>Sin autorización administrativa previa</a:t>
+              <a:t>Entrada: prohibido fumar en zonas señalizadas</a:t>
             </a:r>
           </a:p>
           <a:p>
             <a:pPr>
               <a:spcAft>
-                <a:spcPts val="1000"/>
+                <a:spcPts val="1100"/>
               </a:spcAft>
             </a:pPr>
             <a:r>
               <a:rPr sz="1600" b="1" i="0">
                 <a:solidFill>
-                  <a:srgbClr val="2E3A80"/>
-                </a:solidFill>
-                <a:latin typeface="Montserrat"/>
-              </a:rPr>
-              <a:t>•  </a:t>
+                  <a:srgbClr val="E8801A"/>
+                </a:solidFill>
+                <a:latin typeface="Montserrat"/>
+              </a:rPr>
+              <a:t>▸  </a:t>
             </a:r>
             <a:r>
               <a:rPr sz="1600" b="0" i="0">
@@ -5968,23 +6236,23 @@
                 </a:solidFill>
                 <a:latin typeface="Montserrat"/>
               </a:rPr>
-              <a:t>Proyecto solo en 1.ª, 2.ª y 3.ª</a:t>
+              <a:t>Junto a envases: prohibido fumar a 5 m</a:t>
             </a:r>
           </a:p>
           <a:p>
             <a:pPr>
               <a:spcAft>
-                <a:spcPts val="1000"/>
+                <a:spcPts val="1100"/>
               </a:spcAft>
             </a:pPr>
             <a:r>
               <a:rPr sz="1600" b="1" i="0">
                 <a:solidFill>
-                  <a:srgbClr val="2E3A80"/>
-                </a:solidFill>
-                <a:latin typeface="Montserrat"/>
-              </a:rPr>
-              <a:t>•  </a:t>
+                  <a:srgbClr val="E8801A"/>
+                </a:solidFill>
+                <a:latin typeface="Montserrat"/>
+              </a:rPr>
+              <a:t>▸  </a:t>
             </a:r>
             <a:r>
               <a:rPr sz="1600" b="0" i="0">
@@ -5993,39 +6261,14 @@
                 </a:solidFill>
                 <a:latin typeface="Montserrat"/>
               </a:rPr>
-              <a:t>4.ª y 5.ª: sin proyecto</a:t>
-            </a:r>
-          </a:p>
-          <a:p>
-            <a:pPr>
-              <a:spcAft>
-                <a:spcPts val="1000"/>
-              </a:spcAft>
-            </a:pPr>
-            <a:r>
-              <a:rPr sz="1600" b="1" i="0">
-                <a:solidFill>
-                  <a:srgbClr val="2E3A80"/>
-                </a:solidFill>
-                <a:latin typeface="Montserrat"/>
-              </a:rPr>
-              <a:t>•  </a:t>
-            </a:r>
-            <a:r>
-              <a:rPr sz="1600" b="0" i="0">
-                <a:solidFill>
-                  <a:srgbClr val="1B2330"/>
-                </a:solidFill>
-                <a:latin typeface="Montserrat"/>
-              </a:rPr>
-              <a:t>Inspección: para TODO centro</a:t>
-            </a:r>
-          </a:p>
-        </p:txBody>
-      </p:sp>
-      <p:sp>
-        <p:nvSpPr>
-          <p:cNvPr id="8" name="imgph" descr="IMGQ:engineer reviewing technical blueprint"/>
+              <a:t>Muros sin huecos a otros locales</a:t>
+            </a:r>
+          </a:p>
+        </p:txBody>
+      </p:sp>
+      <p:sp>
+        <p:nvSpPr>
+          <p:cNvPr id="9" name="imgph" descr="IMGQ:no smoking warning sign shop"/>
           <p:cNvSpPr/>
           <p:nvPr/>
         </p:nvSpPr>
@@ -6071,7 +6314,7 @@
       </p:sp>
       <p:sp>
         <p:nvSpPr>
-          <p:cNvPr id="9" name="TextBox 8"/>
+          <p:cNvPr id="10" name="TextBox 9"/>
           <p:cNvSpPr txBox="1"/>
           <p:nvPr/>
         </p:nvSpPr>
@@ -6111,7 +6354,7 @@
                 </a:solidFill>
                 <a:latin typeface="Montserrat"/>
               </a:rPr>
-              <a:t>engineer reviewing technical blueprint</a:t>
+              <a:t>no smoking warning sign shop</a:t>
             </a:r>
           </a:p>
         </p:txBody>
@@ -6208,7 +6451,7 @@
                 </a:solidFill>
                 <a:latin typeface="Montserrat"/>
               </a:rPr>
-              <a:t>013 / 017</a:t>
+              <a:t>013 / 018</a:t>
             </a:r>
           </a:p>
         </p:txBody>
@@ -6256,7 +6499,7 @@
         <p:spPr>
           <a:xfrm>
             <a:off x="822960" y="457200"/>
-            <a:ext cx="8229600" cy="365760"/>
+            <a:ext cx="10058400" cy="365760"/>
           </a:xfrm>
           <a:prstGeom prst="rect">
             <a:avLst/>
@@ -6270,13 +6513,13 @@
           <a:lstStyle/>
           <a:p>
             <a:r>
-              <a:rPr sz="1200" b="1" i="0">
-                <a:solidFill>
-                  <a:srgbClr val="64748B"/>
-                </a:solidFill>
-                <a:latin typeface="Montserrat"/>
-              </a:rPr>
-              <a:t>APARTADO 4 · PUESTA EN SERVICIO</a:t>
+              <a:rPr sz="1300" b="1" i="0">
+                <a:solidFill>
+                  <a:srgbClr val="E8801A"/>
+                </a:solidFill>
+                <a:latin typeface="Montserrat"/>
+              </a:rPr>
+              <a:t>APARTADO 4 · DOCUMENTACIÓN</a:t>
             </a:r>
           </a:p>
         </p:txBody>
@@ -6304,26 +6547,70 @@
           <a:lstStyle/>
           <a:p>
             <a:r>
-              <a:rPr sz="2700" b="1" i="0">
+              <a:rPr sz="2800" b="1" i="0">
                 <a:solidFill>
                   <a:srgbClr val="1E2761"/>
                 </a:solidFill>
                 <a:latin typeface="Montserrat"/>
               </a:rPr>
-              <a:t>Se comunica a la Comunidad</a:t>
-            </a:r>
-          </a:p>
-        </p:txBody>
-      </p:sp>
-      <p:sp>
-        <p:nvSpPr>
-          <p:cNvPr id="7" name="TextBox 6"/>
+              <a:t>Proyecto sí, proyecto no</a:t>
+            </a:r>
+          </a:p>
+        </p:txBody>
+      </p:sp>
+      <p:sp>
+        <p:nvSpPr>
+          <p:cNvPr id="7" name="Rounded Rectangle 6"/>
+          <p:cNvSpPr/>
+          <p:nvPr/>
+        </p:nvSpPr>
+        <p:spPr>
+          <a:xfrm>
+            <a:off x="868680" y="1627632"/>
+            <a:ext cx="2011680" cy="73152"/>
+          </a:xfrm>
+          <a:prstGeom prst="roundRect">
+            <a:avLst/>
+          </a:prstGeom>
+          <a:solidFill>
+            <a:srgbClr val="E8801A"/>
+          </a:solidFill>
+          <a:ln>
+            <a:noFill/>
+          </a:ln>
+          <a:effectLst/>
+        </p:spPr>
+        <p:style>
+          <a:lnRef idx="1">
+            <a:schemeClr val="accent1"/>
+          </a:lnRef>
+          <a:fillRef idx="3">
+            <a:schemeClr val="accent1"/>
+          </a:fillRef>
+          <a:effectRef idx="2">
+            <a:schemeClr val="accent1"/>
+          </a:effectRef>
+          <a:fontRef idx="minor">
+            <a:schemeClr val="lt1"/>
+          </a:fontRef>
+        </p:style>
+        <p:txBody>
+          <a:bodyPr rtlCol="0" anchor="ctr"/>
+          <a:lstStyle/>
+          <a:p>
+            <a:pPr algn="ctr"/>
+          </a:p>
+        </p:txBody>
+      </p:sp>
+      <p:sp>
+        <p:nvSpPr>
+          <p:cNvPr id="8" name="TextBox 7"/>
           <p:cNvSpPr txBox="1"/>
           <p:nvPr/>
         </p:nvSpPr>
         <p:spPr>
           <a:xfrm>
-            <a:off x="822960" y="1920240"/>
+            <a:off x="822960" y="1965960"/>
             <a:ext cx="4983480" cy="4206240"/>
           </a:xfrm>
           <a:prstGeom prst="rect">
@@ -6339,17 +6626,17 @@
           <a:p>
             <a:pPr>
               <a:spcAft>
-                <a:spcPts val="1000"/>
+                <a:spcPts val="1100"/>
               </a:spcAft>
             </a:pPr>
             <a:r>
               <a:rPr sz="1600" b="1" i="0">
                 <a:solidFill>
-                  <a:srgbClr val="2E3A80"/>
-                </a:solidFill>
-                <a:latin typeface="Montserrat"/>
-              </a:rPr>
-              <a:t>•  </a:t>
+                  <a:srgbClr val="E8801A"/>
+                </a:solidFill>
+                <a:latin typeface="Montserrat"/>
+              </a:rPr>
+              <a:t>▸  </a:t>
             </a:r>
             <a:r>
               <a:rPr sz="1600" b="0" i="0">
@@ -6358,23 +6645,23 @@
                 </a:solidFill>
                 <a:latin typeface="Montserrat"/>
               </a:rPr>
-              <a:t>Datos del titular y plano de detalle</a:t>
+              <a:t>Sin autorización administrativa previa</a:t>
             </a:r>
           </a:p>
           <a:p>
             <a:pPr>
               <a:spcAft>
-                <a:spcPts val="1000"/>
+                <a:spcPts val="1100"/>
               </a:spcAft>
             </a:pPr>
             <a:r>
               <a:rPr sz="1600" b="1" i="0">
                 <a:solidFill>
-                  <a:srgbClr val="2E3A80"/>
-                </a:solidFill>
-                <a:latin typeface="Montserrat"/>
-              </a:rPr>
-              <a:t>•  </a:t>
+                  <a:srgbClr val="E8801A"/>
+                </a:solidFill>
+                <a:latin typeface="Montserrat"/>
+              </a:rPr>
+              <a:t>▸  </a:t>
             </a:r>
             <a:r>
               <a:rPr sz="1600" b="0" i="0">
@@ -6383,23 +6670,23 @@
                 </a:solidFill>
                 <a:latin typeface="Montserrat"/>
               </a:rPr>
-              <a:t>Certificado de inspección</a:t>
+              <a:t>Proyecto solo en 1.ª, 2.ª y 3.ª</a:t>
             </a:r>
           </a:p>
           <a:p>
             <a:pPr>
               <a:spcAft>
-                <a:spcPts val="1000"/>
+                <a:spcPts val="1100"/>
               </a:spcAft>
             </a:pPr>
             <a:r>
               <a:rPr sz="1600" b="1" i="0">
                 <a:solidFill>
-                  <a:srgbClr val="2E3A80"/>
-                </a:solidFill>
-                <a:latin typeface="Montserrat"/>
-              </a:rPr>
-              <a:t>•  </a:t>
+                  <a:srgbClr val="E8801A"/>
+                </a:solidFill>
+                <a:latin typeface="Montserrat"/>
+              </a:rPr>
+              <a:t>▸  </a:t>
             </a:r>
             <a:r>
               <a:rPr sz="1600" b="0" i="0">
@@ -6408,23 +6695,23 @@
                 </a:solidFill>
                 <a:latin typeface="Montserrat"/>
               </a:rPr>
-              <a:t>La comunicación faculta el servicio</a:t>
+              <a:t>4.ª y 5.ª: sin proyecto</a:t>
             </a:r>
           </a:p>
           <a:p>
             <a:pPr>
               <a:spcAft>
-                <a:spcPts val="1000"/>
+                <a:spcPts val="1100"/>
               </a:spcAft>
             </a:pPr>
             <a:r>
               <a:rPr sz="1600" b="1" i="0">
                 <a:solidFill>
-                  <a:srgbClr val="2E3A80"/>
-                </a:solidFill>
-                <a:latin typeface="Montserrat"/>
-              </a:rPr>
-              <a:t>•  </a:t>
+                  <a:srgbClr val="E8801A"/>
+                </a:solidFill>
+                <a:latin typeface="Montserrat"/>
+              </a:rPr>
+              <a:t>▸  </a:t>
             </a:r>
             <a:r>
               <a:rPr sz="1600" b="0" i="0">
@@ -6433,14 +6720,14 @@
                 </a:solidFill>
                 <a:latin typeface="Montserrat"/>
               </a:rPr>
-              <a:t>No es conformidad de la Administración</a:t>
-            </a:r>
-          </a:p>
-        </p:txBody>
-      </p:sp>
-      <p:sp>
-        <p:nvSpPr>
-          <p:cNvPr id="8" name="imgph" descr="IMGQ:official documents folder stamp"/>
+              <a:t>Inspección: para TODO centro</a:t>
+            </a:r>
+          </a:p>
+        </p:txBody>
+      </p:sp>
+      <p:sp>
+        <p:nvSpPr>
+          <p:cNvPr id="9" name="imgph" descr="IMGQ:engineer reviewing technical blueprint"/>
           <p:cNvSpPr/>
           <p:nvPr/>
         </p:nvSpPr>
@@ -6486,7 +6773,7 @@
       </p:sp>
       <p:sp>
         <p:nvSpPr>
-          <p:cNvPr id="9" name="TextBox 8"/>
+          <p:cNvPr id="10" name="TextBox 9"/>
           <p:cNvSpPr txBox="1"/>
           <p:nvPr/>
         </p:nvSpPr>
@@ -6526,7 +6813,7 @@
                 </a:solidFill>
                 <a:latin typeface="Montserrat"/>
               </a:rPr>
-              <a:t>official documents folder stamp</a:t>
+              <a:t>engineer reviewing technical blueprint</a:t>
             </a:r>
           </a:p>
         </p:txBody>
@@ -6623,7 +6910,7 @@
                 </a:solidFill>
                 <a:latin typeface="Montserrat"/>
               </a:rPr>
-              <a:t>014 / 017</a:t>
+              <a:t>014 / 018</a:t>
             </a:r>
           </a:p>
         </p:txBody>
@@ -6671,7 +6958,7 @@
         <p:spPr>
           <a:xfrm>
             <a:off x="822960" y="457200"/>
-            <a:ext cx="8229600" cy="365760"/>
+            <a:ext cx="10058400" cy="365760"/>
           </a:xfrm>
           <a:prstGeom prst="rect">
             <a:avLst/>
@@ -6685,13 +6972,13 @@
           <a:lstStyle/>
           <a:p>
             <a:r>
-              <a:rPr sz="1200" b="1" i="0">
-                <a:solidFill>
-                  <a:srgbClr val="64748B"/>
-                </a:solidFill>
-                <a:latin typeface="Montserrat"/>
-              </a:rPr>
-              <a:t>APARTADO 5 · MANTENIMIENTO</a:t>
+              <a:rPr sz="1300" b="1" i="0">
+                <a:solidFill>
+                  <a:srgbClr val="E8801A"/>
+                </a:solidFill>
+                <a:latin typeface="Montserrat"/>
+              </a:rPr>
+              <a:t>APARTADO 4 · PUESTA EN SERVICIO</a:t>
             </a:r>
           </a:p>
         </p:txBody>
@@ -6719,26 +7006,70 @@
           <a:lstStyle/>
           <a:p>
             <a:r>
-              <a:rPr sz="2700" b="1" i="0">
+              <a:rPr sz="2800" b="1" i="0">
                 <a:solidFill>
                   <a:srgbClr val="1E2761"/>
                 </a:solidFill>
                 <a:latin typeface="Montserrat"/>
               </a:rPr>
-              <a:t>Cada 2 años y la llave del gas</a:t>
-            </a:r>
-          </a:p>
-        </p:txBody>
-      </p:sp>
-      <p:sp>
-        <p:nvSpPr>
-          <p:cNvPr id="7" name="TextBox 6"/>
+              <a:t>Se comunica a la Comunidad</a:t>
+            </a:r>
+          </a:p>
+        </p:txBody>
+      </p:sp>
+      <p:sp>
+        <p:nvSpPr>
+          <p:cNvPr id="7" name="Rounded Rectangle 6"/>
+          <p:cNvSpPr/>
+          <p:nvPr/>
+        </p:nvSpPr>
+        <p:spPr>
+          <a:xfrm>
+            <a:off x="868680" y="1627632"/>
+            <a:ext cx="2011680" cy="73152"/>
+          </a:xfrm>
+          <a:prstGeom prst="roundRect">
+            <a:avLst/>
+          </a:prstGeom>
+          <a:solidFill>
+            <a:srgbClr val="E8801A"/>
+          </a:solidFill>
+          <a:ln>
+            <a:noFill/>
+          </a:ln>
+          <a:effectLst/>
+        </p:spPr>
+        <p:style>
+          <a:lnRef idx="1">
+            <a:schemeClr val="accent1"/>
+          </a:lnRef>
+          <a:fillRef idx="3">
+            <a:schemeClr val="accent1"/>
+          </a:fillRef>
+          <a:effectRef idx="2">
+            <a:schemeClr val="accent1"/>
+          </a:effectRef>
+          <a:fontRef idx="minor">
+            <a:schemeClr val="lt1"/>
+          </a:fontRef>
+        </p:style>
+        <p:txBody>
+          <a:bodyPr rtlCol="0" anchor="ctr"/>
+          <a:lstStyle/>
+          <a:p>
+            <a:pPr algn="ctr"/>
+          </a:p>
+        </p:txBody>
+      </p:sp>
+      <p:sp>
+        <p:nvSpPr>
+          <p:cNvPr id="8" name="TextBox 7"/>
           <p:cNvSpPr txBox="1"/>
           <p:nvPr/>
         </p:nvSpPr>
         <p:spPr>
           <a:xfrm>
-            <a:off x="822960" y="1920240"/>
+            <a:off x="822960" y="1965960"/>
             <a:ext cx="4983480" cy="4206240"/>
           </a:xfrm>
           <a:prstGeom prst="rect">
@@ -6754,17 +7085,17 @@
           <a:p>
             <a:pPr>
               <a:spcAft>
-                <a:spcPts val="1000"/>
+                <a:spcPts val="1100"/>
               </a:spcAft>
             </a:pPr>
             <a:r>
               <a:rPr sz="1600" b="1" i="0">
                 <a:solidFill>
-                  <a:srgbClr val="2E3A80"/>
-                </a:solidFill>
-                <a:latin typeface="Montserrat"/>
-              </a:rPr>
-              <a:t>•  </a:t>
+                  <a:srgbClr val="E8801A"/>
+                </a:solidFill>
+                <a:latin typeface="Montserrat"/>
+              </a:rPr>
+              <a:t>▸  </a:t>
             </a:r>
             <a:r>
               <a:rPr sz="1600" b="0" i="0">
@@ -6773,23 +7104,23 @@
                 </a:solidFill>
                 <a:latin typeface="Montserrat"/>
               </a:rPr>
-              <a:t>Titular responsable del mantenimiento</a:t>
+              <a:t>Datos del titular y plano de detalle</a:t>
             </a:r>
           </a:p>
           <a:p>
             <a:pPr>
               <a:spcAft>
-                <a:spcPts val="1000"/>
+                <a:spcPts val="1100"/>
               </a:spcAft>
             </a:pPr>
             <a:r>
               <a:rPr sz="1600" b="1" i="0">
                 <a:solidFill>
-                  <a:srgbClr val="2E3A80"/>
-                </a:solidFill>
-                <a:latin typeface="Montserrat"/>
-              </a:rPr>
-              <a:t>•  </a:t>
+                  <a:srgbClr val="E8801A"/>
+                </a:solidFill>
+                <a:latin typeface="Montserrat"/>
+              </a:rPr>
+              <a:t>▸  </a:t>
             </a:r>
             <a:r>
               <a:rPr sz="1600" b="0" i="0">
@@ -6798,23 +7129,23 @@
                 </a:solidFill>
                 <a:latin typeface="Montserrat"/>
               </a:rPr>
-              <a:t>Inspección cada 2 años</a:t>
+              <a:t>Certificado de inspección</a:t>
             </a:r>
           </a:p>
           <a:p>
             <a:pPr>
               <a:spcAft>
-                <a:spcPts val="1000"/>
+                <a:spcPts val="1100"/>
               </a:spcAft>
             </a:pPr>
             <a:r>
               <a:rPr sz="1600" b="1" i="0">
                 <a:solidFill>
-                  <a:srgbClr val="2E3A80"/>
-                </a:solidFill>
-                <a:latin typeface="Montserrat"/>
-              </a:rPr>
-              <a:t>•  </a:t>
+                  <a:srgbClr val="E8801A"/>
+                </a:solidFill>
+                <a:latin typeface="Montserrat"/>
+              </a:rPr>
+              <a:t>▸  </a:t>
             </a:r>
             <a:r>
               <a:rPr sz="1600" b="0" i="0">
@@ -6823,23 +7154,23 @@
                 </a:solidFill>
                 <a:latin typeface="Montserrat"/>
               </a:rPr>
-              <a:t>No supera la capacidad comunicada</a:t>
+              <a:t>La comunicación faculta el servicio</a:t>
             </a:r>
           </a:p>
           <a:p>
             <a:pPr>
               <a:spcAft>
-                <a:spcPts val="1000"/>
+                <a:spcPts val="1100"/>
               </a:spcAft>
             </a:pPr>
             <a:r>
               <a:rPr sz="1600" b="1" i="0">
                 <a:solidFill>
-                  <a:srgbClr val="2E3A80"/>
-                </a:solidFill>
-                <a:latin typeface="Montserrat"/>
-              </a:rPr>
-              <a:t>•  </a:t>
+                  <a:srgbClr val="E8801A"/>
+                </a:solidFill>
+                <a:latin typeface="Montserrat"/>
+              </a:rPr>
+              <a:t>▸  </a:t>
             </a:r>
             <a:r>
               <a:rPr sz="1600" b="0" i="0">
@@ -6848,14 +7179,14 @@
                 </a:solidFill>
                 <a:latin typeface="Montserrat"/>
               </a:rPr>
-              <a:t>Sin certificado favorable: no hay gas</a:t>
-            </a:r>
-          </a:p>
-        </p:txBody>
-      </p:sp>
-      <p:sp>
-        <p:nvSpPr>
-          <p:cNvPr id="8" name="imgph" descr="IMGQ:inspector checking gas installation"/>
+              <a:t>No es conformidad de la Administración</a:t>
+            </a:r>
+          </a:p>
+        </p:txBody>
+      </p:sp>
+      <p:sp>
+        <p:nvSpPr>
+          <p:cNvPr id="9" name="imgph" descr="IMGQ:official documents folder stamp"/>
           <p:cNvSpPr/>
           <p:nvPr/>
         </p:nvSpPr>
@@ -6901,7 +7232,7 @@
       </p:sp>
       <p:sp>
         <p:nvSpPr>
-          <p:cNvPr id="9" name="TextBox 8"/>
+          <p:cNvPr id="10" name="TextBox 9"/>
           <p:cNvSpPr txBox="1"/>
           <p:nvPr/>
         </p:nvSpPr>
@@ -6941,7 +7272,7 @@
                 </a:solidFill>
                 <a:latin typeface="Montserrat"/>
               </a:rPr>
-              <a:t>inspector checking gas installation</a:t>
+              <a:t>official documents folder stamp</a:t>
             </a:r>
           </a:p>
         </p:txBody>
@@ -7038,7 +7369,7 @@
                 </a:solidFill>
                 <a:latin typeface="Montserrat"/>
               </a:rPr>
-              <a:t>015 / 017</a:t>
+              <a:t>015 / 018</a:t>
             </a:r>
           </a:p>
         </p:txBody>
@@ -7086,7 +7417,7 @@
         <p:spPr>
           <a:xfrm>
             <a:off x="822960" y="457200"/>
-            <a:ext cx="8229600" cy="365760"/>
+            <a:ext cx="10058400" cy="365760"/>
           </a:xfrm>
           <a:prstGeom prst="rect">
             <a:avLst/>
@@ -7100,13 +7431,13 @@
           <a:lstStyle/>
           <a:p>
             <a:r>
-              <a:rPr sz="1200" b="1" i="0">
-                <a:solidFill>
-                  <a:srgbClr val="64748B"/>
-                </a:solidFill>
-                <a:latin typeface="Montserrat"/>
-              </a:rPr>
-              <a:t>APARTADO 6 · TRANSPORTE</a:t>
+              <a:rPr sz="1300" b="1" i="0">
+                <a:solidFill>
+                  <a:srgbClr val="E8801A"/>
+                </a:solidFill>
+                <a:latin typeface="Montserrat"/>
+              </a:rPr>
+              <a:t>APARTADO 5 · MANTENIMIENTO</a:t>
             </a:r>
           </a:p>
         </p:txBody>
@@ -7134,26 +7465,70 @@
           <a:lstStyle/>
           <a:p>
             <a:r>
-              <a:rPr sz="2700" b="1" i="0">
+              <a:rPr sz="2800" b="1" i="0">
                 <a:solidFill>
                   <a:srgbClr val="1E2761"/>
                 </a:solidFill>
                 <a:latin typeface="Montserrat"/>
               </a:rPr>
-              <a:t>Tu coche y las bombonas</a:t>
-            </a:r>
-          </a:p>
-        </p:txBody>
-      </p:sp>
-      <p:sp>
-        <p:nvSpPr>
-          <p:cNvPr id="7" name="TextBox 6"/>
+              <a:t>Cada 2 años y la llave del gas</a:t>
+            </a:r>
+          </a:p>
+        </p:txBody>
+      </p:sp>
+      <p:sp>
+        <p:nvSpPr>
+          <p:cNvPr id="7" name="Rounded Rectangle 6"/>
+          <p:cNvSpPr/>
+          <p:nvPr/>
+        </p:nvSpPr>
+        <p:spPr>
+          <a:xfrm>
+            <a:off x="868680" y="1627632"/>
+            <a:ext cx="2011680" cy="73152"/>
+          </a:xfrm>
+          <a:prstGeom prst="roundRect">
+            <a:avLst/>
+          </a:prstGeom>
+          <a:solidFill>
+            <a:srgbClr val="E8801A"/>
+          </a:solidFill>
+          <a:ln>
+            <a:noFill/>
+          </a:ln>
+          <a:effectLst/>
+        </p:spPr>
+        <p:style>
+          <a:lnRef idx="1">
+            <a:schemeClr val="accent1"/>
+          </a:lnRef>
+          <a:fillRef idx="3">
+            <a:schemeClr val="accent1"/>
+          </a:fillRef>
+          <a:effectRef idx="2">
+            <a:schemeClr val="accent1"/>
+          </a:effectRef>
+          <a:fontRef idx="minor">
+            <a:schemeClr val="lt1"/>
+          </a:fontRef>
+        </p:style>
+        <p:txBody>
+          <a:bodyPr rtlCol="0" anchor="ctr"/>
+          <a:lstStyle/>
+          <a:p>
+            <a:pPr algn="ctr"/>
+          </a:p>
+        </p:txBody>
+      </p:sp>
+      <p:sp>
+        <p:nvSpPr>
+          <p:cNvPr id="8" name="TextBox 7"/>
           <p:cNvSpPr txBox="1"/>
           <p:nvPr/>
         </p:nvSpPr>
         <p:spPr>
           <a:xfrm>
-            <a:off x="822960" y="1920240"/>
+            <a:off x="822960" y="1965960"/>
             <a:ext cx="4983480" cy="4206240"/>
           </a:xfrm>
           <a:prstGeom prst="rect">
@@ -7169,17 +7544,17 @@
           <a:p>
             <a:pPr>
               <a:spcAft>
-                <a:spcPts val="1000"/>
+                <a:spcPts val="1100"/>
               </a:spcAft>
             </a:pPr>
             <a:r>
               <a:rPr sz="1600" b="1" i="0">
                 <a:solidFill>
-                  <a:srgbClr val="2E3A80"/>
-                </a:solidFill>
-                <a:latin typeface="Montserrat"/>
-              </a:rPr>
-              <a:t>•  </a:t>
+                  <a:srgbClr val="E8801A"/>
+                </a:solidFill>
+                <a:latin typeface="Montserrat"/>
+              </a:rPr>
+              <a:t>▸  </a:t>
             </a:r>
             <a:r>
               <a:rPr sz="1600" b="0" i="0">
@@ -7188,23 +7563,23 @@
                 </a:solidFill>
                 <a:latin typeface="Montserrat"/>
               </a:rPr>
-              <a:t>Máximo 2 envases de hasta 15 kg</a:t>
+              <a:t>Titular responsable del mantenimiento</a:t>
             </a:r>
           </a:p>
           <a:p>
             <a:pPr>
               <a:spcAft>
-                <a:spcPts val="1000"/>
+                <a:spcPts val="1100"/>
               </a:spcAft>
             </a:pPr>
             <a:r>
               <a:rPr sz="1600" b="1" i="0">
                 <a:solidFill>
-                  <a:srgbClr val="2E3A80"/>
-                </a:solidFill>
-                <a:latin typeface="Montserrat"/>
-              </a:rPr>
-              <a:t>•  </a:t>
+                  <a:srgbClr val="E8801A"/>
+                </a:solidFill>
+                <a:latin typeface="Montserrat"/>
+              </a:rPr>
+              <a:t>▸  </a:t>
             </a:r>
             <a:r>
               <a:rPr sz="1600" b="0" i="0">
@@ -7213,23 +7588,23 @@
                 </a:solidFill>
                 <a:latin typeface="Montserrat"/>
               </a:rPr>
-              <a:t>Siempre de pie y sujetos</a:t>
+              <a:t>Inspección cada 2 años</a:t>
             </a:r>
           </a:p>
           <a:p>
             <a:pPr>
               <a:spcAft>
-                <a:spcPts val="1000"/>
+                <a:spcPts val="1100"/>
               </a:spcAft>
             </a:pPr>
             <a:r>
               <a:rPr sz="1600" b="1" i="0">
                 <a:solidFill>
-                  <a:srgbClr val="2E3A80"/>
-                </a:solidFill>
-                <a:latin typeface="Montserrat"/>
-              </a:rPr>
-              <a:t>•  </a:t>
+                  <a:srgbClr val="E8801A"/>
+                </a:solidFill>
+                <a:latin typeface="Montserrat"/>
+              </a:rPr>
+              <a:t>▸  </a:t>
             </a:r>
             <a:r>
               <a:rPr sz="1600" b="0" i="0">
@@ -7238,23 +7613,23 @@
                 </a:solidFill>
                 <a:latin typeface="Montserrat"/>
               </a:rPr>
-              <a:t>Prohibido aparcar en subterráneo</a:t>
+              <a:t>No supera la capacidad comunicada</a:t>
             </a:r>
           </a:p>
           <a:p>
             <a:pPr>
               <a:spcAft>
-                <a:spcPts val="1000"/>
+                <a:spcPts val="1100"/>
               </a:spcAft>
             </a:pPr>
             <a:r>
               <a:rPr sz="1600" b="1" i="0">
                 <a:solidFill>
-                  <a:srgbClr val="2E3A80"/>
-                </a:solidFill>
-                <a:latin typeface="Montserrat"/>
-              </a:rPr>
-              <a:t>•  </a:t>
+                  <a:srgbClr val="E8801A"/>
+                </a:solidFill>
+                <a:latin typeface="Montserrat"/>
+              </a:rPr>
+              <a:t>▸  </a:t>
             </a:r>
             <a:r>
               <a:rPr sz="1600" b="0" i="0">
@@ -7263,14 +7638,14 @@
                 </a:solidFill>
                 <a:latin typeface="Montserrat"/>
               </a:rPr>
-              <a:t>Nuevos y sin gas: pueden ir tumbados</a:t>
-            </a:r>
-          </a:p>
-        </p:txBody>
-      </p:sp>
-      <p:sp>
-        <p:nvSpPr>
-          <p:cNvPr id="8" name="imgph" descr="IMGQ:gas cylinders secured in van"/>
+              <a:t>Sin certificado favorable: no hay gas</a:t>
+            </a:r>
+          </a:p>
+        </p:txBody>
+      </p:sp>
+      <p:sp>
+        <p:nvSpPr>
+          <p:cNvPr id="9" name="imgph" descr="IMGQ:inspector checking gas installation"/>
           <p:cNvSpPr/>
           <p:nvPr/>
         </p:nvSpPr>
@@ -7316,7 +7691,7 @@
       </p:sp>
       <p:sp>
         <p:nvSpPr>
-          <p:cNvPr id="9" name="TextBox 8"/>
+          <p:cNvPr id="10" name="TextBox 9"/>
           <p:cNvSpPr txBox="1"/>
           <p:nvPr/>
         </p:nvSpPr>
@@ -7356,7 +7731,7 @@
                 </a:solidFill>
                 <a:latin typeface="Montserrat"/>
               </a:rPr>
-              <a:t>gas cylinders secured in van</a:t>
+              <a:t>inspector checking gas installation</a:t>
             </a:r>
           </a:p>
         </p:txBody>
@@ -7453,7 +7828,7 @@
                 </a:solidFill>
                 <a:latin typeface="Montserrat"/>
               </a:rPr>
-              <a:t>016 / 017</a:t>
+              <a:t>016 / 018</a:t>
             </a:r>
           </a:p>
         </p:txBody>
@@ -7501,7 +7876,7 @@
         <p:spPr>
           <a:xfrm>
             <a:off x="822960" y="457200"/>
-            <a:ext cx="8229600" cy="365760"/>
+            <a:ext cx="10058400" cy="365760"/>
           </a:xfrm>
           <a:prstGeom prst="rect">
             <a:avLst/>
@@ -7515,13 +7890,13 @@
           <a:lstStyle/>
           <a:p>
             <a:r>
-              <a:rPr sz="1200" b="1" i="0">
-                <a:solidFill>
-                  <a:srgbClr val="64748B"/>
-                </a:solidFill>
-                <a:latin typeface="Montserrat"/>
-              </a:rPr>
-              <a:t>APARTADO 6 · REPARTO</a:t>
+              <a:rPr sz="1300" b="1" i="0">
+                <a:solidFill>
+                  <a:srgbClr val="E8801A"/>
+                </a:solidFill>
+                <a:latin typeface="Montserrat"/>
+              </a:rPr>
+              <a:t>APARTADO 6 · TRANSPORTE</a:t>
             </a:r>
           </a:p>
         </p:txBody>
@@ -7549,26 +7924,70 @@
           <a:lstStyle/>
           <a:p>
             <a:r>
-              <a:rPr sz="2700" b="1" i="0">
+              <a:rPr sz="2800" b="1" i="0">
                 <a:solidFill>
                   <a:srgbClr val="1E2761"/>
                 </a:solidFill>
                 <a:latin typeface="Montserrat"/>
               </a:rPr>
-              <a:t>El furgón del butanero</a:t>
-            </a:r>
-          </a:p>
-        </p:txBody>
-      </p:sp>
-      <p:sp>
-        <p:nvSpPr>
-          <p:cNvPr id="7" name="TextBox 6"/>
+              <a:t>Tu coche y las bombonas</a:t>
+            </a:r>
+          </a:p>
+        </p:txBody>
+      </p:sp>
+      <p:sp>
+        <p:nvSpPr>
+          <p:cNvPr id="7" name="Rounded Rectangle 6"/>
+          <p:cNvSpPr/>
+          <p:nvPr/>
+        </p:nvSpPr>
+        <p:spPr>
+          <a:xfrm>
+            <a:off x="868680" y="1627632"/>
+            <a:ext cx="2011680" cy="73152"/>
+          </a:xfrm>
+          <a:prstGeom prst="roundRect">
+            <a:avLst/>
+          </a:prstGeom>
+          <a:solidFill>
+            <a:srgbClr val="E8801A"/>
+          </a:solidFill>
+          <a:ln>
+            <a:noFill/>
+          </a:ln>
+          <a:effectLst/>
+        </p:spPr>
+        <p:style>
+          <a:lnRef idx="1">
+            <a:schemeClr val="accent1"/>
+          </a:lnRef>
+          <a:fillRef idx="3">
+            <a:schemeClr val="accent1"/>
+          </a:fillRef>
+          <a:effectRef idx="2">
+            <a:schemeClr val="accent1"/>
+          </a:effectRef>
+          <a:fontRef idx="minor">
+            <a:schemeClr val="lt1"/>
+          </a:fontRef>
+        </p:style>
+        <p:txBody>
+          <a:bodyPr rtlCol="0" anchor="ctr"/>
+          <a:lstStyle/>
+          <a:p>
+            <a:pPr algn="ctr"/>
+          </a:p>
+        </p:txBody>
+      </p:sp>
+      <p:sp>
+        <p:nvSpPr>
+          <p:cNvPr id="8" name="TextBox 7"/>
           <p:cNvSpPr txBox="1"/>
           <p:nvPr/>
         </p:nvSpPr>
         <p:spPr>
           <a:xfrm>
-            <a:off x="822960" y="1920240"/>
+            <a:off x="822960" y="1965960"/>
             <a:ext cx="4983480" cy="4206240"/>
           </a:xfrm>
           <a:prstGeom prst="rect">
@@ -7584,17 +8003,17 @@
           <a:p>
             <a:pPr>
               <a:spcAft>
-                <a:spcPts val="1000"/>
+                <a:spcPts val="1100"/>
               </a:spcAft>
             </a:pPr>
             <a:r>
               <a:rPr sz="1600" b="1" i="0">
                 <a:solidFill>
-                  <a:srgbClr val="2E3A80"/>
-                </a:solidFill>
-                <a:latin typeface="Montserrat"/>
-              </a:rPr>
-              <a:t>•  </a:t>
+                  <a:srgbClr val="E8801A"/>
+                </a:solidFill>
+                <a:latin typeface="Montserrat"/>
+              </a:rPr>
+              <a:t>▸  </a:t>
             </a:r>
             <a:r>
               <a:rPr sz="1600" b="0" i="0">
@@ -7603,23 +8022,23 @@
                 </a:solidFill>
                 <a:latin typeface="Montserrat"/>
               </a:rPr>
-              <a:t>Caja con rejillas laterales y traseras</a:t>
+              <a:t>Máximo 2 envases de hasta 15 kg</a:t>
             </a:r>
           </a:p>
           <a:p>
             <a:pPr>
               <a:spcAft>
-                <a:spcPts val="1000"/>
+                <a:spcPts val="1100"/>
               </a:spcAft>
             </a:pPr>
             <a:r>
               <a:rPr sz="1600" b="1" i="0">
                 <a:solidFill>
-                  <a:srgbClr val="2E3A80"/>
-                </a:solidFill>
-                <a:latin typeface="Montserrat"/>
-              </a:rPr>
-              <a:t>•  </a:t>
+                  <a:srgbClr val="E8801A"/>
+                </a:solidFill>
+                <a:latin typeface="Montserrat"/>
+              </a:rPr>
+              <a:t>▸  </a:t>
             </a:r>
             <a:r>
               <a:rPr sz="1600" b="0" i="0">
@@ -7628,23 +8047,23 @@
                 </a:solidFill>
                 <a:latin typeface="Montserrat"/>
               </a:rPr>
-              <a:t>Cortafuegos al entrar donde hay &gt; 500 kg</a:t>
+              <a:t>Siempre de pie y sujetos</a:t>
             </a:r>
           </a:p>
           <a:p>
             <a:pPr>
               <a:spcAft>
-                <a:spcPts val="1000"/>
+                <a:spcPts val="1100"/>
               </a:spcAft>
             </a:pPr>
             <a:r>
               <a:rPr sz="1600" b="1" i="0">
                 <a:solidFill>
-                  <a:srgbClr val="2E3A80"/>
-                </a:solidFill>
-                <a:latin typeface="Montserrat"/>
-              </a:rPr>
-              <a:t>•  </a:t>
+                  <a:srgbClr val="E8801A"/>
+                </a:solidFill>
+                <a:latin typeface="Montserrat"/>
+              </a:rPr>
+              <a:t>▸  </a:t>
             </a:r>
             <a:r>
               <a:rPr sz="1600" b="0" i="0">
@@ -7653,23 +8072,23 @@
                 </a:solidFill>
                 <a:latin typeface="Montserrat"/>
               </a:rPr>
-              <a:t>PMA ≤ 3.500 kg: dos 8A-34B</a:t>
+              <a:t>Prohibido aparcar en subterráneo</a:t>
             </a:r>
           </a:p>
           <a:p>
             <a:pPr>
               <a:spcAft>
-                <a:spcPts val="1000"/>
+                <a:spcPts val="1100"/>
               </a:spcAft>
             </a:pPr>
             <a:r>
               <a:rPr sz="1600" b="1" i="0">
                 <a:solidFill>
-                  <a:srgbClr val="2E3A80"/>
-                </a:solidFill>
-                <a:latin typeface="Montserrat"/>
-              </a:rPr>
-              <a:t>•  </a:t>
+                  <a:srgbClr val="E8801A"/>
+                </a:solidFill>
+                <a:latin typeface="Montserrat"/>
+              </a:rPr>
+              <a:t>▸  </a:t>
             </a:r>
             <a:r>
               <a:rPr sz="1600" b="0" i="0">
@@ -7678,14 +8097,14 @@
                 </a:solidFill>
                 <a:latin typeface="Montserrat"/>
               </a:rPr>
-              <a:t>PMA &gt; 3.500 kg: carga sube a 13A-55B</a:t>
-            </a:r>
-          </a:p>
-        </p:txBody>
-      </p:sp>
-      <p:sp>
-        <p:nvSpPr>
-          <p:cNvPr id="8" name="imgph" descr="IMGQ:delivery truck loaded gas cylinders"/>
+              <a:t>Nuevos y sin gas: pueden ir tumbados</a:t>
+            </a:r>
+          </a:p>
+        </p:txBody>
+      </p:sp>
+      <p:sp>
+        <p:nvSpPr>
+          <p:cNvPr id="9" name="imgph" descr="IMGQ:gas cylinders secured in van"/>
           <p:cNvSpPr/>
           <p:nvPr/>
         </p:nvSpPr>
@@ -7731,7 +8150,7 @@
       </p:sp>
       <p:sp>
         <p:nvSpPr>
-          <p:cNvPr id="9" name="TextBox 8"/>
+          <p:cNvPr id="10" name="TextBox 9"/>
           <p:cNvSpPr txBox="1"/>
           <p:nvPr/>
         </p:nvSpPr>
@@ -7771,7 +8190,7 @@
                 </a:solidFill>
                 <a:latin typeface="Montserrat"/>
               </a:rPr>
-              <a:t>delivery truck loaded gas cylinders</a:t>
+              <a:t>gas cylinders secured in van</a:t>
             </a:r>
           </a:p>
         </p:txBody>
@@ -7809,6 +8228,465 @@
             <a:avLst/>
           </a:prstGeom>
           <a:solidFill>
+            <a:srgbClr val="FFFFFF"/>
+          </a:solidFill>
+          <a:ln>
+            <a:noFill/>
+          </a:ln>
+          <a:effectLst/>
+        </p:spPr>
+        <p:style>
+          <a:lnRef idx="1">
+            <a:schemeClr val="accent1"/>
+          </a:lnRef>
+          <a:fillRef idx="3">
+            <a:schemeClr val="accent1"/>
+          </a:fillRef>
+          <a:effectRef idx="2">
+            <a:schemeClr val="accent1"/>
+          </a:effectRef>
+          <a:fontRef idx="minor">
+            <a:schemeClr val="lt1"/>
+          </a:fontRef>
+        </p:style>
+        <p:txBody>
+          <a:bodyPr rtlCol="0" anchor="ctr"/>
+          <a:lstStyle/>
+          <a:p>
+            <a:pPr algn="ctr"/>
+          </a:p>
+        </p:txBody>
+      </p:sp>
+      <p:sp>
+        <p:nvSpPr>
+          <p:cNvPr id="3" name="TextBox 2"/>
+          <p:cNvSpPr txBox="1"/>
+          <p:nvPr/>
+        </p:nvSpPr>
+        <p:spPr>
+          <a:xfrm>
+            <a:off x="10607040" y="320040"/>
+            <a:ext cx="1371600" cy="365760"/>
+          </a:xfrm>
+          <a:prstGeom prst="rect">
+            <a:avLst/>
+          </a:prstGeom>
+          <a:noFill/>
+        </p:spPr>
+        <p:txBody>
+          <a:bodyPr wrap="square">
+            <a:spAutoFit/>
+          </a:bodyPr>
+          <a:lstStyle/>
+          <a:p>
+            <a:pPr algn="r"/>
+            <a:r>
+              <a:rPr sz="1000" b="1" i="0">
+                <a:solidFill>
+                  <a:srgbClr val="64748B"/>
+                </a:solidFill>
+                <a:latin typeface="Montserrat"/>
+              </a:rPr>
+              <a:t>017 / 018</a:t>
+            </a:r>
+          </a:p>
+        </p:txBody>
+      </p:sp>
+      <p:sp>
+        <p:nvSpPr>
+          <p:cNvPr id="4" name="TextBox 3"/>
+          <p:cNvSpPr txBox="1"/>
+          <p:nvPr/>
+        </p:nvSpPr>
+        <p:spPr>
+          <a:xfrm>
+            <a:off x="457200" y="6419088"/>
+            <a:ext cx="8229600" cy="365760"/>
+          </a:xfrm>
+          <a:prstGeom prst="rect">
+            <a:avLst/>
+          </a:prstGeom>
+          <a:noFill/>
+        </p:spPr>
+        <p:txBody>
+          <a:bodyPr wrap="square">
+            <a:spAutoFit/>
+          </a:bodyPr>
+          <a:lstStyle/>
+          <a:p>
+            <a:r>
+              <a:rPr sz="900" b="0" i="0">
+                <a:solidFill>
+                  <a:srgbClr val="64748B"/>
+                </a:solidFill>
+                <a:latin typeface="Montserrat"/>
+              </a:rPr>
+              <a:t>Curso Gas B · Tema 02 · Centros de envases de GLP (II)</a:t>
+            </a:r>
+          </a:p>
+        </p:txBody>
+      </p:sp>
+      <p:sp>
+        <p:nvSpPr>
+          <p:cNvPr id="5" name="TextBox 4"/>
+          <p:cNvSpPr txBox="1"/>
+          <p:nvPr/>
+        </p:nvSpPr>
+        <p:spPr>
+          <a:xfrm>
+            <a:off x="822960" y="457200"/>
+            <a:ext cx="10058400" cy="365760"/>
+          </a:xfrm>
+          <a:prstGeom prst="rect">
+            <a:avLst/>
+          </a:prstGeom>
+          <a:noFill/>
+        </p:spPr>
+        <p:txBody>
+          <a:bodyPr wrap="square">
+            <a:spAutoFit/>
+          </a:bodyPr>
+          <a:lstStyle/>
+          <a:p>
+            <a:r>
+              <a:rPr sz="1300" b="1" i="0">
+                <a:solidFill>
+                  <a:srgbClr val="E8801A"/>
+                </a:solidFill>
+                <a:latin typeface="Montserrat"/>
+              </a:rPr>
+              <a:t>APARTADO 6 · REPARTO</a:t>
+            </a:r>
+          </a:p>
+        </p:txBody>
+      </p:sp>
+      <p:sp>
+        <p:nvSpPr>
+          <p:cNvPr id="6" name="TextBox 5"/>
+          <p:cNvSpPr txBox="1"/>
+          <p:nvPr/>
+        </p:nvSpPr>
+        <p:spPr>
+          <a:xfrm>
+            <a:off x="822960" y="868680"/>
+            <a:ext cx="10515600" cy="914400"/>
+          </a:xfrm>
+          <a:prstGeom prst="rect">
+            <a:avLst/>
+          </a:prstGeom>
+          <a:noFill/>
+        </p:spPr>
+        <p:txBody>
+          <a:bodyPr wrap="square">
+            <a:spAutoFit/>
+          </a:bodyPr>
+          <a:lstStyle/>
+          <a:p>
+            <a:r>
+              <a:rPr sz="2800" b="1" i="0">
+                <a:solidFill>
+                  <a:srgbClr val="1E2761"/>
+                </a:solidFill>
+                <a:latin typeface="Montserrat"/>
+              </a:rPr>
+              <a:t>El furgón del butanero</a:t>
+            </a:r>
+          </a:p>
+        </p:txBody>
+      </p:sp>
+      <p:sp>
+        <p:nvSpPr>
+          <p:cNvPr id="7" name="Rounded Rectangle 6"/>
+          <p:cNvSpPr/>
+          <p:nvPr/>
+        </p:nvSpPr>
+        <p:spPr>
+          <a:xfrm>
+            <a:off x="868680" y="1627632"/>
+            <a:ext cx="2011680" cy="73152"/>
+          </a:xfrm>
+          <a:prstGeom prst="roundRect">
+            <a:avLst/>
+          </a:prstGeom>
+          <a:solidFill>
+            <a:srgbClr val="E8801A"/>
+          </a:solidFill>
+          <a:ln>
+            <a:noFill/>
+          </a:ln>
+          <a:effectLst/>
+        </p:spPr>
+        <p:style>
+          <a:lnRef idx="1">
+            <a:schemeClr val="accent1"/>
+          </a:lnRef>
+          <a:fillRef idx="3">
+            <a:schemeClr val="accent1"/>
+          </a:fillRef>
+          <a:effectRef idx="2">
+            <a:schemeClr val="accent1"/>
+          </a:effectRef>
+          <a:fontRef idx="minor">
+            <a:schemeClr val="lt1"/>
+          </a:fontRef>
+        </p:style>
+        <p:txBody>
+          <a:bodyPr rtlCol="0" anchor="ctr"/>
+          <a:lstStyle/>
+          <a:p>
+            <a:pPr algn="ctr"/>
+          </a:p>
+        </p:txBody>
+      </p:sp>
+      <p:sp>
+        <p:nvSpPr>
+          <p:cNvPr id="8" name="TextBox 7"/>
+          <p:cNvSpPr txBox="1"/>
+          <p:nvPr/>
+        </p:nvSpPr>
+        <p:spPr>
+          <a:xfrm>
+            <a:off x="822960" y="1965960"/>
+            <a:ext cx="4983480" cy="4206240"/>
+          </a:xfrm>
+          <a:prstGeom prst="rect">
+            <a:avLst/>
+          </a:prstGeom>
+          <a:noFill/>
+        </p:spPr>
+        <p:txBody>
+          <a:bodyPr wrap="square">
+            <a:spAutoFit/>
+          </a:bodyPr>
+          <a:lstStyle/>
+          <a:p>
+            <a:pPr>
+              <a:spcAft>
+                <a:spcPts val="1100"/>
+              </a:spcAft>
+            </a:pPr>
+            <a:r>
+              <a:rPr sz="1600" b="1" i="0">
+                <a:solidFill>
+                  <a:srgbClr val="E8801A"/>
+                </a:solidFill>
+                <a:latin typeface="Montserrat"/>
+              </a:rPr>
+              <a:t>▸  </a:t>
+            </a:r>
+            <a:r>
+              <a:rPr sz="1600" b="0" i="0">
+                <a:solidFill>
+                  <a:srgbClr val="1B2330"/>
+                </a:solidFill>
+                <a:latin typeface="Montserrat"/>
+              </a:rPr>
+              <a:t>Caja con rejillas laterales y traseras</a:t>
+            </a:r>
+          </a:p>
+          <a:p>
+            <a:pPr>
+              <a:spcAft>
+                <a:spcPts val="1100"/>
+              </a:spcAft>
+            </a:pPr>
+            <a:r>
+              <a:rPr sz="1600" b="1" i="0">
+                <a:solidFill>
+                  <a:srgbClr val="E8801A"/>
+                </a:solidFill>
+                <a:latin typeface="Montserrat"/>
+              </a:rPr>
+              <a:t>▸  </a:t>
+            </a:r>
+            <a:r>
+              <a:rPr sz="1600" b="0" i="0">
+                <a:solidFill>
+                  <a:srgbClr val="1B2330"/>
+                </a:solidFill>
+                <a:latin typeface="Montserrat"/>
+              </a:rPr>
+              <a:t>Cortafuegos al entrar donde hay &gt; 500 kg</a:t>
+            </a:r>
+          </a:p>
+          <a:p>
+            <a:pPr>
+              <a:spcAft>
+                <a:spcPts val="1100"/>
+              </a:spcAft>
+            </a:pPr>
+            <a:r>
+              <a:rPr sz="1600" b="1" i="0">
+                <a:solidFill>
+                  <a:srgbClr val="E8801A"/>
+                </a:solidFill>
+                <a:latin typeface="Montserrat"/>
+              </a:rPr>
+              <a:t>▸  </a:t>
+            </a:r>
+            <a:r>
+              <a:rPr sz="1600" b="0" i="0">
+                <a:solidFill>
+                  <a:srgbClr val="1B2330"/>
+                </a:solidFill>
+                <a:latin typeface="Montserrat"/>
+              </a:rPr>
+              <a:t>PMA ≤ 3.500 kg: dos 8A-34B</a:t>
+            </a:r>
+          </a:p>
+          <a:p>
+            <a:pPr>
+              <a:spcAft>
+                <a:spcPts val="1100"/>
+              </a:spcAft>
+            </a:pPr>
+            <a:r>
+              <a:rPr sz="1600" b="1" i="0">
+                <a:solidFill>
+                  <a:srgbClr val="E8801A"/>
+                </a:solidFill>
+                <a:latin typeface="Montserrat"/>
+              </a:rPr>
+              <a:t>▸  </a:t>
+            </a:r>
+            <a:r>
+              <a:rPr sz="1600" b="0" i="0">
+                <a:solidFill>
+                  <a:srgbClr val="1B2330"/>
+                </a:solidFill>
+                <a:latin typeface="Montserrat"/>
+              </a:rPr>
+              <a:t>PMA &gt; 3.500 kg: carga sube a 13A-55B</a:t>
+            </a:r>
+          </a:p>
+        </p:txBody>
+      </p:sp>
+      <p:sp>
+        <p:nvSpPr>
+          <p:cNvPr id="9" name="imgph" descr="IMGQ:delivery truck loaded gas cylinders"/>
+          <p:cNvSpPr/>
+          <p:nvPr/>
+        </p:nvSpPr>
+        <p:spPr>
+          <a:xfrm>
+            <a:off x="5806440" y="1051560"/>
+            <a:ext cx="5298947" cy="4629150"/>
+          </a:xfrm>
+          <a:prstGeom prst="roundRect">
+            <a:avLst/>
+          </a:prstGeom>
+          <a:solidFill>
+            <a:srgbClr val="F3F6FB"/>
+          </a:solidFill>
+          <a:ln w="12700">
+            <a:solidFill>
+              <a:srgbClr val="C7D2E6"/>
+            </a:solidFill>
+          </a:ln>
+          <a:effectLst/>
+        </p:spPr>
+        <p:style>
+          <a:lnRef idx="1">
+            <a:schemeClr val="accent1"/>
+          </a:lnRef>
+          <a:fillRef idx="3">
+            <a:schemeClr val="accent1"/>
+          </a:fillRef>
+          <a:effectRef idx="2">
+            <a:schemeClr val="accent1"/>
+          </a:effectRef>
+          <a:fontRef idx="minor">
+            <a:schemeClr val="lt1"/>
+          </a:fontRef>
+        </p:style>
+        <p:txBody>
+          <a:bodyPr rtlCol="0" anchor="ctr"/>
+          <a:lstStyle/>
+          <a:p>
+            <a:pPr algn="ctr"/>
+          </a:p>
+        </p:txBody>
+      </p:sp>
+      <p:sp>
+        <p:nvSpPr>
+          <p:cNvPr id="10" name="TextBox 9"/>
+          <p:cNvSpPr txBox="1"/>
+          <p:nvPr/>
+        </p:nvSpPr>
+        <p:spPr>
+          <a:xfrm>
+            <a:off x="6080760" y="2726055"/>
+            <a:ext cx="4750307" cy="1280160"/>
+          </a:xfrm>
+          <a:prstGeom prst="rect">
+            <a:avLst/>
+          </a:prstGeom>
+          <a:noFill/>
+        </p:spPr>
+        <p:txBody>
+          <a:bodyPr wrap="square">
+            <a:spAutoFit/>
+          </a:bodyPr>
+          <a:lstStyle/>
+          <a:p>
+            <a:pPr algn="ctr"/>
+            <a:r>
+              <a:rPr sz="1400" b="1" i="0">
+                <a:solidFill>
+                  <a:srgbClr val="64748B"/>
+                </a:solidFill>
+                <a:latin typeface="Montserrat"/>
+              </a:rPr>
+              <a:t>IMAGEN REALISTA</a:t>
+            </a:r>
+          </a:p>
+          <a:p>
+            <a:pPr algn="ctr"/>
+            <a:r>
+              <a:rPr sz="1100" b="0" i="1">
+                <a:solidFill>
+                  <a:srgbClr val="64748B"/>
+                </a:solidFill>
+                <a:latin typeface="Montserrat"/>
+              </a:rPr>
+              <a:t>delivery truck loaded gas cylinders</a:t>
+            </a:r>
+          </a:p>
+        </p:txBody>
+      </p:sp>
+    </p:spTree>
+  </p:cSld>
+  <p:clrMapOvr>
+    <a:masterClrMapping/>
+  </p:clrMapOvr>
+</p:sld>
+</file>
+
+<file path=ppt/slides/slide18.xml><?xml version="1.0" encoding="utf-8"?>
+<p:sld xmlns:a="http://schemas.openxmlformats.org/drawingml/2006/main" xmlns:p="http://schemas.openxmlformats.org/presentationml/2006/main" xmlns:r="http://schemas.openxmlformats.org/officeDocument/2006/relationships">
+  <p:cSld>
+    <p:spTree>
+      <p:nvGrpSpPr>
+        <p:cNvPr id="1" name=""/>
+        <p:cNvGrpSpPr/>
+        <p:nvPr/>
+      </p:nvGrpSpPr>
+      <p:grpSpPr/>
+      <p:sp>
+        <p:nvSpPr>
+          <p:cNvPr id="2" name="Rectangle 1"/>
+          <p:cNvSpPr/>
+          <p:nvPr/>
+        </p:nvSpPr>
+        <p:spPr>
+          <a:xfrm>
+            <a:off x="0" y="0"/>
+            <a:ext cx="12191695" cy="6858000"/>
+          </a:xfrm>
+          <a:prstGeom prst="rect">
+            <a:avLst/>
+          </a:prstGeom>
+          <a:solidFill>
             <a:srgbClr val="1E2761"/>
           </a:solidFill>
           <a:ln>
@@ -7863,7 +8741,7 @@
             <a:r>
               <a:rPr sz="1400" b="1" i="0">
                 <a:solidFill>
-                  <a:srgbClr val="CADCFC"/>
+                  <a:srgbClr val="F4A24C"/>
                 </a:solidFill>
                 <a:latin typeface="Montserrat"/>
               </a:rPr>
@@ -7874,13 +8752,57 @@
       </p:sp>
       <p:sp>
         <p:nvSpPr>
-          <p:cNvPr id="4" name="TextBox 3"/>
+          <p:cNvPr id="4" name="Rounded Rectangle 3"/>
+          <p:cNvSpPr/>
+          <p:nvPr/>
+        </p:nvSpPr>
+        <p:spPr>
+          <a:xfrm>
+            <a:off x="868680" y="1051560"/>
+            <a:ext cx="1463040" cy="82296"/>
+          </a:xfrm>
+          <a:prstGeom prst="roundRect">
+            <a:avLst/>
+          </a:prstGeom>
+          <a:solidFill>
+            <a:srgbClr val="E8801A"/>
+          </a:solidFill>
+          <a:ln>
+            <a:noFill/>
+          </a:ln>
+          <a:effectLst/>
+        </p:spPr>
+        <p:style>
+          <a:lnRef idx="1">
+            <a:schemeClr val="accent1"/>
+          </a:lnRef>
+          <a:fillRef idx="3">
+            <a:schemeClr val="accent1"/>
+          </a:fillRef>
+          <a:effectRef idx="2">
+            <a:schemeClr val="accent1"/>
+          </a:effectRef>
+          <a:fontRef idx="minor">
+            <a:schemeClr val="lt1"/>
+          </a:fontRef>
+        </p:style>
+        <p:txBody>
+          <a:bodyPr rtlCol="0" anchor="ctr"/>
+          <a:lstStyle/>
+          <a:p>
+            <a:pPr algn="ctr"/>
+          </a:p>
+        </p:txBody>
+      </p:sp>
+      <p:sp>
+        <p:nvSpPr>
+          <p:cNvPr id="5" name="TextBox 4"/>
           <p:cNvSpPr txBox="1"/>
           <p:nvPr/>
         </p:nvSpPr>
         <p:spPr>
           <a:xfrm>
-            <a:off x="822960" y="1143000"/>
+            <a:off x="822960" y="1234440"/>
             <a:ext cx="10515600" cy="1097280"/>
           </a:xfrm>
           <a:prstGeom prst="rect">
@@ -7908,14 +8830,14 @@
       </p:sp>
       <p:sp>
         <p:nvSpPr>
-          <p:cNvPr id="5" name="TextBox 4"/>
+          <p:cNvPr id="6" name="TextBox 5"/>
           <p:cNvSpPr txBox="1"/>
           <p:nvPr/>
         </p:nvSpPr>
         <p:spPr>
           <a:xfrm>
-            <a:off x="822960" y="2514600"/>
-            <a:ext cx="10515600" cy="2834640"/>
+            <a:off x="822960" y="2606040"/>
+            <a:ext cx="10515600" cy="2743200"/>
           </a:xfrm>
           <a:prstGeom prst="rect">
             <a:avLst/>
@@ -7936,7 +8858,7 @@
             <a:r>
               <a:rPr sz="2000" b="1" i="0">
                 <a:solidFill>
-                  <a:srgbClr val="CADCFC"/>
+                  <a:srgbClr val="F4A24C"/>
                 </a:solidFill>
                 <a:latin typeface="Montserrat"/>
               </a:rPr>
@@ -7961,7 +8883,7 @@
             <a:r>
               <a:rPr sz="2000" b="1" i="0">
                 <a:solidFill>
-                  <a:srgbClr val="CADCFC"/>
+                  <a:srgbClr val="F4A24C"/>
                 </a:solidFill>
                 <a:latin typeface="Montserrat"/>
               </a:rPr>
@@ -7986,7 +8908,7 @@
             <a:r>
               <a:rPr sz="2000" b="1" i="0">
                 <a:solidFill>
-                  <a:srgbClr val="CADCFC"/>
+                  <a:srgbClr val="F4A24C"/>
                 </a:solidFill>
                 <a:latin typeface="Montserrat"/>
               </a:rPr>
@@ -8011,7 +8933,7 @@
             <a:r>
               <a:rPr sz="2000" b="1" i="0">
                 <a:solidFill>
-                  <a:srgbClr val="CADCFC"/>
+                  <a:srgbClr val="F4A24C"/>
                 </a:solidFill>
                 <a:latin typeface="Montserrat"/>
               </a:rPr>
@@ -8031,20 +8953,20 @@
       </p:sp>
       <p:sp>
         <p:nvSpPr>
-          <p:cNvPr id="6" name="Rounded Rectangle 5"/>
+          <p:cNvPr id="7" name="Rounded Rectangle 6"/>
           <p:cNvSpPr/>
           <p:nvPr/>
         </p:nvSpPr>
         <p:spPr>
           <a:xfrm>
             <a:off x="822960" y="5532120"/>
-            <a:ext cx="10515600" cy="777240"/>
+            <a:ext cx="10515600" cy="822960"/>
           </a:xfrm>
           <a:prstGeom prst="roundRect">
             <a:avLst/>
           </a:prstGeom>
           <a:solidFill>
-            <a:srgbClr val="2E3A80"/>
+            <a:srgbClr val="E8801A"/>
           </a:solidFill>
           <a:ln>
             <a:noFill/>
@@ -8075,13 +8997,13 @@
       </p:sp>
       <p:sp>
         <p:nvSpPr>
-          <p:cNvPr id="7" name="TextBox 6"/>
+          <p:cNvPr id="8" name="TextBox 7"/>
           <p:cNvSpPr txBox="1"/>
           <p:nvPr/>
         </p:nvSpPr>
         <p:spPr>
           <a:xfrm>
-            <a:off x="1051560" y="5605272"/>
+            <a:off x="1051560" y="5623560"/>
             <a:ext cx="10058400" cy="640080"/>
           </a:xfrm>
           <a:prstGeom prst="rect">
@@ -8098,7 +9020,7 @@
             <a:r>
               <a:rPr sz="1500" b="1" i="1">
                 <a:solidFill>
-                  <a:srgbClr val="CADCFC"/>
+                  <a:srgbClr val="1E2761"/>
                 </a:solidFill>
                 <a:latin typeface="Montserrat"/>
               </a:rPr>
@@ -8199,7 +9121,7 @@
                 </a:solidFill>
                 <a:latin typeface="Montserrat"/>
               </a:rPr>
-              <a:t>002 / 017</a:t>
+              <a:t>002 / 018</a:t>
             </a:r>
           </a:p>
         </p:txBody>
@@ -8263,7 +9185,7 @@
             <a:r>
               <a:rPr sz="2700" b="1" i="0">
                 <a:solidFill>
-                  <a:srgbClr val="1E2761"/>
+                  <a:srgbClr val="E8801A"/>
                 </a:solidFill>
                 <a:latin typeface="Montserrat"/>
               </a:rPr>
@@ -8275,6 +9197,50 @@
       <p:sp>
         <p:nvSpPr>
           <p:cNvPr id="6" name="Rounded Rectangle 5"/>
+          <p:cNvSpPr/>
+          <p:nvPr/>
+        </p:nvSpPr>
+        <p:spPr>
+          <a:xfrm>
+            <a:off x="868680" y="1234440"/>
+            <a:ext cx="1463040" cy="73152"/>
+          </a:xfrm>
+          <a:prstGeom prst="roundRect">
+            <a:avLst/>
+          </a:prstGeom>
+          <a:solidFill>
+            <a:srgbClr val="1E2761"/>
+          </a:solidFill>
+          <a:ln>
+            <a:noFill/>
+          </a:ln>
+          <a:effectLst/>
+        </p:spPr>
+        <p:style>
+          <a:lnRef idx="1">
+            <a:schemeClr val="accent1"/>
+          </a:lnRef>
+          <a:fillRef idx="3">
+            <a:schemeClr val="accent1"/>
+          </a:fillRef>
+          <a:effectRef idx="2">
+            <a:schemeClr val="accent1"/>
+          </a:effectRef>
+          <a:fontRef idx="minor">
+            <a:schemeClr val="lt1"/>
+          </a:fontRef>
+        </p:style>
+        <p:txBody>
+          <a:bodyPr rtlCol="0" anchor="ctr"/>
+          <a:lstStyle/>
+          <a:p>
+            <a:pPr algn="ctr"/>
+          </a:p>
+        </p:txBody>
+      </p:sp>
+      <p:sp>
+        <p:nvSpPr>
+          <p:cNvPr id="7" name="Rounded Rectangle 6"/>
           <p:cNvSpPr/>
           <p:nvPr/>
         </p:nvSpPr>
@@ -8320,7 +9286,7 @@
       </p:sp>
       <p:sp>
         <p:nvSpPr>
-          <p:cNvPr id="7" name="TextBox 6"/>
+          <p:cNvPr id="8" name="TextBox 7"/>
           <p:cNvSpPr txBox="1"/>
           <p:nvPr/>
         </p:nvSpPr>
@@ -8355,7 +9321,7 @@
       </p:sp>
       <p:sp>
         <p:nvSpPr>
-          <p:cNvPr id="8" name="TextBox 7"/>
+          <p:cNvPr id="9" name="TextBox 8"/>
           <p:cNvSpPr txBox="1"/>
           <p:nvPr/>
         </p:nvSpPr>
@@ -8390,7 +9356,7 @@
       </p:sp>
       <p:sp>
         <p:nvSpPr>
-          <p:cNvPr id="9" name="Rounded Rectangle 8"/>
+          <p:cNvPr id="10" name="Rounded Rectangle 9"/>
           <p:cNvSpPr/>
           <p:nvPr/>
         </p:nvSpPr>
@@ -8436,7 +9402,7 @@
       </p:sp>
       <p:sp>
         <p:nvSpPr>
-          <p:cNvPr id="10" name="TextBox 9"/>
+          <p:cNvPr id="11" name="TextBox 10"/>
           <p:cNvSpPr txBox="1"/>
           <p:nvPr/>
         </p:nvSpPr>
@@ -8471,7 +9437,7 @@
       </p:sp>
       <p:sp>
         <p:nvSpPr>
-          <p:cNvPr id="11" name="TextBox 10"/>
+          <p:cNvPr id="12" name="TextBox 11"/>
           <p:cNvSpPr txBox="1"/>
           <p:nvPr/>
         </p:nvSpPr>
@@ -8506,7 +9472,7 @@
       </p:sp>
       <p:sp>
         <p:nvSpPr>
-          <p:cNvPr id="12" name="Rounded Rectangle 11"/>
+          <p:cNvPr id="13" name="Rounded Rectangle 12"/>
           <p:cNvSpPr/>
           <p:nvPr/>
         </p:nvSpPr>
@@ -8552,7 +9518,7 @@
       </p:sp>
       <p:sp>
         <p:nvSpPr>
-          <p:cNvPr id="13" name="TextBox 12"/>
+          <p:cNvPr id="14" name="TextBox 13"/>
           <p:cNvSpPr txBox="1"/>
           <p:nvPr/>
         </p:nvSpPr>
@@ -8587,7 +9553,7 @@
       </p:sp>
       <p:sp>
         <p:nvSpPr>
-          <p:cNvPr id="14" name="TextBox 13"/>
+          <p:cNvPr id="15" name="TextBox 14"/>
           <p:cNvSpPr txBox="1"/>
           <p:nvPr/>
         </p:nvSpPr>
@@ -8712,7 +9678,7 @@
                 </a:solidFill>
                 <a:latin typeface="Montserrat"/>
               </a:rPr>
-              <a:t>003 / 017</a:t>
+              <a:t>003 / 018</a:t>
             </a:r>
           </a:p>
         </p:txBody>
@@ -8759,7 +9725,7 @@
         </p:nvSpPr>
         <p:spPr>
           <a:xfrm>
-            <a:off x="822960" y="457200"/>
+            <a:off x="822960" y="502920"/>
             <a:ext cx="8229600" cy="365760"/>
           </a:xfrm>
           <a:prstGeom prst="rect">
@@ -8774,13 +9740,13 @@
           <a:lstStyle/>
           <a:p>
             <a:r>
-              <a:rPr sz="1200" b="1" i="0">
-                <a:solidFill>
-                  <a:srgbClr val="64748B"/>
-                </a:solidFill>
-                <a:latin typeface="Montserrat"/>
-              </a:rPr>
-              <a:t>APARTADO 3.3 · 4.ª CATEGORÍA</a:t>
+              <a:rPr sz="1300" b="1" i="0">
+                <a:solidFill>
+                  <a:srgbClr val="E8801A"/>
+                </a:solidFill>
+                <a:latin typeface="Montserrat"/>
+              </a:rPr>
+              <a:t>PARTES DE ESTE VÍDEO</a:t>
             </a:r>
           </a:p>
         </p:txBody>
@@ -8793,7 +9759,7 @@
         </p:nvSpPr>
         <p:spPr>
           <a:xfrm>
-            <a:off x="822960" y="868680"/>
+            <a:off x="822960" y="914400"/>
             <a:ext cx="10515600" cy="914400"/>
           </a:xfrm>
           <a:prstGeom prst="rect">
@@ -8814,155 +9780,30 @@
                 </a:solidFill>
                 <a:latin typeface="Montserrat"/>
               </a:rPr>
-              <a:t>La versión mini y sencilla</a:t>
-            </a:r>
-          </a:p>
-        </p:txBody>
-      </p:sp>
-      <p:sp>
-        <p:nvSpPr>
-          <p:cNvPr id="7" name="TextBox 6"/>
-          <p:cNvSpPr txBox="1"/>
-          <p:nvPr/>
-        </p:nvSpPr>
-        <p:spPr>
-          <a:xfrm>
-            <a:off x="822960" y="1920240"/>
-            <a:ext cx="4983480" cy="4206240"/>
-          </a:xfrm>
-          <a:prstGeom prst="rect">
-            <a:avLst/>
-          </a:prstGeom>
-          <a:noFill/>
-        </p:spPr>
-        <p:txBody>
-          <a:bodyPr wrap="square">
-            <a:spAutoFit/>
-          </a:bodyPr>
-          <a:lstStyle/>
-          <a:p>
-            <a:pPr>
-              <a:spcAft>
-                <a:spcPts val="1000"/>
-              </a:spcAft>
-            </a:pPr>
-            <a:r>
-              <a:rPr sz="1600" b="1" i="0">
-                <a:solidFill>
-                  <a:srgbClr val="2E3A80"/>
-                </a:solidFill>
-                <a:latin typeface="Montserrat"/>
-              </a:rPr>
-              <a:t>•  </a:t>
-            </a:r>
-            <a:r>
-              <a:rPr sz="1600" b="0" i="0">
-                <a:solidFill>
-                  <a:srgbClr val="1B2330"/>
-                </a:solidFill>
-                <a:latin typeface="Montserrat"/>
-              </a:rPr>
-              <a:t>Vallado de 2 m en todo el perímetro</a:t>
-            </a:r>
-          </a:p>
-          <a:p>
-            <a:pPr>
-              <a:spcAft>
-                <a:spcPts val="1000"/>
-              </a:spcAft>
-            </a:pPr>
-            <a:r>
-              <a:rPr sz="1600" b="1" i="0">
-                <a:solidFill>
-                  <a:srgbClr val="2E3A80"/>
-                </a:solidFill>
-                <a:latin typeface="Montserrat"/>
-              </a:rPr>
-              <a:t>•  </a:t>
-            </a:r>
-            <a:r>
-              <a:rPr sz="1600" b="0" i="0">
-                <a:solidFill>
-                  <a:srgbClr val="1B2330"/>
-                </a:solidFill>
-                <a:latin typeface="Montserrat"/>
-              </a:rPr>
-              <a:t>3 m a locales habitados</a:t>
-            </a:r>
-          </a:p>
-          <a:p>
-            <a:pPr>
-              <a:spcAft>
-                <a:spcPts val="1000"/>
-              </a:spcAft>
-            </a:pPr>
-            <a:r>
-              <a:rPr sz="1600" b="1" i="0">
-                <a:solidFill>
-                  <a:srgbClr val="2E3A80"/>
-                </a:solidFill>
-                <a:latin typeface="Montserrat"/>
-              </a:rPr>
-              <a:t>•  </a:t>
-            </a:r>
-            <a:r>
-              <a:rPr sz="1600" b="0" i="0">
-                <a:solidFill>
-                  <a:srgbClr val="1B2330"/>
-                </a:solidFill>
-                <a:latin typeface="Montserrat"/>
-              </a:rPr>
-              <a:t>6 m si está en patio cerrado</a:t>
-            </a:r>
-          </a:p>
-          <a:p>
-            <a:pPr>
-              <a:spcAft>
-                <a:spcPts val="1000"/>
-              </a:spcAft>
-            </a:pPr>
-            <a:r>
-              <a:rPr sz="1600" b="1" i="0">
-                <a:solidFill>
-                  <a:srgbClr val="2E3A80"/>
-                </a:solidFill>
-                <a:latin typeface="Montserrat"/>
-              </a:rPr>
-              <a:t>•  </a:t>
-            </a:r>
-            <a:r>
-              <a:rPr sz="1600" b="0" i="0">
-                <a:solidFill>
-                  <a:srgbClr val="1B2330"/>
-                </a:solidFill>
-                <a:latin typeface="Montserrat"/>
-              </a:rPr>
-              <a:t>2 extintores 21A-113B</a:t>
-            </a:r>
-          </a:p>
-        </p:txBody>
-      </p:sp>
-      <p:sp>
-        <p:nvSpPr>
-          <p:cNvPr id="8" name="imgph" descr="IMGQ:small gas cylinder storage fenced yard"/>
+              <a:t>En este vídeo</a:t>
+            </a:r>
+          </a:p>
+        </p:txBody>
+      </p:sp>
+      <p:sp>
+        <p:nvSpPr>
+          <p:cNvPr id="7" name="Rounded Rectangle 6"/>
           <p:cNvSpPr/>
           <p:nvPr/>
         </p:nvSpPr>
         <p:spPr>
           <a:xfrm>
-            <a:off x="5806440" y="1051560"/>
-            <a:ext cx="5298947" cy="4629150"/>
+            <a:off x="868680" y="1673352"/>
+            <a:ext cx="2011680" cy="73152"/>
           </a:xfrm>
           <a:prstGeom prst="roundRect">
             <a:avLst/>
           </a:prstGeom>
           <a:solidFill>
-            <a:srgbClr val="F3F6FB"/>
+            <a:srgbClr val="E8801A"/>
           </a:solidFill>
-          <a:ln w="12700">
-            <a:solidFill>
-              <a:srgbClr val="C7D2E6"/>
-            </a:solidFill>
+          <a:ln>
+            <a:noFill/>
           </a:ln>
           <a:effectLst/>
         </p:spPr>
@@ -8990,14 +9831,14 @@
       </p:sp>
       <p:sp>
         <p:nvSpPr>
-          <p:cNvPr id="9" name="TextBox 8"/>
+          <p:cNvPr id="8" name="TextBox 7"/>
           <p:cNvSpPr txBox="1"/>
           <p:nvPr/>
         </p:nvSpPr>
         <p:spPr>
           <a:xfrm>
-            <a:off x="6080760" y="2726055"/>
-            <a:ext cx="4750307" cy="1280160"/>
+            <a:off x="822960" y="2103120"/>
+            <a:ext cx="10515600" cy="4023360"/>
           </a:xfrm>
           <a:prstGeom prst="rect">
             <a:avLst/>
@@ -9010,27 +9851,228 @@
           </a:bodyPr>
           <a:lstStyle/>
           <a:p>
-            <a:pPr algn="ctr"/>
-            <a:r>
-              <a:rPr sz="1400" b="1" i="0">
-                <a:solidFill>
-                  <a:srgbClr val="64748B"/>
-                </a:solidFill>
-                <a:latin typeface="Montserrat"/>
-              </a:rPr>
-              <a:t>IMAGEN REALISTA</a:t>
-            </a:r>
-          </a:p>
-          <a:p>
-            <a:pPr algn="ctr"/>
-            <a:r>
-              <a:rPr sz="1100" b="0" i="1">
-                <a:solidFill>
-                  <a:srgbClr val="64748B"/>
-                </a:solidFill>
-                <a:latin typeface="Montserrat"/>
-              </a:rPr>
-              <a:t>small gas cylinder storage fenced yard</a:t>
+            <a:pPr>
+              <a:spcAft>
+                <a:spcPts val="900"/>
+              </a:spcAft>
+            </a:pPr>
+            <a:r>
+              <a:rPr sz="1800" b="1" i="0">
+                <a:solidFill>
+                  <a:srgbClr val="E8801A"/>
+                </a:solidFill>
+                <a:latin typeface="Montserrat"/>
+              </a:rPr>
+              <a:t>01   </a:t>
+            </a:r>
+            <a:r>
+              <a:rPr sz="1700" b="0" i="0">
+                <a:solidFill>
+                  <a:srgbClr val="1B2330"/>
+                </a:solidFill>
+                <a:latin typeface="Montserrat"/>
+              </a:rPr>
+              <a:t>Apartado 3.3</a:t>
+            </a:r>
+          </a:p>
+          <a:p>
+            <a:pPr>
+              <a:spcAft>
+                <a:spcPts val="900"/>
+              </a:spcAft>
+            </a:pPr>
+            <a:r>
+              <a:rPr sz="1800" b="1" i="0">
+                <a:solidFill>
+                  <a:srgbClr val="E8801A"/>
+                </a:solidFill>
+                <a:latin typeface="Montserrat"/>
+              </a:rPr>
+              <a:t>02   </a:t>
+            </a:r>
+            <a:r>
+              <a:rPr sz="1700" b="0" i="0">
+                <a:solidFill>
+                  <a:srgbClr val="1B2330"/>
+                </a:solidFill>
+                <a:latin typeface="Montserrat"/>
+              </a:rPr>
+              <a:t>Apartado 3.4.1</a:t>
+            </a:r>
+          </a:p>
+          <a:p>
+            <a:pPr>
+              <a:spcAft>
+                <a:spcPts val="900"/>
+              </a:spcAft>
+            </a:pPr>
+            <a:r>
+              <a:rPr sz="1800" b="1" i="0">
+                <a:solidFill>
+                  <a:srgbClr val="E8801A"/>
+                </a:solidFill>
+                <a:latin typeface="Montserrat"/>
+              </a:rPr>
+              <a:t>03   </a:t>
+            </a:r>
+            <a:r>
+              <a:rPr sz="1700" b="0" i="0">
+                <a:solidFill>
+                  <a:srgbClr val="1B2330"/>
+                </a:solidFill>
+                <a:latin typeface="Montserrat"/>
+              </a:rPr>
+              <a:t>Apartado 3.4.1.1</a:t>
+            </a:r>
+          </a:p>
+          <a:p>
+            <a:pPr>
+              <a:spcAft>
+                <a:spcPts val="900"/>
+              </a:spcAft>
+            </a:pPr>
+            <a:r>
+              <a:rPr sz="1800" b="1" i="0">
+                <a:solidFill>
+                  <a:srgbClr val="E8801A"/>
+                </a:solidFill>
+                <a:latin typeface="Montserrat"/>
+              </a:rPr>
+              <a:t>04   </a:t>
+            </a:r>
+            <a:r>
+              <a:rPr sz="1700" b="0" i="0">
+                <a:solidFill>
+                  <a:srgbClr val="1B2330"/>
+                </a:solidFill>
+                <a:latin typeface="Montserrat"/>
+              </a:rPr>
+              <a:t>Apartado 3.4.1.2</a:t>
+            </a:r>
+          </a:p>
+          <a:p>
+            <a:pPr>
+              <a:spcAft>
+                <a:spcPts val="900"/>
+              </a:spcAft>
+            </a:pPr>
+            <a:r>
+              <a:rPr sz="1800" b="1" i="0">
+                <a:solidFill>
+                  <a:srgbClr val="E8801A"/>
+                </a:solidFill>
+                <a:latin typeface="Montserrat"/>
+              </a:rPr>
+              <a:t>05   </a:t>
+            </a:r>
+            <a:r>
+              <a:rPr sz="1700" b="0" i="0">
+                <a:solidFill>
+                  <a:srgbClr val="1B2330"/>
+                </a:solidFill>
+                <a:latin typeface="Montserrat"/>
+              </a:rPr>
+              <a:t>Apartado 3.4.2</a:t>
+            </a:r>
+          </a:p>
+          <a:p>
+            <a:pPr>
+              <a:spcAft>
+                <a:spcPts val="900"/>
+              </a:spcAft>
+            </a:pPr>
+            <a:r>
+              <a:rPr sz="1800" b="1" i="0">
+                <a:solidFill>
+                  <a:srgbClr val="E8801A"/>
+                </a:solidFill>
+                <a:latin typeface="Montserrat"/>
+              </a:rPr>
+              <a:t>06   </a:t>
+            </a:r>
+            <a:r>
+              <a:rPr sz="1700" b="0" i="0">
+                <a:solidFill>
+                  <a:srgbClr val="1B2330"/>
+                </a:solidFill>
+                <a:latin typeface="Montserrat"/>
+              </a:rPr>
+              <a:t>Apartado 3.4.2.1</a:t>
+            </a:r>
+          </a:p>
+          <a:p>
+            <a:pPr>
+              <a:spcAft>
+                <a:spcPts val="900"/>
+              </a:spcAft>
+            </a:pPr>
+            <a:r>
+              <a:rPr sz="1800" b="1" i="0">
+                <a:solidFill>
+                  <a:srgbClr val="E8801A"/>
+                </a:solidFill>
+                <a:latin typeface="Montserrat"/>
+              </a:rPr>
+              <a:t>07   </a:t>
+            </a:r>
+            <a:r>
+              <a:rPr sz="1700" b="0" i="0">
+                <a:solidFill>
+                  <a:srgbClr val="1B2330"/>
+                </a:solidFill>
+                <a:latin typeface="Montserrat"/>
+              </a:rPr>
+              <a:t>Apartado 3.4.2.2</a:t>
+            </a:r>
+          </a:p>
+          <a:p>
+            <a:pPr>
+              <a:spcAft>
+                <a:spcPts val="900"/>
+              </a:spcAft>
+            </a:pPr>
+            <a:r>
+              <a:rPr sz="1800" b="1" i="0">
+                <a:solidFill>
+                  <a:srgbClr val="E8801A"/>
+                </a:solidFill>
+                <a:latin typeface="Montserrat"/>
+              </a:rPr>
+              <a:t>08   </a:t>
+            </a:r>
+            <a:r>
+              <a:rPr sz="1700" b="0" i="0">
+                <a:solidFill>
+                  <a:srgbClr val="1B2330"/>
+                </a:solidFill>
+                <a:latin typeface="Montserrat"/>
+              </a:rPr>
+              <a:t>Apartado 4</a:t>
+            </a:r>
+          </a:p>
+          <a:p>
+            <a:pPr>
+              <a:spcAft>
+                <a:spcPts val="900"/>
+              </a:spcAft>
+            </a:pPr>
+            <a:r>
+              <a:rPr sz="1800" b="1" i="0">
+                <a:solidFill>
+                  <a:srgbClr val="E8801A"/>
+                </a:solidFill>
+                <a:latin typeface="Montserrat"/>
+              </a:rPr>
+              <a:t>09   </a:t>
+            </a:r>
+            <a:r>
+              <a:rPr sz="1700" b="0" i="0">
+                <a:solidFill>
+                  <a:srgbClr val="1B2330"/>
+                </a:solidFill>
+                <a:latin typeface="Montserrat"/>
+              </a:rPr>
+              <a:t>Apartado 5</a:t>
             </a:r>
           </a:p>
         </p:txBody>
@@ -9127,7 +10169,7 @@
                 </a:solidFill>
                 <a:latin typeface="Montserrat"/>
               </a:rPr>
-              <a:t>004 / 017</a:t>
+              <a:t>004 / 018</a:t>
             </a:r>
           </a:p>
         </p:txBody>
@@ -9175,7 +10217,7 @@
         <p:spPr>
           <a:xfrm>
             <a:off x="822960" y="457200"/>
-            <a:ext cx="8229600" cy="365760"/>
+            <a:ext cx="10058400" cy="365760"/>
           </a:xfrm>
           <a:prstGeom prst="rect">
             <a:avLst/>
@@ -9189,13 +10231,13 @@
           <a:lstStyle/>
           <a:p>
             <a:r>
-              <a:rPr sz="1200" b="1" i="0">
-                <a:solidFill>
-                  <a:srgbClr val="64748B"/>
-                </a:solidFill>
-                <a:latin typeface="Montserrat"/>
-              </a:rPr>
-              <a:t>APARTADO 3.3 · ANEXOS A EE.SS.</a:t>
+              <a:rPr sz="1300" b="1" i="0">
+                <a:solidFill>
+                  <a:srgbClr val="E8801A"/>
+                </a:solidFill>
+                <a:latin typeface="Montserrat"/>
+              </a:rPr>
+              <a:t>APARTADO 3.3 · 4.ª CATEGORÍA</a:t>
             </a:r>
           </a:p>
         </p:txBody>
@@ -9223,26 +10265,70 @@
           <a:lstStyle/>
           <a:p>
             <a:r>
-              <a:rPr sz="2700" b="1" i="0">
+              <a:rPr sz="2800" b="1" i="0">
                 <a:solidFill>
                   <a:srgbClr val="1E2761"/>
                 </a:solidFill>
                 <a:latin typeface="Montserrat"/>
               </a:rPr>
-              <a:t>4.ª junto a una gasolinera</a:t>
-            </a:r>
-          </a:p>
-        </p:txBody>
-      </p:sp>
-      <p:sp>
-        <p:nvSpPr>
-          <p:cNvPr id="7" name="TextBox 6"/>
+              <a:t>La versión mini y sencilla</a:t>
+            </a:r>
+          </a:p>
+        </p:txBody>
+      </p:sp>
+      <p:sp>
+        <p:nvSpPr>
+          <p:cNvPr id="7" name="Rounded Rectangle 6"/>
+          <p:cNvSpPr/>
+          <p:nvPr/>
+        </p:nvSpPr>
+        <p:spPr>
+          <a:xfrm>
+            <a:off x="868680" y="1627632"/>
+            <a:ext cx="2011680" cy="73152"/>
+          </a:xfrm>
+          <a:prstGeom prst="roundRect">
+            <a:avLst/>
+          </a:prstGeom>
+          <a:solidFill>
+            <a:srgbClr val="E8801A"/>
+          </a:solidFill>
+          <a:ln>
+            <a:noFill/>
+          </a:ln>
+          <a:effectLst/>
+        </p:spPr>
+        <p:style>
+          <a:lnRef idx="1">
+            <a:schemeClr val="accent1"/>
+          </a:lnRef>
+          <a:fillRef idx="3">
+            <a:schemeClr val="accent1"/>
+          </a:fillRef>
+          <a:effectRef idx="2">
+            <a:schemeClr val="accent1"/>
+          </a:effectRef>
+          <a:fontRef idx="minor">
+            <a:schemeClr val="lt1"/>
+          </a:fontRef>
+        </p:style>
+        <p:txBody>
+          <a:bodyPr rtlCol="0" anchor="ctr"/>
+          <a:lstStyle/>
+          <a:p>
+            <a:pPr algn="ctr"/>
+          </a:p>
+        </p:txBody>
+      </p:sp>
+      <p:sp>
+        <p:nvSpPr>
+          <p:cNvPr id="8" name="TextBox 7"/>
           <p:cNvSpPr txBox="1"/>
           <p:nvPr/>
         </p:nvSpPr>
         <p:spPr>
           <a:xfrm>
-            <a:off x="822960" y="1920240"/>
+            <a:off x="822960" y="1965960"/>
             <a:ext cx="4983480" cy="4206240"/>
           </a:xfrm>
           <a:prstGeom prst="rect">
@@ -9258,17 +10344,17 @@
           <a:p>
             <a:pPr>
               <a:spcAft>
-                <a:spcPts val="1000"/>
+                <a:spcPts val="1100"/>
               </a:spcAft>
             </a:pPr>
             <a:r>
               <a:rPr sz="1600" b="1" i="0">
                 <a:solidFill>
-                  <a:srgbClr val="2E3A80"/>
-                </a:solidFill>
-                <a:latin typeface="Montserrat"/>
-              </a:rPr>
-              <a:t>•  </a:t>
+                  <a:srgbClr val="E8801A"/>
+                </a:solidFill>
+                <a:latin typeface="Montserrat"/>
+              </a:rPr>
+              <a:t>▸  </a:t>
             </a:r>
             <a:r>
               <a:rPr sz="1600" b="0" i="0">
@@ -9277,23 +10363,23 @@
                 </a:solidFill>
                 <a:latin typeface="Montserrat"/>
               </a:rPr>
-              <a:t>Fuera de la propia estación de servicio</a:t>
+              <a:t>Vallado de 2 m en todo el perímetro</a:t>
             </a:r>
           </a:p>
           <a:p>
             <a:pPr>
               <a:spcAft>
-                <a:spcPts val="1000"/>
+                <a:spcPts val="1100"/>
               </a:spcAft>
             </a:pPr>
             <a:r>
               <a:rPr sz="1600" b="1" i="0">
                 <a:solidFill>
-                  <a:srgbClr val="2E3A80"/>
-                </a:solidFill>
-                <a:latin typeface="Montserrat"/>
-              </a:rPr>
-              <a:t>•  </a:t>
+                  <a:srgbClr val="E8801A"/>
+                </a:solidFill>
+                <a:latin typeface="Montserrat"/>
+              </a:rPr>
+              <a:t>▸  </a:t>
             </a:r>
             <a:r>
               <a:rPr sz="1600" b="0" i="0">
@@ -9302,23 +10388,23 @@
                 </a:solidFill>
                 <a:latin typeface="Montserrat"/>
               </a:rPr>
-              <a:t>A 10 m del área de suministro</a:t>
+              <a:t>3 m a locales habitados</a:t>
             </a:r>
           </a:p>
           <a:p>
             <a:pPr>
               <a:spcAft>
-                <a:spcPts val="1000"/>
+                <a:spcPts val="1100"/>
               </a:spcAft>
             </a:pPr>
             <a:r>
               <a:rPr sz="1600" b="1" i="0">
                 <a:solidFill>
-                  <a:srgbClr val="2E3A80"/>
-                </a:solidFill>
-                <a:latin typeface="Montserrat"/>
-              </a:rPr>
-              <a:t>•  </a:t>
+                  <a:srgbClr val="E8801A"/>
+                </a:solidFill>
+                <a:latin typeface="Montserrat"/>
+              </a:rPr>
+              <a:t>▸  </a:t>
             </a:r>
             <a:r>
               <a:rPr sz="1600" b="0" i="0">
@@ -9327,14 +10413,39 @@
                 </a:solidFill>
                 <a:latin typeface="Montserrat"/>
               </a:rPr>
-              <a:t>Separa bombonas de los surtidores</a:t>
-            </a:r>
-          </a:p>
-        </p:txBody>
-      </p:sp>
-      <p:sp>
-        <p:nvSpPr>
-          <p:cNvPr id="8" name="imgph" descr="IMGQ:gas station fuel pumps forecourt"/>
+              <a:t>6 m si está en patio cerrado</a:t>
+            </a:r>
+          </a:p>
+          <a:p>
+            <a:pPr>
+              <a:spcAft>
+                <a:spcPts val="1100"/>
+              </a:spcAft>
+            </a:pPr>
+            <a:r>
+              <a:rPr sz="1600" b="1" i="0">
+                <a:solidFill>
+                  <a:srgbClr val="E8801A"/>
+                </a:solidFill>
+                <a:latin typeface="Montserrat"/>
+              </a:rPr>
+              <a:t>▸  </a:t>
+            </a:r>
+            <a:r>
+              <a:rPr sz="1600" b="0" i="0">
+                <a:solidFill>
+                  <a:srgbClr val="1B2330"/>
+                </a:solidFill>
+                <a:latin typeface="Montserrat"/>
+              </a:rPr>
+              <a:t>2 extintores 21A-113B</a:t>
+            </a:r>
+          </a:p>
+        </p:txBody>
+      </p:sp>
+      <p:sp>
+        <p:nvSpPr>
+          <p:cNvPr id="9" name="imgph" descr="IMGQ:small gas cylinder storage fenced yard"/>
           <p:cNvSpPr/>
           <p:nvPr/>
         </p:nvSpPr>
@@ -9380,7 +10491,7 @@
       </p:sp>
       <p:sp>
         <p:nvSpPr>
-          <p:cNvPr id="9" name="TextBox 8"/>
+          <p:cNvPr id="10" name="TextBox 9"/>
           <p:cNvSpPr txBox="1"/>
           <p:nvPr/>
         </p:nvSpPr>
@@ -9420,7 +10531,7 @@
                 </a:solidFill>
                 <a:latin typeface="Montserrat"/>
               </a:rPr>
-              <a:t>gas station fuel pumps forecourt</a:t>
+              <a:t>small gas cylinder storage fenced yard</a:t>
             </a:r>
           </a:p>
         </p:txBody>
@@ -9517,7 +10628,7 @@
                 </a:solidFill>
                 <a:latin typeface="Montserrat"/>
               </a:rPr>
-              <a:t>005 / 017</a:t>
+              <a:t>005 / 018</a:t>
             </a:r>
           </a:p>
         </p:txBody>
@@ -9565,7 +10676,7 @@
         <p:spPr>
           <a:xfrm>
             <a:off x="822960" y="457200"/>
-            <a:ext cx="8229600" cy="365760"/>
+            <a:ext cx="10058400" cy="365760"/>
           </a:xfrm>
           <a:prstGeom prst="rect">
             <a:avLst/>
@@ -9579,13 +10690,13 @@
           <a:lstStyle/>
           <a:p>
             <a:r>
-              <a:rPr sz="1200" b="1" i="0">
-                <a:solidFill>
-                  <a:srgbClr val="64748B"/>
-                </a:solidFill>
-                <a:latin typeface="Montserrat"/>
-              </a:rPr>
-              <a:t>APARTADO 3.4.1 · 5.ª EN EE.SS.</a:t>
+              <a:rPr sz="1300" b="1" i="0">
+                <a:solidFill>
+                  <a:srgbClr val="E8801A"/>
+                </a:solidFill>
+                <a:latin typeface="Montserrat"/>
+              </a:rPr>
+              <a:t>APARTADO 3.3 · ANEXOS A EE.SS.</a:t>
             </a:r>
           </a:p>
         </p:txBody>
@@ -9613,26 +10724,70 @@
           <a:lstStyle/>
           <a:p>
             <a:r>
-              <a:rPr sz="2700" b="1" i="0">
+              <a:rPr sz="2800" b="1" i="0">
                 <a:solidFill>
                   <a:srgbClr val="1E2761"/>
                 </a:solidFill>
                 <a:latin typeface="Montserrat"/>
               </a:rPr>
-              <a:t>La gasolinera: máximo 500 kg</a:t>
-            </a:r>
-          </a:p>
-        </p:txBody>
-      </p:sp>
-      <p:sp>
-        <p:nvSpPr>
-          <p:cNvPr id="7" name="TextBox 6"/>
+              <a:t>4.ª junto a una gasolinera</a:t>
+            </a:r>
+          </a:p>
+        </p:txBody>
+      </p:sp>
+      <p:sp>
+        <p:nvSpPr>
+          <p:cNvPr id="7" name="Rounded Rectangle 6"/>
+          <p:cNvSpPr/>
+          <p:nvPr/>
+        </p:nvSpPr>
+        <p:spPr>
+          <a:xfrm>
+            <a:off x="868680" y="1627632"/>
+            <a:ext cx="2011680" cy="73152"/>
+          </a:xfrm>
+          <a:prstGeom prst="roundRect">
+            <a:avLst/>
+          </a:prstGeom>
+          <a:solidFill>
+            <a:srgbClr val="E8801A"/>
+          </a:solidFill>
+          <a:ln>
+            <a:noFill/>
+          </a:ln>
+          <a:effectLst/>
+        </p:spPr>
+        <p:style>
+          <a:lnRef idx="1">
+            <a:schemeClr val="accent1"/>
+          </a:lnRef>
+          <a:fillRef idx="3">
+            <a:schemeClr val="accent1"/>
+          </a:fillRef>
+          <a:effectRef idx="2">
+            <a:schemeClr val="accent1"/>
+          </a:effectRef>
+          <a:fontRef idx="minor">
+            <a:schemeClr val="lt1"/>
+          </a:fontRef>
+        </p:style>
+        <p:txBody>
+          <a:bodyPr rtlCol="0" anchor="ctr"/>
+          <a:lstStyle/>
+          <a:p>
+            <a:pPr algn="ctr"/>
+          </a:p>
+        </p:txBody>
+      </p:sp>
+      <p:sp>
+        <p:nvSpPr>
+          <p:cNvPr id="8" name="TextBox 7"/>
           <p:cNvSpPr txBox="1"/>
           <p:nvPr/>
         </p:nvSpPr>
         <p:spPr>
           <a:xfrm>
-            <a:off x="822960" y="1920240"/>
+            <a:off x="822960" y="1965960"/>
             <a:ext cx="4983480" cy="4206240"/>
           </a:xfrm>
           <a:prstGeom prst="rect">
@@ -9648,17 +10803,17 @@
           <a:p>
             <a:pPr>
               <a:spcAft>
-                <a:spcPts val="1000"/>
+                <a:spcPts val="1100"/>
               </a:spcAft>
             </a:pPr>
             <a:r>
               <a:rPr sz="1600" b="1" i="0">
                 <a:solidFill>
-                  <a:srgbClr val="2E3A80"/>
-                </a:solidFill>
-                <a:latin typeface="Montserrat"/>
-              </a:rPr>
-              <a:t>•  </a:t>
+                  <a:srgbClr val="E8801A"/>
+                </a:solidFill>
+                <a:latin typeface="Montserrat"/>
+              </a:rPr>
+              <a:t>▸  </a:t>
             </a:r>
             <a:r>
               <a:rPr sz="1600" b="0" i="0">
@@ -9667,23 +10822,23 @@
                 </a:solidFill>
                 <a:latin typeface="Montserrat"/>
               </a:rPr>
-              <a:t>Capacidad total máxima: 500 kg</a:t>
+              <a:t>Fuera de la propia estación de servicio</a:t>
             </a:r>
           </a:p>
           <a:p>
             <a:pPr>
               <a:spcAft>
-                <a:spcPts val="1000"/>
+                <a:spcPts val="1100"/>
               </a:spcAft>
             </a:pPr>
             <a:r>
               <a:rPr sz="1600" b="1" i="0">
                 <a:solidFill>
-                  <a:srgbClr val="2E3A80"/>
-                </a:solidFill>
-                <a:latin typeface="Montserrat"/>
-              </a:rPr>
-              <a:t>•  </a:t>
+                  <a:srgbClr val="E8801A"/>
+                </a:solidFill>
+                <a:latin typeface="Montserrat"/>
+              </a:rPr>
+              <a:t>▸  </a:t>
             </a:r>
             <a:r>
               <a:rPr sz="1600" b="0" i="0">
@@ -9692,23 +10847,23 @@
                 </a:solidFill>
                 <a:latin typeface="Montserrat"/>
               </a:rPr>
-              <a:t>Tipos de envase separados 5 m</a:t>
+              <a:t>A 10 m del área de suministro</a:t>
             </a:r>
           </a:p>
           <a:p>
             <a:pPr>
               <a:spcAft>
-                <a:spcPts val="1000"/>
+                <a:spcPts val="1100"/>
               </a:spcAft>
             </a:pPr>
             <a:r>
               <a:rPr sz="1600" b="1" i="0">
                 <a:solidFill>
-                  <a:srgbClr val="2E3A80"/>
-                </a:solidFill>
-                <a:latin typeface="Montserrat"/>
-              </a:rPr>
-              <a:t>•  </a:t>
+                  <a:srgbClr val="E8801A"/>
+                </a:solidFill>
+                <a:latin typeface="Montserrat"/>
+              </a:rPr>
+              <a:t>▸  </a:t>
             </a:r>
             <a:r>
               <a:rPr sz="1600" b="0" i="0">
@@ -9717,39 +10872,14 @@
                 </a:solidFill>
                 <a:latin typeface="Montserrat"/>
               </a:rPr>
-              <a:t>Coche y ≤ 15 kg: 2 alturas</a:t>
-            </a:r>
-          </a:p>
-          <a:p>
-            <a:pPr>
-              <a:spcAft>
-                <a:spcPts val="1000"/>
-              </a:spcAft>
-            </a:pPr>
-            <a:r>
-              <a:rPr sz="1600" b="1" i="0">
-                <a:solidFill>
-                  <a:srgbClr val="2E3A80"/>
-                </a:solidFill>
-                <a:latin typeface="Montserrat"/>
-              </a:rPr>
-              <a:t>•  </a:t>
-            </a:r>
-            <a:r>
-              <a:rPr sz="1600" b="0" i="0">
-                <a:solidFill>
-                  <a:srgbClr val="1B2330"/>
-                </a:solidFill>
-                <a:latin typeface="Montserrat"/>
-              </a:rPr>
-              <a:t>Cartuchos ≤ 3 kg: 4 alturas (40 cm)</a:t>
-            </a:r>
-          </a:p>
-        </p:txBody>
-      </p:sp>
-      <p:sp>
-        <p:nvSpPr>
-          <p:cNvPr id="8" name="imgph" descr="IMGQ:gas cylinder cage at petrol station"/>
+              <a:t>Separa bombonas de los surtidores</a:t>
+            </a:r>
+          </a:p>
+        </p:txBody>
+      </p:sp>
+      <p:sp>
+        <p:nvSpPr>
+          <p:cNvPr id="9" name="imgph" descr="IMGQ:gas station fuel pumps forecourt"/>
           <p:cNvSpPr/>
           <p:nvPr/>
         </p:nvSpPr>
@@ -9795,7 +10925,7 @@
       </p:sp>
       <p:sp>
         <p:nvSpPr>
-          <p:cNvPr id="9" name="TextBox 8"/>
+          <p:cNvPr id="10" name="TextBox 9"/>
           <p:cNvSpPr txBox="1"/>
           <p:nvPr/>
         </p:nvSpPr>
@@ -9835,7 +10965,7 @@
                 </a:solidFill>
                 <a:latin typeface="Montserrat"/>
               </a:rPr>
-              <a:t>gas cylinder cage at petrol station</a:t>
+              <a:t>gas station fuel pumps forecourt</a:t>
             </a:r>
           </a:p>
         </p:txBody>
@@ -9932,7 +11062,7 @@
                 </a:solidFill>
                 <a:latin typeface="Montserrat"/>
               </a:rPr>
-              <a:t>006 / 017</a:t>
+              <a:t>006 / 018</a:t>
             </a:r>
           </a:p>
         </p:txBody>
@@ -9980,7 +11110,7 @@
         <p:spPr>
           <a:xfrm>
             <a:off x="822960" y="457200"/>
-            <a:ext cx="8229600" cy="365760"/>
+            <a:ext cx="10058400" cy="365760"/>
           </a:xfrm>
           <a:prstGeom prst="rect">
             <a:avLst/>
@@ -9994,13 +11124,13 @@
           <a:lstStyle/>
           <a:p>
             <a:r>
-              <a:rPr sz="1200" b="1" i="0">
-                <a:solidFill>
-                  <a:srgbClr val="64748B"/>
-                </a:solidFill>
-                <a:latin typeface="Montserrat"/>
-              </a:rPr>
-              <a:t>APARTADO 3.4.1.1 · REGLAS COMUNES</a:t>
+              <a:rPr sz="1300" b="1" i="0">
+                <a:solidFill>
+                  <a:srgbClr val="E8801A"/>
+                </a:solidFill>
+                <a:latin typeface="Montserrat"/>
+              </a:rPr>
+              <a:t>APARTADO 3.4.1 · 5.ª EN EE.SS.</a:t>
             </a:r>
           </a:p>
         </p:txBody>
@@ -10028,26 +11158,70 @@
           <a:lstStyle/>
           <a:p>
             <a:r>
-              <a:rPr sz="2700" b="1" i="0">
+              <a:rPr sz="2800" b="1" i="0">
                 <a:solidFill>
                   <a:srgbClr val="1E2761"/>
                 </a:solidFill>
                 <a:latin typeface="Montserrat"/>
               </a:rPr>
-              <a:t>Espacios abiertos y distancias</a:t>
-            </a:r>
-          </a:p>
-        </p:txBody>
-      </p:sp>
-      <p:sp>
-        <p:nvSpPr>
-          <p:cNvPr id="7" name="TextBox 6"/>
+              <a:t>La gasolinera: máximo 500 kg</a:t>
+            </a:r>
+          </a:p>
+        </p:txBody>
+      </p:sp>
+      <p:sp>
+        <p:nvSpPr>
+          <p:cNvPr id="7" name="Rounded Rectangle 6"/>
+          <p:cNvSpPr/>
+          <p:nvPr/>
+        </p:nvSpPr>
+        <p:spPr>
+          <a:xfrm>
+            <a:off x="868680" y="1627632"/>
+            <a:ext cx="2011680" cy="73152"/>
+          </a:xfrm>
+          <a:prstGeom prst="roundRect">
+            <a:avLst/>
+          </a:prstGeom>
+          <a:solidFill>
+            <a:srgbClr val="E8801A"/>
+          </a:solidFill>
+          <a:ln>
+            <a:noFill/>
+          </a:ln>
+          <a:effectLst/>
+        </p:spPr>
+        <p:style>
+          <a:lnRef idx="1">
+            <a:schemeClr val="accent1"/>
+          </a:lnRef>
+          <a:fillRef idx="3">
+            <a:schemeClr val="accent1"/>
+          </a:fillRef>
+          <a:effectRef idx="2">
+            <a:schemeClr val="accent1"/>
+          </a:effectRef>
+          <a:fontRef idx="minor">
+            <a:schemeClr val="lt1"/>
+          </a:fontRef>
+        </p:style>
+        <p:txBody>
+          <a:bodyPr rtlCol="0" anchor="ctr"/>
+          <a:lstStyle/>
+          <a:p>
+            <a:pPr algn="ctr"/>
+          </a:p>
+        </p:txBody>
+      </p:sp>
+      <p:sp>
+        <p:nvSpPr>
+          <p:cNvPr id="8" name="TextBox 7"/>
           <p:cNvSpPr txBox="1"/>
           <p:nvPr/>
         </p:nvSpPr>
         <p:spPr>
           <a:xfrm>
-            <a:off x="822960" y="1920240"/>
+            <a:off x="822960" y="1965960"/>
             <a:ext cx="4983480" cy="4206240"/>
           </a:xfrm>
           <a:prstGeom prst="rect">
@@ -10063,17 +11237,17 @@
           <a:p>
             <a:pPr>
               <a:spcAft>
-                <a:spcPts val="1000"/>
+                <a:spcPts val="1100"/>
               </a:spcAft>
             </a:pPr>
             <a:r>
               <a:rPr sz="1600" b="1" i="0">
                 <a:solidFill>
-                  <a:srgbClr val="2E3A80"/>
-                </a:solidFill>
-                <a:latin typeface="Montserrat"/>
-              </a:rPr>
-              <a:t>•  </a:t>
+                  <a:srgbClr val="E8801A"/>
+                </a:solidFill>
+                <a:latin typeface="Montserrat"/>
+              </a:rPr>
+              <a:t>▸  </a:t>
             </a:r>
             <a:r>
               <a:rPr sz="1600" b="0" i="0">
@@ -10082,23 +11256,23 @@
                 </a:solidFill>
                 <a:latin typeface="Montserrat"/>
               </a:rPr>
-              <a:t>En espacios abiertos, no bajo tierra</a:t>
+              <a:t>Capacidad total máxima: 500 kg</a:t>
             </a:r>
           </a:p>
           <a:p>
             <a:pPr>
               <a:spcAft>
-                <a:spcPts val="1000"/>
+                <a:spcPts val="1100"/>
               </a:spcAft>
             </a:pPr>
             <a:r>
               <a:rPr sz="1600" b="1" i="0">
                 <a:solidFill>
-                  <a:srgbClr val="2E3A80"/>
-                </a:solidFill>
-                <a:latin typeface="Montserrat"/>
-              </a:rPr>
-              <a:t>•  </a:t>
+                  <a:srgbClr val="E8801A"/>
+                </a:solidFill>
+                <a:latin typeface="Montserrat"/>
+              </a:rPr>
+              <a:t>▸  </a:t>
             </a:r>
             <a:r>
               <a:rPr sz="1600" b="0" i="0">
@@ -10107,23 +11281,23 @@
                 </a:solidFill>
                 <a:latin typeface="Montserrat"/>
               </a:rPr>
-              <a:t>4 m a aireación, bocas y vías</a:t>
+              <a:t>Tipos de envase separados 5 m</a:t>
             </a:r>
           </a:p>
           <a:p>
             <a:pPr>
               <a:spcAft>
-                <a:spcPts val="1000"/>
+                <a:spcPts val="1100"/>
               </a:spcAft>
             </a:pPr>
             <a:r>
               <a:rPr sz="1600" b="1" i="0">
                 <a:solidFill>
-                  <a:srgbClr val="2E3A80"/>
-                </a:solidFill>
-                <a:latin typeface="Montserrat"/>
-              </a:rPr>
-              <a:t>•  </a:t>
+                  <a:srgbClr val="E8801A"/>
+                </a:solidFill>
+                <a:latin typeface="Montserrat"/>
+              </a:rPr>
+              <a:t>▸  </a:t>
             </a:r>
             <a:r>
               <a:rPr sz="1600" b="0" i="0">
@@ -10132,23 +11306,23 @@
                 </a:solidFill>
                 <a:latin typeface="Montserrat"/>
               </a:rPr>
-              <a:t>2 m a bordillos, sumideros, surtidores</a:t>
+              <a:t>Coche y ≤ 15 kg: 2 alturas</a:t>
             </a:r>
           </a:p>
           <a:p>
             <a:pPr>
               <a:spcAft>
-                <a:spcPts val="1000"/>
+                <a:spcPts val="1100"/>
               </a:spcAft>
             </a:pPr>
             <a:r>
               <a:rPr sz="1600" b="1" i="0">
                 <a:solidFill>
-                  <a:srgbClr val="2E3A80"/>
-                </a:solidFill>
-                <a:latin typeface="Montserrat"/>
-              </a:rPr>
-              <a:t>•  </a:t>
+                  <a:srgbClr val="E8801A"/>
+                </a:solidFill>
+                <a:latin typeface="Montserrat"/>
+              </a:rPr>
+              <a:t>▸  </a:t>
             </a:r>
             <a:r>
               <a:rPr sz="1600" b="0" i="0">
@@ -10157,14 +11331,14 @@
                 </a:solidFill>
                 <a:latin typeface="Montserrat"/>
               </a:rPr>
-              <a:t>2 extintores 21A-113B</a:t>
-            </a:r>
-          </a:p>
-        </p:txBody>
-      </p:sp>
-      <p:sp>
-        <p:nvSpPr>
-          <p:cNvPr id="8" name="imgph" descr="IMGQ:outdoor gas cylinder storage cage"/>
+              <a:t>Cartuchos ≤ 3 kg: 4 alturas (40 cm)</a:t>
+            </a:r>
+          </a:p>
+        </p:txBody>
+      </p:sp>
+      <p:sp>
+        <p:nvSpPr>
+          <p:cNvPr id="9" name="imgph" descr="IMGQ:gas cylinder cage at petrol station"/>
           <p:cNvSpPr/>
           <p:nvPr/>
         </p:nvSpPr>
@@ -10210,7 +11384,7 @@
       </p:sp>
       <p:sp>
         <p:nvSpPr>
-          <p:cNvPr id="9" name="TextBox 8"/>
+          <p:cNvPr id="10" name="TextBox 9"/>
           <p:cNvSpPr txBox="1"/>
           <p:nvPr/>
         </p:nvSpPr>
@@ -10250,7 +11424,7 @@
                 </a:solidFill>
                 <a:latin typeface="Montserrat"/>
               </a:rPr>
-              <a:t>outdoor gas cylinder storage cage</a:t>
+              <a:t>gas cylinder cage at petrol station</a:t>
             </a:r>
           </a:p>
         </p:txBody>
@@ -10347,7 +11521,7 @@
                 </a:solidFill>
                 <a:latin typeface="Montserrat"/>
               </a:rPr>
-              <a:t>007 / 017</a:t>
+              <a:t>007 / 018</a:t>
             </a:r>
           </a:p>
         </p:txBody>
@@ -10395,7 +11569,7 @@
         <p:spPr>
           <a:xfrm>
             <a:off x="822960" y="457200"/>
-            <a:ext cx="8229600" cy="365760"/>
+            <a:ext cx="10058400" cy="365760"/>
           </a:xfrm>
           <a:prstGeom prst="rect">
             <a:avLst/>
@@ -10409,13 +11583,13 @@
           <a:lstStyle/>
           <a:p>
             <a:r>
-              <a:rPr sz="1200" b="1" i="0">
-                <a:solidFill>
-                  <a:srgbClr val="64748B"/>
-                </a:solidFill>
-                <a:latin typeface="Montserrat"/>
-              </a:rPr>
-              <a:t>APARTADO 3.4.1.2 · JAULAS</a:t>
+              <a:rPr sz="1300" b="1" i="0">
+                <a:solidFill>
+                  <a:srgbClr val="E8801A"/>
+                </a:solidFill>
+                <a:latin typeface="Montserrat"/>
+              </a:rPr>
+              <a:t>APARTADO 3.4.1.1 · REGLAS COMUNES</a:t>
             </a:r>
           </a:p>
         </p:txBody>
@@ -10443,26 +11617,70 @@
           <a:lstStyle/>
           <a:p>
             <a:r>
-              <a:rPr sz="2700" b="1" i="0">
+              <a:rPr sz="2800" b="1" i="0">
                 <a:solidFill>
                   <a:srgbClr val="1E2761"/>
                 </a:solidFill>
                 <a:latin typeface="Montserrat"/>
               </a:rPr>
-              <a:t>La jaula respira arriba y abajo</a:t>
-            </a:r>
-          </a:p>
-        </p:txBody>
-      </p:sp>
-      <p:sp>
-        <p:nvSpPr>
-          <p:cNvPr id="7" name="TextBox 6"/>
+              <a:t>Espacios abiertos y distancias</a:t>
+            </a:r>
+          </a:p>
+        </p:txBody>
+      </p:sp>
+      <p:sp>
+        <p:nvSpPr>
+          <p:cNvPr id="7" name="Rounded Rectangle 6"/>
+          <p:cNvSpPr/>
+          <p:nvPr/>
+        </p:nvSpPr>
+        <p:spPr>
+          <a:xfrm>
+            <a:off x="868680" y="1627632"/>
+            <a:ext cx="2011680" cy="73152"/>
+          </a:xfrm>
+          <a:prstGeom prst="roundRect">
+            <a:avLst/>
+          </a:prstGeom>
+          <a:solidFill>
+            <a:srgbClr val="E8801A"/>
+          </a:solidFill>
+          <a:ln>
+            <a:noFill/>
+          </a:ln>
+          <a:effectLst/>
+        </p:spPr>
+        <p:style>
+          <a:lnRef idx="1">
+            <a:schemeClr val="accent1"/>
+          </a:lnRef>
+          <a:fillRef idx="3">
+            <a:schemeClr val="accent1"/>
+          </a:fillRef>
+          <a:effectRef idx="2">
+            <a:schemeClr val="accent1"/>
+          </a:effectRef>
+          <a:fontRef idx="minor">
+            <a:schemeClr val="lt1"/>
+          </a:fontRef>
+        </p:style>
+        <p:txBody>
+          <a:bodyPr rtlCol="0" anchor="ctr"/>
+          <a:lstStyle/>
+          <a:p>
+            <a:pPr algn="ctr"/>
+          </a:p>
+        </p:txBody>
+      </p:sp>
+      <p:sp>
+        <p:nvSpPr>
+          <p:cNvPr id="8" name="TextBox 7"/>
           <p:cNvSpPr txBox="1"/>
           <p:nvPr/>
         </p:nvSpPr>
         <p:spPr>
           <a:xfrm>
-            <a:off x="822960" y="1920240"/>
+            <a:off x="822960" y="1965960"/>
             <a:ext cx="4983480" cy="4206240"/>
           </a:xfrm>
           <a:prstGeom prst="rect">
@@ -10478,17 +11696,17 @@
           <a:p>
             <a:pPr>
               <a:spcAft>
-                <a:spcPts val="1000"/>
+                <a:spcPts val="1100"/>
               </a:spcAft>
             </a:pPr>
             <a:r>
               <a:rPr sz="1600" b="1" i="0">
                 <a:solidFill>
-                  <a:srgbClr val="2E3A80"/>
-                </a:solidFill>
-                <a:latin typeface="Montserrat"/>
-              </a:rPr>
-              <a:t>•  </a:t>
+                  <a:srgbClr val="E8801A"/>
+                </a:solidFill>
+                <a:latin typeface="Montserrat"/>
+              </a:rPr>
+              <a:t>▸  </a:t>
             </a:r>
             <a:r>
               <a:rPr sz="1600" b="0" i="0">
@@ -10497,23 +11715,23 @@
                 </a:solidFill>
                 <a:latin typeface="Montserrat"/>
               </a:rPr>
-              <a:t>Material que no arde (A2-s3,d0)</a:t>
+              <a:t>En espacios abiertos, no bajo tierra</a:t>
             </a:r>
           </a:p>
           <a:p>
             <a:pPr>
               <a:spcAft>
-                <a:spcPts val="1000"/>
+                <a:spcPts val="1100"/>
               </a:spcAft>
             </a:pPr>
             <a:r>
               <a:rPr sz="1600" b="1" i="0">
                 <a:solidFill>
-                  <a:srgbClr val="2E3A80"/>
-                </a:solidFill>
-                <a:latin typeface="Montserrat"/>
-              </a:rPr>
-              <a:t>•  </a:t>
+                  <a:srgbClr val="E8801A"/>
+                </a:solidFill>
+                <a:latin typeface="Montserrat"/>
+              </a:rPr>
+              <a:t>▸  </a:t>
             </a:r>
             <a:r>
               <a:rPr sz="1600" b="0" i="0">
@@ -10522,23 +11740,23 @@
                 </a:solidFill>
                 <a:latin typeface="Montserrat"/>
               </a:rPr>
-              <a:t>Ventilación superior e inferior</a:t>
+              <a:t>4 m a aireación, bocas y vías</a:t>
             </a:r>
           </a:p>
           <a:p>
             <a:pPr>
               <a:spcAft>
-                <a:spcPts val="1000"/>
+                <a:spcPts val="1100"/>
               </a:spcAft>
             </a:pPr>
             <a:r>
               <a:rPr sz="1600" b="1" i="0">
                 <a:solidFill>
-                  <a:srgbClr val="2E3A80"/>
-                </a:solidFill>
-                <a:latin typeface="Montserrat"/>
-              </a:rPr>
-              <a:t>•  </a:t>
+                  <a:srgbClr val="E8801A"/>
+                </a:solidFill>
+                <a:latin typeface="Montserrat"/>
+              </a:rPr>
+              <a:t>▸  </a:t>
             </a:r>
             <a:r>
               <a:rPr sz="1600" b="0" i="0">
@@ -10547,14 +11765,39 @@
                 </a:solidFill>
                 <a:latin typeface="Montserrat"/>
               </a:rPr>
-              <a:t>Cerradas al público fuera de servicio</a:t>
-            </a:r>
-          </a:p>
-        </p:txBody>
-      </p:sp>
-      <p:sp>
-        <p:nvSpPr>
-          <p:cNvPr id="8" name="imgph" descr="IMGQ:ventilated metal gas bottle cage"/>
+              <a:t>2 m a bordillos, sumideros, surtidores</a:t>
+            </a:r>
+          </a:p>
+          <a:p>
+            <a:pPr>
+              <a:spcAft>
+                <a:spcPts val="1100"/>
+              </a:spcAft>
+            </a:pPr>
+            <a:r>
+              <a:rPr sz="1600" b="1" i="0">
+                <a:solidFill>
+                  <a:srgbClr val="E8801A"/>
+                </a:solidFill>
+                <a:latin typeface="Montserrat"/>
+              </a:rPr>
+              <a:t>▸  </a:t>
+            </a:r>
+            <a:r>
+              <a:rPr sz="1600" b="0" i="0">
+                <a:solidFill>
+                  <a:srgbClr val="1B2330"/>
+                </a:solidFill>
+                <a:latin typeface="Montserrat"/>
+              </a:rPr>
+              <a:t>2 extintores 21A-113B</a:t>
+            </a:r>
+          </a:p>
+        </p:txBody>
+      </p:sp>
+      <p:sp>
+        <p:nvSpPr>
+          <p:cNvPr id="9" name="imgph" descr="IMGQ:outdoor gas cylinder storage cage"/>
           <p:cNvSpPr/>
           <p:nvPr/>
         </p:nvSpPr>
@@ -10600,7 +11843,7 @@
       </p:sp>
       <p:sp>
         <p:nvSpPr>
-          <p:cNvPr id="9" name="TextBox 8"/>
+          <p:cNvPr id="10" name="TextBox 9"/>
           <p:cNvSpPr txBox="1"/>
           <p:nvPr/>
         </p:nvSpPr>
@@ -10640,7 +11883,7 @@
                 </a:solidFill>
                 <a:latin typeface="Montserrat"/>
               </a:rPr>
-              <a:t>ventilated metal gas bottle cage</a:t>
+              <a:t>outdoor gas cylinder storage cage</a:t>
             </a:r>
           </a:p>
         </p:txBody>
@@ -10737,7 +11980,7 @@
                 </a:solidFill>
                 <a:latin typeface="Montserrat"/>
               </a:rPr>
-              <a:t>008 / 017</a:t>
+              <a:t>008 / 018</a:t>
             </a:r>
           </a:p>
         </p:txBody>
@@ -10785,7 +12028,7 @@
         <p:spPr>
           <a:xfrm>
             <a:off x="822960" y="457200"/>
-            <a:ext cx="8229600" cy="365760"/>
+            <a:ext cx="10058400" cy="365760"/>
           </a:xfrm>
           <a:prstGeom prst="rect">
             <a:avLst/>
@@ -10799,13 +12042,13 @@
           <a:lstStyle/>
           <a:p>
             <a:r>
-              <a:rPr sz="1200" b="1" i="0">
-                <a:solidFill>
-                  <a:srgbClr val="64748B"/>
-                </a:solidFill>
-                <a:latin typeface="Montserrat"/>
-              </a:rPr>
-              <a:t>APARTADO 3.4.2 · COMERCIOS</a:t>
+              <a:rPr sz="1300" b="1" i="0">
+                <a:solidFill>
+                  <a:srgbClr val="E8801A"/>
+                </a:solidFill>
+                <a:latin typeface="Montserrat"/>
+              </a:rPr>
+              <a:t>APARTADO 3.4.1.2 · JAULAS</a:t>
             </a:r>
           </a:p>
         </p:txBody>
@@ -10833,26 +12076,70 @@
           <a:lstStyle/>
           <a:p>
             <a:r>
-              <a:rPr sz="2700" b="1" i="0">
+              <a:rPr sz="2800" b="1" i="0">
                 <a:solidFill>
                   <a:srgbClr val="1E2761"/>
                 </a:solidFill>
                 <a:latin typeface="Montserrat"/>
               </a:rPr>
-              <a:t>La tienda se parte en 150 kg</a:t>
-            </a:r>
-          </a:p>
-        </p:txBody>
-      </p:sp>
-      <p:sp>
-        <p:nvSpPr>
-          <p:cNvPr id="7" name="TextBox 6"/>
+              <a:t>La jaula respira arriba y abajo</a:t>
+            </a:r>
+          </a:p>
+        </p:txBody>
+      </p:sp>
+      <p:sp>
+        <p:nvSpPr>
+          <p:cNvPr id="7" name="Rounded Rectangle 6"/>
+          <p:cNvSpPr/>
+          <p:nvPr/>
+        </p:nvSpPr>
+        <p:spPr>
+          <a:xfrm>
+            <a:off x="868680" y="1627632"/>
+            <a:ext cx="2011680" cy="73152"/>
+          </a:xfrm>
+          <a:prstGeom prst="roundRect">
+            <a:avLst/>
+          </a:prstGeom>
+          <a:solidFill>
+            <a:srgbClr val="E8801A"/>
+          </a:solidFill>
+          <a:ln>
+            <a:noFill/>
+          </a:ln>
+          <a:effectLst/>
+        </p:spPr>
+        <p:style>
+          <a:lnRef idx="1">
+            <a:schemeClr val="accent1"/>
+          </a:lnRef>
+          <a:fillRef idx="3">
+            <a:schemeClr val="accent1"/>
+          </a:fillRef>
+          <a:effectRef idx="2">
+            <a:schemeClr val="accent1"/>
+          </a:effectRef>
+          <a:fontRef idx="minor">
+            <a:schemeClr val="lt1"/>
+          </a:fontRef>
+        </p:style>
+        <p:txBody>
+          <a:bodyPr rtlCol="0" anchor="ctr"/>
+          <a:lstStyle/>
+          <a:p>
+            <a:pPr algn="ctr"/>
+          </a:p>
+        </p:txBody>
+      </p:sp>
+      <p:sp>
+        <p:nvSpPr>
+          <p:cNvPr id="8" name="TextBox 7"/>
           <p:cNvSpPr txBox="1"/>
           <p:nvPr/>
         </p:nvSpPr>
         <p:spPr>
           <a:xfrm>
-            <a:off x="822960" y="1920240"/>
+            <a:off x="822960" y="1965960"/>
             <a:ext cx="4983480" cy="4206240"/>
           </a:xfrm>
           <a:prstGeom prst="rect">
@@ -10868,17 +12155,17 @@
           <a:p>
             <a:pPr>
               <a:spcAft>
-                <a:spcPts val="1000"/>
+                <a:spcPts val="1100"/>
               </a:spcAft>
             </a:pPr>
             <a:r>
               <a:rPr sz="1600" b="1" i="0">
                 <a:solidFill>
-                  <a:srgbClr val="2E3A80"/>
-                </a:solidFill>
-                <a:latin typeface="Montserrat"/>
-              </a:rPr>
-              <a:t>•  </a:t>
+                  <a:srgbClr val="E8801A"/>
+                </a:solidFill>
+                <a:latin typeface="Montserrat"/>
+              </a:rPr>
+              <a:t>▸  </a:t>
             </a:r>
             <a:r>
               <a:rPr sz="1600" b="0" i="0">
@@ -10887,23 +12174,23 @@
                 </a:solidFill>
                 <a:latin typeface="Montserrat"/>
               </a:rPr>
-              <a:t>Envases inferiores a 15 kg y cartuchos</a:t>
+              <a:t>Material que no arde (A2-s3,d0)</a:t>
             </a:r>
           </a:p>
           <a:p>
             <a:pPr>
               <a:spcAft>
-                <a:spcPts val="1000"/>
+                <a:spcPts val="1100"/>
               </a:spcAft>
             </a:pPr>
             <a:r>
               <a:rPr sz="1600" b="1" i="0">
                 <a:solidFill>
-                  <a:srgbClr val="2E3A80"/>
-                </a:solidFill>
-                <a:latin typeface="Montserrat"/>
-              </a:rPr>
-              <a:t>•  </a:t>
+                  <a:srgbClr val="E8801A"/>
+                </a:solidFill>
+                <a:latin typeface="Montserrat"/>
+              </a:rPr>
+              <a:t>▸  </a:t>
             </a:r>
             <a:r>
               <a:rPr sz="1600" b="0" i="0">
@@ -10912,23 +12199,23 @@
                 </a:solidFill>
                 <a:latin typeface="Montserrat"/>
               </a:rPr>
-              <a:t>Hasta 150 kg: tienda pequeña</a:t>
+              <a:t>Ventilación superior e inferior</a:t>
             </a:r>
           </a:p>
           <a:p>
             <a:pPr>
               <a:spcAft>
-                <a:spcPts val="1000"/>
+                <a:spcPts val="1100"/>
               </a:spcAft>
             </a:pPr>
             <a:r>
               <a:rPr sz="1600" b="1" i="0">
                 <a:solidFill>
-                  <a:srgbClr val="2E3A80"/>
-                </a:solidFill>
-                <a:latin typeface="Montserrat"/>
-              </a:rPr>
-              <a:t>•  </a:t>
+                  <a:srgbClr val="E8801A"/>
+                </a:solidFill>
+                <a:latin typeface="Montserrat"/>
+              </a:rPr>
+              <a:t>▸  </a:t>
             </a:r>
             <a:r>
               <a:rPr sz="1600" b="0" i="0">
@@ -10937,39 +12224,14 @@
                 </a:solidFill>
                 <a:latin typeface="Montserrat"/>
               </a:rPr>
-              <a:t>De 150 a 500 kg: tienda grande</a:t>
-            </a:r>
-          </a:p>
-          <a:p>
-            <a:pPr>
-              <a:spcAft>
-                <a:spcPts val="1000"/>
-              </a:spcAft>
-            </a:pPr>
-            <a:r>
-              <a:rPr sz="1600" b="1" i="0">
-                <a:solidFill>
-                  <a:srgbClr val="2E3A80"/>
-                </a:solidFill>
-                <a:latin typeface="Montserrat"/>
-              </a:rPr>
-              <a:t>•  </a:t>
-            </a:r>
-            <a:r>
-              <a:rPr sz="1600" b="0" i="0">
-                <a:solidFill>
-                  <a:srgbClr val="1B2330"/>
-                </a:solidFill>
-                <a:latin typeface="Montserrat"/>
-              </a:rPr>
-              <a:t>Escaparate: solo envases vacíos</a:t>
-            </a:r>
-          </a:p>
-        </p:txBody>
-      </p:sp>
-      <p:sp>
-        <p:nvSpPr>
-          <p:cNvPr id="8" name="imgph" descr="IMGQ:hardware store gas bottles shelf"/>
+              <a:t>Cerradas al público fuera de servicio</a:t>
+            </a:r>
+          </a:p>
+        </p:txBody>
+      </p:sp>
+      <p:sp>
+        <p:nvSpPr>
+          <p:cNvPr id="9" name="imgph" descr="IMGQ:ventilated metal gas bottle cage"/>
           <p:cNvSpPr/>
           <p:nvPr/>
         </p:nvSpPr>
@@ -11015,7 +12277,7 @@
       </p:sp>
       <p:sp>
         <p:nvSpPr>
-          <p:cNvPr id="9" name="TextBox 8"/>
+          <p:cNvPr id="10" name="TextBox 9"/>
           <p:cNvSpPr txBox="1"/>
           <p:nvPr/>
         </p:nvSpPr>
@@ -11055,7 +12317,7 @@
                 </a:solidFill>
                 <a:latin typeface="Montserrat"/>
               </a:rPr>
-              <a:t>hardware store gas bottles shelf</a:t>
+              <a:t>ventilated metal gas bottle cage</a:t>
             </a:r>
           </a:p>
         </p:txBody>
@@ -11152,7 +12414,7 @@
                 </a:solidFill>
                 <a:latin typeface="Montserrat"/>
               </a:rPr>
-              <a:t>009 / 017</a:t>
+              <a:t>009 / 018</a:t>
             </a:r>
           </a:p>
         </p:txBody>
@@ -11200,7 +12462,7 @@
         <p:spPr>
           <a:xfrm>
             <a:off x="822960" y="457200"/>
-            <a:ext cx="8229600" cy="365760"/>
+            <a:ext cx="10058400" cy="365760"/>
           </a:xfrm>
           <a:prstGeom prst="rect">
             <a:avLst/>
@@ -11214,13 +12476,13 @@
           <a:lstStyle/>
           <a:p>
             <a:r>
-              <a:rPr sz="1200" b="1" i="0">
-                <a:solidFill>
-                  <a:srgbClr val="64748B"/>
-                </a:solidFill>
-                <a:latin typeface="Montserrat"/>
-              </a:rPr>
-              <a:t>APARTADO 3.4.2.1 · 150 A 500 KG</a:t>
+              <a:rPr sz="1300" b="1" i="0">
+                <a:solidFill>
+                  <a:srgbClr val="E8801A"/>
+                </a:solidFill>
+                <a:latin typeface="Montserrat"/>
+              </a:rPr>
+              <a:t>APARTADO 3.4.2 · COMERCIOS</a:t>
             </a:r>
           </a:p>
         </p:txBody>
@@ -11248,26 +12510,70 @@
           <a:lstStyle/>
           <a:p>
             <a:r>
-              <a:rPr sz="2700" b="1" i="0">
+              <a:rPr sz="2800" b="1" i="0">
                 <a:solidFill>
                   <a:srgbClr val="1E2761"/>
                 </a:solidFill>
                 <a:latin typeface="Montserrat"/>
               </a:rPr>
-              <a:t>Tienda grande, más exigente</a:t>
-            </a:r>
-          </a:p>
-        </p:txBody>
-      </p:sp>
-      <p:sp>
-        <p:nvSpPr>
-          <p:cNvPr id="7" name="TextBox 6"/>
+              <a:t>La tienda se parte en 150 kg</a:t>
+            </a:r>
+          </a:p>
+        </p:txBody>
+      </p:sp>
+      <p:sp>
+        <p:nvSpPr>
+          <p:cNvPr id="7" name="Rounded Rectangle 6"/>
+          <p:cNvSpPr/>
+          <p:nvPr/>
+        </p:nvSpPr>
+        <p:spPr>
+          <a:xfrm>
+            <a:off x="868680" y="1627632"/>
+            <a:ext cx="2011680" cy="73152"/>
+          </a:xfrm>
+          <a:prstGeom prst="roundRect">
+            <a:avLst/>
+          </a:prstGeom>
+          <a:solidFill>
+            <a:srgbClr val="E8801A"/>
+          </a:solidFill>
+          <a:ln>
+            <a:noFill/>
+          </a:ln>
+          <a:effectLst/>
+        </p:spPr>
+        <p:style>
+          <a:lnRef idx="1">
+            <a:schemeClr val="accent1"/>
+          </a:lnRef>
+          <a:fillRef idx="3">
+            <a:schemeClr val="accent1"/>
+          </a:fillRef>
+          <a:effectRef idx="2">
+            <a:schemeClr val="accent1"/>
+          </a:effectRef>
+          <a:fontRef idx="minor">
+            <a:schemeClr val="lt1"/>
+          </a:fontRef>
+        </p:style>
+        <p:txBody>
+          <a:bodyPr rtlCol="0" anchor="ctr"/>
+          <a:lstStyle/>
+          <a:p>
+            <a:pPr algn="ctr"/>
+          </a:p>
+        </p:txBody>
+      </p:sp>
+      <p:sp>
+        <p:nvSpPr>
+          <p:cNvPr id="8" name="TextBox 7"/>
           <p:cNvSpPr txBox="1"/>
           <p:nvPr/>
         </p:nvSpPr>
         <p:spPr>
           <a:xfrm>
-            <a:off x="822960" y="1920240"/>
+            <a:off x="822960" y="1965960"/>
             <a:ext cx="4983480" cy="4206240"/>
           </a:xfrm>
           <a:prstGeom prst="rect">
@@ -11283,17 +12589,17 @@
           <a:p>
             <a:pPr>
               <a:spcAft>
-                <a:spcPts val="1000"/>
+                <a:spcPts val="1100"/>
               </a:spcAft>
             </a:pPr>
             <a:r>
               <a:rPr sz="1600" b="1" i="0">
                 <a:solidFill>
-                  <a:srgbClr val="2E3A80"/>
-                </a:solidFill>
-                <a:latin typeface="Montserrat"/>
-              </a:rPr>
-              <a:t>•  </a:t>
+                  <a:srgbClr val="E8801A"/>
+                </a:solidFill>
+                <a:latin typeface="Montserrat"/>
+              </a:rPr>
+              <a:t>▸  </a:t>
             </a:r>
             <a:r>
               <a:rPr sz="1600" b="0" i="0">
@@ -11302,23 +12608,23 @@
                 </a:solidFill>
                 <a:latin typeface="Montserrat"/>
               </a:rPr>
-              <a:t>3 extintores 21A-113B</a:t>
+              <a:t>Envases inferiores a 15 kg y cartuchos</a:t>
             </a:r>
           </a:p>
           <a:p>
             <a:pPr>
               <a:spcAft>
-                <a:spcPts val="1000"/>
+                <a:spcPts val="1100"/>
               </a:spcAft>
             </a:pPr>
             <a:r>
               <a:rPr sz="1600" b="1" i="0">
                 <a:solidFill>
-                  <a:srgbClr val="2E3A80"/>
-                </a:solidFill>
-                <a:latin typeface="Montserrat"/>
-              </a:rPr>
-              <a:t>•  </a:t>
+                  <a:srgbClr val="E8801A"/>
+                </a:solidFill>
+                <a:latin typeface="Montserrat"/>
+              </a:rPr>
+              <a:t>▸  </a:t>
             </a:r>
             <a:r>
               <a:rPr sz="1600" b="0" i="0">
@@ -11327,23 +12633,23 @@
                 </a:solidFill>
                 <a:latin typeface="Montserrat"/>
               </a:rPr>
-              <a:t>Rejilla a ras de suelo: 400 cm²</a:t>
+              <a:t>Hasta 150 kg: tienda pequeña</a:t>
             </a:r>
           </a:p>
           <a:p>
             <a:pPr>
               <a:spcAft>
-                <a:spcPts val="1000"/>
+                <a:spcPts val="1100"/>
               </a:spcAft>
             </a:pPr>
             <a:r>
               <a:rPr sz="1600" b="1" i="0">
                 <a:solidFill>
-                  <a:srgbClr val="2E3A80"/>
-                </a:solidFill>
-                <a:latin typeface="Montserrat"/>
-              </a:rPr>
-              <a:t>•  </a:t>
+                  <a:srgbClr val="E8801A"/>
+                </a:solidFill>
+                <a:latin typeface="Montserrat"/>
+              </a:rPr>
+              <a:t>▸  </a:t>
             </a:r>
             <a:r>
               <a:rPr sz="1600" b="0" i="0">
@@ -11352,23 +12658,23 @@
                 </a:solidFill>
                 <a:latin typeface="Montserrat"/>
               </a:rPr>
-              <a:t>4 m a escaleras · 8 m a arquetas</a:t>
+              <a:t>De 150 a 500 kg: tienda grande</a:t>
             </a:r>
           </a:p>
           <a:p>
             <a:pPr>
               <a:spcAft>
-                <a:spcPts val="1000"/>
+                <a:spcPts val="1100"/>
               </a:spcAft>
             </a:pPr>
             <a:r>
               <a:rPr sz="1600" b="1" i="0">
                 <a:solidFill>
-                  <a:srgbClr val="2E3A80"/>
-                </a:solidFill>
-                <a:latin typeface="Montserrat"/>
-              </a:rPr>
-              <a:t>•  </a:t>
+                  <a:srgbClr val="E8801A"/>
+                </a:solidFill>
+                <a:latin typeface="Montserrat"/>
+              </a:rPr>
+              <a:t>▸  </a:t>
             </a:r>
             <a:r>
               <a:rPr sz="1600" b="0" i="0">
@@ -11377,14 +12683,14 @@
                 </a:solidFill>
                 <a:latin typeface="Montserrat"/>
               </a:rPr>
-              <a:t>Planta baja, nunca en sótano</a:t>
-            </a:r>
-          </a:p>
-        </p:txBody>
-      </p:sp>
-      <p:sp>
-        <p:nvSpPr>
-          <p:cNvPr id="8" name="imgph" descr="IMGQ:floor ventilation grille indoor"/>
+              <a:t>Escaparate: solo envases vacíos</a:t>
+            </a:r>
+          </a:p>
+        </p:txBody>
+      </p:sp>
+      <p:sp>
+        <p:nvSpPr>
+          <p:cNvPr id="9" name="imgph" descr="IMGQ:hardware store gas bottles shelf"/>
           <p:cNvSpPr/>
           <p:nvPr/>
         </p:nvSpPr>
@@ -11430,7 +12736,7 @@
       </p:sp>
       <p:sp>
         <p:nvSpPr>
-          <p:cNvPr id="9" name="TextBox 8"/>
+          <p:cNvPr id="10" name="TextBox 9"/>
           <p:cNvSpPr txBox="1"/>
           <p:nvPr/>
         </p:nvSpPr>
@@ -11470,7 +12776,7 @@
                 </a:solidFill>
                 <a:latin typeface="Montserrat"/>
               </a:rPr>
-              <a:t>floor ventilation grille indoor</a:t>
+              <a:t>hardware store gas bottles shelf</a:t>
             </a:r>
           </a:p>
         </p:txBody>

--- a/Curso Gas B/02 - ITC-ICG 02-03-04 - Almacenamiento GLP y plantas GNL/02 - ITC-ICG 02-03-04 - Almacenamiento GLP y plantas GNL - Vídeo 2.pptx
+++ b/Curso Gas B/02 - ITC-ICG 02-03-04 - Almacenamiento GLP y plantas GNL/02 - ITC-ICG 02-03-04 - Almacenamiento GLP y plantas GNL - Vídeo 2.pptx
@@ -23,6 +23,11 @@
     <p:sldId id="271" r:id="rId23"/>
     <p:sldId id="272" r:id="rId24"/>
     <p:sldId id="273" r:id="rId25"/>
+    <p:sldId id="274" r:id="rId26"/>
+    <p:sldId id="275" r:id="rId27"/>
+    <p:sldId id="276" r:id="rId28"/>
+    <p:sldId id="277" r:id="rId29"/>
+    <p:sldId id="278" r:id="rId30"/>
   </p:sldIdLst>
   <p:sldSz cx="12191695" cy="6858000" type="screen4x3"/>
   <p:notesSz cx="6858000" cy="9144000"/>
@@ -594,12 +599,12 @@
           <a:lstStyle/>
           <a:p>
             <a:r>
-              <a:t>N1: ¿Qué se le pide a la tienda grande, la de 150 a 500 kilos?</a:t>
-            </a:r>
-          </a:p>
-          <a:p>
-            <a:r>
-              <a:t>N2: Más cosas, porque hay más gas. Tres extintores de veintiuno a, ciento trece b cerca de la zona de venta. Ventilación directa a ras de suelo mediante una o más rejillas de al menos cuatrocientos centímetros cuadrados, sin que un lado sea más del doble que el otro; esa rejilla baja es la que deja salir el gas pesado si fuga. Las zonas van en planta baja, nunca por debajo del terreno. Y dos distancias de seguridad: cuatro metros a comunicaciones con escaleras, sótanos u otros locales de nivel inferior, y ocho metros a arquetas, tragaluces o bocas de alcantarillado que comuniquen con espacios de abajo. Remátalo con muros sin huecos hacia otros locales y techo o cubierta de material que no arde.</a:t>
+              <a:t>N1: La tienda se parte en ciento cincuenta kilos. Tenemos trescientos. ¿Qué dotación?</a:t>
+            </a:r>
+          </a:p>
+          <a:p>
+            <a:r>
+              <a:t>N2: Primero decide si es tienda pequeña o grande, y luego el extintor que le toca.</a:t>
             </a:r>
           </a:p>
         </p:txBody>
@@ -669,12 +674,12 @@
           <a:lstStyle/>
           <a:p>
             <a:r>
-              <a:t>N1: ¿Y la tienda pequeña, hasta 150 kilos?</a:t>
-            </a:r>
-          </a:p>
-          <a:p>
-            <a:r>
-              <a:t>N2: Aquí baja la exigencia porque baja el gas. Basta con dos extintores de trece a, cincuenta y cinco b en lugar accesible, separación de llamas y fuentes de calor, y la ventilación necesaria. Y hay una prohibición que cae fijo: nunca en sótano ni en semisótano. ¿Por qué? Por lo de siempre, el GLP pesa más que el aire y en un sótano se acumularía abajo sin poder ventilar. Los envases van ordenados o en jaulas, incluso en muebles expositores que cumplan las condiciones de ventilación. Y otra vez la frase de oro: en el escaparate, solo recipientes vacíos. Fíjate en el detalle que cruza el examen: la tienda pequeña lleva extintores trece a, cincuenta y cinco b, distintos de los veintiuno a, ciento trece b de la grande.</a:t>
+              <a:t>N1: ¿Por qué tres del veintiuno a, ciento trece b?</a:t>
+            </a:r>
+          </a:p>
+          <a:p>
+            <a:r>
+              <a:t>N2: Trescientos kilos está por encima de ciento cincuenta, así que es tienda grande, la más exigente: tres extintores de veintiuno a, ciento trece b. La pequeña, hasta ciento cincuenta, llevaría dos del trece a, cincuenta y cinco b. El truco es no confundir los dos tipos de extintor con las dos tiendas.</a:t>
             </a:r>
           </a:p>
         </p:txBody>
@@ -744,12 +749,12 @@
           <a:lstStyle/>
           <a:p>
             <a:r>
-              <a:t>N1: Has dicho que los carteles caen en examen, ¿cuáles son exactamente?</a:t>
-            </a:r>
-          </a:p>
-          <a:p>
-            <a:r>
-              <a:t>N2: En la tienda grande hay dos carteles diferentes, y conviene no confundirlos. En la entrada del establecimiento va uno genérico: prohibido fumar en las zonas señalizadas. Y junto a la zona de los envases va otro más concreto: prohibido fumar a menos de cinco metros de esta zona. El número que tienes que retener es ese cinco, asociado al cartel que está pegado a las bombonas. Son pregunta fácil si te suenan las frases tal cual. Y súmale que el establecimiento va separado de otros locales ajenos por muros sin huecos, para que un problema no se propague de un negocio a otro.</a:t>
+              <a:t>N1: ¿Qué se le pide a la tienda grande, la de 150 a 500 kilos?</a:t>
+            </a:r>
+          </a:p>
+          <a:p>
+            <a:r>
+              <a:t>N2: Más cosas, porque hay más gas. Tres extintores de veintiuno a, ciento trece b cerca de la zona de venta. Ventilación directa a ras de suelo mediante una o más rejillas de al menos cuatrocientos centímetros cuadrados, sin que un lado sea más del doble que el otro; esa rejilla baja es la que deja salir el gas pesado si fuga. Las zonas van en planta baja, nunca por debajo del terreno. Y dos distancias de seguridad: cuatro metros a comunicaciones con escaleras, sótanos u otros locales de nivel inferior, y ocho metros a arquetas, tragaluces o bocas de alcantarillado que comuniquen con espacios de abajo. Remátalo con muros sin huecos hacia otros locales y techo o cubierta de material que no arde.</a:t>
             </a:r>
           </a:p>
         </p:txBody>
@@ -819,12 +824,12 @@
           <a:lstStyle/>
           <a:p>
             <a:r>
-              <a:t>N1: ¿Qué papeles hacen falta para poner en marcha un centro de envases?</a:t>
-            </a:r>
-          </a:p>
-          <a:p>
-            <a:r>
-              <a:t>N2: Vamos por orden, porque aquí hay tres ideas que se cruzan. Primera: un centro de envases no necesita autorización administrativa previa; no pides permiso antes de construir. Segunda: hace falta proyecto de técnico facultativo competente solo en los centros grandes, primera, segunda y tercera; la cuarta y la quinta se libran del proyecto. Y tercera, la que más se olvida: la inspección por un organismo de control es para todo centro, grande o pequeño. Resume así la filosofía de Gas B: no se pide permiso, se hace, se inspecciona y se comunica después. Hacer y comunicar, no pedir permiso.</a:t>
+              <a:t>N1: ¿Y la tienda pequeña, hasta 150 kilos?</a:t>
+            </a:r>
+          </a:p>
+          <a:p>
+            <a:r>
+              <a:t>N2: Aquí baja la exigencia porque baja el gas. Basta con dos extintores de trece a, cincuenta y cinco b en lugar accesible, separación de llamas y fuentes de calor, y la ventilación necesaria. Y hay una prohibición que cae fijo: nunca en sótano ni en semisótano. ¿Por qué? Por lo de siempre, el GLP pesa más que el aire y en un sótano se acumularía abajo sin poder ventilar. Los envases van ordenados o en jaulas, incluso en muebles expositores que cumplan las condiciones de ventilación. Y otra vez la frase de oro: en el escaparate, solo recipientes vacíos. Fíjate en el detalle que cruza el examen: la tienda pequeña lleva extintores trece a, cincuenta y cinco b, distintos de los veintiuno a, ciento trece b de la grande.</a:t>
             </a:r>
           </a:p>
         </p:txBody>
@@ -894,12 +899,12 @@
           <a:lstStyle/>
           <a:p>
             <a:r>
-              <a:t>N1: Si no pido permiso antes, ¿cuándo aviso a la Administración?</a:t>
-            </a:r>
-          </a:p>
-          <a:p>
-            <a:r>
-              <a:t>N2: Después de la inspección favorable. El titular presenta ante el órgano competente de la Comunidad Autónoma tres cosas: sus datos y la ubicación con un plano descriptivo de detalle, el proyecto y certificado de dirección de obra si los hubo, y el certificado de inspección del organismo de control. Con esa documentación presentada, los centros de segunda, tercera, cuarta y quinta ya pueden ponerse en servicio. Ojo al matiz que cae: esa presentación te faculta para arrancar, pero no significa que la Administración dé su conformidad técnica. Tú respondes de que está bien hecho; el papel solo deja constancia.</a:t>
+              <a:t>N1: Has dicho que los carteles caen en examen, ¿cuáles son exactamente?</a:t>
+            </a:r>
+          </a:p>
+          <a:p>
+            <a:r>
+              <a:t>N2: En la tienda grande hay dos carteles diferentes, y conviene no confundirlos. En la entrada del establecimiento va uno genérico: prohibido fumar en las zonas señalizadas. Y junto a la zona de los envases va otro más concreto: prohibido fumar a menos de cinco metros de esta zona. El número que tienes que retener es ese cinco, asociado al cartel que está pegado a las bombonas. Son pregunta fácil si te suenan las frases tal cual. Y súmale que el establecimiento va separado de otros locales ajenos por muros sin huecos, para que un problema no se propague de un negocio a otro.</a:t>
             </a:r>
           </a:p>
         </p:txBody>
@@ -969,12 +974,12 @@
           <a:lstStyle/>
           <a:p>
             <a:r>
-              <a:t>N1: Una vez en marcha, ¿cómo se vigila el centro?</a:t>
-            </a:r>
-          </a:p>
-          <a:p>
-            <a:r>
-              <a:t>N2: Con una inspección periódica cada dos años, hecha por un organismo de control. En esa visita comprueban dos cosas: que no se ha superado la capacidad total de almacenamiento que comunicaste, y que se siguen cumpliendo todas las medidas de seguridad. El organismo emite un certificado de inspección, entrega copia al titular y manda otra a la Comunidad Autónoma. Y aquí está el mecanismo genial con el que el sistema se autovigila: no se suministra GLP a ningún centro si el titular no acredita, con copia de ese certificado favorable, que la inspección se ha hecho en plazo. Sin papel, no hay gas. Ese certificado es, literalmente, la llave del suministro, y el titular es quien debe tenerlo al día.</a:t>
+              <a:t>N1: ¿Qué papeles hacen falta para poner en marcha un centro de envases?</a:t>
+            </a:r>
+          </a:p>
+          <a:p>
+            <a:r>
+              <a:t>N2: Vamos por orden, porque aquí hay tres ideas que se cruzan. Primera: un centro de envases no necesita autorización administrativa previa; no pides permiso antes de construir. Segunda: hace falta proyecto de técnico facultativo competente solo en los centros grandes, primera, segunda y tercera; la cuarta y la quinta se libran del proyecto. Y tercera, la que más se olvida: la inspección por un organismo de control es para todo centro, grande o pequeño. Resume así la filosofía de Gas B: no se pide permiso, se hace, se inspecciona y se comunica después. Hacer y comunicar, no pedir permiso.</a:t>
             </a:r>
           </a:p>
         </p:txBody>
@@ -1044,12 +1049,12 @@
           <a:lstStyle/>
           <a:p>
             <a:r>
-              <a:t>N1: ¿Qué puedo llevar y cómo en mi propio coche?</a:t>
-            </a:r>
-          </a:p>
-          <a:p>
-            <a:r>
-              <a:t>N2: Dato preguntadísimo: en un vehículo particular solo puedes llevar dos envases de hasta quince kilos, ni uno más. Y siempre de pie y bien sujetos, con lo necesario para que no vuelquen durante el trayecto, porque un envase que cae puede golpear la válvula y fugar. Hay una prohibición que no falla: jamás aparques un vehículo con bombonas en un garaje subterráneo, otra vez por la lógica del gas pesado que se acumula abajo sin ventilar. La única excepción a lo de ir de pie son los envases nuevos o reparados y sin gas, cuando van de la fábrica a la planta: esos, al estar vacíos de verdad, pueden ir tumbados.</a:t>
+              <a:t>N1: Si no pido permiso antes, ¿cuándo aviso a la Administración?</a:t>
+            </a:r>
+          </a:p>
+          <a:p>
+            <a:r>
+              <a:t>N2: Después de la inspección favorable. El titular presenta ante el órgano competente de la Comunidad Autónoma tres cosas: sus datos y la ubicación con un plano descriptivo de detalle, el proyecto y certificado de dirección de obra si los hubo, y el certificado de inspección del organismo de control. Con esa documentación presentada, los centros de segunda, tercera, cuarta y quinta ya pueden ponerse en servicio. Ojo al matiz que cae: esa presentación te faculta para arrancar, pero no significa que la Administración dé su conformidad técnica. Tú respondes de que está bien hecho; el papel solo deja constancia.</a:t>
             </a:r>
           </a:p>
         </p:txBody>
@@ -1119,12 +1124,12 @@
           <a:lstStyle/>
           <a:p>
             <a:r>
-              <a:t>N1: ¿Y el camión que reparte las bombonas, qué reglas lleva?</a:t>
-            </a:r>
-          </a:p>
-          <a:p>
-            <a:r>
-              <a:t>N2: Tres detalles y una tabla. Primero, la caja del furgón tiene aberturas laterales y en la parte trasera, a ras del piso, para que si una botella fuga, el gas salga por abajo en vez de acumularse dentro. Segundo, cuando el camión entra a descargar en un sitio con más de quinientos kilos de GLP, un centro o una nave, monta el cortafuegos en el tubo de escape para que la chispa del motor no prenda la atmósfera; ese umbral de quinientos kilos va asociado al cortafuegos. Y tercero, los extintores dependen del tamaño del camión, con la frontera en tres mil quinientos kilos de peso máximo: por debajo, dos extintores de ocho a, treinta y cuatro b, uno en cabina y otro en la carga; por encima, el de la carga sube a trece a, cincuenta y cinco b. Ah, y prohibido llevar personas ajenas al servicio.</a:t>
+              <a:t>N1: Una vez en marcha, ¿cómo se vigila el centro?</a:t>
+            </a:r>
+          </a:p>
+          <a:p>
+            <a:r>
+              <a:t>N2: Con una inspección periódica cada dos años, hecha por un organismo de control. En esa visita comprueban dos cosas: que no se ha superado la capacidad total de almacenamiento que comunicaste, y que se siguen cumpliendo todas las medidas de seguridad. El organismo emite un certificado de inspección, entrega copia al titular y manda otra a la Comunidad Autónoma. Y aquí está el mecanismo genial con el que el sistema se autovigila: no se suministra GLP a ningún centro si el titular no acredita, con copia de ese certificado favorable, que la inspección se ha hecho en plazo. Sin papel, no hay gas. Ese certificado es, literalmente, la llave del suministro, y el titular es quien debe tenerlo al día.</a:t>
             </a:r>
           </a:p>
         </p:txBody>
@@ -1194,22 +1199,87 @@
           <a:lstStyle/>
           <a:p>
             <a:r>
-              <a:t>N1: Cerramos la ITC cero dos. ¿Qué me llevo de todo esto?</a:t>
-            </a:r>
-          </a:p>
-          <a:p>
-            <a:r>
-              <a:t>N2: Te llevas el terreno que más vas a pisar en la calle, y todo cuelga de la misma lógica de siempre: el gas pesa más que el aire. Por eso las jaulas ventilan arriba y abajo, por eso nunca hay bombonas en sótano ni coches con gas en garajes subterráneos, y por eso el camión lleva la caja con rejillas a ras de suelo. Encima de esa idea has colocado las cifras: quinientos kilos de tope en quinta, la tienda partida en ciento cincuenta, extintores veintiuno a ciento trece b en la grande y trece a cincuenta y cinco b en la pequeña, y en tu coche solo dos envases de hasta quince kilos.</a:t>
-            </a:r>
-          </a:p>
-          <a:p>
-            <a:r>
-              <a:t>N1: ¿Y cómo se pregunta esto, y qué papeles me quedan claros?</a:t>
-            </a:r>
-          </a:p>
-          <a:p>
-            <a:r>
-              <a:t>N2: En el examen te cruzan las cifras y los carteles: te dan unos kilos de tienda y esperan el extintor correcto, o te piden la frase exacta del cartel de los cinco metros. Y de papeleo te queda una regla limpia: proyecto solo en los centros grandes, inspección para todos, y puesta en servicio que se comunica a la Comunidad Autónoma, más la inspección cada dos años que es la llave del suministro. Con esto cierras la ITC cero dos entera. En el siguiente vídeo cambiamos de escenario y saltamos al depósito fijo de GLP, el del chalé y la urbanización sin gas natural. Nos vemos allí.</a:t>
+              <a:t>N1: ¿Qué puedo llevar y cómo en mi propio coche?</a:t>
+            </a:r>
+          </a:p>
+          <a:p>
+            <a:r>
+              <a:t>N2: Dato preguntadísimo: en un vehículo particular solo puedes llevar dos envases de hasta quince kilos, ni uno más. Y siempre de pie y bien sujetos, con lo necesario para que no vuelquen durante el trayecto, porque un envase que cae puede golpear la válvula y fugar. Hay una prohibición que no falla: jamás aparques un vehículo con bombonas en un garaje subterráneo, otra vez por la lógica del gas pesado que se acumula abajo sin ventilar. La única excepción a lo de ir de pie son los envases nuevos o reparados y sin gas, cuando van de la fábrica a la planta: esos, al estar vacíos de verdad, pueden ir tumbados.</a:t>
+            </a:r>
+          </a:p>
+        </p:txBody>
+      </p:sp>
+      <p:sp>
+        <p:nvSpPr>
+          <p:cNvPr id="4" name="Slide Number Placeholder 3"/>
+          <p:cNvSpPr>
+            <a:spLocks noGrp="1"/>
+          </p:cNvSpPr>
+          <p:nvPr>
+            <p:ph type="sldNum" idx="5" sz="quarter"/>
+          </p:nvPr>
+        </p:nvSpPr>
+        <p:spPr/>
+      </p:sp>
+    </p:spTree>
+  </p:cSld>
+  <p:clrMapOvr>
+    <a:masterClrMapping/>
+  </p:clrMapOvr>
+</p:notes>
+</file>
+
+<file path=ppt/notesSlides/notesSlide19.xml><?xml version="1.0" encoding="utf-8"?>
+<p:notes xmlns:a="http://schemas.openxmlformats.org/drawingml/2006/main" xmlns:p="http://schemas.openxmlformats.org/presentationml/2006/main" xmlns:r="http://schemas.openxmlformats.org/officeDocument/2006/relationships">
+  <p:cSld>
+    <p:spTree>
+      <p:nvGrpSpPr>
+        <p:cNvPr id="1" name=""/>
+        <p:cNvGrpSpPr/>
+        <p:nvPr/>
+      </p:nvGrpSpPr>
+      <p:grpSpPr>
+        <a:xfrm>
+          <a:off x="0" y="0"/>
+          <a:ext cx="0" cy="0"/>
+          <a:chOff x="0" y="0"/>
+          <a:chExt cx="0" cy="0"/>
+        </a:xfrm>
+      </p:grpSpPr>
+      <p:sp>
+        <p:nvSpPr>
+          <p:cNvPr id="2" name="Slide Image Placeholder 1"/>
+          <p:cNvSpPr>
+            <a:spLocks noGrp="1"/>
+          </p:cNvSpPr>
+          <p:nvPr>
+            <p:ph type="sldImg" idx="2"/>
+          </p:nvPr>
+        </p:nvSpPr>
+        <p:spPr/>
+      </p:sp>
+      <p:sp>
+        <p:nvSpPr>
+          <p:cNvPr id="3" name="Notes Placeholder 2"/>
+          <p:cNvSpPr>
+            <a:spLocks noGrp="1"/>
+          </p:cNvSpPr>
+          <p:nvPr>
+            <p:ph type="body" idx="3" sz="quarter"/>
+          </p:nvPr>
+        </p:nvSpPr>
+        <p:spPr/>
+        <p:txBody>
+          <a:bodyPr/>
+          <a:lstStyle/>
+          <a:p>
+            <a:r>
+              <a:t>N1: Dato preguntadísimo. En tu coche, ¿cuántas bombonas y de qué tamaño?</a:t>
+            </a:r>
+          </a:p>
+          <a:p>
+            <a:r>
+              <a:t>N2: Piensa en el límite estricto que fija el Reglamento para los particulares.</a:t>
             </a:r>
           </a:p>
         </p:txBody>
@@ -1285,6 +1355,316 @@
           <a:p>
             <a:r>
               <a:t>N2: Tres números que hoy caen seguro. El primero: quinientos kilos es el tope de la quinta categoría, la gasolinera y la tienda; por encima de ahí ya juegas en otra liga. El segundo: la inspección periódica del centro por un organismo de control es cada dos años, y sin ese papel no te llenan las bombonas. Y el tercero, muy preguntado: en tu coche particular solo puedes llevar dos envases de hasta quince kilos, ni uno más. Con estas tres ya tienes el mapa del vídeo.</a:t>
+            </a:r>
+          </a:p>
+        </p:txBody>
+      </p:sp>
+      <p:sp>
+        <p:nvSpPr>
+          <p:cNvPr id="4" name="Slide Number Placeholder 3"/>
+          <p:cNvSpPr>
+            <a:spLocks noGrp="1"/>
+          </p:cNvSpPr>
+          <p:nvPr>
+            <p:ph type="sldNum" idx="5" sz="quarter"/>
+          </p:nvPr>
+        </p:nvSpPr>
+        <p:spPr/>
+      </p:sp>
+    </p:spTree>
+  </p:cSld>
+  <p:clrMapOvr>
+    <a:masterClrMapping/>
+  </p:clrMapOvr>
+</p:notes>
+</file>
+
+<file path=ppt/notesSlides/notesSlide20.xml><?xml version="1.0" encoding="utf-8"?>
+<p:notes xmlns:a="http://schemas.openxmlformats.org/drawingml/2006/main" xmlns:p="http://schemas.openxmlformats.org/presentationml/2006/main" xmlns:r="http://schemas.openxmlformats.org/officeDocument/2006/relationships">
+  <p:cSld>
+    <p:spTree>
+      <p:nvGrpSpPr>
+        <p:cNvPr id="1" name=""/>
+        <p:cNvGrpSpPr/>
+        <p:nvPr/>
+      </p:nvGrpSpPr>
+      <p:grpSpPr>
+        <a:xfrm>
+          <a:off x="0" y="0"/>
+          <a:ext cx="0" cy="0"/>
+          <a:chOff x="0" y="0"/>
+          <a:chExt cx="0" cy="0"/>
+        </a:xfrm>
+      </p:grpSpPr>
+      <p:sp>
+        <p:nvSpPr>
+          <p:cNvPr id="2" name="Slide Image Placeholder 1"/>
+          <p:cNvSpPr>
+            <a:spLocks noGrp="1"/>
+          </p:cNvSpPr>
+          <p:nvPr>
+            <p:ph type="sldImg" idx="2"/>
+          </p:nvPr>
+        </p:nvSpPr>
+        <p:spPr/>
+      </p:sp>
+      <p:sp>
+        <p:nvSpPr>
+          <p:cNvPr id="3" name="Notes Placeholder 2"/>
+          <p:cNvSpPr>
+            <a:spLocks noGrp="1"/>
+          </p:cNvSpPr>
+          <p:nvPr>
+            <p:ph type="body" idx="3" sz="quarter"/>
+          </p:nvPr>
+        </p:nvSpPr>
+        <p:spPr/>
+        <p:txBody>
+          <a:bodyPr/>
+          <a:lstStyle/>
+          <a:p>
+            <a:r>
+              <a:t>N1: ¿Por qué solo dos y de hasta quince kilos?</a:t>
+            </a:r>
+          </a:p>
+          <a:p>
+            <a:r>
+              <a:t>N2: Porque el vehículo particular tiene la carga limitada a dos envases móviles de hasta quince kilos, ni uno más y nada de botellas grandes. Además van de pie y bien sujetas, y jamás aparcas con ellas en un garaje subterráneo. El truco: dos y quince, los dos números del coche.</a:t>
+            </a:r>
+          </a:p>
+        </p:txBody>
+      </p:sp>
+      <p:sp>
+        <p:nvSpPr>
+          <p:cNvPr id="4" name="Slide Number Placeholder 3"/>
+          <p:cNvSpPr>
+            <a:spLocks noGrp="1"/>
+          </p:cNvSpPr>
+          <p:nvPr>
+            <p:ph type="sldNum" idx="5" sz="quarter"/>
+          </p:nvPr>
+        </p:nvSpPr>
+        <p:spPr/>
+      </p:sp>
+    </p:spTree>
+  </p:cSld>
+  <p:clrMapOvr>
+    <a:masterClrMapping/>
+  </p:clrMapOvr>
+</p:notes>
+</file>
+
+<file path=ppt/notesSlides/notesSlide21.xml><?xml version="1.0" encoding="utf-8"?>
+<p:notes xmlns:a="http://schemas.openxmlformats.org/drawingml/2006/main" xmlns:p="http://schemas.openxmlformats.org/presentationml/2006/main" xmlns:r="http://schemas.openxmlformats.org/officeDocument/2006/relationships">
+  <p:cSld>
+    <p:spTree>
+      <p:nvGrpSpPr>
+        <p:cNvPr id="1" name=""/>
+        <p:cNvGrpSpPr/>
+        <p:nvPr/>
+      </p:nvGrpSpPr>
+      <p:grpSpPr>
+        <a:xfrm>
+          <a:off x="0" y="0"/>
+          <a:ext cx="0" cy="0"/>
+          <a:chOff x="0" y="0"/>
+          <a:chExt cx="0" cy="0"/>
+        </a:xfrm>
+      </p:grpSpPr>
+      <p:sp>
+        <p:nvSpPr>
+          <p:cNvPr id="2" name="Slide Image Placeholder 1"/>
+          <p:cNvSpPr>
+            <a:spLocks noGrp="1"/>
+          </p:cNvSpPr>
+          <p:nvPr>
+            <p:ph type="sldImg" idx="2"/>
+          </p:nvPr>
+        </p:nvSpPr>
+        <p:spPr/>
+      </p:sp>
+      <p:sp>
+        <p:nvSpPr>
+          <p:cNvPr id="3" name="Notes Placeholder 2"/>
+          <p:cNvSpPr>
+            <a:spLocks noGrp="1"/>
+          </p:cNvSpPr>
+          <p:nvPr>
+            <p:ph type="body" idx="3" sz="quarter"/>
+          </p:nvPr>
+        </p:nvSpPr>
+        <p:spPr/>
+        <p:txBody>
+          <a:bodyPr/>
+          <a:lstStyle/>
+          <a:p>
+            <a:r>
+              <a:t>N1: ¿Y el camión que reparte las bombonas, qué reglas lleva?</a:t>
+            </a:r>
+          </a:p>
+          <a:p>
+            <a:r>
+              <a:t>N2: Tres detalles y una tabla. Primero, la caja del furgón tiene aberturas laterales y en la parte trasera, a ras del piso, para que si una botella fuga, el gas salga por abajo en vez de acumularse dentro. Segundo, cuando el camión entra a descargar en un sitio con más de quinientos kilos de GLP, un centro o una nave, monta el cortafuegos en el tubo de escape para que la chispa del motor no prenda la atmósfera; ese umbral de quinientos kilos va asociado al cortafuegos. Y tercero, los extintores dependen del tamaño del camión, con la frontera en tres mil quinientos kilos de peso máximo: por debajo, dos extintores de ocho a, treinta y cuatro b, uno en cabina y otro en la carga; por encima, el de la carga sube a trece a, cincuenta y cinco b. Ah, y prohibido llevar personas ajenas al servicio.</a:t>
+            </a:r>
+          </a:p>
+        </p:txBody>
+      </p:sp>
+      <p:sp>
+        <p:nvSpPr>
+          <p:cNvPr id="4" name="Slide Number Placeholder 3"/>
+          <p:cNvSpPr>
+            <a:spLocks noGrp="1"/>
+          </p:cNvSpPr>
+          <p:nvPr>
+            <p:ph type="sldNum" idx="5" sz="quarter"/>
+          </p:nvPr>
+        </p:nvSpPr>
+        <p:spPr/>
+      </p:sp>
+    </p:spTree>
+  </p:cSld>
+  <p:clrMapOvr>
+    <a:masterClrMapping/>
+  </p:clrMapOvr>
+</p:notes>
+</file>
+
+<file path=ppt/notesSlides/notesSlide22.xml><?xml version="1.0" encoding="utf-8"?>
+<p:notes xmlns:a="http://schemas.openxmlformats.org/drawingml/2006/main" xmlns:p="http://schemas.openxmlformats.org/presentationml/2006/main" xmlns:r="http://schemas.openxmlformats.org/officeDocument/2006/relationships">
+  <p:cSld>
+    <p:spTree>
+      <p:nvGrpSpPr>
+        <p:cNvPr id="1" name=""/>
+        <p:cNvGrpSpPr/>
+        <p:nvPr/>
+      </p:nvGrpSpPr>
+      <p:grpSpPr>
+        <a:xfrm>
+          <a:off x="0" y="0"/>
+          <a:ext cx="0" cy="0"/>
+          <a:chOff x="0" y="0"/>
+          <a:chExt cx="0" cy="0"/>
+        </a:xfrm>
+      </p:grpSpPr>
+      <p:sp>
+        <p:nvSpPr>
+          <p:cNvPr id="2" name="Slide Image Placeholder 1"/>
+          <p:cNvSpPr>
+            <a:spLocks noGrp="1"/>
+          </p:cNvSpPr>
+          <p:nvPr>
+            <p:ph type="sldImg" idx="2"/>
+          </p:nvPr>
+        </p:nvSpPr>
+        <p:spPr/>
+      </p:sp>
+      <p:sp>
+        <p:nvSpPr>
+          <p:cNvPr id="3" name="Notes Placeholder 2"/>
+          <p:cNvSpPr>
+            <a:spLocks noGrp="1"/>
+          </p:cNvSpPr>
+          <p:nvPr>
+            <p:ph type="body" idx="3" sz="quarter"/>
+          </p:nvPr>
+        </p:nvSpPr>
+        <p:spPr/>
+        <p:txBody>
+          <a:bodyPr/>
+          <a:lstStyle/>
+          <a:p>
+            <a:r>
+              <a:t>N1: En un camión de reparto de más de tres mil quinientos kilos, ¿qué extintor lleva la carga?</a:t>
+            </a:r>
+          </a:p>
+          <a:p>
+            <a:r>
+              <a:t>N2: Esta tabla reparte los extintores del vehículo de reparto según su peso máximo autorizado, con la frontera en tres mil quinientos kilos. Lee cada fila con sus dos casillas, cabina y carga. Primera fila, camiones de hasta tres mil quinientos kilos: un extintor de ocho a, treinta y cuatro b en la cabina y otro igual en la carga. Segunda fila, camiones de más de tres mil quinientos: en cabina sigue el de ocho a, treinta y cuatro b, pero el de la carga sube a trece a, cincuenta y cinco b. Ejemplo: un furgón grande de butano llevará el de la carga de trece a, cincuenta y cinco b, más potente, porque transporta más gas.</a:t>
+            </a:r>
+          </a:p>
+        </p:txBody>
+      </p:sp>
+      <p:sp>
+        <p:nvSpPr>
+          <p:cNvPr id="4" name="Slide Number Placeholder 3"/>
+          <p:cNvSpPr>
+            <a:spLocks noGrp="1"/>
+          </p:cNvSpPr>
+          <p:nvPr>
+            <p:ph type="sldNum" idx="5" sz="quarter"/>
+          </p:nvPr>
+        </p:nvSpPr>
+        <p:spPr/>
+      </p:sp>
+    </p:spTree>
+  </p:cSld>
+  <p:clrMapOvr>
+    <a:masterClrMapping/>
+  </p:clrMapOvr>
+</p:notes>
+</file>
+
+<file path=ppt/notesSlides/notesSlide23.xml><?xml version="1.0" encoding="utf-8"?>
+<p:notes xmlns:a="http://schemas.openxmlformats.org/drawingml/2006/main" xmlns:p="http://schemas.openxmlformats.org/presentationml/2006/main" xmlns:r="http://schemas.openxmlformats.org/officeDocument/2006/relationships">
+  <p:cSld>
+    <p:spTree>
+      <p:nvGrpSpPr>
+        <p:cNvPr id="1" name=""/>
+        <p:cNvGrpSpPr/>
+        <p:nvPr/>
+      </p:nvGrpSpPr>
+      <p:grpSpPr>
+        <a:xfrm>
+          <a:off x="0" y="0"/>
+          <a:ext cx="0" cy="0"/>
+          <a:chOff x="0" y="0"/>
+          <a:chExt cx="0" cy="0"/>
+        </a:xfrm>
+      </p:grpSpPr>
+      <p:sp>
+        <p:nvSpPr>
+          <p:cNvPr id="2" name="Slide Image Placeholder 1"/>
+          <p:cNvSpPr>
+            <a:spLocks noGrp="1"/>
+          </p:cNvSpPr>
+          <p:nvPr>
+            <p:ph type="sldImg" idx="2"/>
+          </p:nvPr>
+        </p:nvSpPr>
+        <p:spPr/>
+      </p:sp>
+      <p:sp>
+        <p:nvSpPr>
+          <p:cNvPr id="3" name="Notes Placeholder 2"/>
+          <p:cNvSpPr>
+            <a:spLocks noGrp="1"/>
+          </p:cNvSpPr>
+          <p:nvPr>
+            <p:ph type="body" idx="3" sz="quarter"/>
+          </p:nvPr>
+        </p:nvSpPr>
+        <p:spPr/>
+        <p:txBody>
+          <a:bodyPr/>
+          <a:lstStyle/>
+          <a:p>
+            <a:r>
+              <a:t>N1: Cerramos la ITC cero dos. ¿Qué me llevo de todo esto?</a:t>
+            </a:r>
+          </a:p>
+          <a:p>
+            <a:r>
+              <a:t>N2: Te llevas el terreno que más vas a pisar en la calle, y todo cuelga de la misma lógica de siempre: el gas pesa más que el aire. Por eso las jaulas ventilan arriba y abajo, por eso nunca hay bombonas en sótano ni coches con gas en garajes subterráneos, y por eso el camión lleva la caja con rejillas a ras de suelo. Encima de esa idea has colocado las cifras: quinientos kilos de tope en quinta, la tienda partida en ciento cincuenta, extintores veintiuno a ciento trece b en la grande y trece a cincuenta y cinco b en la pequeña, y en tu coche solo dos envases de hasta quince kilos.</a:t>
+            </a:r>
+          </a:p>
+          <a:p>
+            <a:r>
+              <a:t>N1: ¿Y cómo se pregunta esto, y qué papeles me quedan claros?</a:t>
+            </a:r>
+          </a:p>
+          <a:p>
+            <a:r>
+              <a:t>N2: En el examen te cruzan las cifras y los carteles: te dan unos kilos de tienda y esperan el extintor correcto, o te piden la frase exacta del cartel de los cinco metros. Y de papeleo te queda una regla limpia: proyecto solo en los centros grandes, inspección para todos, y puesta en servicio que se comunica a la Comunidad Autónoma, más la inspección cada dos años que es la llave del suministro. Con esto cierras la ITC cero dos entera. En el siguiente vídeo cambiamos de escenario y saltamos al depósito fijo de GLP, el del chalé y la urbanización sin gas natural. Nos vemos allí.</a:t>
             </a:r>
           </a:p>
         </p:txBody>
@@ -4886,7 +5266,7 @@
       </p:sp>
       <p:sp>
         <p:nvSpPr>
-          <p:cNvPr id="4" name="Rounded Rectangle 3"/>
+          <p:cNvPr id="4" name="Rectangle 3"/>
           <p:cNvSpPr/>
           <p:nvPr/>
         </p:nvSpPr>
@@ -4895,7 +5275,7 @@
             <a:off x="868680" y="2057400"/>
             <a:ext cx="1463040" cy="82296"/>
           </a:xfrm>
-          <a:prstGeom prst="roundRect">
+          <a:prstGeom prst="rect">
             <a:avLst/>
           </a:prstGeom>
           <a:solidFill>
@@ -5012,6 +5392,18 @@
   <p:clrMapOvr>
     <a:masterClrMapping/>
   </p:clrMapOvr>
+  <mc:AlternateContent xmlns:mc="http://schemas.openxmlformats.org/markup-compatibility/2006">
+    <mc:Choice xmlns:p14="http://schemas.microsoft.com/office/powerpoint/2010/main" Requires="p14">
+      <p:transition spd="med" p14:dur="700">
+        <p14:cube dir="l"/>
+      </p:transition>
+    </mc:Choice>
+    <mc:Fallback>
+      <p:transition spd="med">
+        <p:push dir="l"/>
+      </p:transition>
+    </mc:Fallback>
+  </mc:AlternateContent>
 </p:sld>
 </file>
 
@@ -5099,7 +5491,7 @@
                 </a:solidFill>
                 <a:latin typeface="Montserrat"/>
               </a:rPr>
-              <a:t>010 / 018</a:t>
+              <a:t>010 / 023</a:t>
             </a:r>
           </a:p>
         </p:txBody>
@@ -5140,84 +5532,16 @@
       </p:sp>
       <p:sp>
         <p:nvSpPr>
-          <p:cNvPr id="5" name="TextBox 4"/>
-          <p:cNvSpPr txBox="1"/>
-          <p:nvPr/>
-        </p:nvSpPr>
-        <p:spPr>
-          <a:xfrm>
-            <a:off x="822960" y="457200"/>
-            <a:ext cx="10058400" cy="365760"/>
-          </a:xfrm>
-          <a:prstGeom prst="rect">
-            <a:avLst/>
-          </a:prstGeom>
-          <a:noFill/>
-        </p:spPr>
-        <p:txBody>
-          <a:bodyPr wrap="square">
-            <a:spAutoFit/>
-          </a:bodyPr>
-          <a:lstStyle/>
-          <a:p>
-            <a:r>
-              <a:rPr sz="1300" b="1" i="0">
-                <a:solidFill>
-                  <a:srgbClr val="E8801A"/>
-                </a:solidFill>
-                <a:latin typeface="Montserrat"/>
-              </a:rPr>
-              <a:t>APARTADO 3.4.2.1 · 150 A 500 KG</a:t>
-            </a:r>
-          </a:p>
-        </p:txBody>
-      </p:sp>
-      <p:sp>
-        <p:nvSpPr>
-          <p:cNvPr id="6" name="TextBox 5"/>
-          <p:cNvSpPr txBox="1"/>
-          <p:nvPr/>
-        </p:nvSpPr>
-        <p:spPr>
-          <a:xfrm>
-            <a:off x="822960" y="868680"/>
-            <a:ext cx="10515600" cy="914400"/>
-          </a:xfrm>
-          <a:prstGeom prst="rect">
-            <a:avLst/>
-          </a:prstGeom>
-          <a:noFill/>
-        </p:spPr>
-        <p:txBody>
-          <a:bodyPr wrap="square">
-            <a:spAutoFit/>
-          </a:bodyPr>
-          <a:lstStyle/>
-          <a:p>
-            <a:r>
-              <a:rPr sz="2800" b="1" i="0">
-                <a:solidFill>
-                  <a:srgbClr val="1E2761"/>
-                </a:solidFill>
-                <a:latin typeface="Montserrat"/>
-              </a:rPr>
-              <a:t>Tienda grande, más exigente</a:t>
-            </a:r>
-          </a:p>
-        </p:txBody>
-      </p:sp>
-      <p:sp>
-        <p:nvSpPr>
-          <p:cNvPr id="7" name="Rounded Rectangle 6"/>
+          <p:cNvPr id="5" name="Rectangle 4"/>
           <p:cNvSpPr/>
           <p:nvPr/>
         </p:nvSpPr>
         <p:spPr>
           <a:xfrm>
-            <a:off x="868680" y="1627632"/>
-            <a:ext cx="2011680" cy="73152"/>
-          </a:xfrm>
-          <a:prstGeom prst="roundRect">
+            <a:off x="0" y="0"/>
+            <a:ext cx="12191695" cy="1143000"/>
+          </a:xfrm>
+          <a:prstGeom prst="rect">
             <a:avLst/>
           </a:prstGeom>
           <a:solidFill>
@@ -5252,14 +5576,14 @@
       </p:sp>
       <p:sp>
         <p:nvSpPr>
-          <p:cNvPr id="8" name="TextBox 7"/>
+          <p:cNvPr id="6" name="TextBox 5"/>
           <p:cNvSpPr txBox="1"/>
           <p:nvPr/>
         </p:nvSpPr>
         <p:spPr>
           <a:xfrm>
-            <a:off x="822960" y="1965960"/>
-            <a:ext cx="4983480" cy="4206240"/>
+            <a:off x="822960" y="274320"/>
+            <a:ext cx="10515600" cy="640080"/>
           </a:xfrm>
           <a:prstGeom prst="rect">
             <a:avLst/>
@@ -5272,117 +5596,62 @@
           </a:bodyPr>
           <a:lstStyle/>
           <a:p>
-            <a:pPr>
-              <a:spcAft>
-                <a:spcPts val="1100"/>
-              </a:spcAft>
-            </a:pPr>
-            <a:r>
-              <a:rPr sz="1600" b="1" i="0">
-                <a:solidFill>
-                  <a:srgbClr val="E8801A"/>
-                </a:solidFill>
-                <a:latin typeface="Montserrat"/>
-              </a:rPr>
-              <a:t>▸  </a:t>
-            </a:r>
-            <a:r>
-              <a:rPr sz="1600" b="0" i="0">
-                <a:solidFill>
-                  <a:srgbClr val="1B2330"/>
-                </a:solidFill>
-                <a:latin typeface="Montserrat"/>
-              </a:rPr>
-              <a:t>3 extintores 21A-113B</a:t>
-            </a:r>
-          </a:p>
-          <a:p>
-            <a:pPr>
-              <a:spcAft>
-                <a:spcPts val="1100"/>
-              </a:spcAft>
-            </a:pPr>
-            <a:r>
-              <a:rPr sz="1600" b="1" i="0">
-                <a:solidFill>
-                  <a:srgbClr val="E8801A"/>
-                </a:solidFill>
-                <a:latin typeface="Montserrat"/>
-              </a:rPr>
-              <a:t>▸  </a:t>
-            </a:r>
-            <a:r>
-              <a:rPr sz="1600" b="0" i="0">
-                <a:solidFill>
-                  <a:srgbClr val="1B2330"/>
-                </a:solidFill>
-                <a:latin typeface="Montserrat"/>
-              </a:rPr>
-              <a:t>Rejilla a ras de suelo: 400 cm²</a:t>
-            </a:r>
-          </a:p>
-          <a:p>
-            <a:pPr>
-              <a:spcAft>
-                <a:spcPts val="1100"/>
-              </a:spcAft>
-            </a:pPr>
-            <a:r>
-              <a:rPr sz="1600" b="1" i="0">
-                <a:solidFill>
-                  <a:srgbClr val="E8801A"/>
-                </a:solidFill>
-                <a:latin typeface="Montserrat"/>
-              </a:rPr>
-              <a:t>▸  </a:t>
-            </a:r>
-            <a:r>
-              <a:rPr sz="1600" b="0" i="0">
-                <a:solidFill>
-                  <a:srgbClr val="1B2330"/>
-                </a:solidFill>
-                <a:latin typeface="Montserrat"/>
-              </a:rPr>
-              <a:t>4 m a escaleras · 8 m a arquetas</a:t>
-            </a:r>
-          </a:p>
-          <a:p>
-            <a:pPr>
-              <a:spcAft>
-                <a:spcPts val="1100"/>
-              </a:spcAft>
-            </a:pPr>
-            <a:r>
-              <a:rPr sz="1600" b="1" i="0">
-                <a:solidFill>
-                  <a:srgbClr val="E8801A"/>
-                </a:solidFill>
-                <a:latin typeface="Montserrat"/>
-              </a:rPr>
-              <a:t>▸  </a:t>
-            </a:r>
-            <a:r>
-              <a:rPr sz="1600" b="0" i="0">
-                <a:solidFill>
-                  <a:srgbClr val="1B2330"/>
-                </a:solidFill>
-                <a:latin typeface="Montserrat"/>
-              </a:rPr>
-              <a:t>Planta baja, nunca en sótano</a:t>
-            </a:r>
-          </a:p>
-        </p:txBody>
-      </p:sp>
-      <p:sp>
-        <p:nvSpPr>
-          <p:cNvPr id="9" name="imgph" descr="IMGQ:floor ventilation grille indoor"/>
+            <a:r>
+              <a:rPr sz="2400" b="1" i="0">
+                <a:solidFill>
+                  <a:srgbClr val="FFFFFF"/>
+                </a:solidFill>
+                <a:latin typeface="Montserrat"/>
+              </a:rPr>
+              <a:t>⚡  PREGUNTA RÁPIDA</a:t>
+            </a:r>
+          </a:p>
+        </p:txBody>
+      </p:sp>
+      <p:sp>
+        <p:nvSpPr>
+          <p:cNvPr id="7" name="TextBox 6"/>
+          <p:cNvSpPr txBox="1"/>
+          <p:nvPr/>
+        </p:nvSpPr>
+        <p:spPr>
+          <a:xfrm>
+            <a:off x="822960" y="1508760"/>
+            <a:ext cx="10515600" cy="1371600"/>
+          </a:xfrm>
+          <a:prstGeom prst="rect">
+            <a:avLst/>
+          </a:prstGeom>
+          <a:noFill/>
+        </p:spPr>
+        <p:txBody>
+          <a:bodyPr wrap="square">
+            <a:spAutoFit/>
+          </a:bodyPr>
+          <a:lstStyle/>
+          <a:p>
+            <a:r>
+              <a:rPr sz="2400" b="1" i="0">
+                <a:solidFill>
+                  <a:srgbClr val="1E2761"/>
+                </a:solidFill>
+                <a:latin typeface="Montserrat"/>
+              </a:rPr>
+              <a:t>En una tienda que almacena 300 kg de GLP, ¿cuántos extintores y de qué eficacia corresponden?</a:t>
+            </a:r>
+          </a:p>
+        </p:txBody>
+      </p:sp>
+      <p:sp>
+        <p:nvSpPr>
+          <p:cNvPr id="8" name="Rounded Rectangle 7"/>
           <p:cNvSpPr/>
           <p:nvPr/>
         </p:nvSpPr>
         <p:spPr>
           <a:xfrm>
-            <a:off x="5806440" y="1051560"/>
-            <a:ext cx="5298947" cy="4629150"/>
+            <a:off x="822960" y="3291840"/>
+            <a:ext cx="4983480" cy="1143000"/>
           </a:xfrm>
           <a:prstGeom prst="roundRect">
             <a:avLst/>
@@ -5421,14 +5690,58 @@
       </p:sp>
       <p:sp>
         <p:nvSpPr>
+          <p:cNvPr id="9" name="Rectangle 8"/>
+          <p:cNvSpPr/>
+          <p:nvPr/>
+        </p:nvSpPr>
+        <p:spPr>
+          <a:xfrm>
+            <a:off x="822960" y="3291840"/>
+            <a:ext cx="640080" cy="1143000"/>
+          </a:xfrm>
+          <a:prstGeom prst="rect">
+            <a:avLst/>
+          </a:prstGeom>
+          <a:solidFill>
+            <a:srgbClr val="1E2761"/>
+          </a:solidFill>
+          <a:ln>
+            <a:noFill/>
+          </a:ln>
+          <a:effectLst/>
+        </p:spPr>
+        <p:style>
+          <a:lnRef idx="1">
+            <a:schemeClr val="accent1"/>
+          </a:lnRef>
+          <a:fillRef idx="3">
+            <a:schemeClr val="accent1"/>
+          </a:fillRef>
+          <a:effectRef idx="2">
+            <a:schemeClr val="accent1"/>
+          </a:effectRef>
+          <a:fontRef idx="minor">
+            <a:schemeClr val="lt1"/>
+          </a:fontRef>
+        </p:style>
+        <p:txBody>
+          <a:bodyPr rtlCol="0" anchor="ctr"/>
+          <a:lstStyle/>
+          <a:p>
+            <a:pPr algn="ctr"/>
+          </a:p>
+        </p:txBody>
+      </p:sp>
+      <p:sp>
+        <p:nvSpPr>
           <p:cNvPr id="10" name="TextBox 9"/>
           <p:cNvSpPr txBox="1"/>
           <p:nvPr/>
         </p:nvSpPr>
         <p:spPr>
           <a:xfrm>
-            <a:off x="6080760" y="2726055"/>
-            <a:ext cx="4750307" cy="1280160"/>
+            <a:off x="822960" y="3611880"/>
+            <a:ext cx="640080" cy="548640"/>
           </a:xfrm>
           <a:prstGeom prst="rect">
             <a:avLst/>
@@ -5443,25 +5756,524 @@
           <a:p>
             <a:pPr algn="ctr"/>
             <a:r>
-              <a:rPr sz="1400" b="1" i="0">
-                <a:solidFill>
-                  <a:srgbClr val="64748B"/>
-                </a:solidFill>
-                <a:latin typeface="Montserrat"/>
-              </a:rPr>
-              <a:t>IMAGEN REALISTA</a:t>
-            </a:r>
-          </a:p>
+              <a:rPr sz="2200" b="1" i="0">
+                <a:solidFill>
+                  <a:srgbClr val="FFFFFF"/>
+                </a:solidFill>
+                <a:latin typeface="Montserrat"/>
+              </a:rPr>
+              <a:t>A</a:t>
+            </a:r>
+          </a:p>
+        </p:txBody>
+      </p:sp>
+      <p:sp>
+        <p:nvSpPr>
+          <p:cNvPr id="11" name="TextBox 10"/>
+          <p:cNvSpPr txBox="1"/>
+          <p:nvPr/>
+        </p:nvSpPr>
+        <p:spPr>
+          <a:xfrm>
+            <a:off x="1600200" y="3474720"/>
+            <a:ext cx="4114800" cy="868680"/>
+          </a:xfrm>
+          <a:prstGeom prst="rect">
+            <a:avLst/>
+          </a:prstGeom>
+          <a:noFill/>
+        </p:spPr>
+        <p:txBody>
+          <a:bodyPr wrap="square">
+            <a:spAutoFit/>
+          </a:bodyPr>
+          <a:lstStyle/>
+          <a:p>
+            <a:r>
+              <a:rPr sz="1400" b="0" i="0">
+                <a:solidFill>
+                  <a:srgbClr val="1B2330"/>
+                </a:solidFill>
+                <a:latin typeface="Montserrat"/>
+              </a:rPr>
+              <a:t>2 de 13A-55B</a:t>
+            </a:r>
+          </a:p>
+        </p:txBody>
+      </p:sp>
+      <p:sp>
+        <p:nvSpPr>
+          <p:cNvPr id="12" name="Rounded Rectangle 11"/>
+          <p:cNvSpPr/>
+          <p:nvPr/>
+        </p:nvSpPr>
+        <p:spPr>
+          <a:xfrm>
+            <a:off x="6355080" y="3291840"/>
+            <a:ext cx="4983480" cy="1143000"/>
+          </a:xfrm>
+          <a:prstGeom prst="roundRect">
+            <a:avLst/>
+          </a:prstGeom>
+          <a:solidFill>
+            <a:srgbClr val="F3F6FB"/>
+          </a:solidFill>
+          <a:ln w="12700">
+            <a:solidFill>
+              <a:srgbClr val="C7D2E6"/>
+            </a:solidFill>
+          </a:ln>
+          <a:effectLst/>
+        </p:spPr>
+        <p:style>
+          <a:lnRef idx="1">
+            <a:schemeClr val="accent1"/>
+          </a:lnRef>
+          <a:fillRef idx="3">
+            <a:schemeClr val="accent1"/>
+          </a:fillRef>
+          <a:effectRef idx="2">
+            <a:schemeClr val="accent1"/>
+          </a:effectRef>
+          <a:fontRef idx="minor">
+            <a:schemeClr val="lt1"/>
+          </a:fontRef>
+        </p:style>
+        <p:txBody>
+          <a:bodyPr rtlCol="0" anchor="ctr"/>
+          <a:lstStyle/>
           <a:p>
             <a:pPr algn="ctr"/>
-            <a:r>
-              <a:rPr sz="1100" b="0" i="1">
-                <a:solidFill>
-                  <a:srgbClr val="64748B"/>
-                </a:solidFill>
-                <a:latin typeface="Montserrat"/>
-              </a:rPr>
-              <a:t>floor ventilation grille indoor</a:t>
+          </a:p>
+        </p:txBody>
+      </p:sp>
+      <p:sp>
+        <p:nvSpPr>
+          <p:cNvPr id="13" name="Rectangle 12"/>
+          <p:cNvSpPr/>
+          <p:nvPr/>
+        </p:nvSpPr>
+        <p:spPr>
+          <a:xfrm>
+            <a:off x="6355080" y="3291840"/>
+            <a:ext cx="640080" cy="1143000"/>
+          </a:xfrm>
+          <a:prstGeom prst="rect">
+            <a:avLst/>
+          </a:prstGeom>
+          <a:solidFill>
+            <a:srgbClr val="1E2761"/>
+          </a:solidFill>
+          <a:ln>
+            <a:noFill/>
+          </a:ln>
+          <a:effectLst/>
+        </p:spPr>
+        <p:style>
+          <a:lnRef idx="1">
+            <a:schemeClr val="accent1"/>
+          </a:lnRef>
+          <a:fillRef idx="3">
+            <a:schemeClr val="accent1"/>
+          </a:fillRef>
+          <a:effectRef idx="2">
+            <a:schemeClr val="accent1"/>
+          </a:effectRef>
+          <a:fontRef idx="minor">
+            <a:schemeClr val="lt1"/>
+          </a:fontRef>
+        </p:style>
+        <p:txBody>
+          <a:bodyPr rtlCol="0" anchor="ctr"/>
+          <a:lstStyle/>
+          <a:p>
+            <a:pPr algn="ctr"/>
+          </a:p>
+        </p:txBody>
+      </p:sp>
+      <p:sp>
+        <p:nvSpPr>
+          <p:cNvPr id="14" name="TextBox 13"/>
+          <p:cNvSpPr txBox="1"/>
+          <p:nvPr/>
+        </p:nvSpPr>
+        <p:spPr>
+          <a:xfrm>
+            <a:off x="6355080" y="3611880"/>
+            <a:ext cx="640080" cy="548640"/>
+          </a:xfrm>
+          <a:prstGeom prst="rect">
+            <a:avLst/>
+          </a:prstGeom>
+          <a:noFill/>
+        </p:spPr>
+        <p:txBody>
+          <a:bodyPr wrap="square">
+            <a:spAutoFit/>
+          </a:bodyPr>
+          <a:lstStyle/>
+          <a:p>
+            <a:pPr algn="ctr"/>
+            <a:r>
+              <a:rPr sz="2200" b="1" i="0">
+                <a:solidFill>
+                  <a:srgbClr val="FFFFFF"/>
+                </a:solidFill>
+                <a:latin typeface="Montserrat"/>
+              </a:rPr>
+              <a:t>B</a:t>
+            </a:r>
+          </a:p>
+        </p:txBody>
+      </p:sp>
+      <p:sp>
+        <p:nvSpPr>
+          <p:cNvPr id="15" name="TextBox 14"/>
+          <p:cNvSpPr txBox="1"/>
+          <p:nvPr/>
+        </p:nvSpPr>
+        <p:spPr>
+          <a:xfrm>
+            <a:off x="7132320" y="3474720"/>
+            <a:ext cx="4114800" cy="868680"/>
+          </a:xfrm>
+          <a:prstGeom prst="rect">
+            <a:avLst/>
+          </a:prstGeom>
+          <a:noFill/>
+        </p:spPr>
+        <p:txBody>
+          <a:bodyPr wrap="square">
+            <a:spAutoFit/>
+          </a:bodyPr>
+          <a:lstStyle/>
+          <a:p>
+            <a:r>
+              <a:rPr sz="1400" b="0" i="0">
+                <a:solidFill>
+                  <a:srgbClr val="1B2330"/>
+                </a:solidFill>
+                <a:latin typeface="Montserrat"/>
+              </a:rPr>
+              <a:t>3 de 21A-113B</a:t>
+            </a:r>
+          </a:p>
+        </p:txBody>
+      </p:sp>
+      <p:sp>
+        <p:nvSpPr>
+          <p:cNvPr id="16" name="Rounded Rectangle 15"/>
+          <p:cNvSpPr/>
+          <p:nvPr/>
+        </p:nvSpPr>
+        <p:spPr>
+          <a:xfrm>
+            <a:off x="822960" y="4617720"/>
+            <a:ext cx="4983480" cy="1143000"/>
+          </a:xfrm>
+          <a:prstGeom prst="roundRect">
+            <a:avLst/>
+          </a:prstGeom>
+          <a:solidFill>
+            <a:srgbClr val="F3F6FB"/>
+          </a:solidFill>
+          <a:ln w="12700">
+            <a:solidFill>
+              <a:srgbClr val="C7D2E6"/>
+            </a:solidFill>
+          </a:ln>
+          <a:effectLst/>
+        </p:spPr>
+        <p:style>
+          <a:lnRef idx="1">
+            <a:schemeClr val="accent1"/>
+          </a:lnRef>
+          <a:fillRef idx="3">
+            <a:schemeClr val="accent1"/>
+          </a:fillRef>
+          <a:effectRef idx="2">
+            <a:schemeClr val="accent1"/>
+          </a:effectRef>
+          <a:fontRef idx="minor">
+            <a:schemeClr val="lt1"/>
+          </a:fontRef>
+        </p:style>
+        <p:txBody>
+          <a:bodyPr rtlCol="0" anchor="ctr"/>
+          <a:lstStyle/>
+          <a:p>
+            <a:pPr algn="ctr"/>
+          </a:p>
+        </p:txBody>
+      </p:sp>
+      <p:sp>
+        <p:nvSpPr>
+          <p:cNvPr id="17" name="Rectangle 16"/>
+          <p:cNvSpPr/>
+          <p:nvPr/>
+        </p:nvSpPr>
+        <p:spPr>
+          <a:xfrm>
+            <a:off x="822960" y="4617720"/>
+            <a:ext cx="640080" cy="1143000"/>
+          </a:xfrm>
+          <a:prstGeom prst="rect">
+            <a:avLst/>
+          </a:prstGeom>
+          <a:solidFill>
+            <a:srgbClr val="1E2761"/>
+          </a:solidFill>
+          <a:ln>
+            <a:noFill/>
+          </a:ln>
+          <a:effectLst/>
+        </p:spPr>
+        <p:style>
+          <a:lnRef idx="1">
+            <a:schemeClr val="accent1"/>
+          </a:lnRef>
+          <a:fillRef idx="3">
+            <a:schemeClr val="accent1"/>
+          </a:fillRef>
+          <a:effectRef idx="2">
+            <a:schemeClr val="accent1"/>
+          </a:effectRef>
+          <a:fontRef idx="minor">
+            <a:schemeClr val="lt1"/>
+          </a:fontRef>
+        </p:style>
+        <p:txBody>
+          <a:bodyPr rtlCol="0" anchor="ctr"/>
+          <a:lstStyle/>
+          <a:p>
+            <a:pPr algn="ctr"/>
+          </a:p>
+        </p:txBody>
+      </p:sp>
+      <p:sp>
+        <p:nvSpPr>
+          <p:cNvPr id="18" name="TextBox 17"/>
+          <p:cNvSpPr txBox="1"/>
+          <p:nvPr/>
+        </p:nvSpPr>
+        <p:spPr>
+          <a:xfrm>
+            <a:off x="822960" y="4937760"/>
+            <a:ext cx="640080" cy="548640"/>
+          </a:xfrm>
+          <a:prstGeom prst="rect">
+            <a:avLst/>
+          </a:prstGeom>
+          <a:noFill/>
+        </p:spPr>
+        <p:txBody>
+          <a:bodyPr wrap="square">
+            <a:spAutoFit/>
+          </a:bodyPr>
+          <a:lstStyle/>
+          <a:p>
+            <a:pPr algn="ctr"/>
+            <a:r>
+              <a:rPr sz="2200" b="1" i="0">
+                <a:solidFill>
+                  <a:srgbClr val="FFFFFF"/>
+                </a:solidFill>
+                <a:latin typeface="Montserrat"/>
+              </a:rPr>
+              <a:t>C</a:t>
+            </a:r>
+          </a:p>
+        </p:txBody>
+      </p:sp>
+      <p:sp>
+        <p:nvSpPr>
+          <p:cNvPr id="19" name="TextBox 18"/>
+          <p:cNvSpPr txBox="1"/>
+          <p:nvPr/>
+        </p:nvSpPr>
+        <p:spPr>
+          <a:xfrm>
+            <a:off x="1600200" y="4800600"/>
+            <a:ext cx="4114800" cy="868680"/>
+          </a:xfrm>
+          <a:prstGeom prst="rect">
+            <a:avLst/>
+          </a:prstGeom>
+          <a:noFill/>
+        </p:spPr>
+        <p:txBody>
+          <a:bodyPr wrap="square">
+            <a:spAutoFit/>
+          </a:bodyPr>
+          <a:lstStyle/>
+          <a:p>
+            <a:r>
+              <a:rPr sz="1400" b="0" i="0">
+                <a:solidFill>
+                  <a:srgbClr val="1B2330"/>
+                </a:solidFill>
+                <a:latin typeface="Montserrat"/>
+              </a:rPr>
+              <a:t>2 de 21A-113B</a:t>
+            </a:r>
+          </a:p>
+        </p:txBody>
+      </p:sp>
+      <p:sp>
+        <p:nvSpPr>
+          <p:cNvPr id="20" name="Rounded Rectangle 19"/>
+          <p:cNvSpPr/>
+          <p:nvPr/>
+        </p:nvSpPr>
+        <p:spPr>
+          <a:xfrm>
+            <a:off x="6355080" y="4617720"/>
+            <a:ext cx="4983480" cy="1143000"/>
+          </a:xfrm>
+          <a:prstGeom prst="roundRect">
+            <a:avLst/>
+          </a:prstGeom>
+          <a:solidFill>
+            <a:srgbClr val="F3F6FB"/>
+          </a:solidFill>
+          <a:ln w="12700">
+            <a:solidFill>
+              <a:srgbClr val="C7D2E6"/>
+            </a:solidFill>
+          </a:ln>
+          <a:effectLst/>
+        </p:spPr>
+        <p:style>
+          <a:lnRef idx="1">
+            <a:schemeClr val="accent1"/>
+          </a:lnRef>
+          <a:fillRef idx="3">
+            <a:schemeClr val="accent1"/>
+          </a:fillRef>
+          <a:effectRef idx="2">
+            <a:schemeClr val="accent1"/>
+          </a:effectRef>
+          <a:fontRef idx="minor">
+            <a:schemeClr val="lt1"/>
+          </a:fontRef>
+        </p:style>
+        <p:txBody>
+          <a:bodyPr rtlCol="0" anchor="ctr"/>
+          <a:lstStyle/>
+          <a:p>
+            <a:pPr algn="ctr"/>
+          </a:p>
+        </p:txBody>
+      </p:sp>
+      <p:sp>
+        <p:nvSpPr>
+          <p:cNvPr id="21" name="Rectangle 20"/>
+          <p:cNvSpPr/>
+          <p:nvPr/>
+        </p:nvSpPr>
+        <p:spPr>
+          <a:xfrm>
+            <a:off x="6355080" y="4617720"/>
+            <a:ext cx="640080" cy="1143000"/>
+          </a:xfrm>
+          <a:prstGeom prst="rect">
+            <a:avLst/>
+          </a:prstGeom>
+          <a:solidFill>
+            <a:srgbClr val="1E2761"/>
+          </a:solidFill>
+          <a:ln>
+            <a:noFill/>
+          </a:ln>
+          <a:effectLst/>
+        </p:spPr>
+        <p:style>
+          <a:lnRef idx="1">
+            <a:schemeClr val="accent1"/>
+          </a:lnRef>
+          <a:fillRef idx="3">
+            <a:schemeClr val="accent1"/>
+          </a:fillRef>
+          <a:effectRef idx="2">
+            <a:schemeClr val="accent1"/>
+          </a:effectRef>
+          <a:fontRef idx="minor">
+            <a:schemeClr val="lt1"/>
+          </a:fontRef>
+        </p:style>
+        <p:txBody>
+          <a:bodyPr rtlCol="0" anchor="ctr"/>
+          <a:lstStyle/>
+          <a:p>
+            <a:pPr algn="ctr"/>
+          </a:p>
+        </p:txBody>
+      </p:sp>
+      <p:sp>
+        <p:nvSpPr>
+          <p:cNvPr id="22" name="TextBox 21"/>
+          <p:cNvSpPr txBox="1"/>
+          <p:nvPr/>
+        </p:nvSpPr>
+        <p:spPr>
+          <a:xfrm>
+            <a:off x="6355080" y="4937760"/>
+            <a:ext cx="640080" cy="548640"/>
+          </a:xfrm>
+          <a:prstGeom prst="rect">
+            <a:avLst/>
+          </a:prstGeom>
+          <a:noFill/>
+        </p:spPr>
+        <p:txBody>
+          <a:bodyPr wrap="square">
+            <a:spAutoFit/>
+          </a:bodyPr>
+          <a:lstStyle/>
+          <a:p>
+            <a:pPr algn="ctr"/>
+            <a:r>
+              <a:rPr sz="2200" b="1" i="0">
+                <a:solidFill>
+                  <a:srgbClr val="FFFFFF"/>
+                </a:solidFill>
+                <a:latin typeface="Montserrat"/>
+              </a:rPr>
+              <a:t>D</a:t>
+            </a:r>
+          </a:p>
+        </p:txBody>
+      </p:sp>
+      <p:sp>
+        <p:nvSpPr>
+          <p:cNvPr id="23" name="TextBox 22"/>
+          <p:cNvSpPr txBox="1"/>
+          <p:nvPr/>
+        </p:nvSpPr>
+        <p:spPr>
+          <a:xfrm>
+            <a:off x="7132320" y="4800600"/>
+            <a:ext cx="4114800" cy="868680"/>
+          </a:xfrm>
+          <a:prstGeom prst="rect">
+            <a:avLst/>
+          </a:prstGeom>
+          <a:noFill/>
+        </p:spPr>
+        <p:txBody>
+          <a:bodyPr wrap="square">
+            <a:spAutoFit/>
+          </a:bodyPr>
+          <a:lstStyle/>
+          <a:p>
+            <a:r>
+              <a:rPr sz="1400" b="0" i="0">
+                <a:solidFill>
+                  <a:srgbClr val="1B2330"/>
+                </a:solidFill>
+                <a:latin typeface="Montserrat"/>
+              </a:rPr>
+              <a:t>5 de 21A-113B</a:t>
             </a:r>
           </a:p>
         </p:txBody>
@@ -5471,6 +6283,18 @@
   <p:clrMapOvr>
     <a:masterClrMapping/>
   </p:clrMapOvr>
+  <mc:AlternateContent xmlns:mc="http://schemas.openxmlformats.org/markup-compatibility/2006">
+    <mc:Choice xmlns:p14="http://schemas.microsoft.com/office/powerpoint/2010/main" Requires="p14">
+      <p:transition spd="med" p14:dur="700">
+        <p14:cube dir="r"/>
+      </p:transition>
+    </mc:Choice>
+    <mc:Fallback>
+      <p:transition spd="med">
+        <p:push dir="r"/>
+      </p:transition>
+    </mc:Fallback>
+  </mc:AlternateContent>
 </p:sld>
 </file>
 
@@ -5558,7 +6382,7 @@
                 </a:solidFill>
                 <a:latin typeface="Montserrat"/>
               </a:rPr>
-              <a:t>011 / 018</a:t>
+              <a:t>011 / 023</a:t>
             </a:r>
           </a:p>
         </p:txBody>
@@ -5599,88 +6423,20 @@
       </p:sp>
       <p:sp>
         <p:nvSpPr>
-          <p:cNvPr id="5" name="TextBox 4"/>
-          <p:cNvSpPr txBox="1"/>
-          <p:nvPr/>
-        </p:nvSpPr>
-        <p:spPr>
-          <a:xfrm>
-            <a:off x="822960" y="457200"/>
-            <a:ext cx="10058400" cy="365760"/>
-          </a:xfrm>
-          <a:prstGeom prst="rect">
-            <a:avLst/>
-          </a:prstGeom>
-          <a:noFill/>
-        </p:spPr>
-        <p:txBody>
-          <a:bodyPr wrap="square">
-            <a:spAutoFit/>
-          </a:bodyPr>
-          <a:lstStyle/>
-          <a:p>
-            <a:r>
-              <a:rPr sz="1300" b="1" i="0">
-                <a:solidFill>
-                  <a:srgbClr val="E8801A"/>
-                </a:solidFill>
-                <a:latin typeface="Montserrat"/>
-              </a:rPr>
-              <a:t>APARTADO 3.4.2.2 · HASTA 150 KG</a:t>
-            </a:r>
-          </a:p>
-        </p:txBody>
-      </p:sp>
-      <p:sp>
-        <p:nvSpPr>
-          <p:cNvPr id="6" name="TextBox 5"/>
-          <p:cNvSpPr txBox="1"/>
-          <p:nvPr/>
-        </p:nvSpPr>
-        <p:spPr>
-          <a:xfrm>
-            <a:off x="822960" y="868680"/>
-            <a:ext cx="10515600" cy="914400"/>
-          </a:xfrm>
-          <a:prstGeom prst="rect">
-            <a:avLst/>
-          </a:prstGeom>
-          <a:noFill/>
-        </p:spPr>
-        <p:txBody>
-          <a:bodyPr wrap="square">
-            <a:spAutoFit/>
-          </a:bodyPr>
-          <a:lstStyle/>
-          <a:p>
-            <a:r>
-              <a:rPr sz="2800" b="1" i="0">
-                <a:solidFill>
-                  <a:srgbClr val="1E2761"/>
-                </a:solidFill>
-                <a:latin typeface="Montserrat"/>
-              </a:rPr>
-              <a:t>Tienda pequeña, más suave</a:t>
-            </a:r>
-          </a:p>
-        </p:txBody>
-      </p:sp>
-      <p:sp>
-        <p:nvSpPr>
-          <p:cNvPr id="7" name="Rounded Rectangle 6"/>
+          <p:cNvPr id="5" name="Rectangle 4"/>
           <p:cNvSpPr/>
           <p:nvPr/>
         </p:nvSpPr>
         <p:spPr>
           <a:xfrm>
-            <a:off x="868680" y="1627632"/>
-            <a:ext cx="2011680" cy="73152"/>
-          </a:xfrm>
-          <a:prstGeom prst="roundRect">
+            <a:off x="0" y="0"/>
+            <a:ext cx="12191695" cy="1143000"/>
+          </a:xfrm>
+          <a:prstGeom prst="rect">
             <a:avLst/>
           </a:prstGeom>
           <a:solidFill>
-            <a:srgbClr val="E8801A"/>
+            <a:srgbClr val="1E8E4B"/>
           </a:solidFill>
           <a:ln>
             <a:noFill/>
@@ -5711,14 +6467,14 @@
       </p:sp>
       <p:sp>
         <p:nvSpPr>
-          <p:cNvPr id="8" name="TextBox 7"/>
+          <p:cNvPr id="6" name="TextBox 5"/>
           <p:cNvSpPr txBox="1"/>
           <p:nvPr/>
         </p:nvSpPr>
         <p:spPr>
           <a:xfrm>
-            <a:off x="822960" y="1965960"/>
-            <a:ext cx="4983480" cy="4206240"/>
+            <a:off x="822960" y="274320"/>
+            <a:ext cx="10515600" cy="640080"/>
           </a:xfrm>
           <a:prstGeom prst="rect">
             <a:avLst/>
@@ -5731,127 +6487,72 @@
           </a:bodyPr>
           <a:lstStyle/>
           <a:p>
-            <a:pPr>
-              <a:spcAft>
-                <a:spcPts val="1100"/>
-              </a:spcAft>
-            </a:pPr>
-            <a:r>
-              <a:rPr sz="1600" b="1" i="0">
-                <a:solidFill>
-                  <a:srgbClr val="E8801A"/>
-                </a:solidFill>
-                <a:latin typeface="Montserrat"/>
-              </a:rPr>
-              <a:t>▸  </a:t>
-            </a:r>
-            <a:r>
-              <a:rPr sz="1600" b="0" i="0">
-                <a:solidFill>
-                  <a:srgbClr val="1B2330"/>
-                </a:solidFill>
-                <a:latin typeface="Montserrat"/>
-              </a:rPr>
-              <a:t>2 extintores 13A-55B</a:t>
-            </a:r>
-          </a:p>
-          <a:p>
-            <a:pPr>
-              <a:spcAft>
-                <a:spcPts val="1100"/>
-              </a:spcAft>
-            </a:pPr>
-            <a:r>
-              <a:rPr sz="1600" b="1" i="0">
-                <a:solidFill>
-                  <a:srgbClr val="E8801A"/>
-                </a:solidFill>
-                <a:latin typeface="Montserrat"/>
-              </a:rPr>
-              <a:t>▸  </a:t>
-            </a:r>
-            <a:r>
-              <a:rPr sz="1600" b="0" i="0">
-                <a:solidFill>
-                  <a:srgbClr val="1B2330"/>
-                </a:solidFill>
-                <a:latin typeface="Montserrat"/>
-              </a:rPr>
-              <a:t>Ventilación necesaria</a:t>
-            </a:r>
-          </a:p>
-          <a:p>
-            <a:pPr>
-              <a:spcAft>
-                <a:spcPts val="1100"/>
-              </a:spcAft>
-            </a:pPr>
-            <a:r>
-              <a:rPr sz="1600" b="1" i="0">
-                <a:solidFill>
-                  <a:srgbClr val="E8801A"/>
-                </a:solidFill>
-                <a:latin typeface="Montserrat"/>
-              </a:rPr>
-              <a:t>▸  </a:t>
-            </a:r>
-            <a:r>
-              <a:rPr sz="1600" b="0" i="0">
-                <a:solidFill>
-                  <a:srgbClr val="1B2330"/>
-                </a:solidFill>
-                <a:latin typeface="Montserrat"/>
-              </a:rPr>
-              <a:t>Nunca en sótano ni semisótano</a:t>
-            </a:r>
-          </a:p>
-          <a:p>
-            <a:pPr>
-              <a:spcAft>
-                <a:spcPts val="1100"/>
-              </a:spcAft>
-            </a:pPr>
-            <a:r>
-              <a:rPr sz="1600" b="1" i="0">
-                <a:solidFill>
-                  <a:srgbClr val="E8801A"/>
-                </a:solidFill>
-                <a:latin typeface="Montserrat"/>
-              </a:rPr>
-              <a:t>▸  </a:t>
-            </a:r>
-            <a:r>
-              <a:rPr sz="1600" b="0" i="0">
-                <a:solidFill>
-                  <a:srgbClr val="1B2330"/>
-                </a:solidFill>
-                <a:latin typeface="Montserrat"/>
-              </a:rPr>
-              <a:t>Escaparate: solo recipientes vacíos</a:t>
-            </a:r>
-          </a:p>
-        </p:txBody>
-      </p:sp>
-      <p:sp>
-        <p:nvSpPr>
-          <p:cNvPr id="9" name="imgph" descr="IMGQ:small shop counter gas cartridges"/>
+            <a:r>
+              <a:rPr sz="2400" b="1" i="0">
+                <a:solidFill>
+                  <a:srgbClr val="FFFFFF"/>
+                </a:solidFill>
+                <a:latin typeface="Montserrat"/>
+              </a:rPr>
+              <a:t>✔  RESPUESTA:  B</a:t>
+            </a:r>
+          </a:p>
+        </p:txBody>
+      </p:sp>
+      <p:sp>
+        <p:nvSpPr>
+          <p:cNvPr id="7" name="TextBox 6"/>
+          <p:cNvSpPr txBox="1"/>
+          <p:nvPr/>
+        </p:nvSpPr>
+        <p:spPr>
+          <a:xfrm>
+            <a:off x="822960" y="1417320"/>
+            <a:ext cx="10515600" cy="914400"/>
+          </a:xfrm>
+          <a:prstGeom prst="rect">
+            <a:avLst/>
+          </a:prstGeom>
+          <a:noFill/>
+        </p:spPr>
+        <p:txBody>
+          <a:bodyPr wrap="square">
+            <a:spAutoFit/>
+          </a:bodyPr>
+          <a:lstStyle/>
+          <a:p>
+            <a:r>
+              <a:rPr sz="1800" b="1" i="0">
+                <a:solidFill>
+                  <a:srgbClr val="64748B"/>
+                </a:solidFill>
+                <a:latin typeface="Montserrat"/>
+              </a:rPr>
+              <a:t>En una tienda que almacena 300 kg de GLP, ¿cuántos extintores y de qué eficacia corresponden?</a:t>
+            </a:r>
+          </a:p>
+        </p:txBody>
+      </p:sp>
+      <p:sp>
+        <p:nvSpPr>
+          <p:cNvPr id="8" name="Rounded Rectangle 7"/>
           <p:cNvSpPr/>
           <p:nvPr/>
         </p:nvSpPr>
         <p:spPr>
           <a:xfrm>
-            <a:off x="5806440" y="1051560"/>
-            <a:ext cx="5298947" cy="4629150"/>
+            <a:off x="822960" y="2514600"/>
+            <a:ext cx="10515600" cy="914400"/>
           </a:xfrm>
           <a:prstGeom prst="roundRect">
             <a:avLst/>
           </a:prstGeom>
           <a:solidFill>
-            <a:srgbClr val="F3F6FB"/>
+            <a:srgbClr val="E9F6EE"/>
           </a:solidFill>
           <a:ln w="12700">
             <a:solidFill>
-              <a:srgbClr val="C7D2E6"/>
+              <a:srgbClr val="1E8E4B"/>
             </a:solidFill>
           </a:ln>
           <a:effectLst/>
@@ -5880,14 +6581,14 @@
       </p:sp>
       <p:sp>
         <p:nvSpPr>
-          <p:cNvPr id="10" name="TextBox 9"/>
+          <p:cNvPr id="9" name="TextBox 8"/>
           <p:cNvSpPr txBox="1"/>
           <p:nvPr/>
         </p:nvSpPr>
         <p:spPr>
           <a:xfrm>
-            <a:off x="6080760" y="2726055"/>
-            <a:ext cx="4750307" cy="1280160"/>
+            <a:off x="1097280" y="2697480"/>
+            <a:ext cx="10058400" cy="640080"/>
           </a:xfrm>
           <a:prstGeom prst="rect">
             <a:avLst/>
@@ -5900,27 +6601,66 @@
           </a:bodyPr>
           <a:lstStyle/>
           <a:p>
-            <a:pPr algn="ctr"/>
-            <a:r>
-              <a:rPr sz="1400" b="1" i="0">
-                <a:solidFill>
-                  <a:srgbClr val="64748B"/>
-                </a:solidFill>
-                <a:latin typeface="Montserrat"/>
-              </a:rPr>
-              <a:t>IMAGEN REALISTA</a:t>
-            </a:r>
-          </a:p>
-          <a:p>
-            <a:pPr algn="ctr"/>
-            <a:r>
-              <a:rPr sz="1100" b="0" i="1">
-                <a:solidFill>
-                  <a:srgbClr val="64748B"/>
-                </a:solidFill>
-                <a:latin typeface="Montserrat"/>
-              </a:rPr>
-              <a:t>small shop counter gas cartridges</a:t>
+            <a:r>
+              <a:rPr sz="1800" b="1" i="0">
+                <a:solidFill>
+                  <a:srgbClr val="1E8E4B"/>
+                </a:solidFill>
+                <a:latin typeface="Montserrat"/>
+              </a:rPr>
+              <a:t>B.  </a:t>
+            </a:r>
+            <a:r>
+              <a:rPr sz="1800" b="1" i="0">
+                <a:solidFill>
+                  <a:srgbClr val="1E2761"/>
+                </a:solidFill>
+                <a:latin typeface="Montserrat"/>
+              </a:rPr>
+              <a:t>3 de 21A-113B</a:t>
+            </a:r>
+          </a:p>
+        </p:txBody>
+      </p:sp>
+      <p:sp>
+        <p:nvSpPr>
+          <p:cNvPr id="10" name="TextBox 9"/>
+          <p:cNvSpPr txBox="1"/>
+          <p:nvPr/>
+        </p:nvSpPr>
+        <p:spPr>
+          <a:xfrm>
+            <a:off x="822960" y="3749039"/>
+            <a:ext cx="10515600" cy="2194560"/>
+          </a:xfrm>
+          <a:prstGeom prst="rect">
+            <a:avLst/>
+          </a:prstGeom>
+          <a:noFill/>
+        </p:spPr>
+        <p:txBody>
+          <a:bodyPr wrap="square">
+            <a:spAutoFit/>
+          </a:bodyPr>
+          <a:lstStyle/>
+          <a:p>
+            <a:r>
+              <a:rPr sz="1500" b="1" i="0">
+                <a:solidFill>
+                  <a:srgbClr val="E8801A"/>
+                </a:solidFill>
+                <a:latin typeface="Montserrat"/>
+              </a:rPr>
+              <a:t>Por qué:  </a:t>
+            </a:r>
+            <a:r>
+              <a:rPr sz="1500" b="0" i="0">
+                <a:solidFill>
+                  <a:srgbClr val="1B2330"/>
+                </a:solidFill>
+                <a:latin typeface="Montserrat"/>
+              </a:rPr>
+              <a:t>De 150 a 500 kg es tienda grande: le tocan 3 extintores de 21A-113B.</a:t>
             </a:r>
           </a:p>
         </p:txBody>
@@ -5930,6 +6670,18 @@
   <p:clrMapOvr>
     <a:masterClrMapping/>
   </p:clrMapOvr>
+  <mc:AlternateContent xmlns:mc="http://schemas.openxmlformats.org/markup-compatibility/2006">
+    <mc:Choice xmlns:p14="http://schemas.microsoft.com/office/powerpoint/2010/main" Requires="p14">
+      <p:transition spd="med" p14:dur="700">
+        <p14:cube dir="l"/>
+      </p:transition>
+    </mc:Choice>
+    <mc:Fallback>
+      <p:transition spd="med">
+        <p:push dir="l"/>
+      </p:transition>
+    </mc:Fallback>
+  </mc:AlternateContent>
 </p:sld>
 </file>
 
@@ -6017,7 +6769,7 @@
                 </a:solidFill>
                 <a:latin typeface="Montserrat"/>
               </a:rPr>
-              <a:t>012 / 018</a:t>
+              <a:t>012 / 023</a:t>
             </a:r>
           </a:p>
         </p:txBody>
@@ -6085,7 +6837,7 @@
                 </a:solidFill>
                 <a:latin typeface="Montserrat"/>
               </a:rPr>
-              <a:t>APARTADO 3.4.2 · CARTELES</a:t>
+              <a:t>APARTADO 3.4.2.1 · 150 A 500 KG</a:t>
             </a:r>
           </a:p>
         </p:txBody>
@@ -6119,14 +6871,14 @@
                 </a:solidFill>
                 <a:latin typeface="Montserrat"/>
               </a:rPr>
-              <a:t>Dos carteles distintos</a:t>
-            </a:r>
-          </a:p>
-        </p:txBody>
-      </p:sp>
-      <p:sp>
-        <p:nvSpPr>
-          <p:cNvPr id="7" name="Rounded Rectangle 6"/>
+              <a:t>Tienda grande, más exigente</a:t>
+            </a:r>
+          </a:p>
+        </p:txBody>
+      </p:sp>
+      <p:sp>
+        <p:nvSpPr>
+          <p:cNvPr id="7" name="Rectangle 6"/>
           <p:cNvSpPr/>
           <p:nvPr/>
         </p:nvSpPr>
@@ -6135,7 +6887,7 @@
             <a:off x="868680" y="1627632"/>
             <a:ext cx="2011680" cy="73152"/>
           </a:xfrm>
-          <a:prstGeom prst="roundRect">
+          <a:prstGeom prst="rect">
             <a:avLst/>
           </a:prstGeom>
           <a:solidFill>
@@ -6177,7 +6929,7 @@
         <p:spPr>
           <a:xfrm>
             <a:off x="822960" y="1965960"/>
-            <a:ext cx="4983480" cy="4206240"/>
+            <a:ext cx="5029200" cy="4206240"/>
           </a:xfrm>
           <a:prstGeom prst="rect">
             <a:avLst/>
@@ -6211,7 +6963,7 @@
                 </a:solidFill>
                 <a:latin typeface="Montserrat"/>
               </a:rPr>
-              <a:t>Entrada: prohibido fumar en zonas señalizadas</a:t>
+              <a:t>3 extintores 21A-113B</a:t>
             </a:r>
           </a:p>
           <a:p>
@@ -6236,7 +6988,7 @@
                 </a:solidFill>
                 <a:latin typeface="Montserrat"/>
               </a:rPr>
-              <a:t>Junto a envases: prohibido fumar a 5 m</a:t>
+              <a:t>Rejilla a ras de suelo: 400 cm²</a:t>
             </a:r>
           </a:p>
           <a:p>
@@ -6261,21 +7013,46 @@
                 </a:solidFill>
                 <a:latin typeface="Montserrat"/>
               </a:rPr>
-              <a:t>Muros sin huecos a otros locales</a:t>
-            </a:r>
-          </a:p>
-        </p:txBody>
-      </p:sp>
-      <p:sp>
-        <p:nvSpPr>
-          <p:cNvPr id="9" name="imgph" descr="IMGQ:no smoking warning sign shop"/>
+              <a:t>4 m a escaleras · 8 m a arquetas</a:t>
+            </a:r>
+          </a:p>
+          <a:p>
+            <a:pPr>
+              <a:spcAft>
+                <a:spcPts val="1100"/>
+              </a:spcAft>
+            </a:pPr>
+            <a:r>
+              <a:rPr sz="1600" b="1" i="0">
+                <a:solidFill>
+                  <a:srgbClr val="E8801A"/>
+                </a:solidFill>
+                <a:latin typeface="Montserrat"/>
+              </a:rPr>
+              <a:t>▸  </a:t>
+            </a:r>
+            <a:r>
+              <a:rPr sz="1600" b="0" i="0">
+                <a:solidFill>
+                  <a:srgbClr val="1B2330"/>
+                </a:solidFill>
+                <a:latin typeface="Montserrat"/>
+              </a:rPr>
+              <a:t>Planta baja, nunca en sótano</a:t>
+            </a:r>
+          </a:p>
+        </p:txBody>
+      </p:sp>
+      <p:sp>
+        <p:nvSpPr>
+          <p:cNvPr id="9" name="imgph" descr="IMGQ:floor ventilation grille indoor"/>
           <p:cNvSpPr/>
           <p:nvPr/>
         </p:nvSpPr>
         <p:spPr>
           <a:xfrm>
-            <a:off x="5806440" y="1051560"/>
-            <a:ext cx="5298947" cy="4629150"/>
+            <a:off x="6080760" y="1965960"/>
+            <a:ext cx="5303520" cy="4572000"/>
           </a:xfrm>
           <a:prstGeom prst="roundRect">
             <a:avLst/>
@@ -6320,8 +7097,8 @@
         </p:nvSpPr>
         <p:spPr>
           <a:xfrm>
-            <a:off x="6080760" y="2726055"/>
-            <a:ext cx="4750307" cy="1280160"/>
+            <a:off x="6355080" y="3611880"/>
+            <a:ext cx="4754880" cy="1280160"/>
           </a:xfrm>
           <a:prstGeom prst="rect">
             <a:avLst/>
@@ -6342,7 +7119,7 @@
                 </a:solidFill>
                 <a:latin typeface="Montserrat"/>
               </a:rPr>
-              <a:t>IMAGEN REALISTA</a:t>
+              <a:t>IMAGEN</a:t>
             </a:r>
           </a:p>
           <a:p>
@@ -6354,7 +7131,7 @@
                 </a:solidFill>
                 <a:latin typeface="Montserrat"/>
               </a:rPr>
-              <a:t>no smoking warning sign shop</a:t>
+              <a:t>floor ventilation grille indoor</a:t>
             </a:r>
           </a:p>
         </p:txBody>
@@ -6364,6 +7141,18 @@
   <p:clrMapOvr>
     <a:masterClrMapping/>
   </p:clrMapOvr>
+  <mc:AlternateContent xmlns:mc="http://schemas.openxmlformats.org/markup-compatibility/2006">
+    <mc:Choice xmlns:p14="http://schemas.microsoft.com/office/powerpoint/2010/main" Requires="p14">
+      <p:transition spd="med" p14:dur="700">
+        <p14:cube dir="r"/>
+      </p:transition>
+    </mc:Choice>
+    <mc:Fallback>
+      <p:transition spd="med">
+        <p:push dir="r"/>
+      </p:transition>
+    </mc:Fallback>
+  </mc:AlternateContent>
 </p:sld>
 </file>
 
@@ -6451,7 +7240,7 @@
                 </a:solidFill>
                 <a:latin typeface="Montserrat"/>
               </a:rPr>
-              <a:t>013 / 018</a:t>
+              <a:t>013 / 023</a:t>
             </a:r>
           </a:p>
         </p:txBody>
@@ -6519,7 +7308,7 @@
                 </a:solidFill>
                 <a:latin typeface="Montserrat"/>
               </a:rPr>
-              <a:t>APARTADO 4 · DOCUMENTACIÓN</a:t>
+              <a:t>APARTADO 3.4.2.2 · HASTA 150 KG</a:t>
             </a:r>
           </a:p>
         </p:txBody>
@@ -6553,14 +7342,14 @@
                 </a:solidFill>
                 <a:latin typeface="Montserrat"/>
               </a:rPr>
-              <a:t>Proyecto sí, proyecto no</a:t>
-            </a:r>
-          </a:p>
-        </p:txBody>
-      </p:sp>
-      <p:sp>
-        <p:nvSpPr>
-          <p:cNvPr id="7" name="Rounded Rectangle 6"/>
+              <a:t>Tienda pequeña, más suave</a:t>
+            </a:r>
+          </a:p>
+        </p:txBody>
+      </p:sp>
+      <p:sp>
+        <p:nvSpPr>
+          <p:cNvPr id="7" name="Rectangle 6"/>
           <p:cNvSpPr/>
           <p:nvPr/>
         </p:nvSpPr>
@@ -6569,7 +7358,7 @@
             <a:off x="868680" y="1627632"/>
             <a:ext cx="2011680" cy="73152"/>
           </a:xfrm>
-          <a:prstGeom prst="roundRect">
+          <a:prstGeom prst="rect">
             <a:avLst/>
           </a:prstGeom>
           <a:solidFill>
@@ -6610,8 +7399,8 @@
         </p:nvSpPr>
         <p:spPr>
           <a:xfrm>
-            <a:off x="822960" y="1965960"/>
-            <a:ext cx="4983480" cy="4206240"/>
+            <a:off x="6355080" y="1965960"/>
+            <a:ext cx="5029200" cy="4206240"/>
           </a:xfrm>
           <a:prstGeom prst="rect">
             <a:avLst/>
@@ -6645,7 +7434,7 @@
                 </a:solidFill>
                 <a:latin typeface="Montserrat"/>
               </a:rPr>
-              <a:t>Sin autorización administrativa previa</a:t>
+              <a:t>2 extintores 13A-55B</a:t>
             </a:r>
           </a:p>
           <a:p>
@@ -6670,7 +7459,7 @@
                 </a:solidFill>
                 <a:latin typeface="Montserrat"/>
               </a:rPr>
-              <a:t>Proyecto solo en 1.ª, 2.ª y 3.ª</a:t>
+              <a:t>Ventilación necesaria</a:t>
             </a:r>
           </a:p>
           <a:p>
@@ -6695,7 +7484,7 @@
                 </a:solidFill>
                 <a:latin typeface="Montserrat"/>
               </a:rPr>
-              <a:t>4.ª y 5.ª: sin proyecto</a:t>
+              <a:t>Nunca en sótano ni semisótano</a:t>
             </a:r>
           </a:p>
           <a:p>
@@ -6720,21 +7509,21 @@
                 </a:solidFill>
                 <a:latin typeface="Montserrat"/>
               </a:rPr>
-              <a:t>Inspección: para TODO centro</a:t>
-            </a:r>
-          </a:p>
-        </p:txBody>
-      </p:sp>
-      <p:sp>
-        <p:nvSpPr>
-          <p:cNvPr id="9" name="imgph" descr="IMGQ:engineer reviewing technical blueprint"/>
+              <a:t>Escaparate: solo recipientes vacíos</a:t>
+            </a:r>
+          </a:p>
+        </p:txBody>
+      </p:sp>
+      <p:sp>
+        <p:nvSpPr>
+          <p:cNvPr id="9" name="imgph" descr="IMGQ:small shop counter gas cartridges"/>
           <p:cNvSpPr/>
           <p:nvPr/>
         </p:nvSpPr>
         <p:spPr>
           <a:xfrm>
-            <a:off x="5806440" y="1051560"/>
-            <a:ext cx="5298947" cy="4629150"/>
+            <a:off x="822960" y="1965960"/>
+            <a:ext cx="5303520" cy="4572000"/>
           </a:xfrm>
           <a:prstGeom prst="roundRect">
             <a:avLst/>
@@ -6779,8 +7568,8 @@
         </p:nvSpPr>
         <p:spPr>
           <a:xfrm>
-            <a:off x="6080760" y="2726055"/>
-            <a:ext cx="4750307" cy="1280160"/>
+            <a:off x="1097280" y="3611880"/>
+            <a:ext cx="4754880" cy="1280160"/>
           </a:xfrm>
           <a:prstGeom prst="rect">
             <a:avLst/>
@@ -6801,7 +7590,7 @@
                 </a:solidFill>
                 <a:latin typeface="Montserrat"/>
               </a:rPr>
-              <a:t>IMAGEN REALISTA</a:t>
+              <a:t>IMAGEN</a:t>
             </a:r>
           </a:p>
           <a:p>
@@ -6813,7 +7602,7 @@
                 </a:solidFill>
                 <a:latin typeface="Montserrat"/>
               </a:rPr>
-              <a:t>engineer reviewing technical blueprint</a:t>
+              <a:t>small shop counter gas cartridges</a:t>
             </a:r>
           </a:p>
         </p:txBody>
@@ -6823,6 +7612,18 @@
   <p:clrMapOvr>
     <a:masterClrMapping/>
   </p:clrMapOvr>
+  <mc:AlternateContent xmlns:mc="http://schemas.openxmlformats.org/markup-compatibility/2006">
+    <mc:Choice xmlns:p14="http://schemas.microsoft.com/office/powerpoint/2010/main" Requires="p14">
+      <p:transition spd="med" p14:dur="700">
+        <p14:cube dir="l"/>
+      </p:transition>
+    </mc:Choice>
+    <mc:Fallback>
+      <p:transition spd="med">
+        <p:push dir="l"/>
+      </p:transition>
+    </mc:Fallback>
+  </mc:AlternateContent>
 </p:sld>
 </file>
 
@@ -6910,7 +7711,7 @@
                 </a:solidFill>
                 <a:latin typeface="Montserrat"/>
               </a:rPr>
-              <a:t>014 / 018</a:t>
+              <a:t>014 / 023</a:t>
             </a:r>
           </a:p>
         </p:txBody>
@@ -6978,7 +7779,7 @@
                 </a:solidFill>
                 <a:latin typeface="Montserrat"/>
               </a:rPr>
-              <a:t>APARTADO 4 · PUESTA EN SERVICIO</a:t>
+              <a:t>APARTADO 3.4.2 · CARTELES</a:t>
             </a:r>
           </a:p>
         </p:txBody>
@@ -7012,14 +7813,14 @@
                 </a:solidFill>
                 <a:latin typeface="Montserrat"/>
               </a:rPr>
-              <a:t>Se comunica a la Comunidad</a:t>
-            </a:r>
-          </a:p>
-        </p:txBody>
-      </p:sp>
-      <p:sp>
-        <p:nvSpPr>
-          <p:cNvPr id="7" name="Rounded Rectangle 6"/>
+              <a:t>Dos carteles distintos</a:t>
+            </a:r>
+          </a:p>
+        </p:txBody>
+      </p:sp>
+      <p:sp>
+        <p:nvSpPr>
+          <p:cNvPr id="7" name="Rectangle 6"/>
           <p:cNvSpPr/>
           <p:nvPr/>
         </p:nvSpPr>
@@ -7028,7 +7829,7 @@
             <a:off x="868680" y="1627632"/>
             <a:ext cx="2011680" cy="73152"/>
           </a:xfrm>
-          <a:prstGeom prst="roundRect">
+          <a:prstGeom prst="rect">
             <a:avLst/>
           </a:prstGeom>
           <a:solidFill>
@@ -7070,7 +7871,7 @@
         <p:spPr>
           <a:xfrm>
             <a:off x="822960" y="1965960"/>
-            <a:ext cx="4983480" cy="4206240"/>
+            <a:ext cx="5029200" cy="4206240"/>
           </a:xfrm>
           <a:prstGeom prst="rect">
             <a:avLst/>
@@ -7104,7 +7905,7 @@
                 </a:solidFill>
                 <a:latin typeface="Montserrat"/>
               </a:rPr>
-              <a:t>Datos del titular y plano de detalle</a:t>
+              <a:t>Entrada: prohibido fumar en zonas señalizadas</a:t>
             </a:r>
           </a:p>
           <a:p>
@@ -7129,7 +7930,7 @@
                 </a:solidFill>
                 <a:latin typeface="Montserrat"/>
               </a:rPr>
-              <a:t>Certificado de inspección</a:t>
+              <a:t>Junto a envases: prohibido fumar a 5 m</a:t>
             </a:r>
           </a:p>
           <a:p>
@@ -7154,46 +7955,21 @@
                 </a:solidFill>
                 <a:latin typeface="Montserrat"/>
               </a:rPr>
-              <a:t>La comunicación faculta el servicio</a:t>
-            </a:r>
-          </a:p>
-          <a:p>
-            <a:pPr>
-              <a:spcAft>
-                <a:spcPts val="1100"/>
-              </a:spcAft>
-            </a:pPr>
-            <a:r>
-              <a:rPr sz="1600" b="1" i="0">
-                <a:solidFill>
-                  <a:srgbClr val="E8801A"/>
-                </a:solidFill>
-                <a:latin typeface="Montserrat"/>
-              </a:rPr>
-              <a:t>▸  </a:t>
-            </a:r>
-            <a:r>
-              <a:rPr sz="1600" b="0" i="0">
-                <a:solidFill>
-                  <a:srgbClr val="1B2330"/>
-                </a:solidFill>
-                <a:latin typeface="Montserrat"/>
-              </a:rPr>
-              <a:t>No es conformidad de la Administración</a:t>
-            </a:r>
-          </a:p>
-        </p:txBody>
-      </p:sp>
-      <p:sp>
-        <p:nvSpPr>
-          <p:cNvPr id="9" name="imgph" descr="IMGQ:official documents folder stamp"/>
+              <a:t>Muros sin huecos a otros locales</a:t>
+            </a:r>
+          </a:p>
+        </p:txBody>
+      </p:sp>
+      <p:sp>
+        <p:nvSpPr>
+          <p:cNvPr id="9" name="imgph" descr="IMGQ:no smoking warning sign shop"/>
           <p:cNvSpPr/>
           <p:nvPr/>
         </p:nvSpPr>
         <p:spPr>
           <a:xfrm>
-            <a:off x="5806440" y="1051560"/>
-            <a:ext cx="5298947" cy="4629150"/>
+            <a:off x="6080760" y="1965960"/>
+            <a:ext cx="5303520" cy="4572000"/>
           </a:xfrm>
           <a:prstGeom prst="roundRect">
             <a:avLst/>
@@ -7238,8 +8014,8 @@
         </p:nvSpPr>
         <p:spPr>
           <a:xfrm>
-            <a:off x="6080760" y="2726055"/>
-            <a:ext cx="4750307" cy="1280160"/>
+            <a:off x="6355080" y="3611880"/>
+            <a:ext cx="4754880" cy="1280160"/>
           </a:xfrm>
           <a:prstGeom prst="rect">
             <a:avLst/>
@@ -7260,7 +8036,7 @@
                 </a:solidFill>
                 <a:latin typeface="Montserrat"/>
               </a:rPr>
-              <a:t>IMAGEN REALISTA</a:t>
+              <a:t>IMAGEN</a:t>
             </a:r>
           </a:p>
           <a:p>
@@ -7272,7 +8048,7 @@
                 </a:solidFill>
                 <a:latin typeface="Montserrat"/>
               </a:rPr>
-              <a:t>official documents folder stamp</a:t>
+              <a:t>no smoking warning sign shop</a:t>
             </a:r>
           </a:p>
         </p:txBody>
@@ -7282,6 +8058,18 @@
   <p:clrMapOvr>
     <a:masterClrMapping/>
   </p:clrMapOvr>
+  <mc:AlternateContent xmlns:mc="http://schemas.openxmlformats.org/markup-compatibility/2006">
+    <mc:Choice xmlns:p14="http://schemas.microsoft.com/office/powerpoint/2010/main" Requires="p14">
+      <p:transition spd="med" p14:dur="700">
+        <p14:cube dir="r"/>
+      </p:transition>
+    </mc:Choice>
+    <mc:Fallback>
+      <p:transition spd="med">
+        <p:push dir="r"/>
+      </p:transition>
+    </mc:Fallback>
+  </mc:AlternateContent>
 </p:sld>
 </file>
 
@@ -7369,7 +8157,7 @@
                 </a:solidFill>
                 <a:latin typeface="Montserrat"/>
               </a:rPr>
-              <a:t>015 / 018</a:t>
+              <a:t>015 / 023</a:t>
             </a:r>
           </a:p>
         </p:txBody>
@@ -7437,7 +8225,7 @@
                 </a:solidFill>
                 <a:latin typeface="Montserrat"/>
               </a:rPr>
-              <a:t>APARTADO 5 · MANTENIMIENTO</a:t>
+              <a:t>APARTADO 4 · DOCUMENTACIÓN</a:t>
             </a:r>
           </a:p>
         </p:txBody>
@@ -7471,14 +8259,14 @@
                 </a:solidFill>
                 <a:latin typeface="Montserrat"/>
               </a:rPr>
-              <a:t>Cada 2 años y la llave del gas</a:t>
-            </a:r>
-          </a:p>
-        </p:txBody>
-      </p:sp>
-      <p:sp>
-        <p:nvSpPr>
-          <p:cNvPr id="7" name="Rounded Rectangle 6"/>
+              <a:t>Proyecto sí, proyecto no</a:t>
+            </a:r>
+          </a:p>
+        </p:txBody>
+      </p:sp>
+      <p:sp>
+        <p:nvSpPr>
+          <p:cNvPr id="7" name="Rectangle 6"/>
           <p:cNvSpPr/>
           <p:nvPr/>
         </p:nvSpPr>
@@ -7487,7 +8275,7 @@
             <a:off x="868680" y="1627632"/>
             <a:ext cx="2011680" cy="73152"/>
           </a:xfrm>
-          <a:prstGeom prst="roundRect">
+          <a:prstGeom prst="rect">
             <a:avLst/>
           </a:prstGeom>
           <a:solidFill>
@@ -7528,8 +8316,8 @@
         </p:nvSpPr>
         <p:spPr>
           <a:xfrm>
-            <a:off x="822960" y="1965960"/>
-            <a:ext cx="4983480" cy="4206240"/>
+            <a:off x="6355080" y="1965960"/>
+            <a:ext cx="5029200" cy="4206240"/>
           </a:xfrm>
           <a:prstGeom prst="rect">
             <a:avLst/>
@@ -7563,7 +8351,7 @@
                 </a:solidFill>
                 <a:latin typeface="Montserrat"/>
               </a:rPr>
-              <a:t>Titular responsable del mantenimiento</a:t>
+              <a:t>Sin autorización administrativa previa</a:t>
             </a:r>
           </a:p>
           <a:p>
@@ -7588,7 +8376,7 @@
                 </a:solidFill>
                 <a:latin typeface="Montserrat"/>
               </a:rPr>
-              <a:t>Inspección cada 2 años</a:t>
+              <a:t>Proyecto solo en 1.ª, 2.ª y 3.ª</a:t>
             </a:r>
           </a:p>
           <a:p>
@@ -7613,7 +8401,7 @@
                 </a:solidFill>
                 <a:latin typeface="Montserrat"/>
               </a:rPr>
-              <a:t>No supera la capacidad comunicada</a:t>
+              <a:t>4.ª y 5.ª: sin proyecto</a:t>
             </a:r>
           </a:p>
           <a:p>
@@ -7638,21 +8426,21 @@
                 </a:solidFill>
                 <a:latin typeface="Montserrat"/>
               </a:rPr>
-              <a:t>Sin certificado favorable: no hay gas</a:t>
-            </a:r>
-          </a:p>
-        </p:txBody>
-      </p:sp>
-      <p:sp>
-        <p:nvSpPr>
-          <p:cNvPr id="9" name="imgph" descr="IMGQ:inspector checking gas installation"/>
+              <a:t>Inspección: para TODO centro</a:t>
+            </a:r>
+          </a:p>
+        </p:txBody>
+      </p:sp>
+      <p:sp>
+        <p:nvSpPr>
+          <p:cNvPr id="9" name="imgph" descr="IMGQ:engineer reviewing technical blueprint"/>
           <p:cNvSpPr/>
           <p:nvPr/>
         </p:nvSpPr>
         <p:spPr>
           <a:xfrm>
-            <a:off x="5806440" y="1051560"/>
-            <a:ext cx="5298947" cy="4629150"/>
+            <a:off x="822960" y="1965960"/>
+            <a:ext cx="5303520" cy="4572000"/>
           </a:xfrm>
           <a:prstGeom prst="roundRect">
             <a:avLst/>
@@ -7697,8 +8485,8 @@
         </p:nvSpPr>
         <p:spPr>
           <a:xfrm>
-            <a:off x="6080760" y="2726055"/>
-            <a:ext cx="4750307" cy="1280160"/>
+            <a:off x="1097280" y="3611880"/>
+            <a:ext cx="4754880" cy="1280160"/>
           </a:xfrm>
           <a:prstGeom prst="rect">
             <a:avLst/>
@@ -7719,7 +8507,7 @@
                 </a:solidFill>
                 <a:latin typeface="Montserrat"/>
               </a:rPr>
-              <a:t>IMAGEN REALISTA</a:t>
+              <a:t>IMAGEN</a:t>
             </a:r>
           </a:p>
           <a:p>
@@ -7731,7 +8519,7 @@
                 </a:solidFill>
                 <a:latin typeface="Montserrat"/>
               </a:rPr>
-              <a:t>inspector checking gas installation</a:t>
+              <a:t>engineer reviewing technical blueprint</a:t>
             </a:r>
           </a:p>
         </p:txBody>
@@ -7741,6 +8529,18 @@
   <p:clrMapOvr>
     <a:masterClrMapping/>
   </p:clrMapOvr>
+  <mc:AlternateContent xmlns:mc="http://schemas.openxmlformats.org/markup-compatibility/2006">
+    <mc:Choice xmlns:p14="http://schemas.microsoft.com/office/powerpoint/2010/main" Requires="p14">
+      <p:transition spd="med" p14:dur="700">
+        <p14:cube dir="l"/>
+      </p:transition>
+    </mc:Choice>
+    <mc:Fallback>
+      <p:transition spd="med">
+        <p:push dir="l"/>
+      </p:transition>
+    </mc:Fallback>
+  </mc:AlternateContent>
 </p:sld>
 </file>
 
@@ -7828,7 +8628,7 @@
                 </a:solidFill>
                 <a:latin typeface="Montserrat"/>
               </a:rPr>
-              <a:t>016 / 018</a:t>
+              <a:t>016 / 023</a:t>
             </a:r>
           </a:p>
         </p:txBody>
@@ -7896,7 +8696,7 @@
                 </a:solidFill>
                 <a:latin typeface="Montserrat"/>
               </a:rPr>
-              <a:t>APARTADO 6 · TRANSPORTE</a:t>
+              <a:t>APARTADO 4 · PUESTA EN SERVICIO</a:t>
             </a:r>
           </a:p>
         </p:txBody>
@@ -7930,14 +8730,14 @@
                 </a:solidFill>
                 <a:latin typeface="Montserrat"/>
               </a:rPr>
-              <a:t>Tu coche y las bombonas</a:t>
-            </a:r>
-          </a:p>
-        </p:txBody>
-      </p:sp>
-      <p:sp>
-        <p:nvSpPr>
-          <p:cNvPr id="7" name="Rounded Rectangle 6"/>
+              <a:t>Se comunica a la Comunidad</a:t>
+            </a:r>
+          </a:p>
+        </p:txBody>
+      </p:sp>
+      <p:sp>
+        <p:nvSpPr>
+          <p:cNvPr id="7" name="Rectangle 6"/>
           <p:cNvSpPr/>
           <p:nvPr/>
         </p:nvSpPr>
@@ -7946,7 +8746,7 @@
             <a:off x="868680" y="1627632"/>
             <a:ext cx="2011680" cy="73152"/>
           </a:xfrm>
-          <a:prstGeom prst="roundRect">
+          <a:prstGeom prst="rect">
             <a:avLst/>
           </a:prstGeom>
           <a:solidFill>
@@ -7988,7 +8788,7 @@
         <p:spPr>
           <a:xfrm>
             <a:off x="822960" y="1965960"/>
-            <a:ext cx="4983480" cy="4206240"/>
+            <a:ext cx="5029200" cy="4206240"/>
           </a:xfrm>
           <a:prstGeom prst="rect">
             <a:avLst/>
@@ -8022,7 +8822,7 @@
                 </a:solidFill>
                 <a:latin typeface="Montserrat"/>
               </a:rPr>
-              <a:t>Máximo 2 envases de hasta 15 kg</a:t>
+              <a:t>Datos del titular y plano de detalle</a:t>
             </a:r>
           </a:p>
           <a:p>
@@ -8047,7 +8847,7 @@
                 </a:solidFill>
                 <a:latin typeface="Montserrat"/>
               </a:rPr>
-              <a:t>Siempre de pie y sujetos</a:t>
+              <a:t>Certificado de inspección</a:t>
             </a:r>
           </a:p>
           <a:p>
@@ -8072,7 +8872,7 @@
                 </a:solidFill>
                 <a:latin typeface="Montserrat"/>
               </a:rPr>
-              <a:t>Prohibido aparcar en subterráneo</a:t>
+              <a:t>La comunicación faculta el servicio</a:t>
             </a:r>
           </a:p>
           <a:p>
@@ -8097,21 +8897,21 @@
                 </a:solidFill>
                 <a:latin typeface="Montserrat"/>
               </a:rPr>
-              <a:t>Nuevos y sin gas: pueden ir tumbados</a:t>
-            </a:r>
-          </a:p>
-        </p:txBody>
-      </p:sp>
-      <p:sp>
-        <p:nvSpPr>
-          <p:cNvPr id="9" name="imgph" descr="IMGQ:gas cylinders secured in van"/>
+              <a:t>No es conformidad de la Administración</a:t>
+            </a:r>
+          </a:p>
+        </p:txBody>
+      </p:sp>
+      <p:sp>
+        <p:nvSpPr>
+          <p:cNvPr id="9" name="imgph" descr="IMGQ:official documents folder stamp"/>
           <p:cNvSpPr/>
           <p:nvPr/>
         </p:nvSpPr>
         <p:spPr>
           <a:xfrm>
-            <a:off x="5806440" y="1051560"/>
-            <a:ext cx="5298947" cy="4629150"/>
+            <a:off x="6080760" y="1965960"/>
+            <a:ext cx="5303520" cy="4572000"/>
           </a:xfrm>
           <a:prstGeom prst="roundRect">
             <a:avLst/>
@@ -8156,8 +8956,8 @@
         </p:nvSpPr>
         <p:spPr>
           <a:xfrm>
-            <a:off x="6080760" y="2726055"/>
-            <a:ext cx="4750307" cy="1280160"/>
+            <a:off x="6355080" y="3611880"/>
+            <a:ext cx="4754880" cy="1280160"/>
           </a:xfrm>
           <a:prstGeom prst="rect">
             <a:avLst/>
@@ -8178,7 +8978,7 @@
                 </a:solidFill>
                 <a:latin typeface="Montserrat"/>
               </a:rPr>
-              <a:t>IMAGEN REALISTA</a:t>
+              <a:t>IMAGEN</a:t>
             </a:r>
           </a:p>
           <a:p>
@@ -8190,7 +8990,7 @@
                 </a:solidFill>
                 <a:latin typeface="Montserrat"/>
               </a:rPr>
-              <a:t>gas cylinders secured in van</a:t>
+              <a:t>official documents folder stamp</a:t>
             </a:r>
           </a:p>
         </p:txBody>
@@ -8200,6 +9000,18 @@
   <p:clrMapOvr>
     <a:masterClrMapping/>
   </p:clrMapOvr>
+  <mc:AlternateContent xmlns:mc="http://schemas.openxmlformats.org/markup-compatibility/2006">
+    <mc:Choice xmlns:p14="http://schemas.microsoft.com/office/powerpoint/2010/main" Requires="p14">
+      <p:transition spd="med" p14:dur="700">
+        <p14:cube dir="r"/>
+      </p:transition>
+    </mc:Choice>
+    <mc:Fallback>
+      <p:transition spd="med">
+        <p:push dir="r"/>
+      </p:transition>
+    </mc:Fallback>
+  </mc:AlternateContent>
 </p:sld>
 </file>
 
@@ -8287,7 +9099,7 @@
                 </a:solidFill>
                 <a:latin typeface="Montserrat"/>
               </a:rPr>
-              <a:t>017 / 018</a:t>
+              <a:t>017 / 023</a:t>
             </a:r>
           </a:p>
         </p:txBody>
@@ -8355,7 +9167,7 @@
                 </a:solidFill>
                 <a:latin typeface="Montserrat"/>
               </a:rPr>
-              <a:t>APARTADO 6 · REPARTO</a:t>
+              <a:t>APARTADO 5 · MANTENIMIENTO</a:t>
             </a:r>
           </a:p>
         </p:txBody>
@@ -8389,14 +9201,14 @@
                 </a:solidFill>
                 <a:latin typeface="Montserrat"/>
               </a:rPr>
-              <a:t>El furgón del butanero</a:t>
-            </a:r>
-          </a:p>
-        </p:txBody>
-      </p:sp>
-      <p:sp>
-        <p:nvSpPr>
-          <p:cNvPr id="7" name="Rounded Rectangle 6"/>
+              <a:t>Cada 2 años y la llave del gas</a:t>
+            </a:r>
+          </a:p>
+        </p:txBody>
+      </p:sp>
+      <p:sp>
+        <p:nvSpPr>
+          <p:cNvPr id="7" name="Rectangle 6"/>
           <p:cNvSpPr/>
           <p:nvPr/>
         </p:nvSpPr>
@@ -8405,7 +9217,7 @@
             <a:off x="868680" y="1627632"/>
             <a:ext cx="2011680" cy="73152"/>
           </a:xfrm>
-          <a:prstGeom prst="roundRect">
+          <a:prstGeom prst="rect">
             <a:avLst/>
           </a:prstGeom>
           <a:solidFill>
@@ -8446,8 +9258,8 @@
         </p:nvSpPr>
         <p:spPr>
           <a:xfrm>
-            <a:off x="822960" y="1965960"/>
-            <a:ext cx="4983480" cy="4206240"/>
+            <a:off x="6355080" y="1965960"/>
+            <a:ext cx="5029200" cy="4206240"/>
           </a:xfrm>
           <a:prstGeom prst="rect">
             <a:avLst/>
@@ -8481,7 +9293,7 @@
                 </a:solidFill>
                 <a:latin typeface="Montserrat"/>
               </a:rPr>
-              <a:t>Caja con rejillas laterales y traseras</a:t>
+              <a:t>Titular responsable del mantenimiento</a:t>
             </a:r>
           </a:p>
           <a:p>
@@ -8506,7 +9318,7 @@
                 </a:solidFill>
                 <a:latin typeface="Montserrat"/>
               </a:rPr>
-              <a:t>Cortafuegos al entrar donde hay &gt; 500 kg</a:t>
+              <a:t>Inspección cada 2 años</a:t>
             </a:r>
           </a:p>
           <a:p>
@@ -8531,7 +9343,7 @@
                 </a:solidFill>
                 <a:latin typeface="Montserrat"/>
               </a:rPr>
-              <a:t>PMA ≤ 3.500 kg: dos 8A-34B</a:t>
+              <a:t>No supera la capacidad comunicada</a:t>
             </a:r>
           </a:p>
           <a:p>
@@ -8556,21 +9368,21 @@
                 </a:solidFill>
                 <a:latin typeface="Montserrat"/>
               </a:rPr>
-              <a:t>PMA &gt; 3.500 kg: carga sube a 13A-55B</a:t>
-            </a:r>
-          </a:p>
-        </p:txBody>
-      </p:sp>
-      <p:sp>
-        <p:nvSpPr>
-          <p:cNvPr id="9" name="imgph" descr="IMGQ:delivery truck loaded gas cylinders"/>
+              <a:t>Sin certificado favorable: no hay gas</a:t>
+            </a:r>
+          </a:p>
+        </p:txBody>
+      </p:sp>
+      <p:sp>
+        <p:nvSpPr>
+          <p:cNvPr id="9" name="imgph" descr="IMGQ:inspector checking gas installation"/>
           <p:cNvSpPr/>
           <p:nvPr/>
         </p:nvSpPr>
         <p:spPr>
           <a:xfrm>
-            <a:off x="5806440" y="1051560"/>
-            <a:ext cx="5298947" cy="4629150"/>
+            <a:off x="822960" y="1965960"/>
+            <a:ext cx="5303520" cy="4572000"/>
           </a:xfrm>
           <a:prstGeom prst="roundRect">
             <a:avLst/>
@@ -8615,8 +9427,8 @@
         </p:nvSpPr>
         <p:spPr>
           <a:xfrm>
-            <a:off x="6080760" y="2726055"/>
-            <a:ext cx="4750307" cy="1280160"/>
+            <a:off x="1097280" y="3611880"/>
+            <a:ext cx="4754880" cy="1280160"/>
           </a:xfrm>
           <a:prstGeom prst="rect">
             <a:avLst/>
@@ -8637,7 +9449,7 @@
                 </a:solidFill>
                 <a:latin typeface="Montserrat"/>
               </a:rPr>
-              <a:t>IMAGEN REALISTA</a:t>
+              <a:t>IMAGEN</a:t>
             </a:r>
           </a:p>
           <a:p>
@@ -8649,7 +9461,7 @@
                 </a:solidFill>
                 <a:latin typeface="Montserrat"/>
               </a:rPr>
-              <a:t>delivery truck loaded gas cylinders</a:t>
+              <a:t>inspector checking gas installation</a:t>
             </a:r>
           </a:p>
         </p:txBody>
@@ -8659,6 +9471,18 @@
   <p:clrMapOvr>
     <a:masterClrMapping/>
   </p:clrMapOvr>
+  <mc:AlternateContent xmlns:mc="http://schemas.openxmlformats.org/markup-compatibility/2006">
+    <mc:Choice xmlns:p14="http://schemas.microsoft.com/office/powerpoint/2010/main" Requires="p14">
+      <p:transition spd="med" p14:dur="700">
+        <p14:cube dir="l"/>
+      </p:transition>
+    </mc:Choice>
+    <mc:Fallback>
+      <p:transition spd="med">
+        <p:push dir="l"/>
+      </p:transition>
+    </mc:Fallback>
+  </mc:AlternateContent>
 </p:sld>
 </file>
 
@@ -8687,7 +9511,7 @@
             <a:avLst/>
           </a:prstGeom>
           <a:solidFill>
-            <a:srgbClr val="1E2761"/>
+            <a:srgbClr val="FFFFFF"/>
           </a:solidFill>
           <a:ln>
             <a:noFill/>
@@ -8724,8 +9548,8 @@
         </p:nvSpPr>
         <p:spPr>
           <a:xfrm>
-            <a:off x="822960" y="640080"/>
-            <a:ext cx="10515600" cy="457200"/>
+            <a:off x="10607040" y="320040"/>
+            <a:ext cx="1371600" cy="365760"/>
           </a:xfrm>
           <a:prstGeom prst="rect">
             <a:avLst/>
@@ -8738,30 +9562,133 @@
           </a:bodyPr>
           <a:lstStyle/>
           <a:p>
-            <a:r>
-              <a:rPr sz="1400" b="1" i="0">
-                <a:solidFill>
-                  <a:srgbClr val="F4A24C"/>
-                </a:solidFill>
-                <a:latin typeface="Montserrat"/>
-              </a:rPr>
-              <a:t>LO QUE YA DOMINAS</a:t>
-            </a:r>
-          </a:p>
-        </p:txBody>
-      </p:sp>
-      <p:sp>
-        <p:nvSpPr>
-          <p:cNvPr id="4" name="Rounded Rectangle 3"/>
+            <a:pPr algn="r"/>
+            <a:r>
+              <a:rPr sz="1000" b="1" i="0">
+                <a:solidFill>
+                  <a:srgbClr val="64748B"/>
+                </a:solidFill>
+                <a:latin typeface="Montserrat"/>
+              </a:rPr>
+              <a:t>018 / 023</a:t>
+            </a:r>
+          </a:p>
+        </p:txBody>
+      </p:sp>
+      <p:sp>
+        <p:nvSpPr>
+          <p:cNvPr id="4" name="TextBox 3"/>
+          <p:cNvSpPr txBox="1"/>
+          <p:nvPr/>
+        </p:nvSpPr>
+        <p:spPr>
+          <a:xfrm>
+            <a:off x="457200" y="6419088"/>
+            <a:ext cx="8229600" cy="365760"/>
+          </a:xfrm>
+          <a:prstGeom prst="rect">
+            <a:avLst/>
+          </a:prstGeom>
+          <a:noFill/>
+        </p:spPr>
+        <p:txBody>
+          <a:bodyPr wrap="square">
+            <a:spAutoFit/>
+          </a:bodyPr>
+          <a:lstStyle/>
+          <a:p>
+            <a:r>
+              <a:rPr sz="900" b="0" i="0">
+                <a:solidFill>
+                  <a:srgbClr val="64748B"/>
+                </a:solidFill>
+                <a:latin typeface="Montserrat"/>
+              </a:rPr>
+              <a:t>Curso Gas B · Tema 02 · Centros de envases de GLP (II)</a:t>
+            </a:r>
+          </a:p>
+        </p:txBody>
+      </p:sp>
+      <p:sp>
+        <p:nvSpPr>
+          <p:cNvPr id="5" name="TextBox 4"/>
+          <p:cNvSpPr txBox="1"/>
+          <p:nvPr/>
+        </p:nvSpPr>
+        <p:spPr>
+          <a:xfrm>
+            <a:off x="822960" y="457200"/>
+            <a:ext cx="10058400" cy="365760"/>
+          </a:xfrm>
+          <a:prstGeom prst="rect">
+            <a:avLst/>
+          </a:prstGeom>
+          <a:noFill/>
+        </p:spPr>
+        <p:txBody>
+          <a:bodyPr wrap="square">
+            <a:spAutoFit/>
+          </a:bodyPr>
+          <a:lstStyle/>
+          <a:p>
+            <a:r>
+              <a:rPr sz="1300" b="1" i="0">
+                <a:solidFill>
+                  <a:srgbClr val="E8801A"/>
+                </a:solidFill>
+                <a:latin typeface="Montserrat"/>
+              </a:rPr>
+              <a:t>APARTADO 6 · TRANSPORTE</a:t>
+            </a:r>
+          </a:p>
+        </p:txBody>
+      </p:sp>
+      <p:sp>
+        <p:nvSpPr>
+          <p:cNvPr id="6" name="TextBox 5"/>
+          <p:cNvSpPr txBox="1"/>
+          <p:nvPr/>
+        </p:nvSpPr>
+        <p:spPr>
+          <a:xfrm>
+            <a:off x="822960" y="868680"/>
+            <a:ext cx="10515600" cy="914400"/>
+          </a:xfrm>
+          <a:prstGeom prst="rect">
+            <a:avLst/>
+          </a:prstGeom>
+          <a:noFill/>
+        </p:spPr>
+        <p:txBody>
+          <a:bodyPr wrap="square">
+            <a:spAutoFit/>
+          </a:bodyPr>
+          <a:lstStyle/>
+          <a:p>
+            <a:r>
+              <a:rPr sz="2800" b="1" i="0">
+                <a:solidFill>
+                  <a:srgbClr val="1E2761"/>
+                </a:solidFill>
+                <a:latin typeface="Montserrat"/>
+              </a:rPr>
+              <a:t>Tu coche y las bombonas</a:t>
+            </a:r>
+          </a:p>
+        </p:txBody>
+      </p:sp>
+      <p:sp>
+        <p:nvSpPr>
+          <p:cNvPr id="7" name="Rectangle 6"/>
           <p:cNvSpPr/>
           <p:nvPr/>
         </p:nvSpPr>
         <p:spPr>
           <a:xfrm>
-            <a:off x="868680" y="1051560"/>
-            <a:ext cx="1463040" cy="82296"/>
-          </a:xfrm>
-          <a:prstGeom prst="roundRect">
+            <a:off x="868680" y="1627632"/>
+            <a:ext cx="2011680" cy="73152"/>
+          </a:xfrm>
+          <a:prstGeom prst="rect">
             <a:avLst/>
           </a:prstGeom>
           <a:solidFill>
@@ -8796,14 +9723,14 @@
       </p:sp>
       <p:sp>
         <p:nvSpPr>
-          <p:cNvPr id="5" name="TextBox 4"/>
+          <p:cNvPr id="8" name="TextBox 7"/>
           <p:cNvSpPr txBox="1"/>
           <p:nvPr/>
         </p:nvSpPr>
         <p:spPr>
           <a:xfrm>
-            <a:off x="822960" y="1234440"/>
-            <a:ext cx="10515600" cy="1097280"/>
+            <a:off x="822960" y="1965960"/>
+            <a:ext cx="5029200" cy="4206240"/>
           </a:xfrm>
           <a:prstGeom prst="rect">
             <a:avLst/>
@@ -8816,28 +9743,163 @@
           </a:bodyPr>
           <a:lstStyle/>
           <a:p>
-            <a:r>
-              <a:rPr sz="3400" b="1" i="0">
-                <a:solidFill>
-                  <a:srgbClr val="FFFFFF"/>
-                </a:solidFill>
-                <a:latin typeface="Montserrat"/>
-              </a:rPr>
-              <a:t>Ya controlas la gasolinera, la tienda y el reparto</a:t>
-            </a:r>
-          </a:p>
-        </p:txBody>
-      </p:sp>
-      <p:sp>
-        <p:nvSpPr>
-          <p:cNvPr id="6" name="TextBox 5"/>
+            <a:pPr>
+              <a:spcAft>
+                <a:spcPts val="1100"/>
+              </a:spcAft>
+            </a:pPr>
+            <a:r>
+              <a:rPr sz="1600" b="1" i="0">
+                <a:solidFill>
+                  <a:srgbClr val="E8801A"/>
+                </a:solidFill>
+                <a:latin typeface="Montserrat"/>
+              </a:rPr>
+              <a:t>▸  </a:t>
+            </a:r>
+            <a:r>
+              <a:rPr sz="1600" b="0" i="0">
+                <a:solidFill>
+                  <a:srgbClr val="1B2330"/>
+                </a:solidFill>
+                <a:latin typeface="Montserrat"/>
+              </a:rPr>
+              <a:t>Máximo 2 envases de hasta 15 kg</a:t>
+            </a:r>
+          </a:p>
+          <a:p>
+            <a:pPr>
+              <a:spcAft>
+                <a:spcPts val="1100"/>
+              </a:spcAft>
+            </a:pPr>
+            <a:r>
+              <a:rPr sz="1600" b="1" i="0">
+                <a:solidFill>
+                  <a:srgbClr val="E8801A"/>
+                </a:solidFill>
+                <a:latin typeface="Montserrat"/>
+              </a:rPr>
+              <a:t>▸  </a:t>
+            </a:r>
+            <a:r>
+              <a:rPr sz="1600" b="0" i="0">
+                <a:solidFill>
+                  <a:srgbClr val="1B2330"/>
+                </a:solidFill>
+                <a:latin typeface="Montserrat"/>
+              </a:rPr>
+              <a:t>Siempre de pie y sujetos</a:t>
+            </a:r>
+          </a:p>
+          <a:p>
+            <a:pPr>
+              <a:spcAft>
+                <a:spcPts val="1100"/>
+              </a:spcAft>
+            </a:pPr>
+            <a:r>
+              <a:rPr sz="1600" b="1" i="0">
+                <a:solidFill>
+                  <a:srgbClr val="E8801A"/>
+                </a:solidFill>
+                <a:latin typeface="Montserrat"/>
+              </a:rPr>
+              <a:t>▸  </a:t>
+            </a:r>
+            <a:r>
+              <a:rPr sz="1600" b="0" i="0">
+                <a:solidFill>
+                  <a:srgbClr val="1B2330"/>
+                </a:solidFill>
+                <a:latin typeface="Montserrat"/>
+              </a:rPr>
+              <a:t>Prohibido aparcar en subterráneo</a:t>
+            </a:r>
+          </a:p>
+          <a:p>
+            <a:pPr>
+              <a:spcAft>
+                <a:spcPts val="1100"/>
+              </a:spcAft>
+            </a:pPr>
+            <a:r>
+              <a:rPr sz="1600" b="1" i="0">
+                <a:solidFill>
+                  <a:srgbClr val="E8801A"/>
+                </a:solidFill>
+                <a:latin typeface="Montserrat"/>
+              </a:rPr>
+              <a:t>▸  </a:t>
+            </a:r>
+            <a:r>
+              <a:rPr sz="1600" b="0" i="0">
+                <a:solidFill>
+                  <a:srgbClr val="1B2330"/>
+                </a:solidFill>
+                <a:latin typeface="Montserrat"/>
+              </a:rPr>
+              <a:t>Nuevos y sin gas: pueden ir tumbados</a:t>
+            </a:r>
+          </a:p>
+        </p:txBody>
+      </p:sp>
+      <p:sp>
+        <p:nvSpPr>
+          <p:cNvPr id="9" name="imgph" descr="IMGQ:gas cylinders secured in van"/>
+          <p:cNvSpPr/>
+          <p:nvPr/>
+        </p:nvSpPr>
+        <p:spPr>
+          <a:xfrm>
+            <a:off x="6080760" y="1965960"/>
+            <a:ext cx="5303520" cy="4572000"/>
+          </a:xfrm>
+          <a:prstGeom prst="roundRect">
+            <a:avLst/>
+          </a:prstGeom>
+          <a:solidFill>
+            <a:srgbClr val="F3F6FB"/>
+          </a:solidFill>
+          <a:ln w="12700">
+            <a:solidFill>
+              <a:srgbClr val="C7D2E6"/>
+            </a:solidFill>
+          </a:ln>
+          <a:effectLst/>
+        </p:spPr>
+        <p:style>
+          <a:lnRef idx="1">
+            <a:schemeClr val="accent1"/>
+          </a:lnRef>
+          <a:fillRef idx="3">
+            <a:schemeClr val="accent1"/>
+          </a:fillRef>
+          <a:effectRef idx="2">
+            <a:schemeClr val="accent1"/>
+          </a:effectRef>
+          <a:fontRef idx="minor">
+            <a:schemeClr val="lt1"/>
+          </a:fontRef>
+        </p:style>
+        <p:txBody>
+          <a:bodyPr rtlCol="0" anchor="ctr"/>
+          <a:lstStyle/>
+          <a:p>
+            <a:pPr algn="ctr"/>
+          </a:p>
+        </p:txBody>
+      </p:sp>
+      <p:sp>
+        <p:nvSpPr>
+          <p:cNvPr id="10" name="TextBox 9"/>
           <p:cNvSpPr txBox="1"/>
           <p:nvPr/>
         </p:nvSpPr>
         <p:spPr>
           <a:xfrm>
-            <a:off x="822960" y="2606040"/>
-            <a:ext cx="10515600" cy="2743200"/>
+            <a:off x="6355080" y="3611880"/>
+            <a:ext cx="4754880" cy="1280160"/>
           </a:xfrm>
           <a:prstGeom prst="rect">
             <a:avLst/>
@@ -8850,119 +9912,186 @@
           </a:bodyPr>
           <a:lstStyle/>
           <a:p>
-            <a:pPr>
-              <a:spcAft>
-                <a:spcPts val="1200"/>
-              </a:spcAft>
-            </a:pPr>
-            <a:r>
-              <a:rPr sz="2000" b="1" i="0">
-                <a:solidFill>
-                  <a:srgbClr val="F4A24C"/>
-                </a:solidFill>
-                <a:latin typeface="Montserrat"/>
-              </a:rPr>
-              <a:t>✓  </a:t>
-            </a:r>
-            <a:r>
-              <a:rPr sz="1900" b="0" i="0">
-                <a:solidFill>
-                  <a:srgbClr val="FFFFFF"/>
-                </a:solidFill>
-                <a:latin typeface="Montserrat"/>
-              </a:rPr>
-              <a:t>Distingues 4.ª y 5.ª: vallado, distancias y extintores</a:t>
-            </a:r>
-          </a:p>
-          <a:p>
-            <a:pPr>
-              <a:spcAft>
-                <a:spcPts val="1200"/>
-              </a:spcAft>
-            </a:pPr>
-            <a:r>
-              <a:rPr sz="2000" b="1" i="0">
-                <a:solidFill>
-                  <a:srgbClr val="F4A24C"/>
-                </a:solidFill>
-                <a:latin typeface="Montserrat"/>
-              </a:rPr>
-              <a:t>✓  </a:t>
-            </a:r>
-            <a:r>
-              <a:rPr sz="1900" b="0" i="0">
-                <a:solidFill>
-                  <a:srgbClr val="FFFFFF"/>
-                </a:solidFill>
-                <a:latin typeface="Montserrat"/>
-              </a:rPr>
-              <a:t>Partes la tienda en 150 kg y colocas cada extintor</a:t>
-            </a:r>
-          </a:p>
-          <a:p>
-            <a:pPr>
-              <a:spcAft>
-                <a:spcPts val="1200"/>
-              </a:spcAft>
-            </a:pPr>
-            <a:r>
-              <a:rPr sz="2000" b="1" i="0">
-                <a:solidFill>
-                  <a:srgbClr val="F4A24C"/>
-                </a:solidFill>
-                <a:latin typeface="Montserrat"/>
-              </a:rPr>
-              <a:t>✓  </a:t>
-            </a:r>
-            <a:r>
-              <a:rPr sz="1900" b="0" i="0">
-                <a:solidFill>
-                  <a:srgbClr val="FFFFFF"/>
-                </a:solidFill>
-                <a:latin typeface="Montserrat"/>
-              </a:rPr>
-              <a:t>Sabes que se inspecciona y se comunica, no se pide permiso</a:t>
-            </a:r>
-          </a:p>
-          <a:p>
-            <a:pPr>
-              <a:spcAft>
-                <a:spcPts val="1200"/>
-              </a:spcAft>
-            </a:pPr>
-            <a:r>
-              <a:rPr sz="2000" b="1" i="0">
-                <a:solidFill>
-                  <a:srgbClr val="F4A24C"/>
-                </a:solidFill>
-                <a:latin typeface="Montserrat"/>
-              </a:rPr>
-              <a:t>✓  </a:t>
-            </a:r>
-            <a:r>
-              <a:rPr sz="1900" b="0" i="0">
-                <a:solidFill>
-                  <a:srgbClr val="FFFFFF"/>
-                </a:solidFill>
-                <a:latin typeface="Montserrat"/>
-              </a:rPr>
-              <a:t>Transportas envases de pie, sin sótano y sin pasarte de 2</a:t>
-            </a:r>
-          </a:p>
-        </p:txBody>
-      </p:sp>
-      <p:sp>
-        <p:nvSpPr>
-          <p:cNvPr id="7" name="Rounded Rectangle 6"/>
+            <a:pPr algn="ctr"/>
+            <a:r>
+              <a:rPr sz="1400" b="1" i="0">
+                <a:solidFill>
+                  <a:srgbClr val="64748B"/>
+                </a:solidFill>
+                <a:latin typeface="Montserrat"/>
+              </a:rPr>
+              <a:t>IMAGEN</a:t>
+            </a:r>
+          </a:p>
+          <a:p>
+            <a:pPr algn="ctr"/>
+            <a:r>
+              <a:rPr sz="1100" b="0" i="1">
+                <a:solidFill>
+                  <a:srgbClr val="64748B"/>
+                </a:solidFill>
+                <a:latin typeface="Montserrat"/>
+              </a:rPr>
+              <a:t>gas cylinders secured in van</a:t>
+            </a:r>
+          </a:p>
+        </p:txBody>
+      </p:sp>
+    </p:spTree>
+  </p:cSld>
+  <p:clrMapOvr>
+    <a:masterClrMapping/>
+  </p:clrMapOvr>
+  <mc:AlternateContent xmlns:mc="http://schemas.openxmlformats.org/markup-compatibility/2006">
+    <mc:Choice xmlns:p14="http://schemas.microsoft.com/office/powerpoint/2010/main" Requires="p14">
+      <p:transition spd="med" p14:dur="700">
+        <p14:cube dir="r"/>
+      </p:transition>
+    </mc:Choice>
+    <mc:Fallback>
+      <p:transition spd="med">
+        <p:push dir="r"/>
+      </p:transition>
+    </mc:Fallback>
+  </mc:AlternateContent>
+</p:sld>
+</file>
+
+<file path=ppt/slides/slide19.xml><?xml version="1.0" encoding="utf-8"?>
+<p:sld xmlns:a="http://schemas.openxmlformats.org/drawingml/2006/main" xmlns:p="http://schemas.openxmlformats.org/presentationml/2006/main" xmlns:r="http://schemas.openxmlformats.org/officeDocument/2006/relationships">
+  <p:cSld>
+    <p:spTree>
+      <p:nvGrpSpPr>
+        <p:cNvPr id="1" name=""/>
+        <p:cNvGrpSpPr/>
+        <p:nvPr/>
+      </p:nvGrpSpPr>
+      <p:grpSpPr/>
+      <p:sp>
+        <p:nvSpPr>
+          <p:cNvPr id="2" name="Rectangle 1"/>
           <p:cNvSpPr/>
           <p:nvPr/>
         </p:nvSpPr>
         <p:spPr>
           <a:xfrm>
-            <a:off x="822960" y="5532120"/>
-            <a:ext cx="10515600" cy="822960"/>
-          </a:xfrm>
-          <a:prstGeom prst="roundRect">
+            <a:off x="0" y="0"/>
+            <a:ext cx="12191695" cy="6858000"/>
+          </a:xfrm>
+          <a:prstGeom prst="rect">
+            <a:avLst/>
+          </a:prstGeom>
+          <a:solidFill>
+            <a:srgbClr val="FFFFFF"/>
+          </a:solidFill>
+          <a:ln>
+            <a:noFill/>
+          </a:ln>
+          <a:effectLst/>
+        </p:spPr>
+        <p:style>
+          <a:lnRef idx="1">
+            <a:schemeClr val="accent1"/>
+          </a:lnRef>
+          <a:fillRef idx="3">
+            <a:schemeClr val="accent1"/>
+          </a:fillRef>
+          <a:effectRef idx="2">
+            <a:schemeClr val="accent1"/>
+          </a:effectRef>
+          <a:fontRef idx="minor">
+            <a:schemeClr val="lt1"/>
+          </a:fontRef>
+        </p:style>
+        <p:txBody>
+          <a:bodyPr rtlCol="0" anchor="ctr"/>
+          <a:lstStyle/>
+          <a:p>
+            <a:pPr algn="ctr"/>
+          </a:p>
+        </p:txBody>
+      </p:sp>
+      <p:sp>
+        <p:nvSpPr>
+          <p:cNvPr id="3" name="TextBox 2"/>
+          <p:cNvSpPr txBox="1"/>
+          <p:nvPr/>
+        </p:nvSpPr>
+        <p:spPr>
+          <a:xfrm>
+            <a:off x="10607040" y="320040"/>
+            <a:ext cx="1371600" cy="365760"/>
+          </a:xfrm>
+          <a:prstGeom prst="rect">
+            <a:avLst/>
+          </a:prstGeom>
+          <a:noFill/>
+        </p:spPr>
+        <p:txBody>
+          <a:bodyPr wrap="square">
+            <a:spAutoFit/>
+          </a:bodyPr>
+          <a:lstStyle/>
+          <a:p>
+            <a:pPr algn="r"/>
+            <a:r>
+              <a:rPr sz="1000" b="1" i="0">
+                <a:solidFill>
+                  <a:srgbClr val="64748B"/>
+                </a:solidFill>
+                <a:latin typeface="Montserrat"/>
+              </a:rPr>
+              <a:t>019 / 023</a:t>
+            </a:r>
+          </a:p>
+        </p:txBody>
+      </p:sp>
+      <p:sp>
+        <p:nvSpPr>
+          <p:cNvPr id="4" name="TextBox 3"/>
+          <p:cNvSpPr txBox="1"/>
+          <p:nvPr/>
+        </p:nvSpPr>
+        <p:spPr>
+          <a:xfrm>
+            <a:off x="457200" y="6419088"/>
+            <a:ext cx="8229600" cy="365760"/>
+          </a:xfrm>
+          <a:prstGeom prst="rect">
+            <a:avLst/>
+          </a:prstGeom>
+          <a:noFill/>
+        </p:spPr>
+        <p:txBody>
+          <a:bodyPr wrap="square">
+            <a:spAutoFit/>
+          </a:bodyPr>
+          <a:lstStyle/>
+          <a:p>
+            <a:r>
+              <a:rPr sz="900" b="0" i="0">
+                <a:solidFill>
+                  <a:srgbClr val="64748B"/>
+                </a:solidFill>
+                <a:latin typeface="Montserrat"/>
+              </a:rPr>
+              <a:t>Curso Gas B · Tema 02 · Centros de envases de GLP (II)</a:t>
+            </a:r>
+          </a:p>
+        </p:txBody>
+      </p:sp>
+      <p:sp>
+        <p:nvSpPr>
+          <p:cNvPr id="5" name="Rectangle 4"/>
+          <p:cNvSpPr/>
+          <p:nvPr/>
+        </p:nvSpPr>
+        <p:spPr>
+          <a:xfrm>
+            <a:off x="0" y="0"/>
+            <a:ext cx="12191695" cy="1143000"/>
+          </a:xfrm>
+          <a:prstGeom prst="rect">
             <a:avLst/>
           </a:prstGeom>
           <a:solidFill>
@@ -8997,14 +10126,14 @@
       </p:sp>
       <p:sp>
         <p:nvSpPr>
-          <p:cNvPr id="8" name="TextBox 7"/>
+          <p:cNvPr id="6" name="TextBox 5"/>
           <p:cNvSpPr txBox="1"/>
           <p:nvPr/>
         </p:nvSpPr>
         <p:spPr>
           <a:xfrm>
-            <a:off x="1051560" y="5623560"/>
-            <a:ext cx="10058400" cy="640080"/>
+            <a:off x="822960" y="274320"/>
+            <a:ext cx="10515600" cy="640080"/>
           </a:xfrm>
           <a:prstGeom prst="rect">
             <a:avLst/>
@@ -9018,13 +10147,683 @@
           <a:lstStyle/>
           <a:p>
             <a:r>
-              <a:rPr sz="1500" b="1" i="1">
+              <a:rPr sz="2400" b="1" i="0">
+                <a:solidFill>
+                  <a:srgbClr val="FFFFFF"/>
+                </a:solidFill>
+                <a:latin typeface="Montserrat"/>
+              </a:rPr>
+              <a:t>⚡  PREGUNTA RÁPIDA</a:t>
+            </a:r>
+          </a:p>
+        </p:txBody>
+      </p:sp>
+      <p:sp>
+        <p:nvSpPr>
+          <p:cNvPr id="7" name="TextBox 6"/>
+          <p:cNvSpPr txBox="1"/>
+          <p:nvPr/>
+        </p:nvSpPr>
+        <p:spPr>
+          <a:xfrm>
+            <a:off x="822960" y="1508760"/>
+            <a:ext cx="10515600" cy="1371600"/>
+          </a:xfrm>
+          <a:prstGeom prst="rect">
+            <a:avLst/>
+          </a:prstGeom>
+          <a:noFill/>
+        </p:spPr>
+        <p:txBody>
+          <a:bodyPr wrap="square">
+            <a:spAutoFit/>
+          </a:bodyPr>
+          <a:lstStyle/>
+          <a:p>
+            <a:r>
+              <a:rPr sz="2400" b="1" i="0">
                 <a:solidFill>
                   <a:srgbClr val="1E2761"/>
                 </a:solidFill>
                 <a:latin typeface="Montserrat"/>
               </a:rPr>
-              <a:t>Con esto cierras la ITC-02 entera. Ahora damos el salto al depósito fijo del chalé.</a:t>
+              <a:t>¿Qué puedes transportar como máximo en un vehículo particular?</a:t>
+            </a:r>
+          </a:p>
+        </p:txBody>
+      </p:sp>
+      <p:sp>
+        <p:nvSpPr>
+          <p:cNvPr id="8" name="Rounded Rectangle 7"/>
+          <p:cNvSpPr/>
+          <p:nvPr/>
+        </p:nvSpPr>
+        <p:spPr>
+          <a:xfrm>
+            <a:off x="822960" y="3291840"/>
+            <a:ext cx="4983480" cy="1143000"/>
+          </a:xfrm>
+          <a:prstGeom prst="roundRect">
+            <a:avLst/>
+          </a:prstGeom>
+          <a:solidFill>
+            <a:srgbClr val="F3F6FB"/>
+          </a:solidFill>
+          <a:ln w="12700">
+            <a:solidFill>
+              <a:srgbClr val="C7D2E6"/>
+            </a:solidFill>
+          </a:ln>
+          <a:effectLst/>
+        </p:spPr>
+        <p:style>
+          <a:lnRef idx="1">
+            <a:schemeClr val="accent1"/>
+          </a:lnRef>
+          <a:fillRef idx="3">
+            <a:schemeClr val="accent1"/>
+          </a:fillRef>
+          <a:effectRef idx="2">
+            <a:schemeClr val="accent1"/>
+          </a:effectRef>
+          <a:fontRef idx="minor">
+            <a:schemeClr val="lt1"/>
+          </a:fontRef>
+        </p:style>
+        <p:txBody>
+          <a:bodyPr rtlCol="0" anchor="ctr"/>
+          <a:lstStyle/>
+          <a:p>
+            <a:pPr algn="ctr"/>
+          </a:p>
+        </p:txBody>
+      </p:sp>
+      <p:sp>
+        <p:nvSpPr>
+          <p:cNvPr id="9" name="Rectangle 8"/>
+          <p:cNvSpPr/>
+          <p:nvPr/>
+        </p:nvSpPr>
+        <p:spPr>
+          <a:xfrm>
+            <a:off x="822960" y="3291840"/>
+            <a:ext cx="640080" cy="1143000"/>
+          </a:xfrm>
+          <a:prstGeom prst="rect">
+            <a:avLst/>
+          </a:prstGeom>
+          <a:solidFill>
+            <a:srgbClr val="1E2761"/>
+          </a:solidFill>
+          <a:ln>
+            <a:noFill/>
+          </a:ln>
+          <a:effectLst/>
+        </p:spPr>
+        <p:style>
+          <a:lnRef idx="1">
+            <a:schemeClr val="accent1"/>
+          </a:lnRef>
+          <a:fillRef idx="3">
+            <a:schemeClr val="accent1"/>
+          </a:fillRef>
+          <a:effectRef idx="2">
+            <a:schemeClr val="accent1"/>
+          </a:effectRef>
+          <a:fontRef idx="minor">
+            <a:schemeClr val="lt1"/>
+          </a:fontRef>
+        </p:style>
+        <p:txBody>
+          <a:bodyPr rtlCol="0" anchor="ctr"/>
+          <a:lstStyle/>
+          <a:p>
+            <a:pPr algn="ctr"/>
+          </a:p>
+        </p:txBody>
+      </p:sp>
+      <p:sp>
+        <p:nvSpPr>
+          <p:cNvPr id="10" name="TextBox 9"/>
+          <p:cNvSpPr txBox="1"/>
+          <p:nvPr/>
+        </p:nvSpPr>
+        <p:spPr>
+          <a:xfrm>
+            <a:off x="822960" y="3611880"/>
+            <a:ext cx="640080" cy="548640"/>
+          </a:xfrm>
+          <a:prstGeom prst="rect">
+            <a:avLst/>
+          </a:prstGeom>
+          <a:noFill/>
+        </p:spPr>
+        <p:txBody>
+          <a:bodyPr wrap="square">
+            <a:spAutoFit/>
+          </a:bodyPr>
+          <a:lstStyle/>
+          <a:p>
+            <a:pPr algn="ctr"/>
+            <a:r>
+              <a:rPr sz="2200" b="1" i="0">
+                <a:solidFill>
+                  <a:srgbClr val="FFFFFF"/>
+                </a:solidFill>
+                <a:latin typeface="Montserrat"/>
+              </a:rPr>
+              <a:t>A</a:t>
+            </a:r>
+          </a:p>
+        </p:txBody>
+      </p:sp>
+      <p:sp>
+        <p:nvSpPr>
+          <p:cNvPr id="11" name="TextBox 10"/>
+          <p:cNvSpPr txBox="1"/>
+          <p:nvPr/>
+        </p:nvSpPr>
+        <p:spPr>
+          <a:xfrm>
+            <a:off x="1600200" y="3474720"/>
+            <a:ext cx="4114800" cy="868680"/>
+          </a:xfrm>
+          <a:prstGeom prst="rect">
+            <a:avLst/>
+          </a:prstGeom>
+          <a:noFill/>
+        </p:spPr>
+        <p:txBody>
+          <a:bodyPr wrap="square">
+            <a:spAutoFit/>
+          </a:bodyPr>
+          <a:lstStyle/>
+          <a:p>
+            <a:r>
+              <a:rPr sz="1400" b="0" i="0">
+                <a:solidFill>
+                  <a:srgbClr val="1B2330"/>
+                </a:solidFill>
+                <a:latin typeface="Montserrat"/>
+              </a:rPr>
+              <a:t>2 envases de hasta 15 kg</a:t>
+            </a:r>
+          </a:p>
+        </p:txBody>
+      </p:sp>
+      <p:sp>
+        <p:nvSpPr>
+          <p:cNvPr id="12" name="Rounded Rectangle 11"/>
+          <p:cNvSpPr/>
+          <p:nvPr/>
+        </p:nvSpPr>
+        <p:spPr>
+          <a:xfrm>
+            <a:off x="6355080" y="3291840"/>
+            <a:ext cx="4983480" cy="1143000"/>
+          </a:xfrm>
+          <a:prstGeom prst="roundRect">
+            <a:avLst/>
+          </a:prstGeom>
+          <a:solidFill>
+            <a:srgbClr val="F3F6FB"/>
+          </a:solidFill>
+          <a:ln w="12700">
+            <a:solidFill>
+              <a:srgbClr val="C7D2E6"/>
+            </a:solidFill>
+          </a:ln>
+          <a:effectLst/>
+        </p:spPr>
+        <p:style>
+          <a:lnRef idx="1">
+            <a:schemeClr val="accent1"/>
+          </a:lnRef>
+          <a:fillRef idx="3">
+            <a:schemeClr val="accent1"/>
+          </a:fillRef>
+          <a:effectRef idx="2">
+            <a:schemeClr val="accent1"/>
+          </a:effectRef>
+          <a:fontRef idx="minor">
+            <a:schemeClr val="lt1"/>
+          </a:fontRef>
+        </p:style>
+        <p:txBody>
+          <a:bodyPr rtlCol="0" anchor="ctr"/>
+          <a:lstStyle/>
+          <a:p>
+            <a:pPr algn="ctr"/>
+          </a:p>
+        </p:txBody>
+      </p:sp>
+      <p:sp>
+        <p:nvSpPr>
+          <p:cNvPr id="13" name="Rectangle 12"/>
+          <p:cNvSpPr/>
+          <p:nvPr/>
+        </p:nvSpPr>
+        <p:spPr>
+          <a:xfrm>
+            <a:off x="6355080" y="3291840"/>
+            <a:ext cx="640080" cy="1143000"/>
+          </a:xfrm>
+          <a:prstGeom prst="rect">
+            <a:avLst/>
+          </a:prstGeom>
+          <a:solidFill>
+            <a:srgbClr val="1E2761"/>
+          </a:solidFill>
+          <a:ln>
+            <a:noFill/>
+          </a:ln>
+          <a:effectLst/>
+        </p:spPr>
+        <p:style>
+          <a:lnRef idx="1">
+            <a:schemeClr val="accent1"/>
+          </a:lnRef>
+          <a:fillRef idx="3">
+            <a:schemeClr val="accent1"/>
+          </a:fillRef>
+          <a:effectRef idx="2">
+            <a:schemeClr val="accent1"/>
+          </a:effectRef>
+          <a:fontRef idx="minor">
+            <a:schemeClr val="lt1"/>
+          </a:fontRef>
+        </p:style>
+        <p:txBody>
+          <a:bodyPr rtlCol="0" anchor="ctr"/>
+          <a:lstStyle/>
+          <a:p>
+            <a:pPr algn="ctr"/>
+          </a:p>
+        </p:txBody>
+      </p:sp>
+      <p:sp>
+        <p:nvSpPr>
+          <p:cNvPr id="14" name="TextBox 13"/>
+          <p:cNvSpPr txBox="1"/>
+          <p:nvPr/>
+        </p:nvSpPr>
+        <p:spPr>
+          <a:xfrm>
+            <a:off x="6355080" y="3611880"/>
+            <a:ext cx="640080" cy="548640"/>
+          </a:xfrm>
+          <a:prstGeom prst="rect">
+            <a:avLst/>
+          </a:prstGeom>
+          <a:noFill/>
+        </p:spPr>
+        <p:txBody>
+          <a:bodyPr wrap="square">
+            <a:spAutoFit/>
+          </a:bodyPr>
+          <a:lstStyle/>
+          <a:p>
+            <a:pPr algn="ctr"/>
+            <a:r>
+              <a:rPr sz="2200" b="1" i="0">
+                <a:solidFill>
+                  <a:srgbClr val="FFFFFF"/>
+                </a:solidFill>
+                <a:latin typeface="Montserrat"/>
+              </a:rPr>
+              <a:t>B</a:t>
+            </a:r>
+          </a:p>
+        </p:txBody>
+      </p:sp>
+      <p:sp>
+        <p:nvSpPr>
+          <p:cNvPr id="15" name="TextBox 14"/>
+          <p:cNvSpPr txBox="1"/>
+          <p:nvPr/>
+        </p:nvSpPr>
+        <p:spPr>
+          <a:xfrm>
+            <a:off x="7132320" y="3474720"/>
+            <a:ext cx="4114800" cy="868680"/>
+          </a:xfrm>
+          <a:prstGeom prst="rect">
+            <a:avLst/>
+          </a:prstGeom>
+          <a:noFill/>
+        </p:spPr>
+        <p:txBody>
+          <a:bodyPr wrap="square">
+            <a:spAutoFit/>
+          </a:bodyPr>
+          <a:lstStyle/>
+          <a:p>
+            <a:r>
+              <a:rPr sz="1400" b="0" i="0">
+                <a:solidFill>
+                  <a:srgbClr val="1B2330"/>
+                </a:solidFill>
+                <a:latin typeface="Montserrat"/>
+              </a:rPr>
+              <a:t>4 envases de hasta 15 kg</a:t>
+            </a:r>
+          </a:p>
+        </p:txBody>
+      </p:sp>
+      <p:sp>
+        <p:nvSpPr>
+          <p:cNvPr id="16" name="Rounded Rectangle 15"/>
+          <p:cNvSpPr/>
+          <p:nvPr/>
+        </p:nvSpPr>
+        <p:spPr>
+          <a:xfrm>
+            <a:off x="822960" y="4617720"/>
+            <a:ext cx="4983480" cy="1143000"/>
+          </a:xfrm>
+          <a:prstGeom prst="roundRect">
+            <a:avLst/>
+          </a:prstGeom>
+          <a:solidFill>
+            <a:srgbClr val="F3F6FB"/>
+          </a:solidFill>
+          <a:ln w="12700">
+            <a:solidFill>
+              <a:srgbClr val="C7D2E6"/>
+            </a:solidFill>
+          </a:ln>
+          <a:effectLst/>
+        </p:spPr>
+        <p:style>
+          <a:lnRef idx="1">
+            <a:schemeClr val="accent1"/>
+          </a:lnRef>
+          <a:fillRef idx="3">
+            <a:schemeClr val="accent1"/>
+          </a:fillRef>
+          <a:effectRef idx="2">
+            <a:schemeClr val="accent1"/>
+          </a:effectRef>
+          <a:fontRef idx="minor">
+            <a:schemeClr val="lt1"/>
+          </a:fontRef>
+        </p:style>
+        <p:txBody>
+          <a:bodyPr rtlCol="0" anchor="ctr"/>
+          <a:lstStyle/>
+          <a:p>
+            <a:pPr algn="ctr"/>
+          </a:p>
+        </p:txBody>
+      </p:sp>
+      <p:sp>
+        <p:nvSpPr>
+          <p:cNvPr id="17" name="Rectangle 16"/>
+          <p:cNvSpPr/>
+          <p:nvPr/>
+        </p:nvSpPr>
+        <p:spPr>
+          <a:xfrm>
+            <a:off x="822960" y="4617720"/>
+            <a:ext cx="640080" cy="1143000"/>
+          </a:xfrm>
+          <a:prstGeom prst="rect">
+            <a:avLst/>
+          </a:prstGeom>
+          <a:solidFill>
+            <a:srgbClr val="1E2761"/>
+          </a:solidFill>
+          <a:ln>
+            <a:noFill/>
+          </a:ln>
+          <a:effectLst/>
+        </p:spPr>
+        <p:style>
+          <a:lnRef idx="1">
+            <a:schemeClr val="accent1"/>
+          </a:lnRef>
+          <a:fillRef idx="3">
+            <a:schemeClr val="accent1"/>
+          </a:fillRef>
+          <a:effectRef idx="2">
+            <a:schemeClr val="accent1"/>
+          </a:effectRef>
+          <a:fontRef idx="minor">
+            <a:schemeClr val="lt1"/>
+          </a:fontRef>
+        </p:style>
+        <p:txBody>
+          <a:bodyPr rtlCol="0" anchor="ctr"/>
+          <a:lstStyle/>
+          <a:p>
+            <a:pPr algn="ctr"/>
+          </a:p>
+        </p:txBody>
+      </p:sp>
+      <p:sp>
+        <p:nvSpPr>
+          <p:cNvPr id="18" name="TextBox 17"/>
+          <p:cNvSpPr txBox="1"/>
+          <p:nvPr/>
+        </p:nvSpPr>
+        <p:spPr>
+          <a:xfrm>
+            <a:off x="822960" y="4937760"/>
+            <a:ext cx="640080" cy="548640"/>
+          </a:xfrm>
+          <a:prstGeom prst="rect">
+            <a:avLst/>
+          </a:prstGeom>
+          <a:noFill/>
+        </p:spPr>
+        <p:txBody>
+          <a:bodyPr wrap="square">
+            <a:spAutoFit/>
+          </a:bodyPr>
+          <a:lstStyle/>
+          <a:p>
+            <a:pPr algn="ctr"/>
+            <a:r>
+              <a:rPr sz="2200" b="1" i="0">
+                <a:solidFill>
+                  <a:srgbClr val="FFFFFF"/>
+                </a:solidFill>
+                <a:latin typeface="Montserrat"/>
+              </a:rPr>
+              <a:t>C</a:t>
+            </a:r>
+          </a:p>
+        </p:txBody>
+      </p:sp>
+      <p:sp>
+        <p:nvSpPr>
+          <p:cNvPr id="19" name="TextBox 18"/>
+          <p:cNvSpPr txBox="1"/>
+          <p:nvPr/>
+        </p:nvSpPr>
+        <p:spPr>
+          <a:xfrm>
+            <a:off x="1600200" y="4800600"/>
+            <a:ext cx="4114800" cy="868680"/>
+          </a:xfrm>
+          <a:prstGeom prst="rect">
+            <a:avLst/>
+          </a:prstGeom>
+          <a:noFill/>
+        </p:spPr>
+        <p:txBody>
+          <a:bodyPr wrap="square">
+            <a:spAutoFit/>
+          </a:bodyPr>
+          <a:lstStyle/>
+          <a:p>
+            <a:r>
+              <a:rPr sz="1400" b="0" i="0">
+                <a:solidFill>
+                  <a:srgbClr val="1B2330"/>
+                </a:solidFill>
+                <a:latin typeface="Montserrat"/>
+              </a:rPr>
+              <a:t>2 envases de cualquier tamaño</a:t>
+            </a:r>
+          </a:p>
+        </p:txBody>
+      </p:sp>
+      <p:sp>
+        <p:nvSpPr>
+          <p:cNvPr id="20" name="Rounded Rectangle 19"/>
+          <p:cNvSpPr/>
+          <p:nvPr/>
+        </p:nvSpPr>
+        <p:spPr>
+          <a:xfrm>
+            <a:off x="6355080" y="4617720"/>
+            <a:ext cx="4983480" cy="1143000"/>
+          </a:xfrm>
+          <a:prstGeom prst="roundRect">
+            <a:avLst/>
+          </a:prstGeom>
+          <a:solidFill>
+            <a:srgbClr val="F3F6FB"/>
+          </a:solidFill>
+          <a:ln w="12700">
+            <a:solidFill>
+              <a:srgbClr val="C7D2E6"/>
+            </a:solidFill>
+          </a:ln>
+          <a:effectLst/>
+        </p:spPr>
+        <p:style>
+          <a:lnRef idx="1">
+            <a:schemeClr val="accent1"/>
+          </a:lnRef>
+          <a:fillRef idx="3">
+            <a:schemeClr val="accent1"/>
+          </a:fillRef>
+          <a:effectRef idx="2">
+            <a:schemeClr val="accent1"/>
+          </a:effectRef>
+          <a:fontRef idx="minor">
+            <a:schemeClr val="lt1"/>
+          </a:fontRef>
+        </p:style>
+        <p:txBody>
+          <a:bodyPr rtlCol="0" anchor="ctr"/>
+          <a:lstStyle/>
+          <a:p>
+            <a:pPr algn="ctr"/>
+          </a:p>
+        </p:txBody>
+      </p:sp>
+      <p:sp>
+        <p:nvSpPr>
+          <p:cNvPr id="21" name="Rectangle 20"/>
+          <p:cNvSpPr/>
+          <p:nvPr/>
+        </p:nvSpPr>
+        <p:spPr>
+          <a:xfrm>
+            <a:off x="6355080" y="4617720"/>
+            <a:ext cx="640080" cy="1143000"/>
+          </a:xfrm>
+          <a:prstGeom prst="rect">
+            <a:avLst/>
+          </a:prstGeom>
+          <a:solidFill>
+            <a:srgbClr val="1E2761"/>
+          </a:solidFill>
+          <a:ln>
+            <a:noFill/>
+          </a:ln>
+          <a:effectLst/>
+        </p:spPr>
+        <p:style>
+          <a:lnRef idx="1">
+            <a:schemeClr val="accent1"/>
+          </a:lnRef>
+          <a:fillRef idx="3">
+            <a:schemeClr val="accent1"/>
+          </a:fillRef>
+          <a:effectRef idx="2">
+            <a:schemeClr val="accent1"/>
+          </a:effectRef>
+          <a:fontRef idx="minor">
+            <a:schemeClr val="lt1"/>
+          </a:fontRef>
+        </p:style>
+        <p:txBody>
+          <a:bodyPr rtlCol="0" anchor="ctr"/>
+          <a:lstStyle/>
+          <a:p>
+            <a:pPr algn="ctr"/>
+          </a:p>
+        </p:txBody>
+      </p:sp>
+      <p:sp>
+        <p:nvSpPr>
+          <p:cNvPr id="22" name="TextBox 21"/>
+          <p:cNvSpPr txBox="1"/>
+          <p:nvPr/>
+        </p:nvSpPr>
+        <p:spPr>
+          <a:xfrm>
+            <a:off x="6355080" y="4937760"/>
+            <a:ext cx="640080" cy="548640"/>
+          </a:xfrm>
+          <a:prstGeom prst="rect">
+            <a:avLst/>
+          </a:prstGeom>
+          <a:noFill/>
+        </p:spPr>
+        <p:txBody>
+          <a:bodyPr wrap="square">
+            <a:spAutoFit/>
+          </a:bodyPr>
+          <a:lstStyle/>
+          <a:p>
+            <a:pPr algn="ctr"/>
+            <a:r>
+              <a:rPr sz="2200" b="1" i="0">
+                <a:solidFill>
+                  <a:srgbClr val="FFFFFF"/>
+                </a:solidFill>
+                <a:latin typeface="Montserrat"/>
+              </a:rPr>
+              <a:t>D</a:t>
+            </a:r>
+          </a:p>
+        </p:txBody>
+      </p:sp>
+      <p:sp>
+        <p:nvSpPr>
+          <p:cNvPr id="23" name="TextBox 22"/>
+          <p:cNvSpPr txBox="1"/>
+          <p:nvPr/>
+        </p:nvSpPr>
+        <p:spPr>
+          <a:xfrm>
+            <a:off x="7132320" y="4800600"/>
+            <a:ext cx="4114800" cy="868680"/>
+          </a:xfrm>
+          <a:prstGeom prst="rect">
+            <a:avLst/>
+          </a:prstGeom>
+          <a:noFill/>
+        </p:spPr>
+        <p:txBody>
+          <a:bodyPr wrap="square">
+            <a:spAutoFit/>
+          </a:bodyPr>
+          <a:lstStyle/>
+          <a:p>
+            <a:r>
+              <a:rPr sz="1400" b="0" i="0">
+                <a:solidFill>
+                  <a:srgbClr val="1B2330"/>
+                </a:solidFill>
+                <a:latin typeface="Montserrat"/>
+              </a:rPr>
+              <a:t>1 envase de hasta 35 kg</a:t>
             </a:r>
           </a:p>
         </p:txBody>
@@ -9034,6 +10833,18 @@
   <p:clrMapOvr>
     <a:masterClrMapping/>
   </p:clrMapOvr>
+  <mc:AlternateContent xmlns:mc="http://schemas.openxmlformats.org/markup-compatibility/2006">
+    <mc:Choice xmlns:p14="http://schemas.microsoft.com/office/powerpoint/2010/main" Requires="p14">
+      <p:transition spd="med" p14:dur="700">
+        <p14:cube dir="l"/>
+      </p:transition>
+    </mc:Choice>
+    <mc:Fallback>
+      <p:transition spd="med">
+        <p:push dir="l"/>
+      </p:transition>
+    </mc:Fallback>
+  </mc:AlternateContent>
 </p:sld>
 </file>
 
@@ -9121,7 +10932,7 @@
                 </a:solidFill>
                 <a:latin typeface="Montserrat"/>
               </a:rPr>
-              <a:t>002 / 018</a:t>
+              <a:t>002 / 023</a:t>
             </a:r>
           </a:p>
         </p:txBody>
@@ -9196,7 +11007,7 @@
       </p:sp>
       <p:sp>
         <p:nvSpPr>
-          <p:cNvPr id="6" name="Rounded Rectangle 5"/>
+          <p:cNvPr id="6" name="Rectangle 5"/>
           <p:cNvSpPr/>
           <p:nvPr/>
         </p:nvSpPr>
@@ -9205,7 +11016,7 @@
             <a:off x="868680" y="1234440"/>
             <a:ext cx="1463040" cy="73152"/>
           </a:xfrm>
-          <a:prstGeom prst="roundRect">
+          <a:prstGeom prst="rect">
             <a:avLst/>
           </a:prstGeom>
           <a:solidFill>
@@ -9286,14 +11097,58 @@
       </p:sp>
       <p:sp>
         <p:nvSpPr>
-          <p:cNvPr id="8" name="TextBox 7"/>
+          <p:cNvPr id="8" name="Rectangle 7"/>
+          <p:cNvSpPr/>
+          <p:nvPr/>
+        </p:nvSpPr>
+        <p:spPr>
+          <a:xfrm>
+            <a:off x="822960" y="2011680"/>
+            <a:ext cx="3017520" cy="128016"/>
+          </a:xfrm>
+          <a:prstGeom prst="rect">
+            <a:avLst/>
+          </a:prstGeom>
+          <a:solidFill>
+            <a:srgbClr val="E8801A"/>
+          </a:solidFill>
+          <a:ln>
+            <a:noFill/>
+          </a:ln>
+          <a:effectLst/>
+        </p:spPr>
+        <p:style>
+          <a:lnRef idx="1">
+            <a:schemeClr val="accent1"/>
+          </a:lnRef>
+          <a:fillRef idx="3">
+            <a:schemeClr val="accent1"/>
+          </a:fillRef>
+          <a:effectRef idx="2">
+            <a:schemeClr val="accent1"/>
+          </a:effectRef>
+          <a:fontRef idx="minor">
+            <a:schemeClr val="lt1"/>
+          </a:fontRef>
+        </p:style>
+        <p:txBody>
+          <a:bodyPr rtlCol="0" anchor="ctr"/>
+          <a:lstStyle/>
+          <a:p>
+            <a:pPr algn="ctr"/>
+          </a:p>
+        </p:txBody>
+      </p:sp>
+      <p:sp>
+        <p:nvSpPr>
+          <p:cNvPr id="9" name="TextBox 8"/>
           <p:cNvSpPr txBox="1"/>
           <p:nvPr/>
         </p:nvSpPr>
         <p:spPr>
           <a:xfrm>
-            <a:off x="822960" y="2331720"/>
-            <a:ext cx="3017520" cy="1463040"/>
+            <a:off x="822960" y="2377440"/>
+            <a:ext cx="3017520" cy="1371600"/>
           </a:xfrm>
           <a:prstGeom prst="rect">
             <a:avLst/>
@@ -9308,7 +11163,7 @@
           <a:p>
             <a:pPr algn="ctr"/>
             <a:r>
-              <a:rPr sz="6000" b="1" i="0">
+              <a:rPr sz="5800" b="1" i="0">
                 <a:solidFill>
                   <a:srgbClr val="1E2761"/>
                 </a:solidFill>
@@ -9321,13 +11176,13 @@
       </p:sp>
       <p:sp>
         <p:nvSpPr>
-          <p:cNvPr id="9" name="TextBox 8"/>
+          <p:cNvPr id="10" name="TextBox 9"/>
           <p:cNvSpPr txBox="1"/>
           <p:nvPr/>
         </p:nvSpPr>
         <p:spPr>
           <a:xfrm>
-            <a:off x="1051560" y="3611880"/>
+            <a:off x="1051560" y="3657600"/>
             <a:ext cx="2560320" cy="1005840"/>
           </a:xfrm>
           <a:prstGeom prst="rect">
@@ -9356,7 +11211,7 @@
       </p:sp>
       <p:sp>
         <p:nvSpPr>
-          <p:cNvPr id="10" name="Rounded Rectangle 9"/>
+          <p:cNvPr id="11" name="Rounded Rectangle 10"/>
           <p:cNvSpPr/>
           <p:nvPr/>
         </p:nvSpPr>
@@ -9402,14 +11257,58 @@
       </p:sp>
       <p:sp>
         <p:nvSpPr>
-          <p:cNvPr id="11" name="TextBox 10"/>
+          <p:cNvPr id="12" name="Rectangle 11"/>
+          <p:cNvSpPr/>
+          <p:nvPr/>
+        </p:nvSpPr>
+        <p:spPr>
+          <a:xfrm>
+            <a:off x="4617720" y="2011680"/>
+            <a:ext cx="3017520" cy="128016"/>
+          </a:xfrm>
+          <a:prstGeom prst="rect">
+            <a:avLst/>
+          </a:prstGeom>
+          <a:solidFill>
+            <a:srgbClr val="E8801A"/>
+          </a:solidFill>
+          <a:ln>
+            <a:noFill/>
+          </a:ln>
+          <a:effectLst/>
+        </p:spPr>
+        <p:style>
+          <a:lnRef idx="1">
+            <a:schemeClr val="accent1"/>
+          </a:lnRef>
+          <a:fillRef idx="3">
+            <a:schemeClr val="accent1"/>
+          </a:fillRef>
+          <a:effectRef idx="2">
+            <a:schemeClr val="accent1"/>
+          </a:effectRef>
+          <a:fontRef idx="minor">
+            <a:schemeClr val="lt1"/>
+          </a:fontRef>
+        </p:style>
+        <p:txBody>
+          <a:bodyPr rtlCol="0" anchor="ctr"/>
+          <a:lstStyle/>
+          <a:p>
+            <a:pPr algn="ctr"/>
+          </a:p>
+        </p:txBody>
+      </p:sp>
+      <p:sp>
+        <p:nvSpPr>
+          <p:cNvPr id="13" name="TextBox 12"/>
           <p:cNvSpPr txBox="1"/>
           <p:nvPr/>
         </p:nvSpPr>
         <p:spPr>
           <a:xfrm>
-            <a:off x="4617720" y="2331720"/>
-            <a:ext cx="3017520" cy="1463040"/>
+            <a:off x="4617720" y="2377440"/>
+            <a:ext cx="3017520" cy="1371600"/>
           </a:xfrm>
           <a:prstGeom prst="rect">
             <a:avLst/>
@@ -9424,7 +11323,7 @@
           <a:p>
             <a:pPr algn="ctr"/>
             <a:r>
-              <a:rPr sz="6000" b="1" i="0">
+              <a:rPr sz="5800" b="1" i="0">
                 <a:solidFill>
                   <a:srgbClr val="1E2761"/>
                 </a:solidFill>
@@ -9437,13 +11336,13 @@
       </p:sp>
       <p:sp>
         <p:nvSpPr>
-          <p:cNvPr id="12" name="TextBox 11"/>
+          <p:cNvPr id="14" name="TextBox 13"/>
           <p:cNvSpPr txBox="1"/>
           <p:nvPr/>
         </p:nvSpPr>
         <p:spPr>
           <a:xfrm>
-            <a:off x="4846320" y="3611880"/>
+            <a:off x="4846320" y="3657600"/>
             <a:ext cx="2560320" cy="1005840"/>
           </a:xfrm>
           <a:prstGeom prst="rect">
@@ -9472,7 +11371,7 @@
       </p:sp>
       <p:sp>
         <p:nvSpPr>
-          <p:cNvPr id="13" name="Rounded Rectangle 12"/>
+          <p:cNvPr id="15" name="Rounded Rectangle 14"/>
           <p:cNvSpPr/>
           <p:nvPr/>
         </p:nvSpPr>
@@ -9518,14 +11417,58 @@
       </p:sp>
       <p:sp>
         <p:nvSpPr>
-          <p:cNvPr id="14" name="TextBox 13"/>
+          <p:cNvPr id="16" name="Rectangle 15"/>
+          <p:cNvSpPr/>
+          <p:nvPr/>
+        </p:nvSpPr>
+        <p:spPr>
+          <a:xfrm>
+            <a:off x="8412480" y="2011680"/>
+            <a:ext cx="3017520" cy="128016"/>
+          </a:xfrm>
+          <a:prstGeom prst="rect">
+            <a:avLst/>
+          </a:prstGeom>
+          <a:solidFill>
+            <a:srgbClr val="E8801A"/>
+          </a:solidFill>
+          <a:ln>
+            <a:noFill/>
+          </a:ln>
+          <a:effectLst/>
+        </p:spPr>
+        <p:style>
+          <a:lnRef idx="1">
+            <a:schemeClr val="accent1"/>
+          </a:lnRef>
+          <a:fillRef idx="3">
+            <a:schemeClr val="accent1"/>
+          </a:fillRef>
+          <a:effectRef idx="2">
+            <a:schemeClr val="accent1"/>
+          </a:effectRef>
+          <a:fontRef idx="minor">
+            <a:schemeClr val="lt1"/>
+          </a:fontRef>
+        </p:style>
+        <p:txBody>
+          <a:bodyPr rtlCol="0" anchor="ctr"/>
+          <a:lstStyle/>
+          <a:p>
+            <a:pPr algn="ctr"/>
+          </a:p>
+        </p:txBody>
+      </p:sp>
+      <p:sp>
+        <p:nvSpPr>
+          <p:cNvPr id="17" name="TextBox 16"/>
           <p:cNvSpPr txBox="1"/>
           <p:nvPr/>
         </p:nvSpPr>
         <p:spPr>
           <a:xfrm>
-            <a:off x="8412480" y="2331720"/>
-            <a:ext cx="3017520" cy="1463040"/>
+            <a:off x="8412480" y="2377440"/>
+            <a:ext cx="3017520" cy="1371600"/>
           </a:xfrm>
           <a:prstGeom prst="rect">
             <a:avLst/>
@@ -9540,7 +11483,7 @@
           <a:p>
             <a:pPr algn="ctr"/>
             <a:r>
-              <a:rPr sz="6000" b="1" i="0">
+              <a:rPr sz="5800" b="1" i="0">
                 <a:solidFill>
                   <a:srgbClr val="1E2761"/>
                 </a:solidFill>
@@ -9553,13 +11496,13 @@
       </p:sp>
       <p:sp>
         <p:nvSpPr>
-          <p:cNvPr id="15" name="TextBox 14"/>
+          <p:cNvPr id="18" name="TextBox 17"/>
           <p:cNvSpPr txBox="1"/>
           <p:nvPr/>
         </p:nvSpPr>
         <p:spPr>
           <a:xfrm>
-            <a:off x="8641080" y="3611880"/>
+            <a:off x="8641080" y="3657600"/>
             <a:ext cx="2560320" cy="1005840"/>
           </a:xfrm>
           <a:prstGeom prst="rect">
@@ -9591,6 +11534,1838 @@
   <p:clrMapOvr>
     <a:masterClrMapping/>
   </p:clrMapOvr>
+  <mc:AlternateContent xmlns:mc="http://schemas.openxmlformats.org/markup-compatibility/2006">
+    <mc:Choice xmlns:p14="http://schemas.microsoft.com/office/powerpoint/2010/main" Requires="p14">
+      <p:transition spd="med" p14:dur="700">
+        <p14:cube dir="r"/>
+      </p:transition>
+    </mc:Choice>
+    <mc:Fallback>
+      <p:transition spd="med">
+        <p:push dir="r"/>
+      </p:transition>
+    </mc:Fallback>
+  </mc:AlternateContent>
+</p:sld>
+</file>
+
+<file path=ppt/slides/slide20.xml><?xml version="1.0" encoding="utf-8"?>
+<p:sld xmlns:a="http://schemas.openxmlformats.org/drawingml/2006/main" xmlns:p="http://schemas.openxmlformats.org/presentationml/2006/main" xmlns:r="http://schemas.openxmlformats.org/officeDocument/2006/relationships">
+  <p:cSld>
+    <p:spTree>
+      <p:nvGrpSpPr>
+        <p:cNvPr id="1" name=""/>
+        <p:cNvGrpSpPr/>
+        <p:nvPr/>
+      </p:nvGrpSpPr>
+      <p:grpSpPr/>
+      <p:sp>
+        <p:nvSpPr>
+          <p:cNvPr id="2" name="Rectangle 1"/>
+          <p:cNvSpPr/>
+          <p:nvPr/>
+        </p:nvSpPr>
+        <p:spPr>
+          <a:xfrm>
+            <a:off x="0" y="0"/>
+            <a:ext cx="12191695" cy="6858000"/>
+          </a:xfrm>
+          <a:prstGeom prst="rect">
+            <a:avLst/>
+          </a:prstGeom>
+          <a:solidFill>
+            <a:srgbClr val="FFFFFF"/>
+          </a:solidFill>
+          <a:ln>
+            <a:noFill/>
+          </a:ln>
+          <a:effectLst/>
+        </p:spPr>
+        <p:style>
+          <a:lnRef idx="1">
+            <a:schemeClr val="accent1"/>
+          </a:lnRef>
+          <a:fillRef idx="3">
+            <a:schemeClr val="accent1"/>
+          </a:fillRef>
+          <a:effectRef idx="2">
+            <a:schemeClr val="accent1"/>
+          </a:effectRef>
+          <a:fontRef idx="minor">
+            <a:schemeClr val="lt1"/>
+          </a:fontRef>
+        </p:style>
+        <p:txBody>
+          <a:bodyPr rtlCol="0" anchor="ctr"/>
+          <a:lstStyle/>
+          <a:p>
+            <a:pPr algn="ctr"/>
+          </a:p>
+        </p:txBody>
+      </p:sp>
+      <p:sp>
+        <p:nvSpPr>
+          <p:cNvPr id="3" name="TextBox 2"/>
+          <p:cNvSpPr txBox="1"/>
+          <p:nvPr/>
+        </p:nvSpPr>
+        <p:spPr>
+          <a:xfrm>
+            <a:off x="10607040" y="320040"/>
+            <a:ext cx="1371600" cy="365760"/>
+          </a:xfrm>
+          <a:prstGeom prst="rect">
+            <a:avLst/>
+          </a:prstGeom>
+          <a:noFill/>
+        </p:spPr>
+        <p:txBody>
+          <a:bodyPr wrap="square">
+            <a:spAutoFit/>
+          </a:bodyPr>
+          <a:lstStyle/>
+          <a:p>
+            <a:pPr algn="r"/>
+            <a:r>
+              <a:rPr sz="1000" b="1" i="0">
+                <a:solidFill>
+                  <a:srgbClr val="64748B"/>
+                </a:solidFill>
+                <a:latin typeface="Montserrat"/>
+              </a:rPr>
+              <a:t>020 / 023</a:t>
+            </a:r>
+          </a:p>
+        </p:txBody>
+      </p:sp>
+      <p:sp>
+        <p:nvSpPr>
+          <p:cNvPr id="4" name="TextBox 3"/>
+          <p:cNvSpPr txBox="1"/>
+          <p:nvPr/>
+        </p:nvSpPr>
+        <p:spPr>
+          <a:xfrm>
+            <a:off x="457200" y="6419088"/>
+            <a:ext cx="8229600" cy="365760"/>
+          </a:xfrm>
+          <a:prstGeom prst="rect">
+            <a:avLst/>
+          </a:prstGeom>
+          <a:noFill/>
+        </p:spPr>
+        <p:txBody>
+          <a:bodyPr wrap="square">
+            <a:spAutoFit/>
+          </a:bodyPr>
+          <a:lstStyle/>
+          <a:p>
+            <a:r>
+              <a:rPr sz="900" b="0" i="0">
+                <a:solidFill>
+                  <a:srgbClr val="64748B"/>
+                </a:solidFill>
+                <a:latin typeface="Montserrat"/>
+              </a:rPr>
+              <a:t>Curso Gas B · Tema 02 · Centros de envases de GLP (II)</a:t>
+            </a:r>
+          </a:p>
+        </p:txBody>
+      </p:sp>
+      <p:sp>
+        <p:nvSpPr>
+          <p:cNvPr id="5" name="Rectangle 4"/>
+          <p:cNvSpPr/>
+          <p:nvPr/>
+        </p:nvSpPr>
+        <p:spPr>
+          <a:xfrm>
+            <a:off x="0" y="0"/>
+            <a:ext cx="12191695" cy="1143000"/>
+          </a:xfrm>
+          <a:prstGeom prst="rect">
+            <a:avLst/>
+          </a:prstGeom>
+          <a:solidFill>
+            <a:srgbClr val="1E8E4B"/>
+          </a:solidFill>
+          <a:ln>
+            <a:noFill/>
+          </a:ln>
+          <a:effectLst/>
+        </p:spPr>
+        <p:style>
+          <a:lnRef idx="1">
+            <a:schemeClr val="accent1"/>
+          </a:lnRef>
+          <a:fillRef idx="3">
+            <a:schemeClr val="accent1"/>
+          </a:fillRef>
+          <a:effectRef idx="2">
+            <a:schemeClr val="accent1"/>
+          </a:effectRef>
+          <a:fontRef idx="minor">
+            <a:schemeClr val="lt1"/>
+          </a:fontRef>
+        </p:style>
+        <p:txBody>
+          <a:bodyPr rtlCol="0" anchor="ctr"/>
+          <a:lstStyle/>
+          <a:p>
+            <a:pPr algn="ctr"/>
+          </a:p>
+        </p:txBody>
+      </p:sp>
+      <p:sp>
+        <p:nvSpPr>
+          <p:cNvPr id="6" name="TextBox 5"/>
+          <p:cNvSpPr txBox="1"/>
+          <p:nvPr/>
+        </p:nvSpPr>
+        <p:spPr>
+          <a:xfrm>
+            <a:off x="822960" y="274320"/>
+            <a:ext cx="10515600" cy="640080"/>
+          </a:xfrm>
+          <a:prstGeom prst="rect">
+            <a:avLst/>
+          </a:prstGeom>
+          <a:noFill/>
+        </p:spPr>
+        <p:txBody>
+          <a:bodyPr wrap="square">
+            <a:spAutoFit/>
+          </a:bodyPr>
+          <a:lstStyle/>
+          <a:p>
+            <a:r>
+              <a:rPr sz="2400" b="1" i="0">
+                <a:solidFill>
+                  <a:srgbClr val="FFFFFF"/>
+                </a:solidFill>
+                <a:latin typeface="Montserrat"/>
+              </a:rPr>
+              <a:t>✔  RESPUESTA:  A</a:t>
+            </a:r>
+          </a:p>
+        </p:txBody>
+      </p:sp>
+      <p:sp>
+        <p:nvSpPr>
+          <p:cNvPr id="7" name="TextBox 6"/>
+          <p:cNvSpPr txBox="1"/>
+          <p:nvPr/>
+        </p:nvSpPr>
+        <p:spPr>
+          <a:xfrm>
+            <a:off x="822960" y="1417320"/>
+            <a:ext cx="10515600" cy="914400"/>
+          </a:xfrm>
+          <a:prstGeom prst="rect">
+            <a:avLst/>
+          </a:prstGeom>
+          <a:noFill/>
+        </p:spPr>
+        <p:txBody>
+          <a:bodyPr wrap="square">
+            <a:spAutoFit/>
+          </a:bodyPr>
+          <a:lstStyle/>
+          <a:p>
+            <a:r>
+              <a:rPr sz="1800" b="1" i="0">
+                <a:solidFill>
+                  <a:srgbClr val="64748B"/>
+                </a:solidFill>
+                <a:latin typeface="Montserrat"/>
+              </a:rPr>
+              <a:t>¿Qué puedes transportar como máximo en un vehículo particular?</a:t>
+            </a:r>
+          </a:p>
+        </p:txBody>
+      </p:sp>
+      <p:sp>
+        <p:nvSpPr>
+          <p:cNvPr id="8" name="Rounded Rectangle 7"/>
+          <p:cNvSpPr/>
+          <p:nvPr/>
+        </p:nvSpPr>
+        <p:spPr>
+          <a:xfrm>
+            <a:off x="822960" y="2514600"/>
+            <a:ext cx="10515600" cy="914400"/>
+          </a:xfrm>
+          <a:prstGeom prst="roundRect">
+            <a:avLst/>
+          </a:prstGeom>
+          <a:solidFill>
+            <a:srgbClr val="E9F6EE"/>
+          </a:solidFill>
+          <a:ln w="12700">
+            <a:solidFill>
+              <a:srgbClr val="1E8E4B"/>
+            </a:solidFill>
+          </a:ln>
+          <a:effectLst/>
+        </p:spPr>
+        <p:style>
+          <a:lnRef idx="1">
+            <a:schemeClr val="accent1"/>
+          </a:lnRef>
+          <a:fillRef idx="3">
+            <a:schemeClr val="accent1"/>
+          </a:fillRef>
+          <a:effectRef idx="2">
+            <a:schemeClr val="accent1"/>
+          </a:effectRef>
+          <a:fontRef idx="minor">
+            <a:schemeClr val="lt1"/>
+          </a:fontRef>
+        </p:style>
+        <p:txBody>
+          <a:bodyPr rtlCol="0" anchor="ctr"/>
+          <a:lstStyle/>
+          <a:p>
+            <a:pPr algn="ctr"/>
+          </a:p>
+        </p:txBody>
+      </p:sp>
+      <p:sp>
+        <p:nvSpPr>
+          <p:cNvPr id="9" name="TextBox 8"/>
+          <p:cNvSpPr txBox="1"/>
+          <p:nvPr/>
+        </p:nvSpPr>
+        <p:spPr>
+          <a:xfrm>
+            <a:off x="1097280" y="2697480"/>
+            <a:ext cx="10058400" cy="640080"/>
+          </a:xfrm>
+          <a:prstGeom prst="rect">
+            <a:avLst/>
+          </a:prstGeom>
+          <a:noFill/>
+        </p:spPr>
+        <p:txBody>
+          <a:bodyPr wrap="square">
+            <a:spAutoFit/>
+          </a:bodyPr>
+          <a:lstStyle/>
+          <a:p>
+            <a:r>
+              <a:rPr sz="1800" b="1" i="0">
+                <a:solidFill>
+                  <a:srgbClr val="1E8E4B"/>
+                </a:solidFill>
+                <a:latin typeface="Montserrat"/>
+              </a:rPr>
+              <a:t>A.  </a:t>
+            </a:r>
+            <a:r>
+              <a:rPr sz="1800" b="1" i="0">
+                <a:solidFill>
+                  <a:srgbClr val="1E2761"/>
+                </a:solidFill>
+                <a:latin typeface="Montserrat"/>
+              </a:rPr>
+              <a:t>2 envases de hasta 15 kg</a:t>
+            </a:r>
+          </a:p>
+        </p:txBody>
+      </p:sp>
+      <p:sp>
+        <p:nvSpPr>
+          <p:cNvPr id="10" name="TextBox 9"/>
+          <p:cNvSpPr txBox="1"/>
+          <p:nvPr/>
+        </p:nvSpPr>
+        <p:spPr>
+          <a:xfrm>
+            <a:off x="822960" y="3749039"/>
+            <a:ext cx="10515600" cy="2194560"/>
+          </a:xfrm>
+          <a:prstGeom prst="rect">
+            <a:avLst/>
+          </a:prstGeom>
+          <a:noFill/>
+        </p:spPr>
+        <p:txBody>
+          <a:bodyPr wrap="square">
+            <a:spAutoFit/>
+          </a:bodyPr>
+          <a:lstStyle/>
+          <a:p>
+            <a:r>
+              <a:rPr sz="1500" b="1" i="0">
+                <a:solidFill>
+                  <a:srgbClr val="E8801A"/>
+                </a:solidFill>
+                <a:latin typeface="Montserrat"/>
+              </a:rPr>
+              <a:t>Por qué:  </a:t>
+            </a:r>
+            <a:r>
+              <a:rPr sz="1500" b="0" i="0">
+                <a:solidFill>
+                  <a:srgbClr val="1B2330"/>
+                </a:solidFill>
+                <a:latin typeface="Montserrat"/>
+              </a:rPr>
+              <a:t>El vehículo particular tiene la carga limitada a 2 envases móviles de hasta 15 kg.</a:t>
+            </a:r>
+          </a:p>
+        </p:txBody>
+      </p:sp>
+    </p:spTree>
+  </p:cSld>
+  <p:clrMapOvr>
+    <a:masterClrMapping/>
+  </p:clrMapOvr>
+  <mc:AlternateContent xmlns:mc="http://schemas.openxmlformats.org/markup-compatibility/2006">
+    <mc:Choice xmlns:p14="http://schemas.microsoft.com/office/powerpoint/2010/main" Requires="p14">
+      <p:transition spd="med" p14:dur="700">
+        <p14:cube dir="r"/>
+      </p:transition>
+    </mc:Choice>
+    <mc:Fallback>
+      <p:transition spd="med">
+        <p:push dir="r"/>
+      </p:transition>
+    </mc:Fallback>
+  </mc:AlternateContent>
+</p:sld>
+</file>
+
+<file path=ppt/slides/slide21.xml><?xml version="1.0" encoding="utf-8"?>
+<p:sld xmlns:a="http://schemas.openxmlformats.org/drawingml/2006/main" xmlns:p="http://schemas.openxmlformats.org/presentationml/2006/main" xmlns:r="http://schemas.openxmlformats.org/officeDocument/2006/relationships">
+  <p:cSld>
+    <p:spTree>
+      <p:nvGrpSpPr>
+        <p:cNvPr id="1" name=""/>
+        <p:cNvGrpSpPr/>
+        <p:nvPr/>
+      </p:nvGrpSpPr>
+      <p:grpSpPr/>
+      <p:sp>
+        <p:nvSpPr>
+          <p:cNvPr id="2" name="Rectangle 1"/>
+          <p:cNvSpPr/>
+          <p:nvPr/>
+        </p:nvSpPr>
+        <p:spPr>
+          <a:xfrm>
+            <a:off x="0" y="0"/>
+            <a:ext cx="12191695" cy="6858000"/>
+          </a:xfrm>
+          <a:prstGeom prst="rect">
+            <a:avLst/>
+          </a:prstGeom>
+          <a:solidFill>
+            <a:srgbClr val="FFFFFF"/>
+          </a:solidFill>
+          <a:ln>
+            <a:noFill/>
+          </a:ln>
+          <a:effectLst/>
+        </p:spPr>
+        <p:style>
+          <a:lnRef idx="1">
+            <a:schemeClr val="accent1"/>
+          </a:lnRef>
+          <a:fillRef idx="3">
+            <a:schemeClr val="accent1"/>
+          </a:fillRef>
+          <a:effectRef idx="2">
+            <a:schemeClr val="accent1"/>
+          </a:effectRef>
+          <a:fontRef idx="minor">
+            <a:schemeClr val="lt1"/>
+          </a:fontRef>
+        </p:style>
+        <p:txBody>
+          <a:bodyPr rtlCol="0" anchor="ctr"/>
+          <a:lstStyle/>
+          <a:p>
+            <a:pPr algn="ctr"/>
+          </a:p>
+        </p:txBody>
+      </p:sp>
+      <p:sp>
+        <p:nvSpPr>
+          <p:cNvPr id="3" name="TextBox 2"/>
+          <p:cNvSpPr txBox="1"/>
+          <p:nvPr/>
+        </p:nvSpPr>
+        <p:spPr>
+          <a:xfrm>
+            <a:off x="10607040" y="320040"/>
+            <a:ext cx="1371600" cy="365760"/>
+          </a:xfrm>
+          <a:prstGeom prst="rect">
+            <a:avLst/>
+          </a:prstGeom>
+          <a:noFill/>
+        </p:spPr>
+        <p:txBody>
+          <a:bodyPr wrap="square">
+            <a:spAutoFit/>
+          </a:bodyPr>
+          <a:lstStyle/>
+          <a:p>
+            <a:pPr algn="r"/>
+            <a:r>
+              <a:rPr sz="1000" b="1" i="0">
+                <a:solidFill>
+                  <a:srgbClr val="64748B"/>
+                </a:solidFill>
+                <a:latin typeface="Montserrat"/>
+              </a:rPr>
+              <a:t>021 / 023</a:t>
+            </a:r>
+          </a:p>
+        </p:txBody>
+      </p:sp>
+      <p:sp>
+        <p:nvSpPr>
+          <p:cNvPr id="4" name="TextBox 3"/>
+          <p:cNvSpPr txBox="1"/>
+          <p:nvPr/>
+        </p:nvSpPr>
+        <p:spPr>
+          <a:xfrm>
+            <a:off x="457200" y="6419088"/>
+            <a:ext cx="8229600" cy="365760"/>
+          </a:xfrm>
+          <a:prstGeom prst="rect">
+            <a:avLst/>
+          </a:prstGeom>
+          <a:noFill/>
+        </p:spPr>
+        <p:txBody>
+          <a:bodyPr wrap="square">
+            <a:spAutoFit/>
+          </a:bodyPr>
+          <a:lstStyle/>
+          <a:p>
+            <a:r>
+              <a:rPr sz="900" b="0" i="0">
+                <a:solidFill>
+                  <a:srgbClr val="64748B"/>
+                </a:solidFill>
+                <a:latin typeface="Montserrat"/>
+              </a:rPr>
+              <a:t>Curso Gas B · Tema 02 · Centros de envases de GLP (II)</a:t>
+            </a:r>
+          </a:p>
+        </p:txBody>
+      </p:sp>
+      <p:sp>
+        <p:nvSpPr>
+          <p:cNvPr id="5" name="TextBox 4"/>
+          <p:cNvSpPr txBox="1"/>
+          <p:nvPr/>
+        </p:nvSpPr>
+        <p:spPr>
+          <a:xfrm>
+            <a:off x="822960" y="457200"/>
+            <a:ext cx="10058400" cy="365760"/>
+          </a:xfrm>
+          <a:prstGeom prst="rect">
+            <a:avLst/>
+          </a:prstGeom>
+          <a:noFill/>
+        </p:spPr>
+        <p:txBody>
+          <a:bodyPr wrap="square">
+            <a:spAutoFit/>
+          </a:bodyPr>
+          <a:lstStyle/>
+          <a:p>
+            <a:r>
+              <a:rPr sz="1300" b="1" i="0">
+                <a:solidFill>
+                  <a:srgbClr val="E8801A"/>
+                </a:solidFill>
+                <a:latin typeface="Montserrat"/>
+              </a:rPr>
+              <a:t>APARTADO 6 · REPARTO</a:t>
+            </a:r>
+          </a:p>
+        </p:txBody>
+      </p:sp>
+      <p:sp>
+        <p:nvSpPr>
+          <p:cNvPr id="6" name="TextBox 5"/>
+          <p:cNvSpPr txBox="1"/>
+          <p:nvPr/>
+        </p:nvSpPr>
+        <p:spPr>
+          <a:xfrm>
+            <a:off x="822960" y="868680"/>
+            <a:ext cx="10515600" cy="914400"/>
+          </a:xfrm>
+          <a:prstGeom prst="rect">
+            <a:avLst/>
+          </a:prstGeom>
+          <a:noFill/>
+        </p:spPr>
+        <p:txBody>
+          <a:bodyPr wrap="square">
+            <a:spAutoFit/>
+          </a:bodyPr>
+          <a:lstStyle/>
+          <a:p>
+            <a:r>
+              <a:rPr sz="2800" b="1" i="0">
+                <a:solidFill>
+                  <a:srgbClr val="1E2761"/>
+                </a:solidFill>
+                <a:latin typeface="Montserrat"/>
+              </a:rPr>
+              <a:t>El furgón del butanero</a:t>
+            </a:r>
+          </a:p>
+        </p:txBody>
+      </p:sp>
+      <p:sp>
+        <p:nvSpPr>
+          <p:cNvPr id="7" name="Rectangle 6"/>
+          <p:cNvSpPr/>
+          <p:nvPr/>
+        </p:nvSpPr>
+        <p:spPr>
+          <a:xfrm>
+            <a:off x="868680" y="1627632"/>
+            <a:ext cx="2011680" cy="73152"/>
+          </a:xfrm>
+          <a:prstGeom prst="rect">
+            <a:avLst/>
+          </a:prstGeom>
+          <a:solidFill>
+            <a:srgbClr val="E8801A"/>
+          </a:solidFill>
+          <a:ln>
+            <a:noFill/>
+          </a:ln>
+          <a:effectLst/>
+        </p:spPr>
+        <p:style>
+          <a:lnRef idx="1">
+            <a:schemeClr val="accent1"/>
+          </a:lnRef>
+          <a:fillRef idx="3">
+            <a:schemeClr val="accent1"/>
+          </a:fillRef>
+          <a:effectRef idx="2">
+            <a:schemeClr val="accent1"/>
+          </a:effectRef>
+          <a:fontRef idx="minor">
+            <a:schemeClr val="lt1"/>
+          </a:fontRef>
+        </p:style>
+        <p:txBody>
+          <a:bodyPr rtlCol="0" anchor="ctr"/>
+          <a:lstStyle/>
+          <a:p>
+            <a:pPr algn="ctr"/>
+          </a:p>
+        </p:txBody>
+      </p:sp>
+      <p:sp>
+        <p:nvSpPr>
+          <p:cNvPr id="8" name="TextBox 7"/>
+          <p:cNvSpPr txBox="1"/>
+          <p:nvPr/>
+        </p:nvSpPr>
+        <p:spPr>
+          <a:xfrm>
+            <a:off x="6355080" y="1965960"/>
+            <a:ext cx="5029200" cy="4206240"/>
+          </a:xfrm>
+          <a:prstGeom prst="rect">
+            <a:avLst/>
+          </a:prstGeom>
+          <a:noFill/>
+        </p:spPr>
+        <p:txBody>
+          <a:bodyPr wrap="square">
+            <a:spAutoFit/>
+          </a:bodyPr>
+          <a:lstStyle/>
+          <a:p>
+            <a:pPr>
+              <a:spcAft>
+                <a:spcPts val="1100"/>
+              </a:spcAft>
+            </a:pPr>
+            <a:r>
+              <a:rPr sz="1600" b="1" i="0">
+                <a:solidFill>
+                  <a:srgbClr val="E8801A"/>
+                </a:solidFill>
+                <a:latin typeface="Montserrat"/>
+              </a:rPr>
+              <a:t>▸  </a:t>
+            </a:r>
+            <a:r>
+              <a:rPr sz="1600" b="0" i="0">
+                <a:solidFill>
+                  <a:srgbClr val="1B2330"/>
+                </a:solidFill>
+                <a:latin typeface="Montserrat"/>
+              </a:rPr>
+              <a:t>Caja con rejillas laterales y traseras</a:t>
+            </a:r>
+          </a:p>
+          <a:p>
+            <a:pPr>
+              <a:spcAft>
+                <a:spcPts val="1100"/>
+              </a:spcAft>
+            </a:pPr>
+            <a:r>
+              <a:rPr sz="1600" b="1" i="0">
+                <a:solidFill>
+                  <a:srgbClr val="E8801A"/>
+                </a:solidFill>
+                <a:latin typeface="Montserrat"/>
+              </a:rPr>
+              <a:t>▸  </a:t>
+            </a:r>
+            <a:r>
+              <a:rPr sz="1600" b="0" i="0">
+                <a:solidFill>
+                  <a:srgbClr val="1B2330"/>
+                </a:solidFill>
+                <a:latin typeface="Montserrat"/>
+              </a:rPr>
+              <a:t>Cortafuegos al entrar donde hay &gt; 500 kg</a:t>
+            </a:r>
+          </a:p>
+          <a:p>
+            <a:pPr>
+              <a:spcAft>
+                <a:spcPts val="1100"/>
+              </a:spcAft>
+            </a:pPr>
+            <a:r>
+              <a:rPr sz="1600" b="1" i="0">
+                <a:solidFill>
+                  <a:srgbClr val="E8801A"/>
+                </a:solidFill>
+                <a:latin typeface="Montserrat"/>
+              </a:rPr>
+              <a:t>▸  </a:t>
+            </a:r>
+            <a:r>
+              <a:rPr sz="1600" b="0" i="0">
+                <a:solidFill>
+                  <a:srgbClr val="1B2330"/>
+                </a:solidFill>
+                <a:latin typeface="Montserrat"/>
+              </a:rPr>
+              <a:t>PMA ≤ 3.500 kg: dos 8A-34B</a:t>
+            </a:r>
+          </a:p>
+          <a:p>
+            <a:pPr>
+              <a:spcAft>
+                <a:spcPts val="1100"/>
+              </a:spcAft>
+            </a:pPr>
+            <a:r>
+              <a:rPr sz="1600" b="1" i="0">
+                <a:solidFill>
+                  <a:srgbClr val="E8801A"/>
+                </a:solidFill>
+                <a:latin typeface="Montserrat"/>
+              </a:rPr>
+              <a:t>▸  </a:t>
+            </a:r>
+            <a:r>
+              <a:rPr sz="1600" b="0" i="0">
+                <a:solidFill>
+                  <a:srgbClr val="1B2330"/>
+                </a:solidFill>
+                <a:latin typeface="Montserrat"/>
+              </a:rPr>
+              <a:t>PMA &gt; 3.500 kg: carga sube a 13A-55B</a:t>
+            </a:r>
+          </a:p>
+        </p:txBody>
+      </p:sp>
+      <p:sp>
+        <p:nvSpPr>
+          <p:cNvPr id="9" name="imgph" descr="IMGQ:delivery truck loaded gas cylinders"/>
+          <p:cNvSpPr/>
+          <p:nvPr/>
+        </p:nvSpPr>
+        <p:spPr>
+          <a:xfrm>
+            <a:off x="822960" y="1965960"/>
+            <a:ext cx="5303520" cy="4572000"/>
+          </a:xfrm>
+          <a:prstGeom prst="roundRect">
+            <a:avLst/>
+          </a:prstGeom>
+          <a:solidFill>
+            <a:srgbClr val="F3F6FB"/>
+          </a:solidFill>
+          <a:ln w="12700">
+            <a:solidFill>
+              <a:srgbClr val="C7D2E6"/>
+            </a:solidFill>
+          </a:ln>
+          <a:effectLst/>
+        </p:spPr>
+        <p:style>
+          <a:lnRef idx="1">
+            <a:schemeClr val="accent1"/>
+          </a:lnRef>
+          <a:fillRef idx="3">
+            <a:schemeClr val="accent1"/>
+          </a:fillRef>
+          <a:effectRef idx="2">
+            <a:schemeClr val="accent1"/>
+          </a:effectRef>
+          <a:fontRef idx="minor">
+            <a:schemeClr val="lt1"/>
+          </a:fontRef>
+        </p:style>
+        <p:txBody>
+          <a:bodyPr rtlCol="0" anchor="ctr"/>
+          <a:lstStyle/>
+          <a:p>
+            <a:pPr algn="ctr"/>
+          </a:p>
+        </p:txBody>
+      </p:sp>
+      <p:sp>
+        <p:nvSpPr>
+          <p:cNvPr id="10" name="TextBox 9"/>
+          <p:cNvSpPr txBox="1"/>
+          <p:nvPr/>
+        </p:nvSpPr>
+        <p:spPr>
+          <a:xfrm>
+            <a:off x="1097280" y="3611880"/>
+            <a:ext cx="4754880" cy="1280160"/>
+          </a:xfrm>
+          <a:prstGeom prst="rect">
+            <a:avLst/>
+          </a:prstGeom>
+          <a:noFill/>
+        </p:spPr>
+        <p:txBody>
+          <a:bodyPr wrap="square">
+            <a:spAutoFit/>
+          </a:bodyPr>
+          <a:lstStyle/>
+          <a:p>
+            <a:pPr algn="ctr"/>
+            <a:r>
+              <a:rPr sz="1400" b="1" i="0">
+                <a:solidFill>
+                  <a:srgbClr val="64748B"/>
+                </a:solidFill>
+                <a:latin typeface="Montserrat"/>
+              </a:rPr>
+              <a:t>IMAGEN</a:t>
+            </a:r>
+          </a:p>
+          <a:p>
+            <a:pPr algn="ctr"/>
+            <a:r>
+              <a:rPr sz="1100" b="0" i="1">
+                <a:solidFill>
+                  <a:srgbClr val="64748B"/>
+                </a:solidFill>
+                <a:latin typeface="Montserrat"/>
+              </a:rPr>
+              <a:t>delivery truck loaded gas cylinders</a:t>
+            </a:r>
+          </a:p>
+        </p:txBody>
+      </p:sp>
+    </p:spTree>
+  </p:cSld>
+  <p:clrMapOvr>
+    <a:masterClrMapping/>
+  </p:clrMapOvr>
+  <mc:AlternateContent xmlns:mc="http://schemas.openxmlformats.org/markup-compatibility/2006">
+    <mc:Choice xmlns:p14="http://schemas.microsoft.com/office/powerpoint/2010/main" Requires="p14">
+      <p:transition spd="med" p14:dur="700">
+        <p14:cube dir="l"/>
+      </p:transition>
+    </mc:Choice>
+    <mc:Fallback>
+      <p:transition spd="med">
+        <p:push dir="l"/>
+      </p:transition>
+    </mc:Fallback>
+  </mc:AlternateContent>
+</p:sld>
+</file>
+
+<file path=ppt/slides/slide22.xml><?xml version="1.0" encoding="utf-8"?>
+<p:sld xmlns:a="http://schemas.openxmlformats.org/drawingml/2006/main" xmlns:p="http://schemas.openxmlformats.org/presentationml/2006/main" xmlns:r="http://schemas.openxmlformats.org/officeDocument/2006/relationships">
+  <p:cSld>
+    <p:spTree>
+      <p:nvGrpSpPr>
+        <p:cNvPr id="1" name=""/>
+        <p:cNvGrpSpPr/>
+        <p:nvPr/>
+      </p:nvGrpSpPr>
+      <p:grpSpPr/>
+      <p:sp>
+        <p:nvSpPr>
+          <p:cNvPr id="2" name="Rectangle 1"/>
+          <p:cNvSpPr/>
+          <p:nvPr/>
+        </p:nvSpPr>
+        <p:spPr>
+          <a:xfrm>
+            <a:off x="0" y="0"/>
+            <a:ext cx="12191695" cy="6858000"/>
+          </a:xfrm>
+          <a:prstGeom prst="rect">
+            <a:avLst/>
+          </a:prstGeom>
+          <a:solidFill>
+            <a:srgbClr val="FFFFFF"/>
+          </a:solidFill>
+          <a:ln>
+            <a:noFill/>
+          </a:ln>
+          <a:effectLst/>
+        </p:spPr>
+        <p:style>
+          <a:lnRef idx="1">
+            <a:schemeClr val="accent1"/>
+          </a:lnRef>
+          <a:fillRef idx="3">
+            <a:schemeClr val="accent1"/>
+          </a:fillRef>
+          <a:effectRef idx="2">
+            <a:schemeClr val="accent1"/>
+          </a:effectRef>
+          <a:fontRef idx="minor">
+            <a:schemeClr val="lt1"/>
+          </a:fontRef>
+        </p:style>
+        <p:txBody>
+          <a:bodyPr rtlCol="0" anchor="ctr"/>
+          <a:lstStyle/>
+          <a:p>
+            <a:pPr algn="ctr"/>
+          </a:p>
+        </p:txBody>
+      </p:sp>
+      <p:sp>
+        <p:nvSpPr>
+          <p:cNvPr id="3" name="TextBox 2"/>
+          <p:cNvSpPr txBox="1"/>
+          <p:nvPr/>
+        </p:nvSpPr>
+        <p:spPr>
+          <a:xfrm>
+            <a:off x="10607040" y="320040"/>
+            <a:ext cx="1371600" cy="365760"/>
+          </a:xfrm>
+          <a:prstGeom prst="rect">
+            <a:avLst/>
+          </a:prstGeom>
+          <a:noFill/>
+        </p:spPr>
+        <p:txBody>
+          <a:bodyPr wrap="square">
+            <a:spAutoFit/>
+          </a:bodyPr>
+          <a:lstStyle/>
+          <a:p>
+            <a:pPr algn="r"/>
+            <a:r>
+              <a:rPr sz="1000" b="1" i="0">
+                <a:solidFill>
+                  <a:srgbClr val="64748B"/>
+                </a:solidFill>
+                <a:latin typeface="Montserrat"/>
+              </a:rPr>
+              <a:t>022 / 023</a:t>
+            </a:r>
+          </a:p>
+        </p:txBody>
+      </p:sp>
+      <p:sp>
+        <p:nvSpPr>
+          <p:cNvPr id="4" name="TextBox 3"/>
+          <p:cNvSpPr txBox="1"/>
+          <p:nvPr/>
+        </p:nvSpPr>
+        <p:spPr>
+          <a:xfrm>
+            <a:off x="457200" y="6419088"/>
+            <a:ext cx="8229600" cy="365760"/>
+          </a:xfrm>
+          <a:prstGeom prst="rect">
+            <a:avLst/>
+          </a:prstGeom>
+          <a:noFill/>
+        </p:spPr>
+        <p:txBody>
+          <a:bodyPr wrap="square">
+            <a:spAutoFit/>
+          </a:bodyPr>
+          <a:lstStyle/>
+          <a:p>
+            <a:r>
+              <a:rPr sz="900" b="0" i="0">
+                <a:solidFill>
+                  <a:srgbClr val="64748B"/>
+                </a:solidFill>
+                <a:latin typeface="Montserrat"/>
+              </a:rPr>
+              <a:t>Curso Gas B · Tema 02 · Centros de envases de GLP (II)</a:t>
+            </a:r>
+          </a:p>
+        </p:txBody>
+      </p:sp>
+      <p:sp>
+        <p:nvSpPr>
+          <p:cNvPr id="5" name="TextBox 4"/>
+          <p:cNvSpPr txBox="1"/>
+          <p:nvPr/>
+        </p:nvSpPr>
+        <p:spPr>
+          <a:xfrm>
+            <a:off x="822960" y="411480"/>
+            <a:ext cx="10058400" cy="365760"/>
+          </a:xfrm>
+          <a:prstGeom prst="rect">
+            <a:avLst/>
+          </a:prstGeom>
+          <a:noFill/>
+        </p:spPr>
+        <p:txBody>
+          <a:bodyPr wrap="square">
+            <a:spAutoFit/>
+          </a:bodyPr>
+          <a:lstStyle/>
+          <a:p>
+            <a:r>
+              <a:rPr sz="1300" b="1" i="0">
+                <a:solidFill>
+                  <a:srgbClr val="E8801A"/>
+                </a:solidFill>
+                <a:latin typeface="Montserrat"/>
+              </a:rPr>
+              <a:t>APARTADO 6 · REPARTO</a:t>
+            </a:r>
+          </a:p>
+        </p:txBody>
+      </p:sp>
+      <p:sp>
+        <p:nvSpPr>
+          <p:cNvPr id="6" name="TextBox 5"/>
+          <p:cNvSpPr txBox="1"/>
+          <p:nvPr/>
+        </p:nvSpPr>
+        <p:spPr>
+          <a:xfrm>
+            <a:off x="822960" y="777240"/>
+            <a:ext cx="10515600" cy="822960"/>
+          </a:xfrm>
+          <a:prstGeom prst="rect">
+            <a:avLst/>
+          </a:prstGeom>
+          <a:noFill/>
+        </p:spPr>
+        <p:txBody>
+          <a:bodyPr wrap="square">
+            <a:spAutoFit/>
+          </a:bodyPr>
+          <a:lstStyle/>
+          <a:p>
+            <a:r>
+              <a:rPr sz="2600" b="1" i="0">
+                <a:solidFill>
+                  <a:srgbClr val="1E2761"/>
+                </a:solidFill>
+                <a:latin typeface="Montserrat"/>
+              </a:rPr>
+              <a:t>Extintores del vehículo de reparto</a:t>
+            </a:r>
+          </a:p>
+        </p:txBody>
+      </p:sp>
+      <p:sp>
+        <p:nvSpPr>
+          <p:cNvPr id="7" name="Rectangle 6"/>
+          <p:cNvSpPr/>
+          <p:nvPr/>
+        </p:nvSpPr>
+        <p:spPr>
+          <a:xfrm>
+            <a:off x="868680" y="1481328"/>
+            <a:ext cx="2011680" cy="73152"/>
+          </a:xfrm>
+          <a:prstGeom prst="rect">
+            <a:avLst/>
+          </a:prstGeom>
+          <a:solidFill>
+            <a:srgbClr val="E8801A"/>
+          </a:solidFill>
+          <a:ln>
+            <a:noFill/>
+          </a:ln>
+          <a:effectLst/>
+        </p:spPr>
+        <p:style>
+          <a:lnRef idx="1">
+            <a:schemeClr val="accent1"/>
+          </a:lnRef>
+          <a:fillRef idx="3">
+            <a:schemeClr val="accent1"/>
+          </a:fillRef>
+          <a:effectRef idx="2">
+            <a:schemeClr val="accent1"/>
+          </a:effectRef>
+          <a:fontRef idx="minor">
+            <a:schemeClr val="lt1"/>
+          </a:fontRef>
+        </p:style>
+        <p:txBody>
+          <a:bodyPr rtlCol="0" anchor="ctr"/>
+          <a:lstStyle/>
+          <a:p>
+            <a:pPr algn="ctr"/>
+          </a:p>
+        </p:txBody>
+      </p:sp>
+      <p:graphicFrame>
+        <p:nvGraphicFramePr>
+          <p:cNvPr id="8" name="Table 7"/>
+          <p:cNvGraphicFramePr>
+            <a:graphicFrameLocks noGrp="1"/>
+          </p:cNvGraphicFramePr>
+          <p:nvPr/>
+        </p:nvGraphicFramePr>
+        <p:xfrm>
+          <a:off x="548640" y="1783080"/>
+          <a:ext cx="11091672" cy="4023360"/>
+        </p:xfrm>
+        <a:graphic>
+          <a:graphicData uri="http://schemas.openxmlformats.org/drawingml/2006/table">
+            <a:tbl>
+              <a:tblPr firstRow="1" bandRow="1">
+                <a:tableStyleId>{5C22544A-7EE6-4342-B048-85BDC9FD1C3A}</a:tableStyleId>
+              </a:tblPr>
+              <a:tblGrid>
+                <a:gridCol w="3697224"/>
+                <a:gridCol w="3697224"/>
+                <a:gridCol w="3697224"/>
+              </a:tblGrid>
+              <a:tr h="1341120">
+                <a:tc>
+                  <a:txBody>
+                    <a:bodyPr/>
+                    <a:lstStyle/>
+                    <a:p>
+                      <a:r>
+                        <a:rPr sz="1200" b="1" i="0">
+                          <a:solidFill>
+                            <a:srgbClr val="FFFFFF"/>
+                          </a:solidFill>
+                          <a:latin typeface="Montserrat"/>
+                        </a:rPr>
+                        <a:t>Vehículo (por PMA)</a:t>
+                      </a:r>
+                    </a:p>
+                  </a:txBody>
+                  <a:tcPr>
+                    <a:solidFill>
+                      <a:srgbClr val="1E2761"/>
+                    </a:solidFill>
+                  </a:tcPr>
+                </a:tc>
+                <a:tc>
+                  <a:txBody>
+                    <a:bodyPr/>
+                    <a:lstStyle/>
+                    <a:p>
+                      <a:r>
+                        <a:rPr sz="1200" b="1" i="0">
+                          <a:solidFill>
+                            <a:srgbClr val="FFFFFF"/>
+                          </a:solidFill>
+                          <a:latin typeface="Montserrat"/>
+                        </a:rPr>
+                        <a:t>Cabina</a:t>
+                      </a:r>
+                    </a:p>
+                  </a:txBody>
+                  <a:tcPr>
+                    <a:solidFill>
+                      <a:srgbClr val="1E2761"/>
+                    </a:solidFill>
+                  </a:tcPr>
+                </a:tc>
+                <a:tc>
+                  <a:txBody>
+                    <a:bodyPr/>
+                    <a:lstStyle/>
+                    <a:p>
+                      <a:r>
+                        <a:rPr sz="1200" b="1" i="0">
+                          <a:solidFill>
+                            <a:srgbClr val="FFFFFF"/>
+                          </a:solidFill>
+                          <a:latin typeface="Montserrat"/>
+                        </a:rPr>
+                        <a:t>Carga</a:t>
+                      </a:r>
+                    </a:p>
+                  </a:txBody>
+                  <a:tcPr>
+                    <a:solidFill>
+                      <a:srgbClr val="1E2761"/>
+                    </a:solidFill>
+                  </a:tcPr>
+                </a:tc>
+              </a:tr>
+              <a:tr h="1341120">
+                <a:tc>
+                  <a:txBody>
+                    <a:bodyPr/>
+                    <a:lstStyle/>
+                    <a:p>
+                      <a:r>
+                        <a:rPr sz="1200" b="0" i="0">
+                          <a:solidFill>
+                            <a:srgbClr val="1B2330"/>
+                          </a:solidFill>
+                          <a:latin typeface="Montserrat"/>
+                        </a:rPr>
+                        <a:t>PMA ≤ 3.500 kg</a:t>
+                      </a:r>
+                    </a:p>
+                  </a:txBody>
+                  <a:tcPr>
+                    <a:solidFill>
+                      <a:srgbClr val="F6F8FC"/>
+                    </a:solidFill>
+                  </a:tcPr>
+                </a:tc>
+                <a:tc>
+                  <a:txBody>
+                    <a:bodyPr/>
+                    <a:lstStyle/>
+                    <a:p>
+                      <a:r>
+                        <a:rPr sz="1200" b="0" i="0">
+                          <a:solidFill>
+                            <a:srgbClr val="1B2330"/>
+                          </a:solidFill>
+                          <a:latin typeface="Montserrat"/>
+                        </a:rPr>
+                        <a:t>1 extintor 8A-34B</a:t>
+                      </a:r>
+                    </a:p>
+                  </a:txBody>
+                  <a:tcPr>
+                    <a:solidFill>
+                      <a:srgbClr val="F6F8FC"/>
+                    </a:solidFill>
+                  </a:tcPr>
+                </a:tc>
+                <a:tc>
+                  <a:txBody>
+                    <a:bodyPr/>
+                    <a:lstStyle/>
+                    <a:p>
+                      <a:r>
+                        <a:rPr sz="1200" b="0" i="0">
+                          <a:solidFill>
+                            <a:srgbClr val="1B2330"/>
+                          </a:solidFill>
+                          <a:latin typeface="Montserrat"/>
+                        </a:rPr>
+                        <a:t>1 extintor 8A-34B</a:t>
+                      </a:r>
+                    </a:p>
+                  </a:txBody>
+                  <a:tcPr>
+                    <a:solidFill>
+                      <a:srgbClr val="F6F8FC"/>
+                    </a:solidFill>
+                  </a:tcPr>
+                </a:tc>
+              </a:tr>
+              <a:tr h="1341120">
+                <a:tc>
+                  <a:txBody>
+                    <a:bodyPr/>
+                    <a:lstStyle/>
+                    <a:p>
+                      <a:r>
+                        <a:rPr sz="1200" b="0" i="0">
+                          <a:solidFill>
+                            <a:srgbClr val="1B2330"/>
+                          </a:solidFill>
+                          <a:latin typeface="Montserrat"/>
+                        </a:rPr>
+                        <a:t>PMA &gt; 3.500 kg</a:t>
+                      </a:r>
+                    </a:p>
+                  </a:txBody>
+                  <a:tcPr>
+                    <a:solidFill>
+                      <a:srgbClr val="FFFFFF"/>
+                    </a:solidFill>
+                  </a:tcPr>
+                </a:tc>
+                <a:tc>
+                  <a:txBody>
+                    <a:bodyPr/>
+                    <a:lstStyle/>
+                    <a:p>
+                      <a:r>
+                        <a:rPr sz="1200" b="0" i="0">
+                          <a:solidFill>
+                            <a:srgbClr val="1B2330"/>
+                          </a:solidFill>
+                          <a:latin typeface="Montserrat"/>
+                        </a:rPr>
+                        <a:t>1 extintor 8A-34B</a:t>
+                      </a:r>
+                    </a:p>
+                  </a:txBody>
+                  <a:tcPr>
+                    <a:solidFill>
+                      <a:srgbClr val="FFFFFF"/>
+                    </a:solidFill>
+                  </a:tcPr>
+                </a:tc>
+                <a:tc>
+                  <a:txBody>
+                    <a:bodyPr/>
+                    <a:lstStyle/>
+                    <a:p>
+                      <a:r>
+                        <a:rPr sz="1200" b="0" i="0">
+                          <a:solidFill>
+                            <a:srgbClr val="1B2330"/>
+                          </a:solidFill>
+                          <a:latin typeface="Montserrat"/>
+                        </a:rPr>
+                        <a:t>1 extintor 13A-55B</a:t>
+                      </a:r>
+                    </a:p>
+                  </a:txBody>
+                  <a:tcPr>
+                    <a:solidFill>
+                      <a:srgbClr val="FFFFFF"/>
+                    </a:solidFill>
+                  </a:tcPr>
+                </a:tc>
+              </a:tr>
+            </a:tbl>
+          </a:graphicData>
+        </a:graphic>
+      </p:graphicFrame>
+      <p:sp>
+        <p:nvSpPr>
+          <p:cNvPr id="9" name="Rounded Rectangle 8"/>
+          <p:cNvSpPr/>
+          <p:nvPr/>
+        </p:nvSpPr>
+        <p:spPr>
+          <a:xfrm>
+            <a:off x="548640" y="5943600"/>
+            <a:ext cx="11091672" cy="384048"/>
+          </a:xfrm>
+          <a:prstGeom prst="roundRect">
+            <a:avLst/>
+          </a:prstGeom>
+          <a:solidFill>
+            <a:srgbClr val="F3F6FB"/>
+          </a:solidFill>
+          <a:ln w="12700">
+            <a:solidFill>
+              <a:srgbClr val="D7DEEA"/>
+            </a:solidFill>
+          </a:ln>
+          <a:effectLst/>
+        </p:spPr>
+        <p:style>
+          <a:lnRef idx="1">
+            <a:schemeClr val="accent1"/>
+          </a:lnRef>
+          <a:fillRef idx="3">
+            <a:schemeClr val="accent1"/>
+          </a:fillRef>
+          <a:effectRef idx="2">
+            <a:schemeClr val="accent1"/>
+          </a:effectRef>
+          <a:fontRef idx="minor">
+            <a:schemeClr val="lt1"/>
+          </a:fontRef>
+        </p:style>
+        <p:txBody>
+          <a:bodyPr rtlCol="0" anchor="ctr"/>
+          <a:lstStyle/>
+          <a:p>
+            <a:pPr algn="ctr"/>
+          </a:p>
+        </p:txBody>
+      </p:sp>
+      <p:sp>
+        <p:nvSpPr>
+          <p:cNvPr id="10" name="TextBox 9"/>
+          <p:cNvSpPr txBox="1"/>
+          <p:nvPr/>
+        </p:nvSpPr>
+        <p:spPr>
+          <a:xfrm>
+            <a:off x="731520" y="5961888"/>
+            <a:ext cx="10789920" cy="365760"/>
+          </a:xfrm>
+          <a:prstGeom prst="rect">
+            <a:avLst/>
+          </a:prstGeom>
+          <a:noFill/>
+        </p:spPr>
+        <p:txBody>
+          <a:bodyPr wrap="square">
+            <a:spAutoFit/>
+          </a:bodyPr>
+          <a:lstStyle/>
+          <a:p>
+            <a:r>
+              <a:rPr sz="1100" b="1" i="0">
+                <a:solidFill>
+                  <a:srgbClr val="E8801A"/>
+                </a:solidFill>
+                <a:latin typeface="Montserrat"/>
+              </a:rPr>
+              <a:t>Qué significa:  </a:t>
+            </a:r>
+            <a:r>
+              <a:rPr sz="1100" b="0" i="0">
+                <a:solidFill>
+                  <a:srgbClr val="1B2330"/>
+                </a:solidFill>
+                <a:latin typeface="Montserrat"/>
+              </a:rPr>
+              <a:t>El PMA de 3.500 kg es la frontera: por encima, el extintor de la carga sube a 13A-55B.</a:t>
+            </a:r>
+          </a:p>
+        </p:txBody>
+      </p:sp>
+    </p:spTree>
+  </p:cSld>
+  <p:clrMapOvr>
+    <a:masterClrMapping/>
+  </p:clrMapOvr>
+  <mc:AlternateContent xmlns:mc="http://schemas.openxmlformats.org/markup-compatibility/2006">
+    <mc:Choice xmlns:p14="http://schemas.microsoft.com/office/powerpoint/2010/main" Requires="p14">
+      <p:transition spd="med" p14:dur="700">
+        <p14:cube dir="r"/>
+      </p:transition>
+    </mc:Choice>
+    <mc:Fallback>
+      <p:transition spd="med">
+        <p:push dir="r"/>
+      </p:transition>
+    </mc:Fallback>
+  </mc:AlternateContent>
+</p:sld>
+</file>
+
+<file path=ppt/slides/slide23.xml><?xml version="1.0" encoding="utf-8"?>
+<p:sld xmlns:a="http://schemas.openxmlformats.org/drawingml/2006/main" xmlns:p="http://schemas.openxmlformats.org/presentationml/2006/main" xmlns:r="http://schemas.openxmlformats.org/officeDocument/2006/relationships">
+  <p:cSld>
+    <p:spTree>
+      <p:nvGrpSpPr>
+        <p:cNvPr id="1" name=""/>
+        <p:cNvGrpSpPr/>
+        <p:nvPr/>
+      </p:nvGrpSpPr>
+      <p:grpSpPr/>
+      <p:sp>
+        <p:nvSpPr>
+          <p:cNvPr id="2" name="Rectangle 1"/>
+          <p:cNvSpPr/>
+          <p:nvPr/>
+        </p:nvSpPr>
+        <p:spPr>
+          <a:xfrm>
+            <a:off x="0" y="0"/>
+            <a:ext cx="12191695" cy="6858000"/>
+          </a:xfrm>
+          <a:prstGeom prst="rect">
+            <a:avLst/>
+          </a:prstGeom>
+          <a:solidFill>
+            <a:srgbClr val="1E2761"/>
+          </a:solidFill>
+          <a:ln>
+            <a:noFill/>
+          </a:ln>
+          <a:effectLst/>
+        </p:spPr>
+        <p:style>
+          <a:lnRef idx="1">
+            <a:schemeClr val="accent1"/>
+          </a:lnRef>
+          <a:fillRef idx="3">
+            <a:schemeClr val="accent1"/>
+          </a:fillRef>
+          <a:effectRef idx="2">
+            <a:schemeClr val="accent1"/>
+          </a:effectRef>
+          <a:fontRef idx="minor">
+            <a:schemeClr val="lt1"/>
+          </a:fontRef>
+        </p:style>
+        <p:txBody>
+          <a:bodyPr rtlCol="0" anchor="ctr"/>
+          <a:lstStyle/>
+          <a:p>
+            <a:pPr algn="ctr"/>
+          </a:p>
+        </p:txBody>
+      </p:sp>
+      <p:sp>
+        <p:nvSpPr>
+          <p:cNvPr id="3" name="TextBox 2"/>
+          <p:cNvSpPr txBox="1"/>
+          <p:nvPr/>
+        </p:nvSpPr>
+        <p:spPr>
+          <a:xfrm>
+            <a:off x="822960" y="640080"/>
+            <a:ext cx="10515600" cy="457200"/>
+          </a:xfrm>
+          <a:prstGeom prst="rect">
+            <a:avLst/>
+          </a:prstGeom>
+          <a:noFill/>
+        </p:spPr>
+        <p:txBody>
+          <a:bodyPr wrap="square">
+            <a:spAutoFit/>
+          </a:bodyPr>
+          <a:lstStyle/>
+          <a:p>
+            <a:r>
+              <a:rPr sz="1400" b="1" i="0">
+                <a:solidFill>
+                  <a:srgbClr val="F4A24C"/>
+                </a:solidFill>
+                <a:latin typeface="Montserrat"/>
+              </a:rPr>
+              <a:t>LO QUE YA DOMINAS</a:t>
+            </a:r>
+          </a:p>
+        </p:txBody>
+      </p:sp>
+      <p:sp>
+        <p:nvSpPr>
+          <p:cNvPr id="4" name="Rectangle 3"/>
+          <p:cNvSpPr/>
+          <p:nvPr/>
+        </p:nvSpPr>
+        <p:spPr>
+          <a:xfrm>
+            <a:off x="868680" y="1051560"/>
+            <a:ext cx="1463040" cy="82296"/>
+          </a:xfrm>
+          <a:prstGeom prst="rect">
+            <a:avLst/>
+          </a:prstGeom>
+          <a:solidFill>
+            <a:srgbClr val="E8801A"/>
+          </a:solidFill>
+          <a:ln>
+            <a:noFill/>
+          </a:ln>
+          <a:effectLst/>
+        </p:spPr>
+        <p:style>
+          <a:lnRef idx="1">
+            <a:schemeClr val="accent1"/>
+          </a:lnRef>
+          <a:fillRef idx="3">
+            <a:schemeClr val="accent1"/>
+          </a:fillRef>
+          <a:effectRef idx="2">
+            <a:schemeClr val="accent1"/>
+          </a:effectRef>
+          <a:fontRef idx="minor">
+            <a:schemeClr val="lt1"/>
+          </a:fontRef>
+        </p:style>
+        <p:txBody>
+          <a:bodyPr rtlCol="0" anchor="ctr"/>
+          <a:lstStyle/>
+          <a:p>
+            <a:pPr algn="ctr"/>
+          </a:p>
+        </p:txBody>
+      </p:sp>
+      <p:sp>
+        <p:nvSpPr>
+          <p:cNvPr id="5" name="TextBox 4"/>
+          <p:cNvSpPr txBox="1"/>
+          <p:nvPr/>
+        </p:nvSpPr>
+        <p:spPr>
+          <a:xfrm>
+            <a:off x="822960" y="1234440"/>
+            <a:ext cx="10515600" cy="1097280"/>
+          </a:xfrm>
+          <a:prstGeom prst="rect">
+            <a:avLst/>
+          </a:prstGeom>
+          <a:noFill/>
+        </p:spPr>
+        <p:txBody>
+          <a:bodyPr wrap="square">
+            <a:spAutoFit/>
+          </a:bodyPr>
+          <a:lstStyle/>
+          <a:p>
+            <a:r>
+              <a:rPr sz="3400" b="1" i="0">
+                <a:solidFill>
+                  <a:srgbClr val="FFFFFF"/>
+                </a:solidFill>
+                <a:latin typeface="Montserrat"/>
+              </a:rPr>
+              <a:t>Ya controlas la gasolinera, la tienda y el reparto</a:t>
+            </a:r>
+          </a:p>
+        </p:txBody>
+      </p:sp>
+      <p:sp>
+        <p:nvSpPr>
+          <p:cNvPr id="6" name="TextBox 5"/>
+          <p:cNvSpPr txBox="1"/>
+          <p:nvPr/>
+        </p:nvSpPr>
+        <p:spPr>
+          <a:xfrm>
+            <a:off x="822960" y="2606040"/>
+            <a:ext cx="10515600" cy="2743200"/>
+          </a:xfrm>
+          <a:prstGeom prst="rect">
+            <a:avLst/>
+          </a:prstGeom>
+          <a:noFill/>
+        </p:spPr>
+        <p:txBody>
+          <a:bodyPr wrap="square">
+            <a:spAutoFit/>
+          </a:bodyPr>
+          <a:lstStyle/>
+          <a:p>
+            <a:pPr>
+              <a:spcAft>
+                <a:spcPts val="1200"/>
+              </a:spcAft>
+            </a:pPr>
+            <a:r>
+              <a:rPr sz="2000" b="1" i="0">
+                <a:solidFill>
+                  <a:srgbClr val="F4A24C"/>
+                </a:solidFill>
+                <a:latin typeface="Montserrat"/>
+              </a:rPr>
+              <a:t>✓  </a:t>
+            </a:r>
+            <a:r>
+              <a:rPr sz="1900" b="0" i="0">
+                <a:solidFill>
+                  <a:srgbClr val="FFFFFF"/>
+                </a:solidFill>
+                <a:latin typeface="Montserrat"/>
+              </a:rPr>
+              <a:t>Distingues 4.ª y 5.ª: vallado, distancias y extintores</a:t>
+            </a:r>
+          </a:p>
+          <a:p>
+            <a:pPr>
+              <a:spcAft>
+                <a:spcPts val="1200"/>
+              </a:spcAft>
+            </a:pPr>
+            <a:r>
+              <a:rPr sz="2000" b="1" i="0">
+                <a:solidFill>
+                  <a:srgbClr val="F4A24C"/>
+                </a:solidFill>
+                <a:latin typeface="Montserrat"/>
+              </a:rPr>
+              <a:t>✓  </a:t>
+            </a:r>
+            <a:r>
+              <a:rPr sz="1900" b="0" i="0">
+                <a:solidFill>
+                  <a:srgbClr val="FFFFFF"/>
+                </a:solidFill>
+                <a:latin typeface="Montserrat"/>
+              </a:rPr>
+              <a:t>Partes la tienda en 150 kg y colocas cada extintor</a:t>
+            </a:r>
+          </a:p>
+          <a:p>
+            <a:pPr>
+              <a:spcAft>
+                <a:spcPts val="1200"/>
+              </a:spcAft>
+            </a:pPr>
+            <a:r>
+              <a:rPr sz="2000" b="1" i="0">
+                <a:solidFill>
+                  <a:srgbClr val="F4A24C"/>
+                </a:solidFill>
+                <a:latin typeface="Montserrat"/>
+              </a:rPr>
+              <a:t>✓  </a:t>
+            </a:r>
+            <a:r>
+              <a:rPr sz="1900" b="0" i="0">
+                <a:solidFill>
+                  <a:srgbClr val="FFFFFF"/>
+                </a:solidFill>
+                <a:latin typeface="Montserrat"/>
+              </a:rPr>
+              <a:t>Sabes que se inspecciona y se comunica, no se pide permiso</a:t>
+            </a:r>
+          </a:p>
+          <a:p>
+            <a:pPr>
+              <a:spcAft>
+                <a:spcPts val="1200"/>
+              </a:spcAft>
+            </a:pPr>
+            <a:r>
+              <a:rPr sz="2000" b="1" i="0">
+                <a:solidFill>
+                  <a:srgbClr val="F4A24C"/>
+                </a:solidFill>
+                <a:latin typeface="Montserrat"/>
+              </a:rPr>
+              <a:t>✓  </a:t>
+            </a:r>
+            <a:r>
+              <a:rPr sz="1900" b="0" i="0">
+                <a:solidFill>
+                  <a:srgbClr val="FFFFFF"/>
+                </a:solidFill>
+                <a:latin typeface="Montserrat"/>
+              </a:rPr>
+              <a:t>Transportas envases de pie, sin sótano y sin pasarte de 2</a:t>
+            </a:r>
+          </a:p>
+        </p:txBody>
+      </p:sp>
+      <p:sp>
+        <p:nvSpPr>
+          <p:cNvPr id="7" name="Rounded Rectangle 6"/>
+          <p:cNvSpPr/>
+          <p:nvPr/>
+        </p:nvSpPr>
+        <p:spPr>
+          <a:xfrm>
+            <a:off x="822960" y="5532120"/>
+            <a:ext cx="10515600" cy="822960"/>
+          </a:xfrm>
+          <a:prstGeom prst="roundRect">
+            <a:avLst/>
+          </a:prstGeom>
+          <a:solidFill>
+            <a:srgbClr val="E8801A"/>
+          </a:solidFill>
+          <a:ln>
+            <a:noFill/>
+          </a:ln>
+          <a:effectLst/>
+        </p:spPr>
+        <p:style>
+          <a:lnRef idx="1">
+            <a:schemeClr val="accent1"/>
+          </a:lnRef>
+          <a:fillRef idx="3">
+            <a:schemeClr val="accent1"/>
+          </a:fillRef>
+          <a:effectRef idx="2">
+            <a:schemeClr val="accent1"/>
+          </a:effectRef>
+          <a:fontRef idx="minor">
+            <a:schemeClr val="lt1"/>
+          </a:fontRef>
+        </p:style>
+        <p:txBody>
+          <a:bodyPr rtlCol="0" anchor="ctr"/>
+          <a:lstStyle/>
+          <a:p>
+            <a:pPr algn="ctr"/>
+          </a:p>
+        </p:txBody>
+      </p:sp>
+      <p:sp>
+        <p:nvSpPr>
+          <p:cNvPr id="8" name="TextBox 7"/>
+          <p:cNvSpPr txBox="1"/>
+          <p:nvPr/>
+        </p:nvSpPr>
+        <p:spPr>
+          <a:xfrm>
+            <a:off x="1051560" y="5623560"/>
+            <a:ext cx="10058400" cy="640080"/>
+          </a:xfrm>
+          <a:prstGeom prst="rect">
+            <a:avLst/>
+          </a:prstGeom>
+          <a:noFill/>
+        </p:spPr>
+        <p:txBody>
+          <a:bodyPr wrap="square">
+            <a:spAutoFit/>
+          </a:bodyPr>
+          <a:lstStyle/>
+          <a:p>
+            <a:r>
+              <a:rPr sz="1500" b="1" i="1">
+                <a:solidFill>
+                  <a:srgbClr val="1E2761"/>
+                </a:solidFill>
+                <a:latin typeface="Montserrat"/>
+              </a:rPr>
+              <a:t>Con esto cierras la ITC-02 entera. Ahora damos el salto al depósito fijo del chalé.</a:t>
+            </a:r>
+          </a:p>
+        </p:txBody>
+      </p:sp>
+    </p:spTree>
+  </p:cSld>
+  <p:clrMapOvr>
+    <a:masterClrMapping/>
+  </p:clrMapOvr>
+  <mc:AlternateContent xmlns:mc="http://schemas.openxmlformats.org/markup-compatibility/2006">
+    <mc:Choice xmlns:p14="http://schemas.microsoft.com/office/powerpoint/2010/main" Requires="p14">
+      <p:transition spd="med" p14:dur="700">
+        <p14:cube dir="l"/>
+      </p:transition>
+    </mc:Choice>
+    <mc:Fallback>
+      <p:transition spd="med">
+        <p:push dir="l"/>
+      </p:transition>
+    </mc:Fallback>
+  </mc:AlternateContent>
 </p:sld>
 </file>
 
@@ -9678,7 +13453,7 @@
                 </a:solidFill>
                 <a:latin typeface="Montserrat"/>
               </a:rPr>
-              <a:t>003 / 018</a:t>
+              <a:t>003 / 023</a:t>
             </a:r>
           </a:p>
         </p:txBody>
@@ -9787,7 +13562,7 @@
       </p:sp>
       <p:sp>
         <p:nvSpPr>
-          <p:cNvPr id="7" name="Rounded Rectangle 6"/>
+          <p:cNvPr id="7" name="Rectangle 6"/>
           <p:cNvSpPr/>
           <p:nvPr/>
         </p:nvSpPr>
@@ -9796,7 +13571,7 @@
             <a:off x="868680" y="1673352"/>
             <a:ext cx="2011680" cy="73152"/>
           </a:xfrm>
-          <a:prstGeom prst="roundRect">
+          <a:prstGeom prst="rect">
             <a:avLst/>
           </a:prstGeom>
           <a:solidFill>
@@ -10082,6 +13857,18 @@
   <p:clrMapOvr>
     <a:masterClrMapping/>
   </p:clrMapOvr>
+  <mc:AlternateContent xmlns:mc="http://schemas.openxmlformats.org/markup-compatibility/2006">
+    <mc:Choice xmlns:p14="http://schemas.microsoft.com/office/powerpoint/2010/main" Requires="p14">
+      <p:transition spd="med" p14:dur="700">
+        <p14:cube dir="l"/>
+      </p:transition>
+    </mc:Choice>
+    <mc:Fallback>
+      <p:transition spd="med">
+        <p:push dir="l"/>
+      </p:transition>
+    </mc:Fallback>
+  </mc:AlternateContent>
 </p:sld>
 </file>
 
@@ -10169,7 +13956,7 @@
                 </a:solidFill>
                 <a:latin typeface="Montserrat"/>
               </a:rPr>
-              <a:t>004 / 018</a:t>
+              <a:t>004 / 023</a:t>
             </a:r>
           </a:p>
         </p:txBody>
@@ -10278,7 +14065,7 @@
       </p:sp>
       <p:sp>
         <p:nvSpPr>
-          <p:cNvPr id="7" name="Rounded Rectangle 6"/>
+          <p:cNvPr id="7" name="Rectangle 6"/>
           <p:cNvSpPr/>
           <p:nvPr/>
         </p:nvSpPr>
@@ -10287,7 +14074,7 @@
             <a:off x="868680" y="1627632"/>
             <a:ext cx="2011680" cy="73152"/>
           </a:xfrm>
-          <a:prstGeom prst="roundRect">
+          <a:prstGeom prst="rect">
             <a:avLst/>
           </a:prstGeom>
           <a:solidFill>
@@ -10329,7 +14116,7 @@
         <p:spPr>
           <a:xfrm>
             <a:off x="822960" y="1965960"/>
-            <a:ext cx="4983480" cy="4206240"/>
+            <a:ext cx="5029200" cy="4206240"/>
           </a:xfrm>
           <a:prstGeom prst="rect">
             <a:avLst/>
@@ -10451,8 +14238,8 @@
         </p:nvSpPr>
         <p:spPr>
           <a:xfrm>
-            <a:off x="5806440" y="1051560"/>
-            <a:ext cx="5298947" cy="4629150"/>
+            <a:off x="6080760" y="1965960"/>
+            <a:ext cx="5303520" cy="4572000"/>
           </a:xfrm>
           <a:prstGeom prst="roundRect">
             <a:avLst/>
@@ -10497,8 +14284,8 @@
         </p:nvSpPr>
         <p:spPr>
           <a:xfrm>
-            <a:off x="6080760" y="2726055"/>
-            <a:ext cx="4750307" cy="1280160"/>
+            <a:off x="6355080" y="3611880"/>
+            <a:ext cx="4754880" cy="1280160"/>
           </a:xfrm>
           <a:prstGeom prst="rect">
             <a:avLst/>
@@ -10519,7 +14306,7 @@
                 </a:solidFill>
                 <a:latin typeface="Montserrat"/>
               </a:rPr>
-              <a:t>IMAGEN REALISTA</a:t>
+              <a:t>IMAGEN</a:t>
             </a:r>
           </a:p>
           <a:p>
@@ -10541,6 +14328,18 @@
   <p:clrMapOvr>
     <a:masterClrMapping/>
   </p:clrMapOvr>
+  <mc:AlternateContent xmlns:mc="http://schemas.openxmlformats.org/markup-compatibility/2006">
+    <mc:Choice xmlns:p14="http://schemas.microsoft.com/office/powerpoint/2010/main" Requires="p14">
+      <p:transition spd="med" p14:dur="700">
+        <p14:cube dir="r"/>
+      </p:transition>
+    </mc:Choice>
+    <mc:Fallback>
+      <p:transition spd="med">
+        <p:push dir="r"/>
+      </p:transition>
+    </mc:Fallback>
+  </mc:AlternateContent>
 </p:sld>
 </file>
 
@@ -10628,7 +14427,7 @@
                 </a:solidFill>
                 <a:latin typeface="Montserrat"/>
               </a:rPr>
-              <a:t>005 / 018</a:t>
+              <a:t>005 / 023</a:t>
             </a:r>
           </a:p>
         </p:txBody>
@@ -10737,7 +14536,7 @@
       </p:sp>
       <p:sp>
         <p:nvSpPr>
-          <p:cNvPr id="7" name="Rounded Rectangle 6"/>
+          <p:cNvPr id="7" name="Rectangle 6"/>
           <p:cNvSpPr/>
           <p:nvPr/>
         </p:nvSpPr>
@@ -10746,7 +14545,7 @@
             <a:off x="868680" y="1627632"/>
             <a:ext cx="2011680" cy="73152"/>
           </a:xfrm>
-          <a:prstGeom prst="roundRect">
+          <a:prstGeom prst="rect">
             <a:avLst/>
           </a:prstGeom>
           <a:solidFill>
@@ -10787,8 +14586,8 @@
         </p:nvSpPr>
         <p:spPr>
           <a:xfrm>
-            <a:off x="822960" y="1965960"/>
-            <a:ext cx="4983480" cy="4206240"/>
+            <a:off x="6355080" y="1965960"/>
+            <a:ext cx="5029200" cy="4206240"/>
           </a:xfrm>
           <a:prstGeom prst="rect">
             <a:avLst/>
@@ -10885,8 +14684,8 @@
         </p:nvSpPr>
         <p:spPr>
           <a:xfrm>
-            <a:off x="5806440" y="1051560"/>
-            <a:ext cx="5298947" cy="4629150"/>
+            <a:off x="822960" y="1965960"/>
+            <a:ext cx="5303520" cy="4572000"/>
           </a:xfrm>
           <a:prstGeom prst="roundRect">
             <a:avLst/>
@@ -10931,8 +14730,8 @@
         </p:nvSpPr>
         <p:spPr>
           <a:xfrm>
-            <a:off x="6080760" y="2726055"/>
-            <a:ext cx="4750307" cy="1280160"/>
+            <a:off x="1097280" y="3611880"/>
+            <a:ext cx="4754880" cy="1280160"/>
           </a:xfrm>
           <a:prstGeom prst="rect">
             <a:avLst/>
@@ -10953,7 +14752,7 @@
                 </a:solidFill>
                 <a:latin typeface="Montserrat"/>
               </a:rPr>
-              <a:t>IMAGEN REALISTA</a:t>
+              <a:t>IMAGEN</a:t>
             </a:r>
           </a:p>
           <a:p>
@@ -10975,6 +14774,18 @@
   <p:clrMapOvr>
     <a:masterClrMapping/>
   </p:clrMapOvr>
+  <mc:AlternateContent xmlns:mc="http://schemas.openxmlformats.org/markup-compatibility/2006">
+    <mc:Choice xmlns:p14="http://schemas.microsoft.com/office/powerpoint/2010/main" Requires="p14">
+      <p:transition spd="med" p14:dur="700">
+        <p14:cube dir="l"/>
+      </p:transition>
+    </mc:Choice>
+    <mc:Fallback>
+      <p:transition spd="med">
+        <p:push dir="l"/>
+      </p:transition>
+    </mc:Fallback>
+  </mc:AlternateContent>
 </p:sld>
 </file>
 
@@ -11062,7 +14873,7 @@
                 </a:solidFill>
                 <a:latin typeface="Montserrat"/>
               </a:rPr>
-              <a:t>006 / 018</a:t>
+              <a:t>006 / 023</a:t>
             </a:r>
           </a:p>
         </p:txBody>
@@ -11171,7 +14982,7 @@
       </p:sp>
       <p:sp>
         <p:nvSpPr>
-          <p:cNvPr id="7" name="Rounded Rectangle 6"/>
+          <p:cNvPr id="7" name="Rectangle 6"/>
           <p:cNvSpPr/>
           <p:nvPr/>
         </p:nvSpPr>
@@ -11180,7 +14991,7 @@
             <a:off x="868680" y="1627632"/>
             <a:ext cx="2011680" cy="73152"/>
           </a:xfrm>
-          <a:prstGeom prst="roundRect">
+          <a:prstGeom prst="rect">
             <a:avLst/>
           </a:prstGeom>
           <a:solidFill>
@@ -11222,7 +15033,7 @@
         <p:spPr>
           <a:xfrm>
             <a:off x="822960" y="1965960"/>
-            <a:ext cx="4983480" cy="4206240"/>
+            <a:ext cx="5029200" cy="4206240"/>
           </a:xfrm>
           <a:prstGeom prst="rect">
             <a:avLst/>
@@ -11344,8 +15155,8 @@
         </p:nvSpPr>
         <p:spPr>
           <a:xfrm>
-            <a:off x="5806440" y="1051560"/>
-            <a:ext cx="5298947" cy="4629150"/>
+            <a:off x="6080760" y="1965960"/>
+            <a:ext cx="5303520" cy="4572000"/>
           </a:xfrm>
           <a:prstGeom prst="roundRect">
             <a:avLst/>
@@ -11390,8 +15201,8 @@
         </p:nvSpPr>
         <p:spPr>
           <a:xfrm>
-            <a:off x="6080760" y="2726055"/>
-            <a:ext cx="4750307" cy="1280160"/>
+            <a:off x="6355080" y="3611880"/>
+            <a:ext cx="4754880" cy="1280160"/>
           </a:xfrm>
           <a:prstGeom prst="rect">
             <a:avLst/>
@@ -11412,7 +15223,7 @@
                 </a:solidFill>
                 <a:latin typeface="Montserrat"/>
               </a:rPr>
-              <a:t>IMAGEN REALISTA</a:t>
+              <a:t>IMAGEN</a:t>
             </a:r>
           </a:p>
           <a:p>
@@ -11434,6 +15245,18 @@
   <p:clrMapOvr>
     <a:masterClrMapping/>
   </p:clrMapOvr>
+  <mc:AlternateContent xmlns:mc="http://schemas.openxmlformats.org/markup-compatibility/2006">
+    <mc:Choice xmlns:p14="http://schemas.microsoft.com/office/powerpoint/2010/main" Requires="p14">
+      <p:transition spd="med" p14:dur="700">
+        <p14:cube dir="r"/>
+      </p:transition>
+    </mc:Choice>
+    <mc:Fallback>
+      <p:transition spd="med">
+        <p:push dir="r"/>
+      </p:transition>
+    </mc:Fallback>
+  </mc:AlternateContent>
 </p:sld>
 </file>
 
@@ -11521,7 +15344,7 @@
                 </a:solidFill>
                 <a:latin typeface="Montserrat"/>
               </a:rPr>
-              <a:t>007 / 018</a:t>
+              <a:t>007 / 023</a:t>
             </a:r>
           </a:p>
         </p:txBody>
@@ -11630,7 +15453,7 @@
       </p:sp>
       <p:sp>
         <p:nvSpPr>
-          <p:cNvPr id="7" name="Rounded Rectangle 6"/>
+          <p:cNvPr id="7" name="Rectangle 6"/>
           <p:cNvSpPr/>
           <p:nvPr/>
         </p:nvSpPr>
@@ -11639,7 +15462,7 @@
             <a:off x="868680" y="1627632"/>
             <a:ext cx="2011680" cy="73152"/>
           </a:xfrm>
-          <a:prstGeom prst="roundRect">
+          <a:prstGeom prst="rect">
             <a:avLst/>
           </a:prstGeom>
           <a:solidFill>
@@ -11680,8 +15503,8 @@
         </p:nvSpPr>
         <p:spPr>
           <a:xfrm>
-            <a:off x="822960" y="1965960"/>
-            <a:ext cx="4983480" cy="4206240"/>
+            <a:off x="6355080" y="1965960"/>
+            <a:ext cx="5029200" cy="4206240"/>
           </a:xfrm>
           <a:prstGeom prst="rect">
             <a:avLst/>
@@ -11803,8 +15626,8 @@
         </p:nvSpPr>
         <p:spPr>
           <a:xfrm>
-            <a:off x="5806440" y="1051560"/>
-            <a:ext cx="5298947" cy="4629150"/>
+            <a:off x="822960" y="1965960"/>
+            <a:ext cx="5303520" cy="4572000"/>
           </a:xfrm>
           <a:prstGeom prst="roundRect">
             <a:avLst/>
@@ -11849,8 +15672,8 @@
         </p:nvSpPr>
         <p:spPr>
           <a:xfrm>
-            <a:off x="6080760" y="2726055"/>
-            <a:ext cx="4750307" cy="1280160"/>
+            <a:off x="1097280" y="3611880"/>
+            <a:ext cx="4754880" cy="1280160"/>
           </a:xfrm>
           <a:prstGeom prst="rect">
             <a:avLst/>
@@ -11871,7 +15694,7 @@
                 </a:solidFill>
                 <a:latin typeface="Montserrat"/>
               </a:rPr>
-              <a:t>IMAGEN REALISTA</a:t>
+              <a:t>IMAGEN</a:t>
             </a:r>
           </a:p>
           <a:p>
@@ -11893,6 +15716,18 @@
   <p:clrMapOvr>
     <a:masterClrMapping/>
   </p:clrMapOvr>
+  <mc:AlternateContent xmlns:mc="http://schemas.openxmlformats.org/markup-compatibility/2006">
+    <mc:Choice xmlns:p14="http://schemas.microsoft.com/office/powerpoint/2010/main" Requires="p14">
+      <p:transition spd="med" p14:dur="700">
+        <p14:cube dir="l"/>
+      </p:transition>
+    </mc:Choice>
+    <mc:Fallback>
+      <p:transition spd="med">
+        <p:push dir="l"/>
+      </p:transition>
+    </mc:Fallback>
+  </mc:AlternateContent>
 </p:sld>
 </file>
 
@@ -11980,7 +15815,7 @@
                 </a:solidFill>
                 <a:latin typeface="Montserrat"/>
               </a:rPr>
-              <a:t>008 / 018</a:t>
+              <a:t>008 / 023</a:t>
             </a:r>
           </a:p>
         </p:txBody>
@@ -12089,7 +15924,7 @@
       </p:sp>
       <p:sp>
         <p:nvSpPr>
-          <p:cNvPr id="7" name="Rounded Rectangle 6"/>
+          <p:cNvPr id="7" name="Rectangle 6"/>
           <p:cNvSpPr/>
           <p:nvPr/>
         </p:nvSpPr>
@@ -12098,7 +15933,7 @@
             <a:off x="868680" y="1627632"/>
             <a:ext cx="2011680" cy="73152"/>
           </a:xfrm>
-          <a:prstGeom prst="roundRect">
+          <a:prstGeom prst="rect">
             <a:avLst/>
           </a:prstGeom>
           <a:solidFill>
@@ -12140,7 +15975,7 @@
         <p:spPr>
           <a:xfrm>
             <a:off x="822960" y="1965960"/>
-            <a:ext cx="4983480" cy="4206240"/>
+            <a:ext cx="5029200" cy="4206240"/>
           </a:xfrm>
           <a:prstGeom prst="rect">
             <a:avLst/>
@@ -12237,8 +16072,8 @@
         </p:nvSpPr>
         <p:spPr>
           <a:xfrm>
-            <a:off x="5806440" y="1051560"/>
-            <a:ext cx="5298947" cy="4629150"/>
+            <a:off x="6080760" y="1965960"/>
+            <a:ext cx="5303520" cy="4572000"/>
           </a:xfrm>
           <a:prstGeom prst="roundRect">
             <a:avLst/>
@@ -12283,8 +16118,8 @@
         </p:nvSpPr>
         <p:spPr>
           <a:xfrm>
-            <a:off x="6080760" y="2726055"/>
-            <a:ext cx="4750307" cy="1280160"/>
+            <a:off x="6355080" y="3611880"/>
+            <a:ext cx="4754880" cy="1280160"/>
           </a:xfrm>
           <a:prstGeom prst="rect">
             <a:avLst/>
@@ -12305,7 +16140,7 @@
                 </a:solidFill>
                 <a:latin typeface="Montserrat"/>
               </a:rPr>
-              <a:t>IMAGEN REALISTA</a:t>
+              <a:t>IMAGEN</a:t>
             </a:r>
           </a:p>
           <a:p>
@@ -12327,6 +16162,18 @@
   <p:clrMapOvr>
     <a:masterClrMapping/>
   </p:clrMapOvr>
+  <mc:AlternateContent xmlns:mc="http://schemas.openxmlformats.org/markup-compatibility/2006">
+    <mc:Choice xmlns:p14="http://schemas.microsoft.com/office/powerpoint/2010/main" Requires="p14">
+      <p:transition spd="med" p14:dur="700">
+        <p14:cube dir="r"/>
+      </p:transition>
+    </mc:Choice>
+    <mc:Fallback>
+      <p:transition spd="med">
+        <p:push dir="r"/>
+      </p:transition>
+    </mc:Fallback>
+  </mc:AlternateContent>
 </p:sld>
 </file>
 
@@ -12414,7 +16261,7 @@
                 </a:solidFill>
                 <a:latin typeface="Montserrat"/>
               </a:rPr>
-              <a:t>009 / 018</a:t>
+              <a:t>009 / 023</a:t>
             </a:r>
           </a:p>
         </p:txBody>
@@ -12523,7 +16370,7 @@
       </p:sp>
       <p:sp>
         <p:nvSpPr>
-          <p:cNvPr id="7" name="Rounded Rectangle 6"/>
+          <p:cNvPr id="7" name="Rectangle 6"/>
           <p:cNvSpPr/>
           <p:nvPr/>
         </p:nvSpPr>
@@ -12532,7 +16379,7 @@
             <a:off x="868680" y="1627632"/>
             <a:ext cx="2011680" cy="73152"/>
           </a:xfrm>
-          <a:prstGeom prst="roundRect">
+          <a:prstGeom prst="rect">
             <a:avLst/>
           </a:prstGeom>
           <a:solidFill>
@@ -12573,8 +16420,8 @@
         </p:nvSpPr>
         <p:spPr>
           <a:xfrm>
-            <a:off x="822960" y="1965960"/>
-            <a:ext cx="4983480" cy="4206240"/>
+            <a:off x="6355080" y="1965960"/>
+            <a:ext cx="5029200" cy="4206240"/>
           </a:xfrm>
           <a:prstGeom prst="rect">
             <a:avLst/>
@@ -12696,8 +16543,8 @@
         </p:nvSpPr>
         <p:spPr>
           <a:xfrm>
-            <a:off x="5806440" y="1051560"/>
-            <a:ext cx="5298947" cy="4629150"/>
+            <a:off x="822960" y="1965960"/>
+            <a:ext cx="5303520" cy="4572000"/>
           </a:xfrm>
           <a:prstGeom prst="roundRect">
             <a:avLst/>
@@ -12742,8 +16589,8 @@
         </p:nvSpPr>
         <p:spPr>
           <a:xfrm>
-            <a:off x="6080760" y="2726055"/>
-            <a:ext cx="4750307" cy="1280160"/>
+            <a:off x="1097280" y="3611880"/>
+            <a:ext cx="4754880" cy="1280160"/>
           </a:xfrm>
           <a:prstGeom prst="rect">
             <a:avLst/>
@@ -12764,7 +16611,7 @@
                 </a:solidFill>
                 <a:latin typeface="Montserrat"/>
               </a:rPr>
-              <a:t>IMAGEN REALISTA</a:t>
+              <a:t>IMAGEN</a:t>
             </a:r>
           </a:p>
           <a:p>
@@ -12786,6 +16633,18 @@
   <p:clrMapOvr>
     <a:masterClrMapping/>
   </p:clrMapOvr>
+  <mc:AlternateContent xmlns:mc="http://schemas.openxmlformats.org/markup-compatibility/2006">
+    <mc:Choice xmlns:p14="http://schemas.microsoft.com/office/powerpoint/2010/main" Requires="p14">
+      <p:transition spd="med" p14:dur="700">
+        <p14:cube dir="l"/>
+      </p:transition>
+    </mc:Choice>
+    <mc:Fallback>
+      <p:transition spd="med">
+        <p:push dir="l"/>
+      </p:transition>
+    </mc:Fallback>
+  </mc:AlternateContent>
 </p:sld>
 </file>
 

--- a/Curso Gas B/02 - ITC-ICG 02-03-04 - Almacenamiento GLP y plantas GNL/02 - ITC-ICG 02-03-04 - Almacenamiento GLP y plantas GNL - Vídeo 2.pptx
+++ b/Curso Gas B/02 - ITC-ICG 02-03-04 - Almacenamiento GLP y plantas GNL/02 - ITC-ICG 02-03-04 - Almacenamiento GLP y plantas GNL - Vídeo 2.pptx
@@ -599,12 +599,12 @@
           <a:lstStyle/>
           <a:p>
             <a:r>
-              <a:t>N1: La tienda se parte en ciento cincuenta kilos. Tenemos trescientos. ¿Qué dotación?</a:t>
-            </a:r>
-          </a:p>
-          <a:p>
-            <a:r>
-              <a:t>N2: Primero decide si es tienda pequeña o grande, y luego el extintor que le toca.</a:t>
+              <a:t>N1: La tienda se parte en ciento cincuenta kilos. Tenemos una tienda que almacena trescientos kilos de GLP. ¿Cuántos extintores y de qué eficacia le corresponden? Opción A, dos de trece a, cincuenta y cinco b. Opción B, tres de veintiuno a, ciento trece b. Opción C, dos de veintiuno a, ciento trece b. Opción D, cinco de veintiuno a, ciento trece b. Tómate un segundo.</a:t>
+            </a:r>
+          </a:p>
+          <a:p>
+            <a:r>
+              <a:t>N2: Pista: primero decide si trescientos kilos es tienda pequeña o grande, y luego el extintor que le toca.</a:t>
             </a:r>
           </a:p>
         </p:txBody>
@@ -674,12 +674,12 @@
           <a:lstStyle/>
           <a:p>
             <a:r>
-              <a:t>N1: ¿Por qué tres del veintiuno a, ciento trece b?</a:t>
-            </a:r>
-          </a:p>
-          <a:p>
-            <a:r>
-              <a:t>N2: Trescientos kilos está por encima de ciento cincuenta, así que es tienda grande, la más exigente: tres extintores de veintiuno a, ciento trece b. La pequeña, hasta ciento cincuenta, llevaría dos del trece a, cincuenta y cinco b. El truco es no confundir los dos tipos de extintor con las dos tiendas.</a:t>
+              <a:t>N2: La respuesta correcta es la opción B: tres extintores de veintiuno a, ciento trece b. ¿Por qué? Porque trescientos kilos está por encima de ciento cincuenta, así que es tienda grande, la más exigente, y le tocan tres extintores de veintiuno a, ciento trece b. La pequeña, hasta ciento cincuenta, llevaría dos del trece a, cincuenta y cinco b. El truco es no confundir los dos tipos de extintor con las dos tiendas.</a:t>
+            </a:r>
+          </a:p>
+          <a:p>
+            <a:r>
+              <a:t>N1: Tienda grande, tres del veintiuno a, ciento trece b.</a:t>
             </a:r>
           </a:p>
         </p:txBody>
@@ -1274,12 +1274,12 @@
           <a:lstStyle/>
           <a:p>
             <a:r>
-              <a:t>N1: Dato preguntadísimo. En tu coche, ¿cuántas bombonas y de qué tamaño?</a:t>
-            </a:r>
-          </a:p>
-          <a:p>
-            <a:r>
-              <a:t>N2: Piensa en el límite estricto que fija el Reglamento para los particulares.</a:t>
+              <a:t>N1: Dato preguntadísimo del transporte. ¿Qué puedes transportar como máximo en un vehículo particular? Opción A, dos envases de hasta quince kilos. Opción B, cuatro envases de hasta quince kilos. Opción C, dos envases de cualquier tamaño. Opción D, un envase de hasta treinta y cinco kilos. Piénsalo antes de que te lo diga.</a:t>
+            </a:r>
+          </a:p>
+          <a:p>
+            <a:r>
+              <a:t>N2: Pista: piensa en el límite estricto que fija el Reglamento para los particulares, y fíjate en que son dos números.</a:t>
             </a:r>
           </a:p>
         </p:txBody>
@@ -1424,12 +1424,12 @@
           <a:lstStyle/>
           <a:p>
             <a:r>
-              <a:t>N1: ¿Por qué solo dos y de hasta quince kilos?</a:t>
-            </a:r>
-          </a:p>
-          <a:p>
-            <a:r>
-              <a:t>N2: Porque el vehículo particular tiene la carga limitada a dos envases móviles de hasta quince kilos, ni uno más y nada de botellas grandes. Además van de pie y bien sujetas, y jamás aparcas con ellas en un garaje subterráneo. El truco: dos y quince, los dos números del coche.</a:t>
+              <a:t>N2: La respuesta correcta es la opción A: dos envases de hasta quince kilos. ¿Por qué? Porque el vehículo particular tiene la carga limitada a dos envases móviles de hasta quince kilos, ni uno más y nada de botellas grandes. Además van de pie y bien sujetas, y jamás aparcas con ellas en un garaje subterráneo. El truco: dos y quince, los dos números del coche.</a:t>
+            </a:r>
+          </a:p>
+          <a:p>
+            <a:r>
+              <a:t>N1: Dos y quince, y siempre de pie.</a:t>
             </a:r>
           </a:p>
         </p:txBody>
